--- a/slides/CS221-Vietnews-tom-tat.pptx
+++ b/slides/CS221-Vietnews-tom-tat.pptx
@@ -2994,7 +2994,7 @@
         </p:nvSpPr>
         <p:spPr>
           <a:xfrm>
-            <a:off x="640080" y="4160520"/>
+            <a:off x="640080" y="4069080"/>
             <a:ext cx="10058400" cy="640080"/>
           </a:xfrm>
           <a:prstGeom prst="rect">
@@ -3045,6 +3045,62 @@
       <p:sp>
         <p:nvSpPr>
           <p:cNvPr id="7" name="Text 5"/>
+          <p:cNvSpPr/>
+          <p:nvPr/>
+        </p:nvSpPr>
+        <p:spPr>
+          <a:xfrm>
+            <a:off x="640080" y="4846320"/>
+            <a:ext cx="10972800" cy="640080"/>
+          </a:xfrm>
+          <a:prstGeom prst="rect">
+            <a:avLst/>
+          </a:prstGeom>
+          <a:noFill/>
+          <a:ln/>
+        </p:spPr>
+        <p:txBody>
+          <a:bodyPr wrap="square" lIns="0" tIns="0" rIns="0" bIns="0" rtlCol="0" anchor="ctr"/>
+          <a:lstStyle/>
+          <a:p>
+            <a:pPr indent="0" marL="0">
+              <a:buNone/>
+            </a:pPr>
+            <a:r>
+              <a:rPr lang="en-US" sz="1400" dirty="0">
+                <a:solidFill>
+                  <a:srgbClr val="1A1A1A"/>
+                </a:solidFill>
+                <a:latin typeface="Calibri" pitchFamily="34" charset="0"/>
+                <a:ea typeface="Calibri" pitchFamily="34" charset="-122"/>
+                <a:cs typeface="Calibri" pitchFamily="34" charset="-120"/>
+              </a:rPr>
+              <a:t>Nhóm 14</a:t>
+            </a:r>
+            <a:endParaRPr lang="en-US" sz="1400" dirty="0"/>
+          </a:p>
+          <a:p>
+            <a:pPr indent="0" marL="0">
+              <a:buNone/>
+            </a:pPr>
+            <a:r>
+              <a:rPr lang="en-US" sz="1400" dirty="0">
+                <a:solidFill>
+                  <a:srgbClr val="1A1A1A"/>
+                </a:solidFill>
+                <a:latin typeface="Calibri" pitchFamily="34" charset="0"/>
+                <a:ea typeface="Calibri" pitchFamily="34" charset="-122"/>
+                <a:cs typeface="Calibri" pitchFamily="34" charset="-120"/>
+              </a:rPr>
+              <a:t>Nguyễn Trí Toàn  26410135    ·    Nguyễn Văn Thái  26410108    ·    Đỗ Quốc Hoàng  26410043</a:t>
+            </a:r>
+            <a:endParaRPr lang="en-US" sz="1400" dirty="0"/>
+          </a:p>
+        </p:txBody>
+      </p:sp>
+      <p:sp>
+        <p:nvSpPr>
+          <p:cNvPr id="8" name="Text 6"/>
           <p:cNvSpPr/>
           <p:nvPr/>
         </p:nvSpPr>

--- a/slides/CS221-Vietnews-tom-tat.pptx
+++ b/slides/CS221-Vietnews-tom-tat.pptx
@@ -23,9 +23,10 @@
     <p:sldId id="271" r:id="rId17"/>
     <p:sldId id="272" r:id="rId18"/>
     <p:sldId id="273" r:id="rId19"/>
+    <p:sldId id="274" r:id="rId20"/>
   </p:sldIdLst>
   <p:notesMasterIdLst>
-    <p:notesMasterId r:id="rId20"/>
+    <p:notesMasterId r:id="rId21"/>
   </p:notesMasterIdLst>
   <p:sldSz cx="12192000" cy="6858000"/>
   <p:notesSz cx="6858000" cy="12192000"/>
@@ -1794,6 +1795,94 @@
 </p:notes>
 </file>
 
+<file path=ppt/notesSlides/notesSlide19.xml><?xml version="1.0" encoding="utf-8"?>
+<p:notes xmlns:a="http://schemas.openxmlformats.org/drawingml/2006/main" xmlns:r="http://schemas.openxmlformats.org/officeDocument/2006/relationships" xmlns:p="http://schemas.openxmlformats.org/presentationml/2006/main">
+  <p:cSld>
+    <p:spTree>
+      <p:nvGrpSpPr>
+        <p:cNvPr id="1" name=""/>
+        <p:cNvGrpSpPr/>
+        <p:nvPr/>
+      </p:nvGrpSpPr>
+      <p:grpSpPr>
+        <a:xfrm>
+          <a:off x="0" y="0"/>
+          <a:ext cx="0" cy="0"/>
+          <a:chOff x="0" y="0"/>
+          <a:chExt cx="0" cy="0"/>
+        </a:xfrm>
+      </p:grpSpPr>
+      <p:sp>
+        <p:nvSpPr>
+          <p:cNvPr id="2" name="Slide Image Placeholder 1"/>
+          <p:cNvSpPr>
+            <a:spLocks noGrp="1" noRot="1" noChangeAspect="1"/>
+          </p:cNvSpPr>
+          <p:nvPr>
+            <p:ph type="sldImg"/>
+          </p:nvPr>
+        </p:nvSpPr>
+        <p:spPr/>
+      </p:sp>
+      <p:sp>
+        <p:nvSpPr>
+          <p:cNvPr id="3" name="Notes Placeholder 2"/>
+          <p:cNvSpPr>
+            <a:spLocks noGrp="1"/>
+          </p:cNvSpPr>
+          <p:nvPr>
+            <p:ph type="body" idx="1"/>
+          </p:nvPr>
+        </p:nvSpPr>
+        <p:spPr/>
+        <p:txBody>
+          <a:bodyPr/>
+          <a:lstStyle/>
+          <a:p>
+            <a:r>
+              <a:rPr lang="en-US" dirty="0"/>
+              <a:t/>
+            </a:r>
+            <a:endParaRPr lang="en-US" dirty="0"/>
+          </a:p>
+        </p:txBody>
+      </p:sp>
+      <p:sp>
+        <p:nvSpPr>
+          <p:cNvPr id="4" name="Slide Number Placeholder 3"/>
+          <p:cNvSpPr>
+            <a:spLocks noGrp="1"/>
+          </p:cNvSpPr>
+          <p:nvPr>
+            <p:ph type="sldNum" sz="quarter" idx="10"/>
+          </p:nvPr>
+        </p:nvSpPr>
+        <p:spPr/>
+        <p:txBody>
+          <a:bodyPr/>
+          <a:lstStyle/>
+          <a:p>
+            <a:fld id="{F7021451-1387-4CA6-816F-3879F97B5CBC}" type="slidenum">
+              <a:rPr lang="en-US"/>
+              <a:t>19</a:t>
+            </a:fld>
+            <a:endParaRPr lang="en-US"/>
+          </a:p>
+        </p:txBody>
+      </p:sp>
+    </p:spTree>
+    <p:extLst>
+      <p:ext uri="{BB962C8B-B14F-4D97-AF65-F5344CB8AC3E}">
+        <p14:creationId xmlns:p14="http://schemas.microsoft.com/office/powerpoint/2010/main" val="1024086991"/>
+      </p:ext>
+    </p:extLst>
+  </p:cSld>
+  <p:clrMapOvr>
+    <a:masterClrMapping/>
+  </p:clrMapOvr>
+</p:notes>
+</file>
+
 <file path=ppt/notesSlides/notesSlide2.xml><?xml version="1.0" encoding="utf-8"?>
 <p:notes xmlns:a="http://schemas.openxmlformats.org/drawingml/2006/main" xmlns:r="http://schemas.openxmlformats.org/officeDocument/2006/relationships" xmlns:p="http://schemas.openxmlformats.org/presentationml/2006/main">
   <p:cSld>
@@ -4925,7 +5014,7 @@
                 <a:ea typeface="Calibri" pitchFamily="34" charset="-122"/>
                 <a:cs typeface="Calibri" pitchFamily="34" charset="-120"/>
               </a:rPr>
-              <a:t>11  ĐỌC TAY 20 BÀI</a:t>
+              <a:t>10b  THEO ĐỘ DÀI BÀI</a:t>
             </a:r>
             <a:endParaRPr lang="en-US" sz="1100" dirty="0"/>
           </a:p>
@@ -4964,7 +5053,7 @@
                 <a:ea typeface="Calibri" pitchFamily="34" charset="-122"/>
                 <a:cs typeface="Calibri" pitchFamily="34" charset="-120"/>
               </a:rPr>
-              <a:t>ROUGE không đủ</a:t>
+              <a:t>n ≈ 33 / nhóm</a:t>
             </a:r>
             <a:endParaRPr lang="en-US" sz="1200" dirty="0"/>
           </a:p>
@@ -5001,8 +5090,8 @@
         </p:nvSpPr>
         <p:spPr>
           <a:xfrm>
-            <a:off x="502920" y="914400"/>
-            <a:ext cx="10972800" cy="457200"/>
+            <a:off x="502920" y="868680"/>
+            <a:ext cx="11155680" cy="320040"/>
           </a:xfrm>
           <a:prstGeom prst="rect">
             <a:avLst/>
@@ -5018,7 +5107,7 @@
               <a:buNone/>
             </a:pPr>
             <a:r>
-              <a:rPr lang="en-US" sz="2600" dirty="0">
+              <a:rPr lang="en-US" sz="1800" dirty="0">
                 <a:solidFill>
                   <a:srgbClr val="1A1A1A"/>
                 </a:solidFill>
@@ -5026,81 +5115,1378 @@
                 <a:ea typeface="Georgia" pitchFamily="34" charset="-122"/>
                 <a:cs typeface="Georgia" pitchFamily="34" charset="-120"/>
               </a:rPr>
-              <a:t>ViT5 điểm cao hơn vẫn sai tên và số.</a:t>
-            </a:r>
-            <a:endParaRPr lang="en-US" sz="2600" dirty="0"/>
-          </a:p>
-        </p:txBody>
-      </p:sp>
-      <p:sp>
-        <p:nvSpPr>
-          <p:cNvPr id="6" name="Shape 4"/>
-          <p:cNvSpPr/>
-          <p:nvPr/>
-        </p:nvSpPr>
-        <p:spPr>
-          <a:xfrm>
-            <a:off x="502920" y="1554480"/>
-            <a:ext cx="2194560" cy="1188720"/>
-          </a:xfrm>
-          <a:prstGeom prst="rect">
-            <a:avLst/>
-          </a:prstGeom>
-          <a:solidFill>
-            <a:srgbClr val="0B0B0B"/>
-          </a:solidFill>
-          <a:ln/>
-        </p:spPr>
-      </p:sp>
-      <p:sp>
-        <p:nvSpPr>
-          <p:cNvPr id="7" name="Text 5"/>
-          <p:cNvSpPr/>
-          <p:nvPr/>
-        </p:nvSpPr>
-        <p:spPr>
-          <a:xfrm>
-            <a:off x="640080" y="1920240"/>
-            <a:ext cx="1920240" cy="457200"/>
-          </a:xfrm>
-          <a:prstGeom prst="rect">
-            <a:avLst/>
-          </a:prstGeom>
-          <a:noFill/>
-          <a:ln/>
-        </p:spPr>
-        <p:txBody>
-          <a:bodyPr wrap="square" lIns="0" tIns="0" rIns="0" bIns="0" rtlCol="0" anchor="ctr"/>
-          <a:lstStyle/>
-          <a:p>
-            <a:pPr indent="0" marL="0">
-              <a:buNone/>
-            </a:pPr>
-            <a:r>
-              <a:rPr lang="en-US" sz="2000" dirty="0">
-                <a:solidFill>
-                  <a:srgbClr val="EFE8D6"/>
-                </a:solidFill>
-                <a:latin typeface="Georgia" pitchFamily="34" charset="0"/>
-                <a:ea typeface="Georgia" pitchFamily="34" charset="-122"/>
-                <a:cs typeface="Georgia" pitchFamily="34" charset="-120"/>
-              </a:rPr>
-              <a:t>ViT5</a:t>
-            </a:r>
-            <a:endParaRPr lang="en-US" sz="2000" dirty="0"/>
-          </a:p>
-        </p:txBody>
-      </p:sp>
-      <p:sp>
-        <p:nvSpPr>
-          <p:cNvPr id="8" name="Shape 6"/>
-          <p:cNvSpPr/>
-          <p:nvPr/>
-        </p:nvSpPr>
-        <p:spPr>
-          <a:xfrm>
-            <a:off x="2697480" y="1554480"/>
-            <a:ext cx="8961120" cy="1188720"/>
+              <a:t>Ngưỡng 300 / 500 từ — làm tròn tertile (p33≈298, p67≈492).</a:t>
+            </a:r>
+            <a:endParaRPr lang="en-US" sz="1800" dirty="0"/>
+          </a:p>
+        </p:txBody>
+      </p:sp>
+      <p:graphicFrame>
+        <p:nvGraphicFramePr>
+          <p:cNvPr id="13" name="Table 0"/>
+          <p:cNvGraphicFramePr>
+            <a:graphicFrameLocks noGrp="1"/>
+          </p:cNvGraphicFramePr>
+          <p:nvPr>
+            <p:extLst>
+              <p:ext uri="{D42A27DB-BD31-4B8C-83A1-F6EECF244321}">
+                <p14:modId xmlns:p14="http://schemas.microsoft.com/office/powerpoint/2010/main" val="1579011935"/>
+              </p:ext>
+            </p:extLst>
+          </p:nvPr>
+        </p:nvGraphicFramePr>
+        <p:xfrm>
+          <a:off x="502920" y="1325880"/>
+          <a:ext cx="11155680" cy="2468880"/>
+        </p:xfrm>
+        <a:graphic>
+          <a:graphicData uri="http://schemas.openxmlformats.org/drawingml/2006/table">
+            <a:tbl>
+              <a:tblPr/>
+              <a:tblGrid>
+                <a:gridCol w="2377440"/>
+                <a:gridCol w="1280160"/>
+                <a:gridCol w="2496312"/>
+                <a:gridCol w="2496312"/>
+                <a:gridCol w="2505456"/>
+              </a:tblGrid>
+              <a:tr h="617220">
+                <a:tc>
+                  <a:txBody>
+                    <a:bodyPr/>
+                    <a:lstStyle/>
+                    <a:p>
+                      <a:pPr algn="ctr" indent="0" marL="0">
+                        <a:buNone/>
+                      </a:pPr>
+                      <a:r>
+                        <a:rPr lang="en-US" sz="1500" b="1" dirty="0">
+                          <a:solidFill>
+                            <a:srgbClr val="EFE8D6"/>
+                          </a:solidFill>
+                          <a:latin typeface="Calibri" pitchFamily="34" charset="0"/>
+                          <a:ea typeface="Calibri" pitchFamily="34" charset="-122"/>
+                          <a:cs typeface="Calibri" pitchFamily="34" charset="-120"/>
+                        </a:rPr>
+                        <a:t>Nhóm</a:t>
+                      </a:r>
+                      <a:endParaRPr lang="en-US" sz="1500" dirty="0">
+                        <a:latin typeface="Calibri" charset="0"/>
+                        <a:ea typeface="Calibri" charset="0"/>
+                        <a:cs typeface="Calibri" charset="0"/>
+                      </a:endParaRPr>
+                    </a:p>
+                  </a:txBody>
+                  <a:tcPr marL="91440" marR="91440" marT="45720" marB="45720" anchor="ctr">
+                    <a:lnL w="6350" cap="flat" cmpd="sng" algn="ctr">
+                      <a:solidFill>
+                        <a:srgbClr val="C8C0AE"/>
+                      </a:solidFill>
+                      <a:prstDash val="solid"/>
+                      <a:round/>
+                      <a:headEnd type="none" w="med" len="med"/>
+                      <a:tailEnd type="none" w="med" len="med"/>
+                    </a:lnL>
+                    <a:lnR w="6350" cap="flat" cmpd="sng" algn="ctr">
+                      <a:solidFill>
+                        <a:srgbClr val="C8C0AE"/>
+                      </a:solidFill>
+                      <a:prstDash val="solid"/>
+                      <a:round/>
+                      <a:headEnd type="none" w="med" len="med"/>
+                      <a:tailEnd type="none" w="med" len="med"/>
+                    </a:lnR>
+                    <a:lnT w="6350" cap="flat" cmpd="sng" algn="ctr">
+                      <a:solidFill>
+                        <a:srgbClr val="C8C0AE"/>
+                      </a:solidFill>
+                      <a:prstDash val="solid"/>
+                      <a:round/>
+                      <a:headEnd type="none" w="med" len="med"/>
+                      <a:tailEnd type="none" w="med" len="med"/>
+                    </a:lnT>
+                    <a:lnB w="6350" cap="flat" cmpd="sng" algn="ctr">
+                      <a:solidFill>
+                        <a:srgbClr val="C8C0AE"/>
+                      </a:solidFill>
+                      <a:prstDash val="solid"/>
+                      <a:round/>
+                      <a:headEnd type="none" w="med" len="med"/>
+                      <a:tailEnd type="none" w="med" len="med"/>
+                    </a:lnB>
+                    <a:solidFill>
+                      <a:srgbClr val="0B0B0B"/>
+                    </a:solidFill>
+                  </a:tcPr>
+                </a:tc>
+                <a:tc>
+                  <a:txBody>
+                    <a:bodyPr/>
+                    <a:lstStyle/>
+                    <a:p>
+                      <a:pPr algn="ctr" indent="0" marL="0">
+                        <a:buNone/>
+                      </a:pPr>
+                      <a:r>
+                        <a:rPr lang="en-US" sz="1500" b="1" dirty="0">
+                          <a:solidFill>
+                            <a:srgbClr val="EFE8D6"/>
+                          </a:solidFill>
+                          <a:latin typeface="Calibri" pitchFamily="34" charset="0"/>
+                          <a:ea typeface="Calibri" pitchFamily="34" charset="-122"/>
+                          <a:cs typeface="Calibri" pitchFamily="34" charset="-120"/>
+                        </a:rPr>
+                        <a:t>n</a:t>
+                      </a:r>
+                      <a:endParaRPr lang="en-US" sz="1500" dirty="0">
+                        <a:latin typeface="Calibri" charset="0"/>
+                        <a:ea typeface="Calibri" charset="0"/>
+                        <a:cs typeface="Calibri" charset="0"/>
+                      </a:endParaRPr>
+                    </a:p>
+                  </a:txBody>
+                  <a:tcPr marL="91440" marR="91440" marT="45720" marB="45720" anchor="ctr">
+                    <a:lnL w="6350" cap="flat" cmpd="sng" algn="ctr">
+                      <a:solidFill>
+                        <a:srgbClr val="C8C0AE"/>
+                      </a:solidFill>
+                      <a:prstDash val="solid"/>
+                      <a:round/>
+                      <a:headEnd type="none" w="med" len="med"/>
+                      <a:tailEnd type="none" w="med" len="med"/>
+                    </a:lnL>
+                    <a:lnR w="6350" cap="flat" cmpd="sng" algn="ctr">
+                      <a:solidFill>
+                        <a:srgbClr val="C8C0AE"/>
+                      </a:solidFill>
+                      <a:prstDash val="solid"/>
+                      <a:round/>
+                      <a:headEnd type="none" w="med" len="med"/>
+                      <a:tailEnd type="none" w="med" len="med"/>
+                    </a:lnR>
+                    <a:lnT w="6350" cap="flat" cmpd="sng" algn="ctr">
+                      <a:solidFill>
+                        <a:srgbClr val="C8C0AE"/>
+                      </a:solidFill>
+                      <a:prstDash val="solid"/>
+                      <a:round/>
+                      <a:headEnd type="none" w="med" len="med"/>
+                      <a:tailEnd type="none" w="med" len="med"/>
+                    </a:lnT>
+                    <a:lnB w="6350" cap="flat" cmpd="sng" algn="ctr">
+                      <a:solidFill>
+                        <a:srgbClr val="C8C0AE"/>
+                      </a:solidFill>
+                      <a:prstDash val="solid"/>
+                      <a:round/>
+                      <a:headEnd type="none" w="med" len="med"/>
+                      <a:tailEnd type="none" w="med" len="med"/>
+                    </a:lnB>
+                    <a:solidFill>
+                      <a:srgbClr val="0B0B0B"/>
+                    </a:solidFill>
+                  </a:tcPr>
+                </a:tc>
+                <a:tc>
+                  <a:txBody>
+                    <a:bodyPr/>
+                    <a:lstStyle/>
+                    <a:p>
+                      <a:pPr algn="ctr" indent="0" marL="0">
+                        <a:buNone/>
+                      </a:pPr>
+                      <a:r>
+                        <a:rPr lang="en-US" sz="1500" b="1" dirty="0">
+                          <a:solidFill>
+                            <a:srgbClr val="EFE8D6"/>
+                          </a:solidFill>
+                          <a:latin typeface="Calibri" pitchFamily="34" charset="0"/>
+                          <a:ea typeface="Calibri" pitchFamily="34" charset="-122"/>
+                          <a:cs typeface="Calibri" pitchFamily="34" charset="-120"/>
+                        </a:rPr>
+                        <a:t>Lead-3 R-1</a:t>
+                      </a:r>
+                      <a:endParaRPr lang="en-US" sz="1500" dirty="0">
+                        <a:latin typeface="Calibri" charset="0"/>
+                        <a:ea typeface="Calibri" charset="0"/>
+                        <a:cs typeface="Calibri" charset="0"/>
+                      </a:endParaRPr>
+                    </a:p>
+                  </a:txBody>
+                  <a:tcPr marL="91440" marR="91440" marT="45720" marB="45720" anchor="ctr">
+                    <a:lnL w="6350" cap="flat" cmpd="sng" algn="ctr">
+                      <a:solidFill>
+                        <a:srgbClr val="C8C0AE"/>
+                      </a:solidFill>
+                      <a:prstDash val="solid"/>
+                      <a:round/>
+                      <a:headEnd type="none" w="med" len="med"/>
+                      <a:tailEnd type="none" w="med" len="med"/>
+                    </a:lnL>
+                    <a:lnR w="6350" cap="flat" cmpd="sng" algn="ctr">
+                      <a:solidFill>
+                        <a:srgbClr val="C8C0AE"/>
+                      </a:solidFill>
+                      <a:prstDash val="solid"/>
+                      <a:round/>
+                      <a:headEnd type="none" w="med" len="med"/>
+                      <a:tailEnd type="none" w="med" len="med"/>
+                    </a:lnR>
+                    <a:lnT w="6350" cap="flat" cmpd="sng" algn="ctr">
+                      <a:solidFill>
+                        <a:srgbClr val="C8C0AE"/>
+                      </a:solidFill>
+                      <a:prstDash val="solid"/>
+                      <a:round/>
+                      <a:headEnd type="none" w="med" len="med"/>
+                      <a:tailEnd type="none" w="med" len="med"/>
+                    </a:lnT>
+                    <a:lnB w="6350" cap="flat" cmpd="sng" algn="ctr">
+                      <a:solidFill>
+                        <a:srgbClr val="C8C0AE"/>
+                      </a:solidFill>
+                      <a:prstDash val="solid"/>
+                      <a:round/>
+                      <a:headEnd type="none" w="med" len="med"/>
+                      <a:tailEnd type="none" w="med" len="med"/>
+                    </a:lnB>
+                    <a:solidFill>
+                      <a:srgbClr val="0B0B0B"/>
+                    </a:solidFill>
+                  </a:tcPr>
+                </a:tc>
+                <a:tc>
+                  <a:txBody>
+                    <a:bodyPr/>
+                    <a:lstStyle/>
+                    <a:p>
+                      <a:pPr algn="ctr" indent="0" marL="0">
+                        <a:buNone/>
+                      </a:pPr>
+                      <a:r>
+                        <a:rPr lang="en-US" sz="1500" b="1" dirty="0">
+                          <a:solidFill>
+                            <a:srgbClr val="EFE8D6"/>
+                          </a:solidFill>
+                          <a:latin typeface="Calibri" pitchFamily="34" charset="0"/>
+                          <a:ea typeface="Calibri" pitchFamily="34" charset="-122"/>
+                          <a:cs typeface="Calibri" pitchFamily="34" charset="-120"/>
+                        </a:rPr>
+                        <a:t>TextRank R-1</a:t>
+                      </a:r>
+                      <a:endParaRPr lang="en-US" sz="1500" dirty="0">
+                        <a:latin typeface="Calibri" charset="0"/>
+                        <a:ea typeface="Calibri" charset="0"/>
+                        <a:cs typeface="Calibri" charset="0"/>
+                      </a:endParaRPr>
+                    </a:p>
+                  </a:txBody>
+                  <a:tcPr marL="91440" marR="91440" marT="45720" marB="45720" anchor="ctr">
+                    <a:lnL w="6350" cap="flat" cmpd="sng" algn="ctr">
+                      <a:solidFill>
+                        <a:srgbClr val="C8C0AE"/>
+                      </a:solidFill>
+                      <a:prstDash val="solid"/>
+                      <a:round/>
+                      <a:headEnd type="none" w="med" len="med"/>
+                      <a:tailEnd type="none" w="med" len="med"/>
+                    </a:lnL>
+                    <a:lnR w="6350" cap="flat" cmpd="sng" algn="ctr">
+                      <a:solidFill>
+                        <a:srgbClr val="C8C0AE"/>
+                      </a:solidFill>
+                      <a:prstDash val="solid"/>
+                      <a:round/>
+                      <a:headEnd type="none" w="med" len="med"/>
+                      <a:tailEnd type="none" w="med" len="med"/>
+                    </a:lnR>
+                    <a:lnT w="6350" cap="flat" cmpd="sng" algn="ctr">
+                      <a:solidFill>
+                        <a:srgbClr val="C8C0AE"/>
+                      </a:solidFill>
+                      <a:prstDash val="solid"/>
+                      <a:round/>
+                      <a:headEnd type="none" w="med" len="med"/>
+                      <a:tailEnd type="none" w="med" len="med"/>
+                    </a:lnT>
+                    <a:lnB w="6350" cap="flat" cmpd="sng" algn="ctr">
+                      <a:solidFill>
+                        <a:srgbClr val="C8C0AE"/>
+                      </a:solidFill>
+                      <a:prstDash val="solid"/>
+                      <a:round/>
+                      <a:headEnd type="none" w="med" len="med"/>
+                      <a:tailEnd type="none" w="med" len="med"/>
+                    </a:lnB>
+                    <a:solidFill>
+                      <a:srgbClr val="0B0B0B"/>
+                    </a:solidFill>
+                  </a:tcPr>
+                </a:tc>
+                <a:tc>
+                  <a:txBody>
+                    <a:bodyPr/>
+                    <a:lstStyle/>
+                    <a:p>
+                      <a:pPr algn="ctr" indent="0" marL="0">
+                        <a:buNone/>
+                      </a:pPr>
+                      <a:r>
+                        <a:rPr lang="en-US" sz="1500" b="1" dirty="0">
+                          <a:solidFill>
+                            <a:srgbClr val="EFE8D6"/>
+                          </a:solidFill>
+                          <a:latin typeface="Calibri" pitchFamily="34" charset="0"/>
+                          <a:ea typeface="Calibri" pitchFamily="34" charset="-122"/>
+                          <a:cs typeface="Calibri" pitchFamily="34" charset="-120"/>
+                        </a:rPr>
+                        <a:t>ViT5 R-1</a:t>
+                      </a:r>
+                      <a:endParaRPr lang="en-US" sz="1500" dirty="0">
+                        <a:latin typeface="Calibri" charset="0"/>
+                        <a:ea typeface="Calibri" charset="0"/>
+                        <a:cs typeface="Calibri" charset="0"/>
+                      </a:endParaRPr>
+                    </a:p>
+                  </a:txBody>
+                  <a:tcPr marL="91440" marR="91440" marT="45720" marB="45720" anchor="ctr">
+                    <a:lnL w="6350" cap="flat" cmpd="sng" algn="ctr">
+                      <a:solidFill>
+                        <a:srgbClr val="C8C0AE"/>
+                      </a:solidFill>
+                      <a:prstDash val="solid"/>
+                      <a:round/>
+                      <a:headEnd type="none" w="med" len="med"/>
+                      <a:tailEnd type="none" w="med" len="med"/>
+                    </a:lnL>
+                    <a:lnR w="6350" cap="flat" cmpd="sng" algn="ctr">
+                      <a:solidFill>
+                        <a:srgbClr val="C8C0AE"/>
+                      </a:solidFill>
+                      <a:prstDash val="solid"/>
+                      <a:round/>
+                      <a:headEnd type="none" w="med" len="med"/>
+                      <a:tailEnd type="none" w="med" len="med"/>
+                    </a:lnR>
+                    <a:lnT w="6350" cap="flat" cmpd="sng" algn="ctr">
+                      <a:solidFill>
+                        <a:srgbClr val="C8C0AE"/>
+                      </a:solidFill>
+                      <a:prstDash val="solid"/>
+                      <a:round/>
+                      <a:headEnd type="none" w="med" len="med"/>
+                      <a:tailEnd type="none" w="med" len="med"/>
+                    </a:lnT>
+                    <a:lnB w="6350" cap="flat" cmpd="sng" algn="ctr">
+                      <a:solidFill>
+                        <a:srgbClr val="C8C0AE"/>
+                      </a:solidFill>
+                      <a:prstDash val="solid"/>
+                      <a:round/>
+                      <a:headEnd type="none" w="med" len="med"/>
+                      <a:tailEnd type="none" w="med" len="med"/>
+                    </a:lnB>
+                    <a:solidFill>
+                      <a:srgbClr val="0B0B0B"/>
+                    </a:solidFill>
+                  </a:tcPr>
+                </a:tc>
+              </a:tr>
+              <a:tr h="617220">
+                <a:tc>
+                  <a:txBody>
+                    <a:bodyPr/>
+                    <a:lstStyle/>
+                    <a:p>
+                      <a:pPr algn="ctr" indent="0" marL="0">
+                        <a:buNone/>
+                      </a:pPr>
+                      <a:r>
+                        <a:rPr lang="en-US" sz="1500" dirty="0">
+                          <a:solidFill>
+                            <a:srgbClr val="2B2B2B"/>
+                          </a:solidFill>
+                          <a:latin typeface="Calibri" pitchFamily="34" charset="0"/>
+                          <a:ea typeface="Calibri" pitchFamily="34" charset="-122"/>
+                          <a:cs typeface="Calibri" pitchFamily="34" charset="-120"/>
+                        </a:rPr>
+                        <a:t>Ngắn  &lt;300</a:t>
+                      </a:r>
+                      <a:endParaRPr lang="en-US" sz="1500" dirty="0">
+                        <a:latin typeface="Calibri" charset="0"/>
+                        <a:ea typeface="Calibri" charset="0"/>
+                        <a:cs typeface="Calibri" charset="0"/>
+                      </a:endParaRPr>
+                    </a:p>
+                  </a:txBody>
+                  <a:tcPr marL="91440" marR="91440" marT="45720" marB="45720" anchor="ctr">
+                    <a:lnL w="6350" cap="flat" cmpd="sng" algn="ctr">
+                      <a:solidFill>
+                        <a:srgbClr val="C8C0AE"/>
+                      </a:solidFill>
+                      <a:prstDash val="solid"/>
+                      <a:round/>
+                      <a:headEnd type="none" w="med" len="med"/>
+                      <a:tailEnd type="none" w="med" len="med"/>
+                    </a:lnL>
+                    <a:lnR w="6350" cap="flat" cmpd="sng" algn="ctr">
+                      <a:solidFill>
+                        <a:srgbClr val="C8C0AE"/>
+                      </a:solidFill>
+                      <a:prstDash val="solid"/>
+                      <a:round/>
+                      <a:headEnd type="none" w="med" len="med"/>
+                      <a:tailEnd type="none" w="med" len="med"/>
+                    </a:lnR>
+                    <a:lnT w="6350" cap="flat" cmpd="sng" algn="ctr">
+                      <a:solidFill>
+                        <a:srgbClr val="C8C0AE"/>
+                      </a:solidFill>
+                      <a:prstDash val="solid"/>
+                      <a:round/>
+                      <a:headEnd type="none" w="med" len="med"/>
+                      <a:tailEnd type="none" w="med" len="med"/>
+                    </a:lnT>
+                    <a:lnB w="6350" cap="flat" cmpd="sng" algn="ctr">
+                      <a:solidFill>
+                        <a:srgbClr val="C8C0AE"/>
+                      </a:solidFill>
+                      <a:prstDash val="solid"/>
+                      <a:round/>
+                      <a:headEnd type="none" w="med" len="med"/>
+                      <a:tailEnd type="none" w="med" len="med"/>
+                    </a:lnB>
+                  </a:tcPr>
+                </a:tc>
+                <a:tc>
+                  <a:txBody>
+                    <a:bodyPr/>
+                    <a:lstStyle/>
+                    <a:p>
+                      <a:pPr algn="ctr" indent="0" marL="0">
+                        <a:buNone/>
+                      </a:pPr>
+                      <a:r>
+                        <a:rPr lang="en-US" sz="1500" dirty="0">
+                          <a:solidFill>
+                            <a:srgbClr val="2B2B2B"/>
+                          </a:solidFill>
+                          <a:latin typeface="Calibri" pitchFamily="34" charset="0"/>
+                          <a:ea typeface="Calibri" pitchFamily="34" charset="-122"/>
+                          <a:cs typeface="Calibri" pitchFamily="34" charset="-120"/>
+                        </a:rPr>
+                        <a:t>34</a:t>
+                      </a:r>
+                      <a:endParaRPr lang="en-US" sz="1500" dirty="0">
+                        <a:latin typeface="Calibri" charset="0"/>
+                        <a:ea typeface="Calibri" charset="0"/>
+                        <a:cs typeface="Calibri" charset="0"/>
+                      </a:endParaRPr>
+                    </a:p>
+                  </a:txBody>
+                  <a:tcPr marL="91440" marR="91440" marT="45720" marB="45720" anchor="ctr">
+                    <a:lnL w="6350" cap="flat" cmpd="sng" algn="ctr">
+                      <a:solidFill>
+                        <a:srgbClr val="C8C0AE"/>
+                      </a:solidFill>
+                      <a:prstDash val="solid"/>
+                      <a:round/>
+                      <a:headEnd type="none" w="med" len="med"/>
+                      <a:tailEnd type="none" w="med" len="med"/>
+                    </a:lnL>
+                    <a:lnR w="6350" cap="flat" cmpd="sng" algn="ctr">
+                      <a:solidFill>
+                        <a:srgbClr val="C8C0AE"/>
+                      </a:solidFill>
+                      <a:prstDash val="solid"/>
+                      <a:round/>
+                      <a:headEnd type="none" w="med" len="med"/>
+                      <a:tailEnd type="none" w="med" len="med"/>
+                    </a:lnR>
+                    <a:lnT w="6350" cap="flat" cmpd="sng" algn="ctr">
+                      <a:solidFill>
+                        <a:srgbClr val="C8C0AE"/>
+                      </a:solidFill>
+                      <a:prstDash val="solid"/>
+                      <a:round/>
+                      <a:headEnd type="none" w="med" len="med"/>
+                      <a:tailEnd type="none" w="med" len="med"/>
+                    </a:lnT>
+                    <a:lnB w="6350" cap="flat" cmpd="sng" algn="ctr">
+                      <a:solidFill>
+                        <a:srgbClr val="C8C0AE"/>
+                      </a:solidFill>
+                      <a:prstDash val="solid"/>
+                      <a:round/>
+                      <a:headEnd type="none" w="med" len="med"/>
+                      <a:tailEnd type="none" w="med" len="med"/>
+                    </a:lnB>
+                  </a:tcPr>
+                </a:tc>
+                <a:tc>
+                  <a:txBody>
+                    <a:bodyPr/>
+                    <a:lstStyle/>
+                    <a:p>
+                      <a:pPr algn="ctr" indent="0" marL="0">
+                        <a:buNone/>
+                      </a:pPr>
+                      <a:r>
+                        <a:rPr lang="en-US" sz="1500" dirty="0">
+                          <a:solidFill>
+                            <a:srgbClr val="2B2B2B"/>
+                          </a:solidFill>
+                          <a:latin typeface="Calibri" pitchFamily="34" charset="0"/>
+                          <a:ea typeface="Calibri" pitchFamily="34" charset="-122"/>
+                          <a:cs typeface="Calibri" pitchFamily="34" charset="-120"/>
+                        </a:rPr>
+                        <a:t>0.2581</a:t>
+                      </a:r>
+                      <a:endParaRPr lang="en-US" sz="1500" dirty="0">
+                        <a:latin typeface="Calibri" charset="0"/>
+                        <a:ea typeface="Calibri" charset="0"/>
+                        <a:cs typeface="Calibri" charset="0"/>
+                      </a:endParaRPr>
+                    </a:p>
+                  </a:txBody>
+                  <a:tcPr marL="91440" marR="91440" marT="45720" marB="45720" anchor="ctr">
+                    <a:lnL w="6350" cap="flat" cmpd="sng" algn="ctr">
+                      <a:solidFill>
+                        <a:srgbClr val="C8C0AE"/>
+                      </a:solidFill>
+                      <a:prstDash val="solid"/>
+                      <a:round/>
+                      <a:headEnd type="none" w="med" len="med"/>
+                      <a:tailEnd type="none" w="med" len="med"/>
+                    </a:lnL>
+                    <a:lnR w="6350" cap="flat" cmpd="sng" algn="ctr">
+                      <a:solidFill>
+                        <a:srgbClr val="C8C0AE"/>
+                      </a:solidFill>
+                      <a:prstDash val="solid"/>
+                      <a:round/>
+                      <a:headEnd type="none" w="med" len="med"/>
+                      <a:tailEnd type="none" w="med" len="med"/>
+                    </a:lnR>
+                    <a:lnT w="6350" cap="flat" cmpd="sng" algn="ctr">
+                      <a:solidFill>
+                        <a:srgbClr val="C8C0AE"/>
+                      </a:solidFill>
+                      <a:prstDash val="solid"/>
+                      <a:round/>
+                      <a:headEnd type="none" w="med" len="med"/>
+                      <a:tailEnd type="none" w="med" len="med"/>
+                    </a:lnT>
+                    <a:lnB w="6350" cap="flat" cmpd="sng" algn="ctr">
+                      <a:solidFill>
+                        <a:srgbClr val="C8C0AE"/>
+                      </a:solidFill>
+                      <a:prstDash val="solid"/>
+                      <a:round/>
+                      <a:headEnd type="none" w="med" len="med"/>
+                      <a:tailEnd type="none" w="med" len="med"/>
+                    </a:lnB>
+                  </a:tcPr>
+                </a:tc>
+                <a:tc>
+                  <a:txBody>
+                    <a:bodyPr/>
+                    <a:lstStyle/>
+                    <a:p>
+                      <a:pPr algn="ctr" indent="0" marL="0">
+                        <a:buNone/>
+                      </a:pPr>
+                      <a:r>
+                        <a:rPr lang="en-US" sz="1500" dirty="0">
+                          <a:solidFill>
+                            <a:srgbClr val="2B2B2B"/>
+                          </a:solidFill>
+                          <a:latin typeface="Calibri" pitchFamily="34" charset="0"/>
+                          <a:ea typeface="Calibri" pitchFamily="34" charset="-122"/>
+                          <a:cs typeface="Calibri" pitchFamily="34" charset="-120"/>
+                        </a:rPr>
+                        <a:t>0.2672</a:t>
+                      </a:r>
+                      <a:endParaRPr lang="en-US" sz="1500" dirty="0">
+                        <a:latin typeface="Calibri" charset="0"/>
+                        <a:ea typeface="Calibri" charset="0"/>
+                        <a:cs typeface="Calibri" charset="0"/>
+                      </a:endParaRPr>
+                    </a:p>
+                  </a:txBody>
+                  <a:tcPr marL="91440" marR="91440" marT="45720" marB="45720" anchor="ctr">
+                    <a:lnL w="6350" cap="flat" cmpd="sng" algn="ctr">
+                      <a:solidFill>
+                        <a:srgbClr val="C8C0AE"/>
+                      </a:solidFill>
+                      <a:prstDash val="solid"/>
+                      <a:round/>
+                      <a:headEnd type="none" w="med" len="med"/>
+                      <a:tailEnd type="none" w="med" len="med"/>
+                    </a:lnL>
+                    <a:lnR w="6350" cap="flat" cmpd="sng" algn="ctr">
+                      <a:solidFill>
+                        <a:srgbClr val="C8C0AE"/>
+                      </a:solidFill>
+                      <a:prstDash val="solid"/>
+                      <a:round/>
+                      <a:headEnd type="none" w="med" len="med"/>
+                      <a:tailEnd type="none" w="med" len="med"/>
+                    </a:lnR>
+                    <a:lnT w="6350" cap="flat" cmpd="sng" algn="ctr">
+                      <a:solidFill>
+                        <a:srgbClr val="C8C0AE"/>
+                      </a:solidFill>
+                      <a:prstDash val="solid"/>
+                      <a:round/>
+                      <a:headEnd type="none" w="med" len="med"/>
+                      <a:tailEnd type="none" w="med" len="med"/>
+                    </a:lnT>
+                    <a:lnB w="6350" cap="flat" cmpd="sng" algn="ctr">
+                      <a:solidFill>
+                        <a:srgbClr val="C8C0AE"/>
+                      </a:solidFill>
+                      <a:prstDash val="solid"/>
+                      <a:round/>
+                      <a:headEnd type="none" w="med" len="med"/>
+                      <a:tailEnd type="none" w="med" len="med"/>
+                    </a:lnB>
+                  </a:tcPr>
+                </a:tc>
+                <a:tc>
+                  <a:txBody>
+                    <a:bodyPr/>
+                    <a:lstStyle/>
+                    <a:p>
+                      <a:pPr algn="ctr" indent="0" marL="0">
+                        <a:buNone/>
+                      </a:pPr>
+                      <a:r>
+                        <a:rPr lang="en-US" sz="1500" dirty="0">
+                          <a:solidFill>
+                            <a:srgbClr val="2B2B2B"/>
+                          </a:solidFill>
+                          <a:latin typeface="Calibri" pitchFamily="34" charset="0"/>
+                          <a:ea typeface="Calibri" pitchFamily="34" charset="-122"/>
+                          <a:cs typeface="Calibri" pitchFamily="34" charset="-120"/>
+                        </a:rPr>
+                        <a:t>0.2919</a:t>
+                      </a:r>
+                      <a:endParaRPr lang="en-US" sz="1500" dirty="0">
+                        <a:latin typeface="Calibri" charset="0"/>
+                        <a:ea typeface="Calibri" charset="0"/>
+                        <a:cs typeface="Calibri" charset="0"/>
+                      </a:endParaRPr>
+                    </a:p>
+                  </a:txBody>
+                  <a:tcPr marL="91440" marR="91440" marT="45720" marB="45720" anchor="ctr">
+                    <a:lnL w="6350" cap="flat" cmpd="sng" algn="ctr">
+                      <a:solidFill>
+                        <a:srgbClr val="C8C0AE"/>
+                      </a:solidFill>
+                      <a:prstDash val="solid"/>
+                      <a:round/>
+                      <a:headEnd type="none" w="med" len="med"/>
+                      <a:tailEnd type="none" w="med" len="med"/>
+                    </a:lnL>
+                    <a:lnR w="6350" cap="flat" cmpd="sng" algn="ctr">
+                      <a:solidFill>
+                        <a:srgbClr val="C8C0AE"/>
+                      </a:solidFill>
+                      <a:prstDash val="solid"/>
+                      <a:round/>
+                      <a:headEnd type="none" w="med" len="med"/>
+                      <a:tailEnd type="none" w="med" len="med"/>
+                    </a:lnR>
+                    <a:lnT w="6350" cap="flat" cmpd="sng" algn="ctr">
+                      <a:solidFill>
+                        <a:srgbClr val="C8C0AE"/>
+                      </a:solidFill>
+                      <a:prstDash val="solid"/>
+                      <a:round/>
+                      <a:headEnd type="none" w="med" len="med"/>
+                      <a:tailEnd type="none" w="med" len="med"/>
+                    </a:lnT>
+                    <a:lnB w="6350" cap="flat" cmpd="sng" algn="ctr">
+                      <a:solidFill>
+                        <a:srgbClr val="C8C0AE"/>
+                      </a:solidFill>
+                      <a:prstDash val="solid"/>
+                      <a:round/>
+                      <a:headEnd type="none" w="med" len="med"/>
+                      <a:tailEnd type="none" w="med" len="med"/>
+                    </a:lnB>
+                  </a:tcPr>
+                </a:tc>
+              </a:tr>
+              <a:tr h="617220">
+                <a:tc>
+                  <a:txBody>
+                    <a:bodyPr/>
+                    <a:lstStyle/>
+                    <a:p>
+                      <a:pPr algn="ctr" indent="0" marL="0">
+                        <a:buNone/>
+                      </a:pPr>
+                      <a:r>
+                        <a:rPr lang="en-US" sz="1500" dirty="0">
+                          <a:solidFill>
+                            <a:srgbClr val="2B2B2B"/>
+                          </a:solidFill>
+                          <a:latin typeface="Calibri" pitchFamily="34" charset="0"/>
+                          <a:ea typeface="Calibri" pitchFamily="34" charset="-122"/>
+                          <a:cs typeface="Calibri" pitchFamily="34" charset="-120"/>
+                        </a:rPr>
+                        <a:t>Trung  300–499</a:t>
+                      </a:r>
+                      <a:endParaRPr lang="en-US" sz="1500" dirty="0">
+                        <a:latin typeface="Calibri" charset="0"/>
+                        <a:ea typeface="Calibri" charset="0"/>
+                        <a:cs typeface="Calibri" charset="0"/>
+                      </a:endParaRPr>
+                    </a:p>
+                  </a:txBody>
+                  <a:tcPr marL="91440" marR="91440" marT="45720" marB="45720" anchor="ctr">
+                    <a:lnL w="6350" cap="flat" cmpd="sng" algn="ctr">
+                      <a:solidFill>
+                        <a:srgbClr val="C8C0AE"/>
+                      </a:solidFill>
+                      <a:prstDash val="solid"/>
+                      <a:round/>
+                      <a:headEnd type="none" w="med" len="med"/>
+                      <a:tailEnd type="none" w="med" len="med"/>
+                    </a:lnL>
+                    <a:lnR w="6350" cap="flat" cmpd="sng" algn="ctr">
+                      <a:solidFill>
+                        <a:srgbClr val="C8C0AE"/>
+                      </a:solidFill>
+                      <a:prstDash val="solid"/>
+                      <a:round/>
+                      <a:headEnd type="none" w="med" len="med"/>
+                      <a:tailEnd type="none" w="med" len="med"/>
+                    </a:lnR>
+                    <a:lnT w="6350" cap="flat" cmpd="sng" algn="ctr">
+                      <a:solidFill>
+                        <a:srgbClr val="C8C0AE"/>
+                      </a:solidFill>
+                      <a:prstDash val="solid"/>
+                      <a:round/>
+                      <a:headEnd type="none" w="med" len="med"/>
+                      <a:tailEnd type="none" w="med" len="med"/>
+                    </a:lnT>
+                    <a:lnB w="6350" cap="flat" cmpd="sng" algn="ctr">
+                      <a:solidFill>
+                        <a:srgbClr val="C8C0AE"/>
+                      </a:solidFill>
+                      <a:prstDash val="solid"/>
+                      <a:round/>
+                      <a:headEnd type="none" w="med" len="med"/>
+                      <a:tailEnd type="none" w="med" len="med"/>
+                    </a:lnB>
+                  </a:tcPr>
+                </a:tc>
+                <a:tc>
+                  <a:txBody>
+                    <a:bodyPr/>
+                    <a:lstStyle/>
+                    <a:p>
+                      <a:pPr algn="ctr" indent="0" marL="0">
+                        <a:buNone/>
+                      </a:pPr>
+                      <a:r>
+                        <a:rPr lang="en-US" sz="1500" dirty="0">
+                          <a:solidFill>
+                            <a:srgbClr val="2B2B2B"/>
+                          </a:solidFill>
+                          <a:latin typeface="Calibri" pitchFamily="34" charset="0"/>
+                          <a:ea typeface="Calibri" pitchFamily="34" charset="-122"/>
+                          <a:cs typeface="Calibri" pitchFamily="34" charset="-120"/>
+                        </a:rPr>
+                        <a:t>33</a:t>
+                      </a:r>
+                      <a:endParaRPr lang="en-US" sz="1500" dirty="0">
+                        <a:latin typeface="Calibri" charset="0"/>
+                        <a:ea typeface="Calibri" charset="0"/>
+                        <a:cs typeface="Calibri" charset="0"/>
+                      </a:endParaRPr>
+                    </a:p>
+                  </a:txBody>
+                  <a:tcPr marL="91440" marR="91440" marT="45720" marB="45720" anchor="ctr">
+                    <a:lnL w="6350" cap="flat" cmpd="sng" algn="ctr">
+                      <a:solidFill>
+                        <a:srgbClr val="C8C0AE"/>
+                      </a:solidFill>
+                      <a:prstDash val="solid"/>
+                      <a:round/>
+                      <a:headEnd type="none" w="med" len="med"/>
+                      <a:tailEnd type="none" w="med" len="med"/>
+                    </a:lnL>
+                    <a:lnR w="6350" cap="flat" cmpd="sng" algn="ctr">
+                      <a:solidFill>
+                        <a:srgbClr val="C8C0AE"/>
+                      </a:solidFill>
+                      <a:prstDash val="solid"/>
+                      <a:round/>
+                      <a:headEnd type="none" w="med" len="med"/>
+                      <a:tailEnd type="none" w="med" len="med"/>
+                    </a:lnR>
+                    <a:lnT w="6350" cap="flat" cmpd="sng" algn="ctr">
+                      <a:solidFill>
+                        <a:srgbClr val="C8C0AE"/>
+                      </a:solidFill>
+                      <a:prstDash val="solid"/>
+                      <a:round/>
+                      <a:headEnd type="none" w="med" len="med"/>
+                      <a:tailEnd type="none" w="med" len="med"/>
+                    </a:lnT>
+                    <a:lnB w="6350" cap="flat" cmpd="sng" algn="ctr">
+                      <a:solidFill>
+                        <a:srgbClr val="C8C0AE"/>
+                      </a:solidFill>
+                      <a:prstDash val="solid"/>
+                      <a:round/>
+                      <a:headEnd type="none" w="med" len="med"/>
+                      <a:tailEnd type="none" w="med" len="med"/>
+                    </a:lnB>
+                  </a:tcPr>
+                </a:tc>
+                <a:tc>
+                  <a:txBody>
+                    <a:bodyPr/>
+                    <a:lstStyle/>
+                    <a:p>
+                      <a:pPr algn="ctr" indent="0" marL="0">
+                        <a:buNone/>
+                      </a:pPr>
+                      <a:r>
+                        <a:rPr lang="en-US" sz="1500" dirty="0">
+                          <a:solidFill>
+                            <a:srgbClr val="2B2B2B"/>
+                          </a:solidFill>
+                          <a:latin typeface="Calibri" pitchFamily="34" charset="0"/>
+                          <a:ea typeface="Calibri" pitchFamily="34" charset="-122"/>
+                          <a:cs typeface="Calibri" pitchFamily="34" charset="-120"/>
+                        </a:rPr>
+                        <a:t>0.2638</a:t>
+                      </a:r>
+                      <a:endParaRPr lang="en-US" sz="1500" dirty="0">
+                        <a:latin typeface="Calibri" charset="0"/>
+                        <a:ea typeface="Calibri" charset="0"/>
+                        <a:cs typeface="Calibri" charset="0"/>
+                      </a:endParaRPr>
+                    </a:p>
+                  </a:txBody>
+                  <a:tcPr marL="91440" marR="91440" marT="45720" marB="45720" anchor="ctr">
+                    <a:lnL w="6350" cap="flat" cmpd="sng" algn="ctr">
+                      <a:solidFill>
+                        <a:srgbClr val="C8C0AE"/>
+                      </a:solidFill>
+                      <a:prstDash val="solid"/>
+                      <a:round/>
+                      <a:headEnd type="none" w="med" len="med"/>
+                      <a:tailEnd type="none" w="med" len="med"/>
+                    </a:lnL>
+                    <a:lnR w="6350" cap="flat" cmpd="sng" algn="ctr">
+                      <a:solidFill>
+                        <a:srgbClr val="C8C0AE"/>
+                      </a:solidFill>
+                      <a:prstDash val="solid"/>
+                      <a:round/>
+                      <a:headEnd type="none" w="med" len="med"/>
+                      <a:tailEnd type="none" w="med" len="med"/>
+                    </a:lnR>
+                    <a:lnT w="6350" cap="flat" cmpd="sng" algn="ctr">
+                      <a:solidFill>
+                        <a:srgbClr val="C8C0AE"/>
+                      </a:solidFill>
+                      <a:prstDash val="solid"/>
+                      <a:round/>
+                      <a:headEnd type="none" w="med" len="med"/>
+                      <a:tailEnd type="none" w="med" len="med"/>
+                    </a:lnT>
+                    <a:lnB w="6350" cap="flat" cmpd="sng" algn="ctr">
+                      <a:solidFill>
+                        <a:srgbClr val="C8C0AE"/>
+                      </a:solidFill>
+                      <a:prstDash val="solid"/>
+                      <a:round/>
+                      <a:headEnd type="none" w="med" len="med"/>
+                      <a:tailEnd type="none" w="med" len="med"/>
+                    </a:lnB>
+                  </a:tcPr>
+                </a:tc>
+                <a:tc>
+                  <a:txBody>
+                    <a:bodyPr/>
+                    <a:lstStyle/>
+                    <a:p>
+                      <a:pPr algn="ctr" indent="0" marL="0">
+                        <a:buNone/>
+                      </a:pPr>
+                      <a:r>
+                        <a:rPr lang="en-US" sz="1500" dirty="0">
+                          <a:solidFill>
+                            <a:srgbClr val="2B2B2B"/>
+                          </a:solidFill>
+                          <a:latin typeface="Calibri" pitchFamily="34" charset="0"/>
+                          <a:ea typeface="Calibri" pitchFamily="34" charset="-122"/>
+                          <a:cs typeface="Calibri" pitchFamily="34" charset="-120"/>
+                        </a:rPr>
+                        <a:t>0.2409</a:t>
+                      </a:r>
+                      <a:endParaRPr lang="en-US" sz="1500" dirty="0">
+                        <a:latin typeface="Calibri" charset="0"/>
+                        <a:ea typeface="Calibri" charset="0"/>
+                        <a:cs typeface="Calibri" charset="0"/>
+                      </a:endParaRPr>
+                    </a:p>
+                  </a:txBody>
+                  <a:tcPr marL="91440" marR="91440" marT="45720" marB="45720" anchor="ctr">
+                    <a:lnL w="6350" cap="flat" cmpd="sng" algn="ctr">
+                      <a:solidFill>
+                        <a:srgbClr val="C8C0AE"/>
+                      </a:solidFill>
+                      <a:prstDash val="solid"/>
+                      <a:round/>
+                      <a:headEnd type="none" w="med" len="med"/>
+                      <a:tailEnd type="none" w="med" len="med"/>
+                    </a:lnL>
+                    <a:lnR w="6350" cap="flat" cmpd="sng" algn="ctr">
+                      <a:solidFill>
+                        <a:srgbClr val="C8C0AE"/>
+                      </a:solidFill>
+                      <a:prstDash val="solid"/>
+                      <a:round/>
+                      <a:headEnd type="none" w="med" len="med"/>
+                      <a:tailEnd type="none" w="med" len="med"/>
+                    </a:lnR>
+                    <a:lnT w="6350" cap="flat" cmpd="sng" algn="ctr">
+                      <a:solidFill>
+                        <a:srgbClr val="C8C0AE"/>
+                      </a:solidFill>
+                      <a:prstDash val="solid"/>
+                      <a:round/>
+                      <a:headEnd type="none" w="med" len="med"/>
+                      <a:tailEnd type="none" w="med" len="med"/>
+                    </a:lnT>
+                    <a:lnB w="6350" cap="flat" cmpd="sng" algn="ctr">
+                      <a:solidFill>
+                        <a:srgbClr val="C8C0AE"/>
+                      </a:solidFill>
+                      <a:prstDash val="solid"/>
+                      <a:round/>
+                      <a:headEnd type="none" w="med" len="med"/>
+                      <a:tailEnd type="none" w="med" len="med"/>
+                    </a:lnB>
+                  </a:tcPr>
+                </a:tc>
+                <a:tc>
+                  <a:txBody>
+                    <a:bodyPr/>
+                    <a:lstStyle/>
+                    <a:p>
+                      <a:pPr algn="ctr" indent="0" marL="0">
+                        <a:buNone/>
+                      </a:pPr>
+                      <a:r>
+                        <a:rPr lang="en-US" sz="1500" dirty="0">
+                          <a:solidFill>
+                            <a:srgbClr val="2B2B2B"/>
+                          </a:solidFill>
+                          <a:latin typeface="Calibri" pitchFamily="34" charset="0"/>
+                          <a:ea typeface="Calibri" pitchFamily="34" charset="-122"/>
+                          <a:cs typeface="Calibri" pitchFamily="34" charset="-120"/>
+                        </a:rPr>
+                        <a:t>0.2549</a:t>
+                      </a:r>
+                      <a:endParaRPr lang="en-US" sz="1500" dirty="0">
+                        <a:latin typeface="Calibri" charset="0"/>
+                        <a:ea typeface="Calibri" charset="0"/>
+                        <a:cs typeface="Calibri" charset="0"/>
+                      </a:endParaRPr>
+                    </a:p>
+                  </a:txBody>
+                  <a:tcPr marL="91440" marR="91440" marT="45720" marB="45720" anchor="ctr">
+                    <a:lnL w="6350" cap="flat" cmpd="sng" algn="ctr">
+                      <a:solidFill>
+                        <a:srgbClr val="C8C0AE"/>
+                      </a:solidFill>
+                      <a:prstDash val="solid"/>
+                      <a:round/>
+                      <a:headEnd type="none" w="med" len="med"/>
+                      <a:tailEnd type="none" w="med" len="med"/>
+                    </a:lnL>
+                    <a:lnR w="6350" cap="flat" cmpd="sng" algn="ctr">
+                      <a:solidFill>
+                        <a:srgbClr val="C8C0AE"/>
+                      </a:solidFill>
+                      <a:prstDash val="solid"/>
+                      <a:round/>
+                      <a:headEnd type="none" w="med" len="med"/>
+                      <a:tailEnd type="none" w="med" len="med"/>
+                    </a:lnR>
+                    <a:lnT w="6350" cap="flat" cmpd="sng" algn="ctr">
+                      <a:solidFill>
+                        <a:srgbClr val="C8C0AE"/>
+                      </a:solidFill>
+                      <a:prstDash val="solid"/>
+                      <a:round/>
+                      <a:headEnd type="none" w="med" len="med"/>
+                      <a:tailEnd type="none" w="med" len="med"/>
+                    </a:lnT>
+                    <a:lnB w="6350" cap="flat" cmpd="sng" algn="ctr">
+                      <a:solidFill>
+                        <a:srgbClr val="C8C0AE"/>
+                      </a:solidFill>
+                      <a:prstDash val="solid"/>
+                      <a:round/>
+                      <a:headEnd type="none" w="med" len="med"/>
+                      <a:tailEnd type="none" w="med" len="med"/>
+                    </a:lnB>
+                  </a:tcPr>
+                </a:tc>
+              </a:tr>
+              <a:tr h="617220">
+                <a:tc>
+                  <a:txBody>
+                    <a:bodyPr/>
+                    <a:lstStyle/>
+                    <a:p>
+                      <a:pPr algn="ctr" indent="0" marL="0">
+                        <a:buNone/>
+                      </a:pPr>
+                      <a:r>
+                        <a:rPr lang="en-US" sz="1500" dirty="0">
+                          <a:solidFill>
+                            <a:srgbClr val="2B2B2B"/>
+                          </a:solidFill>
+                          <a:latin typeface="Calibri" pitchFamily="34" charset="0"/>
+                          <a:ea typeface="Calibri" pitchFamily="34" charset="-122"/>
+                          <a:cs typeface="Calibri" pitchFamily="34" charset="-120"/>
+                        </a:rPr>
+                        <a:t>Dài  ≥500</a:t>
+                      </a:r>
+                      <a:endParaRPr lang="en-US" sz="1500" dirty="0">
+                        <a:latin typeface="Calibri" charset="0"/>
+                        <a:ea typeface="Calibri" charset="0"/>
+                        <a:cs typeface="Calibri" charset="0"/>
+                      </a:endParaRPr>
+                    </a:p>
+                  </a:txBody>
+                  <a:tcPr marL="91440" marR="91440" marT="45720" marB="45720" anchor="ctr">
+                    <a:lnL w="6350" cap="flat" cmpd="sng" algn="ctr">
+                      <a:solidFill>
+                        <a:srgbClr val="C8C0AE"/>
+                      </a:solidFill>
+                      <a:prstDash val="solid"/>
+                      <a:round/>
+                      <a:headEnd type="none" w="med" len="med"/>
+                      <a:tailEnd type="none" w="med" len="med"/>
+                    </a:lnL>
+                    <a:lnR w="6350" cap="flat" cmpd="sng" algn="ctr">
+                      <a:solidFill>
+                        <a:srgbClr val="C8C0AE"/>
+                      </a:solidFill>
+                      <a:prstDash val="solid"/>
+                      <a:round/>
+                      <a:headEnd type="none" w="med" len="med"/>
+                      <a:tailEnd type="none" w="med" len="med"/>
+                    </a:lnR>
+                    <a:lnT w="6350" cap="flat" cmpd="sng" algn="ctr">
+                      <a:solidFill>
+                        <a:srgbClr val="C8C0AE"/>
+                      </a:solidFill>
+                      <a:prstDash val="solid"/>
+                      <a:round/>
+                      <a:headEnd type="none" w="med" len="med"/>
+                      <a:tailEnd type="none" w="med" len="med"/>
+                    </a:lnT>
+                    <a:lnB w="6350" cap="flat" cmpd="sng" algn="ctr">
+                      <a:solidFill>
+                        <a:srgbClr val="C8C0AE"/>
+                      </a:solidFill>
+                      <a:prstDash val="solid"/>
+                      <a:round/>
+                      <a:headEnd type="none" w="med" len="med"/>
+                      <a:tailEnd type="none" w="med" len="med"/>
+                    </a:lnB>
+                  </a:tcPr>
+                </a:tc>
+                <a:tc>
+                  <a:txBody>
+                    <a:bodyPr/>
+                    <a:lstStyle/>
+                    <a:p>
+                      <a:pPr algn="ctr" indent="0" marL="0">
+                        <a:buNone/>
+                      </a:pPr>
+                      <a:r>
+                        <a:rPr lang="en-US" sz="1500" dirty="0">
+                          <a:solidFill>
+                            <a:srgbClr val="2B2B2B"/>
+                          </a:solidFill>
+                          <a:latin typeface="Calibri" pitchFamily="34" charset="0"/>
+                          <a:ea typeface="Calibri" pitchFamily="34" charset="-122"/>
+                          <a:cs typeface="Calibri" pitchFamily="34" charset="-120"/>
+                        </a:rPr>
+                        <a:t>33</a:t>
+                      </a:r>
+                      <a:endParaRPr lang="en-US" sz="1500" dirty="0">
+                        <a:latin typeface="Calibri" charset="0"/>
+                        <a:ea typeface="Calibri" charset="0"/>
+                        <a:cs typeface="Calibri" charset="0"/>
+                      </a:endParaRPr>
+                    </a:p>
+                  </a:txBody>
+                  <a:tcPr marL="91440" marR="91440" marT="45720" marB="45720" anchor="ctr">
+                    <a:lnL w="6350" cap="flat" cmpd="sng" algn="ctr">
+                      <a:solidFill>
+                        <a:srgbClr val="C8C0AE"/>
+                      </a:solidFill>
+                      <a:prstDash val="solid"/>
+                      <a:round/>
+                      <a:headEnd type="none" w="med" len="med"/>
+                      <a:tailEnd type="none" w="med" len="med"/>
+                    </a:lnL>
+                    <a:lnR w="6350" cap="flat" cmpd="sng" algn="ctr">
+                      <a:solidFill>
+                        <a:srgbClr val="C8C0AE"/>
+                      </a:solidFill>
+                      <a:prstDash val="solid"/>
+                      <a:round/>
+                      <a:headEnd type="none" w="med" len="med"/>
+                      <a:tailEnd type="none" w="med" len="med"/>
+                    </a:lnR>
+                    <a:lnT w="6350" cap="flat" cmpd="sng" algn="ctr">
+                      <a:solidFill>
+                        <a:srgbClr val="C8C0AE"/>
+                      </a:solidFill>
+                      <a:prstDash val="solid"/>
+                      <a:round/>
+                      <a:headEnd type="none" w="med" len="med"/>
+                      <a:tailEnd type="none" w="med" len="med"/>
+                    </a:lnT>
+                    <a:lnB w="6350" cap="flat" cmpd="sng" algn="ctr">
+                      <a:solidFill>
+                        <a:srgbClr val="C8C0AE"/>
+                      </a:solidFill>
+                      <a:prstDash val="solid"/>
+                      <a:round/>
+                      <a:headEnd type="none" w="med" len="med"/>
+                      <a:tailEnd type="none" w="med" len="med"/>
+                    </a:lnB>
+                  </a:tcPr>
+                </a:tc>
+                <a:tc>
+                  <a:txBody>
+                    <a:bodyPr/>
+                    <a:lstStyle/>
+                    <a:p>
+                      <a:pPr algn="ctr" indent="0" marL="0">
+                        <a:buNone/>
+                      </a:pPr>
+                      <a:r>
+                        <a:rPr lang="en-US" sz="1500" dirty="0">
+                          <a:solidFill>
+                            <a:srgbClr val="2B2B2B"/>
+                          </a:solidFill>
+                          <a:latin typeface="Calibri" pitchFamily="34" charset="0"/>
+                          <a:ea typeface="Calibri" pitchFamily="34" charset="-122"/>
+                          <a:cs typeface="Calibri" pitchFamily="34" charset="-120"/>
+                        </a:rPr>
+                        <a:t>0.2298</a:t>
+                      </a:r>
+                      <a:endParaRPr lang="en-US" sz="1500" dirty="0">
+                        <a:latin typeface="Calibri" charset="0"/>
+                        <a:ea typeface="Calibri" charset="0"/>
+                        <a:cs typeface="Calibri" charset="0"/>
+                      </a:endParaRPr>
+                    </a:p>
+                  </a:txBody>
+                  <a:tcPr marL="91440" marR="91440" marT="45720" marB="45720" anchor="ctr">
+                    <a:lnL w="6350" cap="flat" cmpd="sng" algn="ctr">
+                      <a:solidFill>
+                        <a:srgbClr val="C8C0AE"/>
+                      </a:solidFill>
+                      <a:prstDash val="solid"/>
+                      <a:round/>
+                      <a:headEnd type="none" w="med" len="med"/>
+                      <a:tailEnd type="none" w="med" len="med"/>
+                    </a:lnL>
+                    <a:lnR w="6350" cap="flat" cmpd="sng" algn="ctr">
+                      <a:solidFill>
+                        <a:srgbClr val="C8C0AE"/>
+                      </a:solidFill>
+                      <a:prstDash val="solid"/>
+                      <a:round/>
+                      <a:headEnd type="none" w="med" len="med"/>
+                      <a:tailEnd type="none" w="med" len="med"/>
+                    </a:lnR>
+                    <a:lnT w="6350" cap="flat" cmpd="sng" algn="ctr">
+                      <a:solidFill>
+                        <a:srgbClr val="C8C0AE"/>
+                      </a:solidFill>
+                      <a:prstDash val="solid"/>
+                      <a:round/>
+                      <a:headEnd type="none" w="med" len="med"/>
+                      <a:tailEnd type="none" w="med" len="med"/>
+                    </a:lnT>
+                    <a:lnB w="6350" cap="flat" cmpd="sng" algn="ctr">
+                      <a:solidFill>
+                        <a:srgbClr val="C8C0AE"/>
+                      </a:solidFill>
+                      <a:prstDash val="solid"/>
+                      <a:round/>
+                      <a:headEnd type="none" w="med" len="med"/>
+                      <a:tailEnd type="none" w="med" len="med"/>
+                    </a:lnB>
+                  </a:tcPr>
+                </a:tc>
+                <a:tc>
+                  <a:txBody>
+                    <a:bodyPr/>
+                    <a:lstStyle/>
+                    <a:p>
+                      <a:pPr algn="ctr" indent="0" marL="0">
+                        <a:buNone/>
+                      </a:pPr>
+                      <a:r>
+                        <a:rPr lang="en-US" sz="1500" dirty="0">
+                          <a:solidFill>
+                            <a:srgbClr val="2B2B2B"/>
+                          </a:solidFill>
+                          <a:latin typeface="Calibri" pitchFamily="34" charset="0"/>
+                          <a:ea typeface="Calibri" pitchFamily="34" charset="-122"/>
+                          <a:cs typeface="Calibri" pitchFamily="34" charset="-120"/>
+                        </a:rPr>
+                        <a:t>0.2194</a:t>
+                      </a:r>
+                      <a:endParaRPr lang="en-US" sz="1500" dirty="0">
+                        <a:latin typeface="Calibri" charset="0"/>
+                        <a:ea typeface="Calibri" charset="0"/>
+                        <a:cs typeface="Calibri" charset="0"/>
+                      </a:endParaRPr>
+                    </a:p>
+                  </a:txBody>
+                  <a:tcPr marL="91440" marR="91440" marT="45720" marB="45720" anchor="ctr">
+                    <a:lnL w="6350" cap="flat" cmpd="sng" algn="ctr">
+                      <a:solidFill>
+                        <a:srgbClr val="C8C0AE"/>
+                      </a:solidFill>
+                      <a:prstDash val="solid"/>
+                      <a:round/>
+                      <a:headEnd type="none" w="med" len="med"/>
+                      <a:tailEnd type="none" w="med" len="med"/>
+                    </a:lnL>
+                    <a:lnR w="6350" cap="flat" cmpd="sng" algn="ctr">
+                      <a:solidFill>
+                        <a:srgbClr val="C8C0AE"/>
+                      </a:solidFill>
+                      <a:prstDash val="solid"/>
+                      <a:round/>
+                      <a:headEnd type="none" w="med" len="med"/>
+                      <a:tailEnd type="none" w="med" len="med"/>
+                    </a:lnR>
+                    <a:lnT w="6350" cap="flat" cmpd="sng" algn="ctr">
+                      <a:solidFill>
+                        <a:srgbClr val="C8C0AE"/>
+                      </a:solidFill>
+                      <a:prstDash val="solid"/>
+                      <a:round/>
+                      <a:headEnd type="none" w="med" len="med"/>
+                      <a:tailEnd type="none" w="med" len="med"/>
+                    </a:lnT>
+                    <a:lnB w="6350" cap="flat" cmpd="sng" algn="ctr">
+                      <a:solidFill>
+                        <a:srgbClr val="C8C0AE"/>
+                      </a:solidFill>
+                      <a:prstDash val="solid"/>
+                      <a:round/>
+                      <a:headEnd type="none" w="med" len="med"/>
+                      <a:tailEnd type="none" w="med" len="med"/>
+                    </a:lnB>
+                  </a:tcPr>
+                </a:tc>
+                <a:tc>
+                  <a:txBody>
+                    <a:bodyPr/>
+                    <a:lstStyle/>
+                    <a:p>
+                      <a:pPr algn="ctr" indent="0" marL="0">
+                        <a:buNone/>
+                      </a:pPr>
+                      <a:r>
+                        <a:rPr lang="en-US" sz="1500" dirty="0">
+                          <a:solidFill>
+                            <a:srgbClr val="2B2B2B"/>
+                          </a:solidFill>
+                          <a:latin typeface="Calibri" pitchFamily="34" charset="0"/>
+                          <a:ea typeface="Calibri" pitchFamily="34" charset="-122"/>
+                          <a:cs typeface="Calibri" pitchFamily="34" charset="-120"/>
+                        </a:rPr>
+                        <a:t>0.2519</a:t>
+                      </a:r>
+                      <a:endParaRPr lang="en-US" sz="1500" dirty="0">
+                        <a:latin typeface="Calibri" charset="0"/>
+                        <a:ea typeface="Calibri" charset="0"/>
+                        <a:cs typeface="Calibri" charset="0"/>
+                      </a:endParaRPr>
+                    </a:p>
+                  </a:txBody>
+                  <a:tcPr marL="91440" marR="91440" marT="45720" marB="45720" anchor="ctr">
+                    <a:lnL w="6350" cap="flat" cmpd="sng" algn="ctr">
+                      <a:solidFill>
+                        <a:srgbClr val="C8C0AE"/>
+                      </a:solidFill>
+                      <a:prstDash val="solid"/>
+                      <a:round/>
+                      <a:headEnd type="none" w="med" len="med"/>
+                      <a:tailEnd type="none" w="med" len="med"/>
+                    </a:lnL>
+                    <a:lnR w="6350" cap="flat" cmpd="sng" algn="ctr">
+                      <a:solidFill>
+                        <a:srgbClr val="C8C0AE"/>
+                      </a:solidFill>
+                      <a:prstDash val="solid"/>
+                      <a:round/>
+                      <a:headEnd type="none" w="med" len="med"/>
+                      <a:tailEnd type="none" w="med" len="med"/>
+                    </a:lnR>
+                    <a:lnT w="6350" cap="flat" cmpd="sng" algn="ctr">
+                      <a:solidFill>
+                        <a:srgbClr val="C8C0AE"/>
+                      </a:solidFill>
+                      <a:prstDash val="solid"/>
+                      <a:round/>
+                      <a:headEnd type="none" w="med" len="med"/>
+                      <a:tailEnd type="none" w="med" len="med"/>
+                    </a:lnT>
+                    <a:lnB w="6350" cap="flat" cmpd="sng" algn="ctr">
+                      <a:solidFill>
+                        <a:srgbClr val="C8C0AE"/>
+                      </a:solidFill>
+                      <a:prstDash val="solid"/>
+                      <a:round/>
+                      <a:headEnd type="none" w="med" len="med"/>
+                      <a:tailEnd type="none" w="med" len="med"/>
+                    </a:lnB>
+                  </a:tcPr>
+                </a:tc>
+              </a:tr>
+            </a:tbl>
+          </a:graphicData>
+        </a:graphic>
+      </p:graphicFrame>
+      <p:sp>
+        <p:nvSpPr>
+          <p:cNvPr id="7" name="Shape 4"/>
+          <p:cNvSpPr/>
+          <p:nvPr/>
+        </p:nvSpPr>
+        <p:spPr>
+          <a:xfrm>
+            <a:off x="502920" y="4023360"/>
+            <a:ext cx="3611880" cy="1691640"/>
           </a:xfrm>
           <a:prstGeom prst="rect">
             <a:avLst/>
@@ -5118,14 +6504,14 @@
       </p:sp>
       <p:sp>
         <p:nvSpPr>
-          <p:cNvPr id="9" name="Text 7"/>
-          <p:cNvSpPr/>
-          <p:nvPr/>
-        </p:nvSpPr>
-        <p:spPr>
-          <a:xfrm>
-            <a:off x="2926080" y="1828800"/>
-            <a:ext cx="8549640" cy="640080"/>
+          <p:cNvPr id="8" name="Text 5"/>
+          <p:cNvSpPr/>
+          <p:nvPr/>
+        </p:nvSpPr>
+        <p:spPr>
+          <a:xfrm>
+            <a:off x="685800" y="4160520"/>
+            <a:ext cx="3246120" cy="320040"/>
           </a:xfrm>
           <a:prstGeom prst="rect">
             <a:avLst/>
@@ -5141,50 +6527,30 @@
               <a:buNone/>
             </a:pPr>
             <a:r>
-              <a:rPr lang="en-US" sz="1600" dirty="0">
-                <a:solidFill>
-                  <a:srgbClr val="2B2B2B"/>
+              <a:rPr lang="en-US" sz="1400" dirty="0">
+                <a:solidFill>
+                  <a:srgbClr val="B8432A"/>
                 </a:solidFill>
                 <a:latin typeface="Calibri" pitchFamily="34" charset="0"/>
                 <a:ea typeface="Calibri" pitchFamily="34" charset="-122"/>
                 <a:cs typeface="Calibri" pitchFamily="34" charset="-120"/>
               </a:rPr>
-              <a:t>Sai tên / gán nhầm người; đảo polarity; bịa súng-dao; xe bồn thay máy ủi.</a:t>
-            </a:r>
-            <a:endParaRPr lang="en-US" sz="1600" dirty="0"/>
-          </a:p>
-        </p:txBody>
-      </p:sp>
-      <p:sp>
-        <p:nvSpPr>
-          <p:cNvPr id="10" name="Shape 8"/>
-          <p:cNvSpPr/>
-          <p:nvPr/>
-        </p:nvSpPr>
-        <p:spPr>
-          <a:xfrm>
-            <a:off x="502920" y="2880360"/>
-            <a:ext cx="2194560" cy="1188720"/>
-          </a:xfrm>
-          <a:prstGeom prst="rect">
-            <a:avLst/>
-          </a:prstGeom>
-          <a:solidFill>
-            <a:srgbClr val="0B0B0B"/>
-          </a:solidFill>
-          <a:ln/>
-        </p:spPr>
-      </p:sp>
-      <p:sp>
-        <p:nvSpPr>
-          <p:cNvPr id="11" name="Text 9"/>
-          <p:cNvSpPr/>
-          <p:nvPr/>
-        </p:nvSpPr>
-        <p:spPr>
-          <a:xfrm>
-            <a:off x="640080" y="3246120"/>
-            <a:ext cx="1920240" cy="457200"/>
+              <a:t>Ngắn</a:t>
+            </a:r>
+            <a:endParaRPr lang="en-US" sz="1400" dirty="0"/>
+          </a:p>
+        </p:txBody>
+      </p:sp>
+      <p:sp>
+        <p:nvSpPr>
+          <p:cNvPr id="9" name="Text 6"/>
+          <p:cNvSpPr/>
+          <p:nvPr/>
+        </p:nvSpPr>
+        <p:spPr>
+          <a:xfrm>
+            <a:off x="685800" y="4572000"/>
+            <a:ext cx="3246120" cy="914400"/>
           </a:xfrm>
           <a:prstGeom prst="rect">
             <a:avLst/>
@@ -5200,30 +6566,30 @@
               <a:buNone/>
             </a:pPr>
             <a:r>
-              <a:rPr lang="en-US" sz="2000" dirty="0">
-                <a:solidFill>
-                  <a:srgbClr val="EFE8D6"/>
-                </a:solidFill>
-                <a:latin typeface="Georgia" pitchFamily="34" charset="0"/>
-                <a:ea typeface="Georgia" pitchFamily="34" charset="-122"/>
-                <a:cs typeface="Georgia" pitchFamily="34" charset="-120"/>
-              </a:rPr>
-              <a:t>Lead-3</a:t>
-            </a:r>
-            <a:endParaRPr lang="en-US" sz="2000" dirty="0"/>
-          </a:p>
-        </p:txBody>
-      </p:sp>
-      <p:sp>
-        <p:nvSpPr>
-          <p:cNvPr id="12" name="Shape 10"/>
-          <p:cNvSpPr/>
-          <p:nvPr/>
-        </p:nvSpPr>
-        <p:spPr>
-          <a:xfrm>
-            <a:off x="2697480" y="2880360"/>
-            <a:ext cx="8961120" cy="1188720"/>
+              <a:rPr lang="en-US" sz="1500" dirty="0">
+                <a:solidFill>
+                  <a:srgbClr val="2B2B2B"/>
+                </a:solidFill>
+                <a:latin typeface="Calibri" pitchFamily="34" charset="0"/>
+                <a:ea typeface="Calibri" pitchFamily="34" charset="-122"/>
+                <a:cs typeface="Calibri" pitchFamily="34" charset="-120"/>
+              </a:rPr>
+              <a:t>ViT5 cao nhất cả R-1/2/L.</a:t>
+            </a:r>
+            <a:endParaRPr lang="en-US" sz="1500" dirty="0"/>
+          </a:p>
+        </p:txBody>
+      </p:sp>
+      <p:sp>
+        <p:nvSpPr>
+          <p:cNvPr id="10" name="Shape 7"/>
+          <p:cNvSpPr/>
+          <p:nvPr/>
+        </p:nvSpPr>
+        <p:spPr>
+          <a:xfrm>
+            <a:off x="4297680" y="4023360"/>
+            <a:ext cx="3611880" cy="1691640"/>
           </a:xfrm>
           <a:prstGeom prst="rect">
             <a:avLst/>
@@ -5241,14 +6607,14 @@
       </p:sp>
       <p:sp>
         <p:nvSpPr>
-          <p:cNvPr id="13" name="Text 11"/>
-          <p:cNvSpPr/>
-          <p:nvPr/>
-        </p:nvSpPr>
-        <p:spPr>
-          <a:xfrm>
-            <a:off x="2926080" y="3154680"/>
-            <a:ext cx="8549640" cy="640080"/>
+          <p:cNvPr id="11" name="Text 8"/>
+          <p:cNvSpPr/>
+          <p:nvPr/>
+        </p:nvSpPr>
+        <p:spPr>
+          <a:xfrm>
+            <a:off x="4480560" y="4160520"/>
+            <a:ext cx="3246120" cy="320040"/>
           </a:xfrm>
           <a:prstGeom prst="rect">
             <a:avLst/>
@@ -5264,50 +6630,30 @@
               <a:buNone/>
             </a:pPr>
             <a:r>
-              <a:rPr lang="en-US" sz="1600" dirty="0">
-                <a:solidFill>
-                  <a:srgbClr val="2B2B2B"/>
+              <a:rPr lang="en-US" sz="1400" dirty="0">
+                <a:solidFill>
+                  <a:srgbClr val="B8432A"/>
                 </a:solidFill>
                 <a:latin typeface="Calibri" pitchFamily="34" charset="0"/>
                 <a:ea typeface="Calibri" pitchFamily="34" charset="-122"/>
                 <a:cs typeface="Calibri" pitchFamily="34" charset="-120"/>
               </a:rPr>
-              <a:t>Ít bịa (câu lấy từ bài). Hay lệch gold vì gold là sapo/kết luận.</a:t>
-            </a:r>
-            <a:endParaRPr lang="en-US" sz="1600" dirty="0"/>
-          </a:p>
-        </p:txBody>
-      </p:sp>
-      <p:sp>
-        <p:nvSpPr>
-          <p:cNvPr id="14" name="Shape 12"/>
-          <p:cNvSpPr/>
-          <p:nvPr/>
-        </p:nvSpPr>
-        <p:spPr>
-          <a:xfrm>
-            <a:off x="502920" y="4206240"/>
-            <a:ext cx="2194560" cy="1188720"/>
-          </a:xfrm>
-          <a:prstGeom prst="rect">
-            <a:avLst/>
-          </a:prstGeom>
-          <a:solidFill>
-            <a:srgbClr val="0B0B0B"/>
-          </a:solidFill>
-          <a:ln/>
-        </p:spPr>
-      </p:sp>
-      <p:sp>
-        <p:nvSpPr>
-          <p:cNvPr id="15" name="Text 13"/>
-          <p:cNvSpPr/>
-          <p:nvPr/>
-        </p:nvSpPr>
-        <p:spPr>
-          <a:xfrm>
-            <a:off x="640080" y="4572000"/>
-            <a:ext cx="1920240" cy="457200"/>
+              <a:t>Trung</a:t>
+            </a:r>
+            <a:endParaRPr lang="en-US" sz="1400" dirty="0"/>
+          </a:p>
+        </p:txBody>
+      </p:sp>
+      <p:sp>
+        <p:nvSpPr>
+          <p:cNvPr id="12" name="Text 9"/>
+          <p:cNvSpPr/>
+          <p:nvPr/>
+        </p:nvSpPr>
+        <p:spPr>
+          <a:xfrm>
+            <a:off x="4480560" y="4572000"/>
+            <a:ext cx="3246120" cy="914400"/>
           </a:xfrm>
           <a:prstGeom prst="rect">
             <a:avLst/>
@@ -5323,30 +6669,30 @@
               <a:buNone/>
             </a:pPr>
             <a:r>
-              <a:rPr lang="en-US" sz="2000" dirty="0">
-                <a:solidFill>
-                  <a:srgbClr val="EFE8D6"/>
-                </a:solidFill>
-                <a:latin typeface="Georgia" pitchFamily="34" charset="0"/>
-                <a:ea typeface="Georgia" pitchFamily="34" charset="-122"/>
-                <a:cs typeface="Georgia" pitchFamily="34" charset="-120"/>
-              </a:rPr>
-              <a:t>TextRank</a:t>
-            </a:r>
-            <a:endParaRPr lang="en-US" sz="2000" dirty="0"/>
-          </a:p>
-        </p:txBody>
-      </p:sp>
-      <p:sp>
-        <p:nvSpPr>
-          <p:cNvPr id="16" name="Shape 14"/>
-          <p:cNvSpPr/>
-          <p:nvPr/>
-        </p:nvSpPr>
-        <p:spPr>
-          <a:xfrm>
-            <a:off x="2697480" y="4206240"/>
-            <a:ext cx="8961120" cy="1188720"/>
+              <a:rPr lang="en-US" sz="1500" dirty="0">
+                <a:solidFill>
+                  <a:srgbClr val="2B2B2B"/>
+                </a:solidFill>
+                <a:latin typeface="Calibri" pitchFamily="34" charset="0"/>
+                <a:ea typeface="Calibri" pitchFamily="34" charset="-122"/>
+                <a:cs typeface="Calibri" pitchFamily="34" charset="-120"/>
+              </a:rPr>
+              <a:t>Lead-3 cao nhất (0.2638).</a:t>
+            </a:r>
+            <a:endParaRPr lang="en-US" sz="1500" dirty="0"/>
+          </a:p>
+        </p:txBody>
+      </p:sp>
+      <p:sp>
+        <p:nvSpPr>
+          <p:cNvPr id="13" name="Shape 10"/>
+          <p:cNvSpPr/>
+          <p:nvPr/>
+        </p:nvSpPr>
+        <p:spPr>
+          <a:xfrm>
+            <a:off x="8092440" y="4023360"/>
+            <a:ext cx="3611880" cy="1691640"/>
           </a:xfrm>
           <a:prstGeom prst="rect">
             <a:avLst/>
@@ -5364,14 +6710,14 @@
       </p:sp>
       <p:sp>
         <p:nvSpPr>
-          <p:cNvPr id="17" name="Text 15"/>
-          <p:cNvSpPr/>
-          <p:nvPr/>
-        </p:nvSpPr>
-        <p:spPr>
-          <a:xfrm>
-            <a:off x="2926080" y="4480560"/>
-            <a:ext cx="8549640" cy="640080"/>
+          <p:cNvPr id="14" name="Text 11"/>
+          <p:cNvSpPr/>
+          <p:nvPr/>
+        </p:nvSpPr>
+        <p:spPr>
+          <a:xfrm>
+            <a:off x="8275320" y="4160520"/>
+            <a:ext cx="3246120" cy="320040"/>
           </a:xfrm>
           <a:prstGeom prst="rect">
             <a:avLst/>
@@ -5387,30 +6733,30 @@
               <a:buNone/>
             </a:pPr>
             <a:r>
-              <a:rPr lang="en-US" sz="1600" dirty="0">
-                <a:solidFill>
-                  <a:srgbClr val="2B2B2B"/>
+              <a:rPr lang="en-US" sz="1400" dirty="0">
+                <a:solidFill>
+                  <a:srgbClr val="B8432A"/>
                 </a:solidFill>
                 <a:latin typeface="Calibri" pitchFamily="34" charset="0"/>
                 <a:ea typeface="Calibri" pitchFamily="34" charset="-122"/>
                 <a:cs typeface="Calibri" pitchFamily="34" charset="-120"/>
               </a:rPr>
-              <a:t>Đôi khi nhảy đoạn hoặc trộn nhiều tin trong bài tổng hợp 24h.</a:t>
-            </a:r>
-            <a:endParaRPr lang="en-US" sz="1600" dirty="0"/>
-          </a:p>
-        </p:txBody>
-      </p:sp>
-      <p:sp>
-        <p:nvSpPr>
-          <p:cNvPr id="18" name="Text 16"/>
-          <p:cNvSpPr/>
-          <p:nvPr/>
-        </p:nvSpPr>
-        <p:spPr>
-          <a:xfrm>
-            <a:off x="502920" y="6510528"/>
-            <a:ext cx="8229600" cy="201168"/>
+              <a:t>Dài</a:t>
+            </a:r>
+            <a:endParaRPr lang="en-US" sz="1400" dirty="0"/>
+          </a:p>
+        </p:txBody>
+      </p:sp>
+      <p:sp>
+        <p:nvSpPr>
+          <p:cNvPr id="15" name="Text 12"/>
+          <p:cNvSpPr/>
+          <p:nvPr/>
+        </p:nvSpPr>
+        <p:spPr>
+          <a:xfrm>
+            <a:off x="8275320" y="4572000"/>
+            <a:ext cx="3246120" cy="914400"/>
           </a:xfrm>
           <a:prstGeom prst="rect">
             <a:avLst/>
@@ -5426,14 +6772,53 @@
               <a:buNone/>
             </a:pPr>
             <a:r>
-              <a:rPr lang="en-US" sz="1000" dirty="0">
-                <a:solidFill>
-                  <a:srgbClr val="B5AFA0"/>
+              <a:rPr lang="en-US" sz="1500" dirty="0">
+                <a:solidFill>
+                  <a:srgbClr val="2B2B2B"/>
                 </a:solidFill>
                 <a:latin typeface="Calibri" pitchFamily="34" charset="0"/>
                 <a:ea typeface="Calibri" pitchFamily="34" charset="-122"/>
                 <a:cs typeface="Calibri" pitchFamily="34" charset="-120"/>
               </a:rPr>
+              <a:t>Cả ba giảm; ViT5 vẫn hơn extractive.</a:t>
+            </a:r>
+            <a:endParaRPr lang="en-US" sz="1500" dirty="0"/>
+          </a:p>
+        </p:txBody>
+      </p:sp>
+      <p:sp>
+        <p:nvSpPr>
+          <p:cNvPr id="16" name="Text 13"/>
+          <p:cNvSpPr/>
+          <p:nvPr/>
+        </p:nvSpPr>
+        <p:spPr>
+          <a:xfrm>
+            <a:off x="502920" y="6510528"/>
+            <a:ext cx="8229600" cy="201168"/>
+          </a:xfrm>
+          <a:prstGeom prst="rect">
+            <a:avLst/>
+          </a:prstGeom>
+          <a:noFill/>
+          <a:ln/>
+        </p:spPr>
+        <p:txBody>
+          <a:bodyPr wrap="square" lIns="0" tIns="0" rIns="0" bIns="0" rtlCol="0" anchor="ctr"/>
+          <a:lstStyle/>
+          <a:p>
+            <a:pPr indent="0" marL="0">
+              <a:buNone/>
+            </a:pPr>
+            <a:r>
+              <a:rPr lang="en-US" sz="1000" dirty="0">
+                <a:solidFill>
+                  <a:srgbClr val="B5AFA0"/>
+                </a:solidFill>
+                <a:latin typeface="Calibri" pitchFamily="34" charset="0"/>
+                <a:ea typeface="Calibri" pitchFamily="34" charset="-122"/>
+                <a:cs typeface="Calibri" pitchFamily="34" charset="-120"/>
+              </a:rPr>
               <a:t>CS221 · UIT  ·  Vietnews extractive vs abstractive</a:t>
             </a:r>
             <a:endParaRPr lang="en-US" sz="1000" dirty="0"/>
@@ -5442,7 +6827,7 @@
       </p:sp>
       <p:sp>
         <p:nvSpPr>
-          <p:cNvPr id="19" name="Text 17"/>
+          <p:cNvPr id="17" name="Text 14"/>
           <p:cNvSpPr/>
           <p:nvPr/>
         </p:nvSpPr>
@@ -5544,7 +6929,7 @@
                 <a:ea typeface="Calibri" pitchFamily="34" charset="-122"/>
                 <a:cs typeface="Calibri" pitchFamily="34" charset="-120"/>
               </a:rPr>
-              <a:t>12  BA VÍ DỤ</a:t>
+              <a:t>11  ĐỌC TAY 20 BÀI</a:t>
             </a:r>
             <a:endParaRPr lang="en-US" sz="1100" dirty="0"/>
           </a:p>
@@ -5583,7 +6968,7 @@
                 <a:ea typeface="Calibri" pitchFamily="34" charset="-122"/>
                 <a:cs typeface="Calibri" pitchFamily="34" charset="-120"/>
               </a:rPr>
-              <a:t>Đối chiếu gold</a:t>
+              <a:t>ROUGE không đủ</a:t>
             </a:r>
             <a:endParaRPr lang="en-US" sz="1200" dirty="0"/>
           </a:p>
@@ -5614,14 +6999,112 @@
       </p:sp>
       <p:sp>
         <p:nvSpPr>
-          <p:cNvPr id="5" name="Shape 3"/>
-          <p:cNvSpPr/>
-          <p:nvPr/>
-        </p:nvSpPr>
-        <p:spPr>
-          <a:xfrm>
-            <a:off x="457200" y="1051560"/>
-            <a:ext cx="3657600" cy="4892040"/>
+          <p:cNvPr id="5" name="Text 3"/>
+          <p:cNvSpPr/>
+          <p:nvPr/>
+        </p:nvSpPr>
+        <p:spPr>
+          <a:xfrm>
+            <a:off x="502920" y="914400"/>
+            <a:ext cx="10972800" cy="457200"/>
+          </a:xfrm>
+          <a:prstGeom prst="rect">
+            <a:avLst/>
+          </a:prstGeom>
+          <a:noFill/>
+          <a:ln/>
+        </p:spPr>
+        <p:txBody>
+          <a:bodyPr wrap="square" lIns="0" tIns="0" rIns="0" bIns="0" rtlCol="0" anchor="ctr"/>
+          <a:lstStyle/>
+          <a:p>
+            <a:pPr indent="0" marL="0">
+              <a:buNone/>
+            </a:pPr>
+            <a:r>
+              <a:rPr lang="en-US" sz="2600" dirty="0">
+                <a:solidFill>
+                  <a:srgbClr val="1A1A1A"/>
+                </a:solidFill>
+                <a:latin typeface="Georgia" pitchFamily="34" charset="0"/>
+                <a:ea typeface="Georgia" pitchFamily="34" charset="-122"/>
+                <a:cs typeface="Georgia" pitchFamily="34" charset="-120"/>
+              </a:rPr>
+              <a:t>ViT5 điểm cao hơn vẫn sai tên và số.</a:t>
+            </a:r>
+            <a:endParaRPr lang="en-US" sz="2600" dirty="0"/>
+          </a:p>
+        </p:txBody>
+      </p:sp>
+      <p:sp>
+        <p:nvSpPr>
+          <p:cNvPr id="6" name="Shape 4"/>
+          <p:cNvSpPr/>
+          <p:nvPr/>
+        </p:nvSpPr>
+        <p:spPr>
+          <a:xfrm>
+            <a:off x="502920" y="1554480"/>
+            <a:ext cx="2194560" cy="1188720"/>
+          </a:xfrm>
+          <a:prstGeom prst="rect">
+            <a:avLst/>
+          </a:prstGeom>
+          <a:solidFill>
+            <a:srgbClr val="0B0B0B"/>
+          </a:solidFill>
+          <a:ln/>
+        </p:spPr>
+      </p:sp>
+      <p:sp>
+        <p:nvSpPr>
+          <p:cNvPr id="7" name="Text 5"/>
+          <p:cNvSpPr/>
+          <p:nvPr/>
+        </p:nvSpPr>
+        <p:spPr>
+          <a:xfrm>
+            <a:off x="640080" y="1920240"/>
+            <a:ext cx="1920240" cy="457200"/>
+          </a:xfrm>
+          <a:prstGeom prst="rect">
+            <a:avLst/>
+          </a:prstGeom>
+          <a:noFill/>
+          <a:ln/>
+        </p:spPr>
+        <p:txBody>
+          <a:bodyPr wrap="square" lIns="0" tIns="0" rIns="0" bIns="0" rtlCol="0" anchor="ctr"/>
+          <a:lstStyle/>
+          <a:p>
+            <a:pPr indent="0" marL="0">
+              <a:buNone/>
+            </a:pPr>
+            <a:r>
+              <a:rPr lang="en-US" sz="2000" dirty="0">
+                <a:solidFill>
+                  <a:srgbClr val="EFE8D6"/>
+                </a:solidFill>
+                <a:latin typeface="Georgia" pitchFamily="34" charset="0"/>
+                <a:ea typeface="Georgia" pitchFamily="34" charset="-122"/>
+                <a:cs typeface="Georgia" pitchFamily="34" charset="-120"/>
+              </a:rPr>
+              <a:t>ViT5</a:t>
+            </a:r>
+            <a:endParaRPr lang="en-US" sz="2000" dirty="0"/>
+          </a:p>
+        </p:txBody>
+      </p:sp>
+      <p:sp>
+        <p:nvSpPr>
+          <p:cNvPr id="8" name="Shape 6"/>
+          <p:cNvSpPr/>
+          <p:nvPr/>
+        </p:nvSpPr>
+        <p:spPr>
+          <a:xfrm>
+            <a:off x="2697480" y="1554480"/>
+            <a:ext cx="8961120" cy="1188720"/>
           </a:xfrm>
           <a:prstGeom prst="rect">
             <a:avLst/>
@@ -5639,14 +7122,14 @@
       </p:sp>
       <p:sp>
         <p:nvSpPr>
-          <p:cNvPr id="6" name="Text 4"/>
-          <p:cNvSpPr/>
-          <p:nvPr/>
-        </p:nvSpPr>
-        <p:spPr>
-          <a:xfrm>
-            <a:off x="685800" y="1234440"/>
-            <a:ext cx="3200400" cy="320040"/>
+          <p:cNvPr id="9" name="Text 7"/>
+          <p:cNvSpPr/>
+          <p:nvPr/>
+        </p:nvSpPr>
+        <p:spPr>
+          <a:xfrm>
+            <a:off x="2926080" y="1828800"/>
+            <a:ext cx="8549640" cy="640080"/>
           </a:xfrm>
           <a:prstGeom prst="rect">
             <a:avLst/>
@@ -5662,30 +7145,50 @@
               <a:buNone/>
             </a:pPr>
             <a:r>
-              <a:rPr lang="en-US" sz="1400" dirty="0">
-                <a:solidFill>
-                  <a:srgbClr val="B8432A"/>
-                </a:solidFill>
-                <a:latin typeface="Consolas" pitchFamily="34" charset="0"/>
-                <a:ea typeface="Consolas" pitchFamily="34" charset="-122"/>
-                <a:cs typeface="Consolas" pitchFamily="34" charset="-120"/>
-              </a:rPr>
-              <a:t>000001</a:t>
-            </a:r>
-            <a:endParaRPr lang="en-US" sz="1400" dirty="0"/>
-          </a:p>
-        </p:txBody>
-      </p:sp>
-      <p:sp>
-        <p:nvSpPr>
-          <p:cNvPr id="7" name="Text 5"/>
-          <p:cNvSpPr/>
-          <p:nvPr/>
-        </p:nvSpPr>
-        <p:spPr>
-          <a:xfrm>
-            <a:off x="685800" y="1600200"/>
-            <a:ext cx="3200400" cy="411480"/>
+              <a:rPr lang="en-US" sz="1600" dirty="0">
+                <a:solidFill>
+                  <a:srgbClr val="2B2B2B"/>
+                </a:solidFill>
+                <a:latin typeface="Calibri" pitchFamily="34" charset="0"/>
+                <a:ea typeface="Calibri" pitchFamily="34" charset="-122"/>
+                <a:cs typeface="Calibri" pitchFamily="34" charset="-120"/>
+              </a:rPr>
+              <a:t>Sai tên / gán nhầm người; đảo polarity; bịa súng-dao; xe bồn thay máy ủi.</a:t>
+            </a:r>
+            <a:endParaRPr lang="en-US" sz="1600" dirty="0"/>
+          </a:p>
+        </p:txBody>
+      </p:sp>
+      <p:sp>
+        <p:nvSpPr>
+          <p:cNvPr id="10" name="Shape 8"/>
+          <p:cNvSpPr/>
+          <p:nvPr/>
+        </p:nvSpPr>
+        <p:spPr>
+          <a:xfrm>
+            <a:off x="502920" y="2880360"/>
+            <a:ext cx="2194560" cy="1188720"/>
+          </a:xfrm>
+          <a:prstGeom prst="rect">
+            <a:avLst/>
+          </a:prstGeom>
+          <a:solidFill>
+            <a:srgbClr val="0B0B0B"/>
+          </a:solidFill>
+          <a:ln/>
+        </p:spPr>
+      </p:sp>
+      <p:sp>
+        <p:nvSpPr>
+          <p:cNvPr id="11" name="Text 9"/>
+          <p:cNvSpPr/>
+          <p:nvPr/>
+        </p:nvSpPr>
+        <p:spPr>
+          <a:xfrm>
+            <a:off x="640080" y="3246120"/>
+            <a:ext cx="1920240" cy="457200"/>
           </a:xfrm>
           <a:prstGeom prst="rect">
             <a:avLst/>
@@ -5703,13 +7206,13 @@
             <a:r>
               <a:rPr lang="en-US" sz="2000" dirty="0">
                 <a:solidFill>
-                  <a:srgbClr val="1A1A1A"/>
+                  <a:srgbClr val="EFE8D6"/>
                 </a:solidFill>
                 <a:latin typeface="Georgia" pitchFamily="34" charset="0"/>
                 <a:ea typeface="Georgia" pitchFamily="34" charset="-122"/>
                 <a:cs typeface="Georgia" pitchFamily="34" charset="-120"/>
               </a:rPr>
-              <a:t>Sai tên</a:t>
+              <a:t>Lead-3</a:t>
             </a:r>
             <a:endParaRPr lang="en-US" sz="2000" dirty="0"/>
           </a:p>
@@ -5717,92 +7220,14 @@
       </p:sp>
       <p:sp>
         <p:nvSpPr>
-          <p:cNvPr id="8" name="Text 6"/>
-          <p:cNvSpPr/>
-          <p:nvPr/>
-        </p:nvSpPr>
-        <p:spPr>
-          <a:xfrm>
-            <a:off x="685800" y="2240280"/>
-            <a:ext cx="3200400" cy="1554480"/>
-          </a:xfrm>
-          <a:prstGeom prst="rect">
-            <a:avLst/>
-          </a:prstGeom>
-          <a:noFill/>
-          <a:ln/>
-        </p:spPr>
-        <p:txBody>
-          <a:bodyPr wrap="square" lIns="0" tIns="0" rIns="0" bIns="0" rtlCol="0" anchor="ctr"/>
-          <a:lstStyle/>
-          <a:p>
-            <a:pPr indent="0" marL="0">
-              <a:buNone/>
-            </a:pPr>
-            <a:r>
-              <a:rPr lang="en-US" sz="1500" dirty="0">
-                <a:solidFill>
-                  <a:srgbClr val="2B2B2B"/>
-                </a:solidFill>
-                <a:latin typeface="Calibri" pitchFamily="34" charset="0"/>
-                <a:ea typeface="Calibri" pitchFamily="34" charset="-122"/>
-                <a:cs typeface="Calibri" pitchFamily="34" charset="-120"/>
-              </a:rPr>
-              <a:t>Gold: Hồ Xuân Huy, 12 năm tù.</a:t>
-            </a:r>
-            <a:endParaRPr lang="en-US" sz="1500" dirty="0"/>
-          </a:p>
-        </p:txBody>
-      </p:sp>
-      <p:sp>
-        <p:nvSpPr>
-          <p:cNvPr id="9" name="Text 7"/>
-          <p:cNvSpPr/>
-          <p:nvPr/>
-        </p:nvSpPr>
-        <p:spPr>
-          <a:xfrm>
-            <a:off x="685800" y="3931920"/>
-            <a:ext cx="3200400" cy="1645920"/>
-          </a:xfrm>
-          <a:prstGeom prst="rect">
-            <a:avLst/>
-          </a:prstGeom>
-          <a:noFill/>
-          <a:ln/>
-        </p:spPr>
-        <p:txBody>
-          <a:bodyPr wrap="square" lIns="0" tIns="0" rIns="0" bIns="0" rtlCol="0" anchor="ctr"/>
-          <a:lstStyle/>
-          <a:p>
-            <a:pPr indent="0" marL="0">
-              <a:buNone/>
-            </a:pPr>
-            <a:r>
-              <a:rPr lang="en-US" sz="1500" dirty="0">
-                <a:solidFill>
-                  <a:srgbClr val="B8432A"/>
-                </a:solidFill>
-                <a:latin typeface="Calibri" pitchFamily="34" charset="0"/>
-                <a:ea typeface="Calibri" pitchFamily="34" charset="-122"/>
-                <a:cs typeface="Calibri" pitchFamily="34" charset="-120"/>
-              </a:rPr>
-              <a:t>ViT5: Bùi Quang Huy / Vũ nhôm, 3,2 tỷ.</a:t>
-            </a:r>
-            <a:endParaRPr lang="en-US" sz="1500" dirty="0"/>
-          </a:p>
-        </p:txBody>
-      </p:sp>
-      <p:sp>
-        <p:nvSpPr>
-          <p:cNvPr id="10" name="Shape 8"/>
-          <p:cNvSpPr/>
-          <p:nvPr/>
-        </p:nvSpPr>
-        <p:spPr>
-          <a:xfrm>
-            <a:off x="4297680" y="1051560"/>
-            <a:ext cx="3657600" cy="4892040"/>
+          <p:cNvPr id="12" name="Shape 10"/>
+          <p:cNvSpPr/>
+          <p:nvPr/>
+        </p:nvSpPr>
+        <p:spPr>
+          <a:xfrm>
+            <a:off x="2697480" y="2880360"/>
+            <a:ext cx="8961120" cy="1188720"/>
           </a:xfrm>
           <a:prstGeom prst="rect">
             <a:avLst/>
@@ -5820,14 +7245,14 @@
       </p:sp>
       <p:sp>
         <p:nvSpPr>
-          <p:cNvPr id="11" name="Text 9"/>
-          <p:cNvSpPr/>
-          <p:nvPr/>
-        </p:nvSpPr>
-        <p:spPr>
-          <a:xfrm>
-            <a:off x="4526280" y="1234440"/>
-            <a:ext cx="3200400" cy="320040"/>
+          <p:cNvPr id="13" name="Text 11"/>
+          <p:cNvSpPr/>
+          <p:nvPr/>
+        </p:nvSpPr>
+        <p:spPr>
+          <a:xfrm>
+            <a:off x="2926080" y="3154680"/>
+            <a:ext cx="8549640" cy="640080"/>
           </a:xfrm>
           <a:prstGeom prst="rect">
             <a:avLst/>
@@ -5843,30 +7268,50 @@
               <a:buNone/>
             </a:pPr>
             <a:r>
-              <a:rPr lang="en-US" sz="1400" dirty="0">
-                <a:solidFill>
-                  <a:srgbClr val="B8432A"/>
-                </a:solidFill>
-                <a:latin typeface="Consolas" pitchFamily="34" charset="0"/>
-                <a:ea typeface="Consolas" pitchFamily="34" charset="-122"/>
-                <a:cs typeface="Consolas" pitchFamily="34" charset="-120"/>
-              </a:rPr>
-              <a:t>000011</a:t>
-            </a:r>
-            <a:endParaRPr lang="en-US" sz="1400" dirty="0"/>
-          </a:p>
-        </p:txBody>
-      </p:sp>
-      <p:sp>
-        <p:nvSpPr>
-          <p:cNvPr id="12" name="Text 10"/>
-          <p:cNvSpPr/>
-          <p:nvPr/>
-        </p:nvSpPr>
-        <p:spPr>
-          <a:xfrm>
-            <a:off x="4526280" y="1600200"/>
-            <a:ext cx="3200400" cy="411480"/>
+              <a:rPr lang="en-US" sz="1600" dirty="0">
+                <a:solidFill>
+                  <a:srgbClr val="2B2B2B"/>
+                </a:solidFill>
+                <a:latin typeface="Calibri" pitchFamily="34" charset="0"/>
+                <a:ea typeface="Calibri" pitchFamily="34" charset="-122"/>
+                <a:cs typeface="Calibri" pitchFamily="34" charset="-120"/>
+              </a:rPr>
+              <a:t>Ít bịa (câu lấy từ bài). Hay lệch gold vì gold là sapo/kết luận.</a:t>
+            </a:r>
+            <a:endParaRPr lang="en-US" sz="1600" dirty="0"/>
+          </a:p>
+        </p:txBody>
+      </p:sp>
+      <p:sp>
+        <p:nvSpPr>
+          <p:cNvPr id="14" name="Shape 12"/>
+          <p:cNvSpPr/>
+          <p:nvPr/>
+        </p:nvSpPr>
+        <p:spPr>
+          <a:xfrm>
+            <a:off x="502920" y="4206240"/>
+            <a:ext cx="2194560" cy="1188720"/>
+          </a:xfrm>
+          <a:prstGeom prst="rect">
+            <a:avLst/>
+          </a:prstGeom>
+          <a:solidFill>
+            <a:srgbClr val="0B0B0B"/>
+          </a:solidFill>
+          <a:ln/>
+        </p:spPr>
+      </p:sp>
+      <p:sp>
+        <p:nvSpPr>
+          <p:cNvPr id="15" name="Text 13"/>
+          <p:cNvSpPr/>
+          <p:nvPr/>
+        </p:nvSpPr>
+        <p:spPr>
+          <a:xfrm>
+            <a:off x="640080" y="4572000"/>
+            <a:ext cx="1920240" cy="457200"/>
           </a:xfrm>
           <a:prstGeom prst="rect">
             <a:avLst/>
@@ -5884,13 +7329,13 @@
             <a:r>
               <a:rPr lang="en-US" sz="2000" dirty="0">
                 <a:solidFill>
-                  <a:srgbClr val="1A1A1A"/>
+                  <a:srgbClr val="EFE8D6"/>
                 </a:solidFill>
                 <a:latin typeface="Georgia" pitchFamily="34" charset="0"/>
                 <a:ea typeface="Georgia" pitchFamily="34" charset="-122"/>
                 <a:cs typeface="Georgia" pitchFamily="34" charset="-120"/>
               </a:rPr>
-              <a:t>Bịa đối tượng</a:t>
+              <a:t>TextRank</a:t>
             </a:r>
             <a:endParaRPr lang="en-US" sz="2000" dirty="0"/>
           </a:p>
@@ -5898,92 +7343,14 @@
       </p:sp>
       <p:sp>
         <p:nvSpPr>
-          <p:cNvPr id="13" name="Text 11"/>
-          <p:cNvSpPr/>
-          <p:nvPr/>
-        </p:nvSpPr>
-        <p:spPr>
-          <a:xfrm>
-            <a:off x="4526280" y="2240280"/>
-            <a:ext cx="3200400" cy="1554480"/>
-          </a:xfrm>
-          <a:prstGeom prst="rect">
-            <a:avLst/>
-          </a:prstGeom>
-          <a:noFill/>
-          <a:ln/>
-        </p:spPr>
-        <p:txBody>
-          <a:bodyPr wrap="square" lIns="0" tIns="0" rIns="0" bIns="0" rtlCol="0" anchor="ctr"/>
-          <a:lstStyle/>
-          <a:p>
-            <a:pPr indent="0" marL="0">
-              <a:buNone/>
-            </a:pPr>
-            <a:r>
-              <a:rPr lang="en-US" sz="1500" dirty="0">
-                <a:solidFill>
-                  <a:srgbClr val="2B2B2B"/>
-                </a:solidFill>
-                <a:latin typeface="Calibri" pitchFamily="34" charset="0"/>
-                <a:ea typeface="Calibri" pitchFamily="34" charset="-122"/>
-                <a:cs typeface="Calibri" pitchFamily="34" charset="-120"/>
-              </a:rPr>
-              <a:t>Gold: trộm máy ủi, bán, mua dây chuyền.</a:t>
-            </a:r>
-            <a:endParaRPr lang="en-US" sz="1500" dirty="0"/>
-          </a:p>
-        </p:txBody>
-      </p:sp>
-      <p:sp>
-        <p:nvSpPr>
-          <p:cNvPr id="14" name="Text 12"/>
-          <p:cNvSpPr/>
-          <p:nvPr/>
-        </p:nvSpPr>
-        <p:spPr>
-          <a:xfrm>
-            <a:off x="4526280" y="3931920"/>
-            <a:ext cx="3200400" cy="1645920"/>
-          </a:xfrm>
-          <a:prstGeom prst="rect">
-            <a:avLst/>
-          </a:prstGeom>
-          <a:noFill/>
-          <a:ln/>
-        </p:spPr>
-        <p:txBody>
-          <a:bodyPr wrap="square" lIns="0" tIns="0" rIns="0" bIns="0" rtlCol="0" anchor="ctr"/>
-          <a:lstStyle/>
-          <a:p>
-            <a:pPr indent="0" marL="0">
-              <a:buNone/>
-            </a:pPr>
-            <a:r>
-              <a:rPr lang="en-US" sz="1500" dirty="0">
-                <a:solidFill>
-                  <a:srgbClr val="B8432A"/>
-                </a:solidFill>
-                <a:latin typeface="Calibri" pitchFamily="34" charset="0"/>
-                <a:ea typeface="Calibri" pitchFamily="34" charset="-122"/>
-                <a:cs typeface="Calibri" pitchFamily="34" charset="-120"/>
-              </a:rPr>
-              <a:t>ViT5: “xe bồn”, thuê sửa chữa.</a:t>
-            </a:r>
-            <a:endParaRPr lang="en-US" sz="1500" dirty="0"/>
-          </a:p>
-        </p:txBody>
-      </p:sp>
-      <p:sp>
-        <p:nvSpPr>
-          <p:cNvPr id="15" name="Shape 13"/>
-          <p:cNvSpPr/>
-          <p:nvPr/>
-        </p:nvSpPr>
-        <p:spPr>
-          <a:xfrm>
-            <a:off x="8138160" y="1051560"/>
-            <a:ext cx="3657600" cy="4892040"/>
+          <p:cNvPr id="16" name="Shape 14"/>
+          <p:cNvSpPr/>
+          <p:nvPr/>
+        </p:nvSpPr>
+        <p:spPr>
+          <a:xfrm>
+            <a:off x="2697480" y="4206240"/>
+            <a:ext cx="8961120" cy="1188720"/>
           </a:xfrm>
           <a:prstGeom prst="rect">
             <a:avLst/>
@@ -6001,14 +7368,14 @@
       </p:sp>
       <p:sp>
         <p:nvSpPr>
-          <p:cNvPr id="16" name="Text 14"/>
-          <p:cNvSpPr/>
-          <p:nvPr/>
-        </p:nvSpPr>
-        <p:spPr>
-          <a:xfrm>
-            <a:off x="8366760" y="1234440"/>
-            <a:ext cx="3200400" cy="320040"/>
+          <p:cNvPr id="17" name="Text 15"/>
+          <p:cNvSpPr/>
+          <p:nvPr/>
+        </p:nvSpPr>
+        <p:spPr>
+          <a:xfrm>
+            <a:off x="2926080" y="4480560"/>
+            <a:ext cx="8549640" cy="640080"/>
           </a:xfrm>
           <a:prstGeom prst="rect">
             <a:avLst/>
@@ -6024,85 +7391,7 @@
               <a:buNone/>
             </a:pPr>
             <a:r>
-              <a:rPr lang="en-US" sz="1400" dirty="0">
-                <a:solidFill>
-                  <a:srgbClr val="B8432A"/>
-                </a:solidFill>
-                <a:latin typeface="Consolas" pitchFamily="34" charset="0"/>
-                <a:ea typeface="Consolas" pitchFamily="34" charset="-122"/>
-                <a:cs typeface="Consolas" pitchFamily="34" charset="-120"/>
-              </a:rPr>
-              <a:t>000036</a:t>
-            </a:r>
-            <a:endParaRPr lang="en-US" sz="1400" dirty="0"/>
-          </a:p>
-        </p:txBody>
-      </p:sp>
-      <p:sp>
-        <p:nvSpPr>
-          <p:cNvPr id="17" name="Text 15"/>
-          <p:cNvSpPr/>
-          <p:nvPr/>
-        </p:nvSpPr>
-        <p:spPr>
-          <a:xfrm>
-            <a:off x="8366760" y="1600200"/>
-            <a:ext cx="3200400" cy="411480"/>
-          </a:xfrm>
-          <a:prstGeom prst="rect">
-            <a:avLst/>
-          </a:prstGeom>
-          <a:noFill/>
-          <a:ln/>
-        </p:spPr>
-        <p:txBody>
-          <a:bodyPr wrap="square" lIns="0" tIns="0" rIns="0" bIns="0" rtlCol="0" anchor="ctr"/>
-          <a:lstStyle/>
-          <a:p>
-            <a:pPr indent="0" marL="0">
-              <a:buNone/>
-            </a:pPr>
-            <a:r>
-              <a:rPr lang="en-US" sz="2000" dirty="0">
-                <a:solidFill>
-                  <a:srgbClr val="1A1A1A"/>
-                </a:solidFill>
-                <a:latin typeface="Georgia" pitchFamily="34" charset="0"/>
-                <a:ea typeface="Georgia" pitchFamily="34" charset="-122"/>
-                <a:cs typeface="Georgia" pitchFamily="34" charset="-120"/>
-              </a:rPr>
-              <a:t>Gán nhầm lời Dương</a:t>
-            </a:r>
-            <a:endParaRPr lang="en-US" sz="2000" dirty="0"/>
-          </a:p>
-        </p:txBody>
-      </p:sp>
-      <p:sp>
-        <p:nvSpPr>
-          <p:cNvPr id="18" name="Text 16"/>
-          <p:cNvSpPr/>
-          <p:nvPr/>
-        </p:nvSpPr>
-        <p:spPr>
-          <a:xfrm>
-            <a:off x="8366760" y="2240280"/>
-            <a:ext cx="3200400" cy="1554480"/>
-          </a:xfrm>
-          <a:prstGeom prst="rect">
-            <a:avLst/>
-          </a:prstGeom>
-          <a:noFill/>
-          <a:ln/>
-        </p:spPr>
-        <p:txBody>
-          <a:bodyPr wrap="square" lIns="0" tIns="0" rIns="0" bIns="0" rtlCol="0" anchor="ctr"/>
-          <a:lstStyle/>
-          <a:p>
-            <a:pPr indent="0" marL="0">
-              <a:buNone/>
-            </a:pPr>
-            <a:r>
-              <a:rPr lang="en-US" sz="1500" dirty="0">
+              <a:rPr lang="en-US" sz="1600" dirty="0">
                 <a:solidFill>
                   <a:srgbClr val="2B2B2B"/>
                 </a:solidFill>
@@ -6110,22 +7399,22 @@
                 <a:ea typeface="Calibri" pitchFamily="34" charset="-122"/>
                 <a:cs typeface="Calibri" pitchFamily="34" charset="-120"/>
               </a:rPr>
-              <a:t>Gold: Vĩnh chối Rolex 7.000 USD.</a:t>
-            </a:r>
-            <a:endParaRPr lang="en-US" sz="1500" dirty="0"/>
-          </a:p>
-        </p:txBody>
-      </p:sp>
-      <p:sp>
-        <p:nvSpPr>
-          <p:cNvPr id="19" name="Text 17"/>
-          <p:cNvSpPr/>
-          <p:nvPr/>
-        </p:nvSpPr>
-        <p:spPr>
-          <a:xfrm>
-            <a:off x="8366760" y="3931920"/>
-            <a:ext cx="3200400" cy="1645920"/>
+              <a:t>Đôi khi nhảy đoạn hoặc trộn nhiều tin trong bài tổng hợp 24h.</a:t>
+            </a:r>
+            <a:endParaRPr lang="en-US" sz="1600" dirty="0"/>
+          </a:p>
+        </p:txBody>
+      </p:sp>
+      <p:sp>
+        <p:nvSpPr>
+          <p:cNvPr id="18" name="Text 16"/>
+          <p:cNvSpPr/>
+          <p:nvPr/>
+        </p:nvSpPr>
+        <p:spPr>
+          <a:xfrm>
+            <a:off x="502920" y="6510528"/>
+            <a:ext cx="8229600" cy="201168"/>
           </a:xfrm>
           <a:prstGeom prst="rect">
             <a:avLst/>
@@ -6141,53 +7430,14 @@
               <a:buNone/>
             </a:pPr>
             <a:r>
-              <a:rPr lang="en-US" sz="1500" dirty="0">
-                <a:solidFill>
-                  <a:srgbClr val="B8432A"/>
+              <a:rPr lang="en-US" sz="1000" dirty="0">
+                <a:solidFill>
+                  <a:srgbClr val="B5AFA0"/>
                 </a:solidFill>
                 <a:latin typeface="Calibri" pitchFamily="34" charset="0"/>
                 <a:ea typeface="Calibri" pitchFamily="34" charset="-122"/>
                 <a:cs typeface="Calibri" pitchFamily="34" charset="-120"/>
               </a:rPr>
-              <a:t>ViT5: Vĩnh “khai cho ông Vĩnh” 27 tỷ.</a:t>
-            </a:r>
-            <a:endParaRPr lang="en-US" sz="1500" dirty="0"/>
-          </a:p>
-        </p:txBody>
-      </p:sp>
-      <p:sp>
-        <p:nvSpPr>
-          <p:cNvPr id="20" name="Text 18"/>
-          <p:cNvSpPr/>
-          <p:nvPr/>
-        </p:nvSpPr>
-        <p:spPr>
-          <a:xfrm>
-            <a:off x="502920" y="6510528"/>
-            <a:ext cx="8229600" cy="201168"/>
-          </a:xfrm>
-          <a:prstGeom prst="rect">
-            <a:avLst/>
-          </a:prstGeom>
-          <a:noFill/>
-          <a:ln/>
-        </p:spPr>
-        <p:txBody>
-          <a:bodyPr wrap="square" lIns="0" tIns="0" rIns="0" bIns="0" rtlCol="0" anchor="ctr"/>
-          <a:lstStyle/>
-          <a:p>
-            <a:pPr indent="0" marL="0">
-              <a:buNone/>
-            </a:pPr>
-            <a:r>
-              <a:rPr lang="en-US" sz="1000" dirty="0">
-                <a:solidFill>
-                  <a:srgbClr val="B5AFA0"/>
-                </a:solidFill>
-                <a:latin typeface="Calibri" pitchFamily="34" charset="0"/>
-                <a:ea typeface="Calibri" pitchFamily="34" charset="-122"/>
-                <a:cs typeface="Calibri" pitchFamily="34" charset="-120"/>
-              </a:rPr>
               <a:t>CS221 · UIT  ·  Vietnews extractive vs abstractive</a:t>
             </a:r>
             <a:endParaRPr lang="en-US" sz="1000" dirty="0"/>
@@ -6196,7 +7446,7 @@
       </p:sp>
       <p:sp>
         <p:nvSpPr>
-          <p:cNvPr id="21" name="Text 19"/>
+          <p:cNvPr id="19" name="Text 17"/>
           <p:cNvSpPr/>
           <p:nvPr/>
         </p:nvSpPr>
@@ -6298,7 +7548,7 @@
                 <a:ea typeface="Calibri" pitchFamily="34" charset="-122"/>
                 <a:cs typeface="Calibri" pitchFamily="34" charset="-120"/>
               </a:rPr>
-              <a:t>13  DEMO</a:t>
+              <a:t>12  BA VÍ DỤ</a:t>
             </a:r>
             <a:endParaRPr lang="en-US" sz="1100" dirty="0"/>
           </a:p>
@@ -6337,7 +7587,7 @@
                 <a:ea typeface="Calibri" pitchFamily="34" charset="-122"/>
                 <a:cs typeface="Calibri" pitchFamily="34" charset="-120"/>
               </a:rPr>
-              <a:t>Không cần GPU lúc bảo vệ</a:t>
+              <a:t>Đối chiếu gold</a:t>
             </a:r>
             <a:endParaRPr lang="en-US" sz="1200" dirty="0"/>
           </a:p>
@@ -6368,53 +7618,14 @@
       </p:sp>
       <p:sp>
         <p:nvSpPr>
-          <p:cNvPr id="5" name="Text 3"/>
-          <p:cNvSpPr/>
-          <p:nvPr/>
-        </p:nvSpPr>
-        <p:spPr>
-          <a:xfrm>
-            <a:off x="502920" y="914400"/>
-            <a:ext cx="10972800" cy="411480"/>
-          </a:xfrm>
-          <a:prstGeom prst="rect">
-            <a:avLst/>
-          </a:prstGeom>
-          <a:noFill/>
-          <a:ln/>
-        </p:spPr>
-        <p:txBody>
-          <a:bodyPr wrap="square" lIns="0" tIns="0" rIns="0" bIns="0" rtlCol="0" anchor="ctr"/>
-          <a:lstStyle/>
-          <a:p>
-            <a:pPr indent="0" marL="0">
-              <a:buNone/>
-            </a:pPr>
-            <a:r>
-              <a:rPr lang="en-US" sz="2600" dirty="0">
-                <a:solidFill>
-                  <a:srgbClr val="1A1A1A"/>
-                </a:solidFill>
-                <a:latin typeface="Georgia" pitchFamily="34" charset="0"/>
-                <a:ea typeface="Georgia" pitchFamily="34" charset="-122"/>
-                <a:cs typeface="Georgia" pitchFamily="34" charset="-120"/>
-              </a:rPr>
-              <a:t>Ba cột trên cùng một bài test.</a:t>
-            </a:r>
-            <a:endParaRPr lang="en-US" sz="2600" dirty="0"/>
-          </a:p>
-        </p:txBody>
-      </p:sp>
-      <p:sp>
-        <p:nvSpPr>
-          <p:cNvPr id="6" name="Shape 4"/>
-          <p:cNvSpPr/>
-          <p:nvPr/>
-        </p:nvSpPr>
-        <p:spPr>
-          <a:xfrm>
-            <a:off x="502920" y="1554480"/>
-            <a:ext cx="3611880" cy="3200400"/>
+          <p:cNvPr id="5" name="Shape 3"/>
+          <p:cNvSpPr/>
+          <p:nvPr/>
+        </p:nvSpPr>
+        <p:spPr>
+          <a:xfrm>
+            <a:off x="457200" y="1051560"/>
+            <a:ext cx="3657600" cy="4892040"/>
           </a:xfrm>
           <a:prstGeom prst="rect">
             <a:avLst/>
@@ -6432,14 +7643,53 @@
       </p:sp>
       <p:sp>
         <p:nvSpPr>
+          <p:cNvPr id="6" name="Text 4"/>
+          <p:cNvSpPr/>
+          <p:nvPr/>
+        </p:nvSpPr>
+        <p:spPr>
+          <a:xfrm>
+            <a:off x="685800" y="1234440"/>
+            <a:ext cx="3200400" cy="320040"/>
+          </a:xfrm>
+          <a:prstGeom prst="rect">
+            <a:avLst/>
+          </a:prstGeom>
+          <a:noFill/>
+          <a:ln/>
+        </p:spPr>
+        <p:txBody>
+          <a:bodyPr wrap="square" lIns="0" tIns="0" rIns="0" bIns="0" rtlCol="0" anchor="ctr"/>
+          <a:lstStyle/>
+          <a:p>
+            <a:pPr indent="0" marL="0">
+              <a:buNone/>
+            </a:pPr>
+            <a:r>
+              <a:rPr lang="en-US" sz="1400" dirty="0">
+                <a:solidFill>
+                  <a:srgbClr val="B8432A"/>
+                </a:solidFill>
+                <a:latin typeface="Consolas" pitchFamily="34" charset="0"/>
+                <a:ea typeface="Consolas" pitchFamily="34" charset="-122"/>
+                <a:cs typeface="Consolas" pitchFamily="34" charset="-120"/>
+              </a:rPr>
+              <a:t>000001</a:t>
+            </a:r>
+            <a:endParaRPr lang="en-US" sz="1400" dirty="0"/>
+          </a:p>
+        </p:txBody>
+      </p:sp>
+      <p:sp>
+        <p:nvSpPr>
           <p:cNvPr id="7" name="Text 5"/>
           <p:cNvSpPr/>
           <p:nvPr/>
         </p:nvSpPr>
         <p:spPr>
           <a:xfrm>
-            <a:off x="731520" y="1783080"/>
-            <a:ext cx="3154680" cy="457200"/>
+            <a:off x="685800" y="1600200"/>
+            <a:ext cx="3200400" cy="411480"/>
           </a:xfrm>
           <a:prstGeom prst="rect">
             <a:avLst/>
@@ -6455,7 +7705,7 @@
               <a:buNone/>
             </a:pPr>
             <a:r>
-              <a:rPr lang="en-US" sz="2200" dirty="0">
+              <a:rPr lang="en-US" sz="2000" dirty="0">
                 <a:solidFill>
                   <a:srgbClr val="1A1A1A"/>
                 </a:solidFill>
@@ -6463,9 +7713,9 @@
                 <a:ea typeface="Georgia" pitchFamily="34" charset="-122"/>
                 <a:cs typeface="Georgia" pitchFamily="34" charset="-120"/>
               </a:rPr>
-              <a:t>Local</a:t>
-            </a:r>
-            <a:endParaRPr lang="en-US" sz="2200" dirty="0"/>
+              <a:t>Sai tên</a:t>
+            </a:r>
+            <a:endParaRPr lang="en-US" sz="2000" dirty="0"/>
           </a:p>
         </p:txBody>
       </p:sp>
@@ -6477,8 +7727,8 @@
         </p:nvSpPr>
         <p:spPr>
           <a:xfrm>
-            <a:off x="731520" y="2377440"/>
-            <a:ext cx="3154680" cy="2011680"/>
+            <a:off x="685800" y="2240280"/>
+            <a:ext cx="3200400" cy="1554480"/>
           </a:xfrm>
           <a:prstGeom prst="rect">
             <a:avLst/>
@@ -6498,14 +7748,36 @@
                 <a:solidFill>
                   <a:srgbClr val="2B2B2B"/>
                 </a:solidFill>
-                <a:latin typeface="Consolas" pitchFamily="34" charset="0"/>
-                <a:ea typeface="Consolas" pitchFamily="34" charset="-122"/>
-                <a:cs typeface="Consolas" pitchFamily="34" charset="-120"/>
-              </a:rPr>
-              <a:t>python app/demo.py</a:t>
+                <a:latin typeface="Calibri" pitchFamily="34" charset="0"/>
+                <a:ea typeface="Calibri" pitchFamily="34" charset="-122"/>
+                <a:cs typeface="Calibri" pitchFamily="34" charset="-120"/>
+              </a:rPr>
+              <a:t>Gold: Hồ Xuân Huy, 12 năm tù.</a:t>
             </a:r>
             <a:endParaRPr lang="en-US" sz="1500" dirty="0"/>
           </a:p>
+        </p:txBody>
+      </p:sp>
+      <p:sp>
+        <p:nvSpPr>
+          <p:cNvPr id="9" name="Text 7"/>
+          <p:cNvSpPr/>
+          <p:nvPr/>
+        </p:nvSpPr>
+        <p:spPr>
+          <a:xfrm>
+            <a:off x="685800" y="3931920"/>
+            <a:ext cx="3200400" cy="1645920"/>
+          </a:xfrm>
+          <a:prstGeom prst="rect">
+            <a:avLst/>
+          </a:prstGeom>
+          <a:noFill/>
+          <a:ln/>
+        </p:spPr>
+        <p:txBody>
+          <a:bodyPr wrap="square" lIns="0" tIns="0" rIns="0" bIns="0" rtlCol="0" anchor="ctr"/>
+          <a:lstStyle/>
           <a:p>
             <a:pPr indent="0" marL="0">
               <a:buNone/>
@@ -6513,13 +7785,13 @@
             <a:r>
               <a:rPr lang="en-US" sz="1500" dirty="0">
                 <a:solidFill>
-                  <a:srgbClr val="2B2B2B"/>
-                </a:solidFill>
-                <a:latin typeface="Consolas" pitchFamily="34" charset="0"/>
-                <a:ea typeface="Consolas" pitchFamily="34" charset="-122"/>
-                <a:cs typeface="Consolas" pitchFamily="34" charset="-120"/>
-              </a:rPr>
-              <a:t>http://127.0.0.1:7860</a:t>
+                  <a:srgbClr val="B8432A"/>
+                </a:solidFill>
+                <a:latin typeface="Calibri" pitchFamily="34" charset="0"/>
+                <a:ea typeface="Calibri" pitchFamily="34" charset="-122"/>
+                <a:cs typeface="Calibri" pitchFamily="34" charset="-120"/>
+              </a:rPr>
+              <a:t>ViT5: Bùi Quang Huy / Vũ nhôm, 3,2 tỷ.</a:t>
             </a:r>
             <a:endParaRPr lang="en-US" sz="1500" dirty="0"/>
           </a:p>
@@ -6527,14 +7799,14 @@
       </p:sp>
       <p:sp>
         <p:nvSpPr>
-          <p:cNvPr id="9" name="Shape 7"/>
-          <p:cNvSpPr/>
-          <p:nvPr/>
-        </p:nvSpPr>
-        <p:spPr>
-          <a:xfrm>
-            <a:off x="4297680" y="1554480"/>
-            <a:ext cx="3611880" cy="3200400"/>
+          <p:cNvPr id="10" name="Shape 8"/>
+          <p:cNvSpPr/>
+          <p:nvPr/>
+        </p:nvSpPr>
+        <p:spPr>
+          <a:xfrm>
+            <a:off x="4297680" y="1051560"/>
+            <a:ext cx="3657600" cy="4892040"/>
           </a:xfrm>
           <a:prstGeom prst="rect">
             <a:avLst/>
@@ -6552,14 +7824,14 @@
       </p:sp>
       <p:sp>
         <p:nvSpPr>
-          <p:cNvPr id="10" name="Text 8"/>
-          <p:cNvSpPr/>
-          <p:nvPr/>
-        </p:nvSpPr>
-        <p:spPr>
-          <a:xfrm>
-            <a:off x="4526280" y="1783080"/>
-            <a:ext cx="3154680" cy="457200"/>
+          <p:cNvPr id="11" name="Text 9"/>
+          <p:cNvSpPr/>
+          <p:nvPr/>
+        </p:nvSpPr>
+        <p:spPr>
+          <a:xfrm>
+            <a:off x="4526280" y="1234440"/>
+            <a:ext cx="3200400" cy="320040"/>
           </a:xfrm>
           <a:prstGeom prst="rect">
             <a:avLst/>
@@ -6575,7 +7847,46 @@
               <a:buNone/>
             </a:pPr>
             <a:r>
-              <a:rPr lang="en-US" sz="2200" dirty="0">
+              <a:rPr lang="en-US" sz="1400" dirty="0">
+                <a:solidFill>
+                  <a:srgbClr val="B8432A"/>
+                </a:solidFill>
+                <a:latin typeface="Consolas" pitchFamily="34" charset="0"/>
+                <a:ea typeface="Consolas" pitchFamily="34" charset="-122"/>
+                <a:cs typeface="Consolas" pitchFamily="34" charset="-120"/>
+              </a:rPr>
+              <a:t>000011</a:t>
+            </a:r>
+            <a:endParaRPr lang="en-US" sz="1400" dirty="0"/>
+          </a:p>
+        </p:txBody>
+      </p:sp>
+      <p:sp>
+        <p:nvSpPr>
+          <p:cNvPr id="12" name="Text 10"/>
+          <p:cNvSpPr/>
+          <p:nvPr/>
+        </p:nvSpPr>
+        <p:spPr>
+          <a:xfrm>
+            <a:off x="4526280" y="1600200"/>
+            <a:ext cx="3200400" cy="411480"/>
+          </a:xfrm>
+          <a:prstGeom prst="rect">
+            <a:avLst/>
+          </a:prstGeom>
+          <a:noFill/>
+          <a:ln/>
+        </p:spPr>
+        <p:txBody>
+          <a:bodyPr wrap="square" lIns="0" tIns="0" rIns="0" bIns="0" rtlCol="0" anchor="ctr"/>
+          <a:lstStyle/>
+          <a:p>
+            <a:pPr indent="0" marL="0">
+              <a:buNone/>
+            </a:pPr>
+            <a:r>
+              <a:rPr lang="en-US" sz="2000" dirty="0">
                 <a:solidFill>
                   <a:srgbClr val="1A1A1A"/>
                 </a:solidFill>
@@ -6583,22 +7894,22 @@
                 <a:ea typeface="Georgia" pitchFamily="34" charset="-122"/>
                 <a:cs typeface="Georgia" pitchFamily="34" charset="-120"/>
               </a:rPr>
-              <a:t>Docker</a:t>
-            </a:r>
-            <a:endParaRPr lang="en-US" sz="2200" dirty="0"/>
-          </a:p>
-        </p:txBody>
-      </p:sp>
-      <p:sp>
-        <p:nvSpPr>
-          <p:cNvPr id="11" name="Text 9"/>
-          <p:cNvSpPr/>
-          <p:nvPr/>
-        </p:nvSpPr>
-        <p:spPr>
-          <a:xfrm>
-            <a:off x="4526280" y="2377440"/>
-            <a:ext cx="3154680" cy="2011680"/>
+              <a:t>Bịa đối tượng</a:t>
+            </a:r>
+            <a:endParaRPr lang="en-US" sz="2000" dirty="0"/>
+          </a:p>
+        </p:txBody>
+      </p:sp>
+      <p:sp>
+        <p:nvSpPr>
+          <p:cNvPr id="13" name="Text 11"/>
+          <p:cNvSpPr/>
+          <p:nvPr/>
+        </p:nvSpPr>
+        <p:spPr>
+          <a:xfrm>
+            <a:off x="4526280" y="2240280"/>
+            <a:ext cx="3200400" cy="1554480"/>
           </a:xfrm>
           <a:prstGeom prst="rect">
             <a:avLst/>
@@ -6618,14 +7929,36 @@
                 <a:solidFill>
                   <a:srgbClr val="2B2B2B"/>
                 </a:solidFill>
-                <a:latin typeface="Consolas" pitchFamily="34" charset="0"/>
-                <a:ea typeface="Consolas" pitchFamily="34" charset="-122"/>
-                <a:cs typeface="Consolas" pitchFamily="34" charset="-120"/>
-              </a:rPr>
-              <a:t>docker start vietnews-demo</a:t>
+                <a:latin typeface="Calibri" pitchFamily="34" charset="0"/>
+                <a:ea typeface="Calibri" pitchFamily="34" charset="-122"/>
+                <a:cs typeface="Calibri" pitchFamily="34" charset="-120"/>
+              </a:rPr>
+              <a:t>Gold: trộm máy ủi, bán, mua dây chuyền.</a:t>
             </a:r>
             <a:endParaRPr lang="en-US" sz="1500" dirty="0"/>
           </a:p>
+        </p:txBody>
+      </p:sp>
+      <p:sp>
+        <p:nvSpPr>
+          <p:cNvPr id="14" name="Text 12"/>
+          <p:cNvSpPr/>
+          <p:nvPr/>
+        </p:nvSpPr>
+        <p:spPr>
+          <a:xfrm>
+            <a:off x="4526280" y="3931920"/>
+            <a:ext cx="3200400" cy="1645920"/>
+          </a:xfrm>
+          <a:prstGeom prst="rect">
+            <a:avLst/>
+          </a:prstGeom>
+          <a:noFill/>
+          <a:ln/>
+        </p:spPr>
+        <p:txBody>
+          <a:bodyPr wrap="square" lIns="0" tIns="0" rIns="0" bIns="0" rtlCol="0" anchor="ctr"/>
+          <a:lstStyle/>
           <a:p>
             <a:pPr indent="0" marL="0">
               <a:buNone/>
@@ -6633,13 +7966,13 @@
             <a:r>
               <a:rPr lang="en-US" sz="1500" dirty="0">
                 <a:solidFill>
-                  <a:srgbClr val="2B2B2B"/>
-                </a:solidFill>
-                <a:latin typeface="Consolas" pitchFamily="34" charset="0"/>
-                <a:ea typeface="Consolas" pitchFamily="34" charset="-122"/>
-                <a:cs typeface="Consolas" pitchFamily="34" charset="-120"/>
-              </a:rPr>
-              <a:t>Cùng cổng 7860</a:t>
+                  <a:srgbClr val="B8432A"/>
+                </a:solidFill>
+                <a:latin typeface="Calibri" pitchFamily="34" charset="0"/>
+                <a:ea typeface="Calibri" pitchFamily="34" charset="-122"/>
+                <a:cs typeface="Calibri" pitchFamily="34" charset="-120"/>
+              </a:rPr>
+              <a:t>ViT5: “xe bồn”, thuê sửa chữa.</a:t>
             </a:r>
             <a:endParaRPr lang="en-US" sz="1500" dirty="0"/>
           </a:p>
@@ -6647,14 +7980,14 @@
       </p:sp>
       <p:sp>
         <p:nvSpPr>
-          <p:cNvPr id="12" name="Shape 10"/>
-          <p:cNvSpPr/>
-          <p:nvPr/>
-        </p:nvSpPr>
-        <p:spPr>
-          <a:xfrm>
-            <a:off x="8092440" y="1554480"/>
-            <a:ext cx="3611880" cy="3200400"/>
+          <p:cNvPr id="15" name="Shape 13"/>
+          <p:cNvSpPr/>
+          <p:nvPr/>
+        </p:nvSpPr>
+        <p:spPr>
+          <a:xfrm>
+            <a:off x="8138160" y="1051560"/>
+            <a:ext cx="3657600" cy="4892040"/>
           </a:xfrm>
           <a:prstGeom prst="rect">
             <a:avLst/>
@@ -6672,14 +8005,14 @@
       </p:sp>
       <p:sp>
         <p:nvSpPr>
-          <p:cNvPr id="13" name="Text 11"/>
-          <p:cNvSpPr/>
-          <p:nvPr/>
-        </p:nvSpPr>
-        <p:spPr>
-          <a:xfrm>
-            <a:off x="8321040" y="1783080"/>
-            <a:ext cx="3154680" cy="457200"/>
+          <p:cNvPr id="16" name="Text 14"/>
+          <p:cNvSpPr/>
+          <p:nvPr/>
+        </p:nvSpPr>
+        <p:spPr>
+          <a:xfrm>
+            <a:off x="8366760" y="1234440"/>
+            <a:ext cx="3200400" cy="320040"/>
           </a:xfrm>
           <a:prstGeom prst="rect">
             <a:avLst/>
@@ -6695,7 +8028,46 @@
               <a:buNone/>
             </a:pPr>
             <a:r>
-              <a:rPr lang="en-US" sz="2200" dirty="0">
+              <a:rPr lang="en-US" sz="1400" dirty="0">
+                <a:solidFill>
+                  <a:srgbClr val="B8432A"/>
+                </a:solidFill>
+                <a:latin typeface="Consolas" pitchFamily="34" charset="0"/>
+                <a:ea typeface="Consolas" pitchFamily="34" charset="-122"/>
+                <a:cs typeface="Consolas" pitchFamily="34" charset="-120"/>
+              </a:rPr>
+              <a:t>000036</a:t>
+            </a:r>
+            <a:endParaRPr lang="en-US" sz="1400" dirty="0"/>
+          </a:p>
+        </p:txBody>
+      </p:sp>
+      <p:sp>
+        <p:nvSpPr>
+          <p:cNvPr id="17" name="Text 15"/>
+          <p:cNvSpPr/>
+          <p:nvPr/>
+        </p:nvSpPr>
+        <p:spPr>
+          <a:xfrm>
+            <a:off x="8366760" y="1600200"/>
+            <a:ext cx="3200400" cy="411480"/>
+          </a:xfrm>
+          <a:prstGeom prst="rect">
+            <a:avLst/>
+          </a:prstGeom>
+          <a:noFill/>
+          <a:ln/>
+        </p:spPr>
+        <p:txBody>
+          <a:bodyPr wrap="square" lIns="0" tIns="0" rIns="0" bIns="0" rtlCol="0" anchor="ctr"/>
+          <a:lstStyle/>
+          <a:p>
+            <a:pPr indent="0" marL="0">
+              <a:buNone/>
+            </a:pPr>
+            <a:r>
+              <a:rPr lang="en-US" sz="2000" dirty="0">
                 <a:solidFill>
                   <a:srgbClr val="1A1A1A"/>
                 </a:solidFill>
@@ -6703,22 +8075,22 @@
                 <a:ea typeface="Georgia" pitchFamily="34" charset="-122"/>
                 <a:cs typeface="Georgia" pitchFamily="34" charset="-120"/>
               </a:rPr>
-              <a:t>Dữ liệu</a:t>
-            </a:r>
-            <a:endParaRPr lang="en-US" sz="2200" dirty="0"/>
-          </a:p>
-        </p:txBody>
-      </p:sp>
-      <p:sp>
-        <p:nvSpPr>
-          <p:cNvPr id="14" name="Text 12"/>
-          <p:cNvSpPr/>
-          <p:nvPr/>
-        </p:nvSpPr>
-        <p:spPr>
-          <a:xfrm>
-            <a:off x="8321040" y="2377440"/>
-            <a:ext cx="3154680" cy="2011680"/>
+              <a:t>Gán nhầm lời Dương</a:t>
+            </a:r>
+            <a:endParaRPr lang="en-US" sz="2000" dirty="0"/>
+          </a:p>
+        </p:txBody>
+      </p:sp>
+      <p:sp>
+        <p:nvSpPr>
+          <p:cNvPr id="18" name="Text 16"/>
+          <p:cNvSpPr/>
+          <p:nvPr/>
+        </p:nvSpPr>
+        <p:spPr>
+          <a:xfrm>
+            <a:off x="8366760" y="2240280"/>
+            <a:ext cx="3200400" cy="1554480"/>
           </a:xfrm>
           <a:prstGeom prst="rect">
             <a:avLst/>
@@ -6735,62 +8107,6 @@
             </a:pPr>
             <a:r>
               <a:rPr lang="en-US" sz="1500" dirty="0">
-                <a:solidFill>
-                  <a:srgbClr val="2B2B2B"/>
-                </a:solidFill>
-                <a:latin typeface="Consolas" pitchFamily="34" charset="0"/>
-                <a:ea typeface="Consolas" pitchFamily="34" charset="-122"/>
-                <a:cs typeface="Consolas" pitchFamily="34" charset="-120"/>
-              </a:rPr>
-              <a:t>preds.json có sẵn</a:t>
-            </a:r>
-            <a:endParaRPr lang="en-US" sz="1500" dirty="0"/>
-          </a:p>
-          <a:p>
-            <a:pPr indent="0" marL="0">
-              <a:buNone/>
-            </a:pPr>
-            <a:r>
-              <a:rPr lang="en-US" sz="1500" dirty="0">
-                <a:solidFill>
-                  <a:srgbClr val="2B2B2B"/>
-                </a:solidFill>
-                <a:latin typeface="Consolas" pitchFamily="34" charset="0"/>
-                <a:ea typeface="Consolas" pitchFamily="34" charset="-122"/>
-                <a:cs typeface="Consolas" pitchFamily="34" charset="-120"/>
-              </a:rPr>
-              <a:t>Lead-3 / TextRank tính lúc chọn bài</a:t>
-            </a:r>
-            <a:endParaRPr lang="en-US" sz="1500" dirty="0"/>
-          </a:p>
-        </p:txBody>
-      </p:sp>
-      <p:sp>
-        <p:nvSpPr>
-          <p:cNvPr id="15" name="Text 13"/>
-          <p:cNvSpPr/>
-          <p:nvPr/>
-        </p:nvSpPr>
-        <p:spPr>
-          <a:xfrm>
-            <a:off x="502920" y="4983480"/>
-            <a:ext cx="11155680" cy="640080"/>
-          </a:xfrm>
-          <a:prstGeom prst="rect">
-            <a:avLst/>
-          </a:prstGeom>
-          <a:noFill/>
-          <a:ln/>
-        </p:spPr>
-        <p:txBody>
-          <a:bodyPr wrap="square" lIns="0" tIns="0" rIns="0" bIns="0" rtlCol="0" anchor="ctr"/>
-          <a:lstStyle/>
-          <a:p>
-            <a:pPr indent="0" marL="0">
-              <a:buNone/>
-            </a:pPr>
-            <a:r>
-              <a:rPr lang="en-US" sz="1600" dirty="0">
                 <a:solidFill>
                   <a:srgbClr val="2B2B2B"/>
                 </a:solidFill>
@@ -6798,22 +8114,22 @@
                 <a:ea typeface="Calibri" pitchFamily="34" charset="-122"/>
                 <a:cs typeface="Calibri" pitchFamily="34" charset="-120"/>
               </a:rPr>
-              <a:t>Quay video 2 phút dự phòng nếu máy phòng máy không có Docker.</a:t>
-            </a:r>
-            <a:endParaRPr lang="en-US" sz="1600" dirty="0"/>
-          </a:p>
-        </p:txBody>
-      </p:sp>
-      <p:sp>
-        <p:nvSpPr>
-          <p:cNvPr id="16" name="Text 14"/>
-          <p:cNvSpPr/>
-          <p:nvPr/>
-        </p:nvSpPr>
-        <p:spPr>
-          <a:xfrm>
-            <a:off x="502920" y="6510528"/>
-            <a:ext cx="8229600" cy="201168"/>
+              <a:t>Gold: Vĩnh chối Rolex 7.000 USD.</a:t>
+            </a:r>
+            <a:endParaRPr lang="en-US" sz="1500" dirty="0"/>
+          </a:p>
+        </p:txBody>
+      </p:sp>
+      <p:sp>
+        <p:nvSpPr>
+          <p:cNvPr id="19" name="Text 17"/>
+          <p:cNvSpPr/>
+          <p:nvPr/>
+        </p:nvSpPr>
+        <p:spPr>
+          <a:xfrm>
+            <a:off x="8366760" y="3931920"/>
+            <a:ext cx="3200400" cy="1645920"/>
           </a:xfrm>
           <a:prstGeom prst="rect">
             <a:avLst/>
@@ -6829,14 +8145,53 @@
               <a:buNone/>
             </a:pPr>
             <a:r>
-              <a:rPr lang="en-US" sz="1000" dirty="0">
-                <a:solidFill>
-                  <a:srgbClr val="B5AFA0"/>
+              <a:rPr lang="en-US" sz="1500" dirty="0">
+                <a:solidFill>
+                  <a:srgbClr val="B8432A"/>
                 </a:solidFill>
                 <a:latin typeface="Calibri" pitchFamily="34" charset="0"/>
                 <a:ea typeface="Calibri" pitchFamily="34" charset="-122"/>
                 <a:cs typeface="Calibri" pitchFamily="34" charset="-120"/>
               </a:rPr>
+              <a:t>ViT5: Vĩnh “khai cho ông Vĩnh” 27 tỷ.</a:t>
+            </a:r>
+            <a:endParaRPr lang="en-US" sz="1500" dirty="0"/>
+          </a:p>
+        </p:txBody>
+      </p:sp>
+      <p:sp>
+        <p:nvSpPr>
+          <p:cNvPr id="20" name="Text 18"/>
+          <p:cNvSpPr/>
+          <p:nvPr/>
+        </p:nvSpPr>
+        <p:spPr>
+          <a:xfrm>
+            <a:off x="502920" y="6510528"/>
+            <a:ext cx="8229600" cy="201168"/>
+          </a:xfrm>
+          <a:prstGeom prst="rect">
+            <a:avLst/>
+          </a:prstGeom>
+          <a:noFill/>
+          <a:ln/>
+        </p:spPr>
+        <p:txBody>
+          <a:bodyPr wrap="square" lIns="0" tIns="0" rIns="0" bIns="0" rtlCol="0" anchor="ctr"/>
+          <a:lstStyle/>
+          <a:p>
+            <a:pPr indent="0" marL="0">
+              <a:buNone/>
+            </a:pPr>
+            <a:r>
+              <a:rPr lang="en-US" sz="1000" dirty="0">
+                <a:solidFill>
+                  <a:srgbClr val="B5AFA0"/>
+                </a:solidFill>
+                <a:latin typeface="Calibri" pitchFamily="34" charset="0"/>
+                <a:ea typeface="Calibri" pitchFamily="34" charset="-122"/>
+                <a:cs typeface="Calibri" pitchFamily="34" charset="-120"/>
+              </a:rPr>
               <a:t>CS221 · UIT  ·  Vietnews extractive vs abstractive</a:t>
             </a:r>
             <a:endParaRPr lang="en-US" sz="1000" dirty="0"/>
@@ -6845,7 +8200,7 @@
       </p:sp>
       <p:sp>
         <p:nvSpPr>
-          <p:cNvPr id="17" name="Text 15"/>
+          <p:cNvPr id="21" name="Text 19"/>
           <p:cNvSpPr/>
           <p:nvPr/>
         </p:nvSpPr>
@@ -6947,7 +8302,7 @@
                 <a:ea typeface="Calibri" pitchFamily="34" charset="-122"/>
                 <a:cs typeface="Calibri" pitchFamily="34" charset="-120"/>
               </a:rPr>
-              <a:t>14  KẾT LUẬN</a:t>
+              <a:t>13  DEMO</a:t>
             </a:r>
             <a:endParaRPr lang="en-US" sz="1100" dirty="0"/>
           </a:p>
@@ -6986,7 +8341,7 @@
                 <a:ea typeface="Calibri" pitchFamily="34" charset="-122"/>
                 <a:cs typeface="Calibri" pitchFamily="34" charset="-120"/>
               </a:rPr>
-              <a:t>Hạn chế</a:t>
+              <a:t>Không cần GPU lúc bảo vệ</a:t>
             </a:r>
             <a:endParaRPr lang="en-US" sz="1200" dirty="0"/>
           </a:p>
@@ -7017,14 +8372,53 @@
       </p:sp>
       <p:sp>
         <p:nvSpPr>
-          <p:cNvPr id="5" name="Shape 3"/>
-          <p:cNvSpPr/>
-          <p:nvPr/>
-        </p:nvSpPr>
-        <p:spPr>
-          <a:xfrm>
-            <a:off x="502920" y="1005840"/>
-            <a:ext cx="5577840" cy="4937760"/>
+          <p:cNvPr id="5" name="Text 3"/>
+          <p:cNvSpPr/>
+          <p:nvPr/>
+        </p:nvSpPr>
+        <p:spPr>
+          <a:xfrm>
+            <a:off x="502920" y="914400"/>
+            <a:ext cx="10972800" cy="411480"/>
+          </a:xfrm>
+          <a:prstGeom prst="rect">
+            <a:avLst/>
+          </a:prstGeom>
+          <a:noFill/>
+          <a:ln/>
+        </p:spPr>
+        <p:txBody>
+          <a:bodyPr wrap="square" lIns="0" tIns="0" rIns="0" bIns="0" rtlCol="0" anchor="ctr"/>
+          <a:lstStyle/>
+          <a:p>
+            <a:pPr indent="0" marL="0">
+              <a:buNone/>
+            </a:pPr>
+            <a:r>
+              <a:rPr lang="en-US" sz="2600" dirty="0">
+                <a:solidFill>
+                  <a:srgbClr val="1A1A1A"/>
+                </a:solidFill>
+                <a:latin typeface="Georgia" pitchFamily="34" charset="0"/>
+                <a:ea typeface="Georgia" pitchFamily="34" charset="-122"/>
+                <a:cs typeface="Georgia" pitchFamily="34" charset="-120"/>
+              </a:rPr>
+              <a:t>Ba cột trên cùng một bài test.</a:t>
+            </a:r>
+            <a:endParaRPr lang="en-US" sz="2600" dirty="0"/>
+          </a:p>
+        </p:txBody>
+      </p:sp>
+      <p:sp>
+        <p:nvSpPr>
+          <p:cNvPr id="6" name="Shape 4"/>
+          <p:cNvSpPr/>
+          <p:nvPr/>
+        </p:nvSpPr>
+        <p:spPr>
+          <a:xfrm>
+            <a:off x="502920" y="1554480"/>
+            <a:ext cx="3611880" cy="3200400"/>
           </a:xfrm>
           <a:prstGeom prst="rect">
             <a:avLst/>
@@ -7042,20 +8436,115 @@
       </p:sp>
       <p:sp>
         <p:nvSpPr>
-          <p:cNvPr id="6" name="Shape 4"/>
-          <p:cNvSpPr/>
-          <p:nvPr/>
-        </p:nvSpPr>
-        <p:spPr>
-          <a:xfrm>
-            <a:off x="6263640" y="1005840"/>
-            <a:ext cx="5394960" cy="4937760"/>
+          <p:cNvPr id="7" name="Text 5"/>
+          <p:cNvSpPr/>
+          <p:nvPr/>
+        </p:nvSpPr>
+        <p:spPr>
+          <a:xfrm>
+            <a:off x="731520" y="1783080"/>
+            <a:ext cx="3154680" cy="457200"/>
+          </a:xfrm>
+          <a:prstGeom prst="rect">
+            <a:avLst/>
+          </a:prstGeom>
+          <a:noFill/>
+          <a:ln/>
+        </p:spPr>
+        <p:txBody>
+          <a:bodyPr wrap="square" lIns="0" tIns="0" rIns="0" bIns="0" rtlCol="0" anchor="ctr"/>
+          <a:lstStyle/>
+          <a:p>
+            <a:pPr indent="0" marL="0">
+              <a:buNone/>
+            </a:pPr>
+            <a:r>
+              <a:rPr lang="en-US" sz="2200" dirty="0">
+                <a:solidFill>
+                  <a:srgbClr val="1A1A1A"/>
+                </a:solidFill>
+                <a:latin typeface="Georgia" pitchFamily="34" charset="0"/>
+                <a:ea typeface="Georgia" pitchFamily="34" charset="-122"/>
+                <a:cs typeface="Georgia" pitchFamily="34" charset="-120"/>
+              </a:rPr>
+              <a:t>Local</a:t>
+            </a:r>
+            <a:endParaRPr lang="en-US" sz="2200" dirty="0"/>
+          </a:p>
+        </p:txBody>
+      </p:sp>
+      <p:sp>
+        <p:nvSpPr>
+          <p:cNvPr id="8" name="Text 6"/>
+          <p:cNvSpPr/>
+          <p:nvPr/>
+        </p:nvSpPr>
+        <p:spPr>
+          <a:xfrm>
+            <a:off x="731520" y="2377440"/>
+            <a:ext cx="3154680" cy="2011680"/>
+          </a:xfrm>
+          <a:prstGeom prst="rect">
+            <a:avLst/>
+          </a:prstGeom>
+          <a:noFill/>
+          <a:ln/>
+        </p:spPr>
+        <p:txBody>
+          <a:bodyPr wrap="square" lIns="0" tIns="0" rIns="0" bIns="0" rtlCol="0" anchor="ctr"/>
+          <a:lstStyle/>
+          <a:p>
+            <a:pPr indent="0" marL="0">
+              <a:buNone/>
+            </a:pPr>
+            <a:r>
+              <a:rPr lang="en-US" sz="1500" dirty="0">
+                <a:solidFill>
+                  <a:srgbClr val="2B2B2B"/>
+                </a:solidFill>
+                <a:latin typeface="Consolas" pitchFamily="34" charset="0"/>
+                <a:ea typeface="Consolas" pitchFamily="34" charset="-122"/>
+                <a:cs typeface="Consolas" pitchFamily="34" charset="-120"/>
+              </a:rPr>
+              <a:t>python app/demo.py</a:t>
+            </a:r>
+            <a:endParaRPr lang="en-US" sz="1500" dirty="0"/>
+          </a:p>
+          <a:p>
+            <a:pPr indent="0" marL="0">
+              <a:buNone/>
+            </a:pPr>
+            <a:r>
+              <a:rPr lang="en-US" sz="1500" dirty="0">
+                <a:solidFill>
+                  <a:srgbClr val="2B2B2B"/>
+                </a:solidFill>
+                <a:latin typeface="Consolas" pitchFamily="34" charset="0"/>
+                <a:ea typeface="Consolas" pitchFamily="34" charset="-122"/>
+                <a:cs typeface="Consolas" pitchFamily="34" charset="-120"/>
+              </a:rPr>
+              <a:t>http://127.0.0.1:7860</a:t>
+            </a:r>
+            <a:endParaRPr lang="en-US" sz="1500" dirty="0"/>
+          </a:p>
+        </p:txBody>
+      </p:sp>
+      <p:sp>
+        <p:nvSpPr>
+          <p:cNvPr id="9" name="Shape 7"/>
+          <p:cNvSpPr/>
+          <p:nvPr/>
+        </p:nvSpPr>
+        <p:spPr>
+          <a:xfrm>
+            <a:off x="4297680" y="1554480"/>
+            <a:ext cx="3611880" cy="3200400"/>
           </a:xfrm>
           <a:prstGeom prst="rect">
             <a:avLst/>
           </a:prstGeom>
           <a:solidFill>
-            <a:srgbClr val="F2E5D0"/>
+            <a:srgbClr val="F7F3E8"/>
           </a:solidFill>
           <a:ln w="9525">
             <a:solidFill>
@@ -7067,14 +8556,14 @@
       </p:sp>
       <p:sp>
         <p:nvSpPr>
-          <p:cNvPr id="7" name="Text 5"/>
-          <p:cNvSpPr/>
-          <p:nvPr/>
-        </p:nvSpPr>
-        <p:spPr>
-          <a:xfrm>
-            <a:off x="731520" y="1188720"/>
-            <a:ext cx="5120640" cy="365760"/>
+          <p:cNvPr id="10" name="Text 8"/>
+          <p:cNvSpPr/>
+          <p:nvPr/>
+        </p:nvSpPr>
+        <p:spPr>
+          <a:xfrm>
+            <a:off x="4526280" y="1783080"/>
+            <a:ext cx="3154680" cy="457200"/>
           </a:xfrm>
           <a:prstGeom prst="rect">
             <a:avLst/>
@@ -7090,329 +8579,232 @@
               <a:buNone/>
             </a:pPr>
             <a:r>
-              <a:rPr lang="en-US" sz="1400" dirty="0">
-                <a:solidFill>
-                  <a:srgbClr val="B8432A"/>
+              <a:rPr lang="en-US" sz="2200" dirty="0">
+                <a:solidFill>
+                  <a:srgbClr val="1A1A1A"/>
+                </a:solidFill>
+                <a:latin typeface="Georgia" pitchFamily="34" charset="0"/>
+                <a:ea typeface="Georgia" pitchFamily="34" charset="-122"/>
+                <a:cs typeface="Georgia" pitchFamily="34" charset="-120"/>
+              </a:rPr>
+              <a:t>Docker</a:t>
+            </a:r>
+            <a:endParaRPr lang="en-US" sz="2200" dirty="0"/>
+          </a:p>
+        </p:txBody>
+      </p:sp>
+      <p:sp>
+        <p:nvSpPr>
+          <p:cNvPr id="11" name="Text 9"/>
+          <p:cNvSpPr/>
+          <p:nvPr/>
+        </p:nvSpPr>
+        <p:spPr>
+          <a:xfrm>
+            <a:off x="4526280" y="2377440"/>
+            <a:ext cx="3154680" cy="2011680"/>
+          </a:xfrm>
+          <a:prstGeom prst="rect">
+            <a:avLst/>
+          </a:prstGeom>
+          <a:noFill/>
+          <a:ln/>
+        </p:spPr>
+        <p:txBody>
+          <a:bodyPr wrap="square" lIns="0" tIns="0" rIns="0" bIns="0" rtlCol="0" anchor="ctr"/>
+          <a:lstStyle/>
+          <a:p>
+            <a:pPr indent="0" marL="0">
+              <a:buNone/>
+            </a:pPr>
+            <a:r>
+              <a:rPr lang="en-US" sz="1500" dirty="0">
+                <a:solidFill>
+                  <a:srgbClr val="2B2B2B"/>
+                </a:solidFill>
+                <a:latin typeface="Consolas" pitchFamily="34" charset="0"/>
+                <a:ea typeface="Consolas" pitchFamily="34" charset="-122"/>
+                <a:cs typeface="Consolas" pitchFamily="34" charset="-120"/>
+              </a:rPr>
+              <a:t>docker start vietnews-demo</a:t>
+            </a:r>
+            <a:endParaRPr lang="en-US" sz="1500" dirty="0"/>
+          </a:p>
+          <a:p>
+            <a:pPr indent="0" marL="0">
+              <a:buNone/>
+            </a:pPr>
+            <a:r>
+              <a:rPr lang="en-US" sz="1500" dirty="0">
+                <a:solidFill>
+                  <a:srgbClr val="2B2B2B"/>
+                </a:solidFill>
+                <a:latin typeface="Consolas" pitchFamily="34" charset="0"/>
+                <a:ea typeface="Consolas" pitchFamily="34" charset="-122"/>
+                <a:cs typeface="Consolas" pitchFamily="34" charset="-120"/>
+              </a:rPr>
+              <a:t>Cùng cổng 7860</a:t>
+            </a:r>
+            <a:endParaRPr lang="en-US" sz="1500" dirty="0"/>
+          </a:p>
+        </p:txBody>
+      </p:sp>
+      <p:sp>
+        <p:nvSpPr>
+          <p:cNvPr id="12" name="Shape 10"/>
+          <p:cNvSpPr/>
+          <p:nvPr/>
+        </p:nvSpPr>
+        <p:spPr>
+          <a:xfrm>
+            <a:off x="8092440" y="1554480"/>
+            <a:ext cx="3611880" cy="3200400"/>
+          </a:xfrm>
+          <a:prstGeom prst="rect">
+            <a:avLst/>
+          </a:prstGeom>
+          <a:solidFill>
+            <a:srgbClr val="F7F3E8"/>
+          </a:solidFill>
+          <a:ln w="9525">
+            <a:solidFill>
+              <a:srgbClr val="C8C0AE"/>
+            </a:solidFill>
+            <a:prstDash val="solid"/>
+          </a:ln>
+        </p:spPr>
+      </p:sp>
+      <p:sp>
+        <p:nvSpPr>
+          <p:cNvPr id="13" name="Text 11"/>
+          <p:cNvSpPr/>
+          <p:nvPr/>
+        </p:nvSpPr>
+        <p:spPr>
+          <a:xfrm>
+            <a:off x="8321040" y="1783080"/>
+            <a:ext cx="3154680" cy="457200"/>
+          </a:xfrm>
+          <a:prstGeom prst="rect">
+            <a:avLst/>
+          </a:prstGeom>
+          <a:noFill/>
+          <a:ln/>
+        </p:spPr>
+        <p:txBody>
+          <a:bodyPr wrap="square" lIns="0" tIns="0" rIns="0" bIns="0" rtlCol="0" anchor="ctr"/>
+          <a:lstStyle/>
+          <a:p>
+            <a:pPr indent="0" marL="0">
+              <a:buNone/>
+            </a:pPr>
+            <a:r>
+              <a:rPr lang="en-US" sz="2200" dirty="0">
+                <a:solidFill>
+                  <a:srgbClr val="1A1A1A"/>
+                </a:solidFill>
+                <a:latin typeface="Georgia" pitchFamily="34" charset="0"/>
+                <a:ea typeface="Georgia" pitchFamily="34" charset="-122"/>
+                <a:cs typeface="Georgia" pitchFamily="34" charset="-120"/>
+              </a:rPr>
+              <a:t>Dữ liệu</a:t>
+            </a:r>
+            <a:endParaRPr lang="en-US" sz="2200" dirty="0"/>
+          </a:p>
+        </p:txBody>
+      </p:sp>
+      <p:sp>
+        <p:nvSpPr>
+          <p:cNvPr id="14" name="Text 12"/>
+          <p:cNvSpPr/>
+          <p:nvPr/>
+        </p:nvSpPr>
+        <p:spPr>
+          <a:xfrm>
+            <a:off x="8321040" y="2377440"/>
+            <a:ext cx="3154680" cy="2011680"/>
+          </a:xfrm>
+          <a:prstGeom prst="rect">
+            <a:avLst/>
+          </a:prstGeom>
+          <a:noFill/>
+          <a:ln/>
+        </p:spPr>
+        <p:txBody>
+          <a:bodyPr wrap="square" lIns="0" tIns="0" rIns="0" bIns="0" rtlCol="0" anchor="ctr"/>
+          <a:lstStyle/>
+          <a:p>
+            <a:pPr indent="0" marL="0">
+              <a:buNone/>
+            </a:pPr>
+            <a:r>
+              <a:rPr lang="en-US" sz="1500" dirty="0">
+                <a:solidFill>
+                  <a:srgbClr val="2B2B2B"/>
+                </a:solidFill>
+                <a:latin typeface="Consolas" pitchFamily="34" charset="0"/>
+                <a:ea typeface="Consolas" pitchFamily="34" charset="-122"/>
+                <a:cs typeface="Consolas" pitchFamily="34" charset="-120"/>
+              </a:rPr>
+              <a:t>preds.json có sẵn</a:t>
+            </a:r>
+            <a:endParaRPr lang="en-US" sz="1500" dirty="0"/>
+          </a:p>
+          <a:p>
+            <a:pPr indent="0" marL="0">
+              <a:buNone/>
+            </a:pPr>
+            <a:r>
+              <a:rPr lang="en-US" sz="1500" dirty="0">
+                <a:solidFill>
+                  <a:srgbClr val="2B2B2B"/>
+                </a:solidFill>
+                <a:latin typeface="Consolas" pitchFamily="34" charset="0"/>
+                <a:ea typeface="Consolas" pitchFamily="34" charset="-122"/>
+                <a:cs typeface="Consolas" pitchFamily="34" charset="-120"/>
+              </a:rPr>
+              <a:t>Lead-3 / TextRank tính lúc chọn bài</a:t>
+            </a:r>
+            <a:endParaRPr lang="en-US" sz="1500" dirty="0"/>
+          </a:p>
+        </p:txBody>
+      </p:sp>
+      <p:sp>
+        <p:nvSpPr>
+          <p:cNvPr id="15" name="Text 13"/>
+          <p:cNvSpPr/>
+          <p:nvPr/>
+        </p:nvSpPr>
+        <p:spPr>
+          <a:xfrm>
+            <a:off x="502920" y="4983480"/>
+            <a:ext cx="11155680" cy="640080"/>
+          </a:xfrm>
+          <a:prstGeom prst="rect">
+            <a:avLst/>
+          </a:prstGeom>
+          <a:noFill/>
+          <a:ln/>
+        </p:spPr>
+        <p:txBody>
+          <a:bodyPr wrap="square" lIns="0" tIns="0" rIns="0" bIns="0" rtlCol="0" anchor="ctr"/>
+          <a:lstStyle/>
+          <a:p>
+            <a:pPr indent="0" marL="0">
+              <a:buNone/>
+            </a:pPr>
+            <a:r>
+              <a:rPr lang="en-US" sz="1600" dirty="0">
+                <a:solidFill>
+                  <a:srgbClr val="2B2B2B"/>
                 </a:solidFill>
                 <a:latin typeface="Calibri" pitchFamily="34" charset="0"/>
                 <a:ea typeface="Calibri" pitchFamily="34" charset="-122"/>
                 <a:cs typeface="Calibri" pitchFamily="34" charset="-120"/>
               </a:rPr>
-              <a:t>Nhận được</a:t>
-            </a:r>
-            <a:endParaRPr lang="en-US" sz="1400" dirty="0"/>
-          </a:p>
-        </p:txBody>
-      </p:sp>
-      <p:sp>
-        <p:nvSpPr>
-          <p:cNvPr id="8" name="Text 6"/>
-          <p:cNvSpPr/>
-          <p:nvPr/>
-        </p:nvSpPr>
-        <p:spPr>
-          <a:xfrm>
-            <a:off x="731520" y="1691640"/>
-            <a:ext cx="5074920" cy="1143000"/>
-          </a:xfrm>
-          <a:prstGeom prst="rect">
-            <a:avLst/>
-          </a:prstGeom>
-          <a:noFill/>
-          <a:ln/>
-        </p:spPr>
-        <p:txBody>
-          <a:bodyPr wrap="square" lIns="0" tIns="0" rIns="0" bIns="0" rtlCol="0" anchor="ctr"/>
-          <a:lstStyle/>
-          <a:p>
-            <a:pPr indent="0" marL="0">
-              <a:buNone/>
-            </a:pPr>
-            <a:r>
-              <a:rPr lang="en-US" sz="1500" dirty="0">
-                <a:solidFill>
-                  <a:srgbClr val="2B2B2B"/>
-                </a:solidFill>
-                <a:latin typeface="Calibri" pitchFamily="34" charset="0"/>
-                <a:ea typeface="Calibri" pitchFamily="34" charset="-122"/>
-                <a:cs typeface="Calibri" pitchFamily="34" charset="-120"/>
-              </a:rPr>
-              <a:t>Trên 100 bài test đầu Vietnews, ViT5 ROUGE-1/2/L cao hơn Lead-3 và TextRank một chút.</a:t>
-            </a:r>
-            <a:endParaRPr lang="en-US" sz="1500" dirty="0"/>
-          </a:p>
-        </p:txBody>
-      </p:sp>
-      <p:sp>
-        <p:nvSpPr>
-          <p:cNvPr id="9" name="Text 7"/>
-          <p:cNvSpPr/>
-          <p:nvPr/>
-        </p:nvSpPr>
-        <p:spPr>
-          <a:xfrm>
-            <a:off x="731520" y="2926080"/>
-            <a:ext cx="5074920" cy="1143000"/>
-          </a:xfrm>
-          <a:prstGeom prst="rect">
-            <a:avLst/>
-          </a:prstGeom>
-          <a:noFill/>
-          <a:ln/>
-        </p:spPr>
-        <p:txBody>
-          <a:bodyPr wrap="square" lIns="0" tIns="0" rIns="0" bIns="0" rtlCol="0" anchor="ctr"/>
-          <a:lstStyle/>
-          <a:p>
-            <a:pPr indent="0" marL="0">
-              <a:buNone/>
-            </a:pPr>
-            <a:r>
-              <a:rPr lang="en-US" sz="1500" dirty="0">
-                <a:solidFill>
-                  <a:srgbClr val="2B2B2B"/>
-                </a:solidFill>
-                <a:latin typeface="Calibri" pitchFamily="34" charset="0"/>
-                <a:ea typeface="Calibri" pitchFamily="34" charset="-122"/>
-                <a:cs typeface="Calibri" pitchFamily="34" charset="-120"/>
-              </a:rPr>
-              <a:t>Đọc tay 20 bài: ViT5 vẫn sai tên, đảo ý, bịa chi tiết — ROUGE không thay cho đối chiếu gold.</a:t>
-            </a:r>
-            <a:endParaRPr lang="en-US" sz="1500" dirty="0"/>
-          </a:p>
-        </p:txBody>
-      </p:sp>
-      <p:sp>
-        <p:nvSpPr>
-          <p:cNvPr id="10" name="Text 8"/>
-          <p:cNvSpPr/>
-          <p:nvPr/>
-        </p:nvSpPr>
-        <p:spPr>
-          <a:xfrm>
-            <a:off x="731520" y="4160520"/>
-            <a:ext cx="5074920" cy="1143000"/>
-          </a:xfrm>
-          <a:prstGeom prst="rect">
-            <a:avLst/>
-          </a:prstGeom>
-          <a:noFill/>
-          <a:ln/>
-        </p:spPr>
-        <p:txBody>
-          <a:bodyPr wrap="square" lIns="0" tIns="0" rIns="0" bIns="0" rtlCol="0" anchor="ctr"/>
-          <a:lstStyle/>
-          <a:p>
-            <a:pPr indent="0" marL="0">
-              <a:buNone/>
-            </a:pPr>
-            <a:r>
-              <a:rPr lang="en-US" sz="1500" dirty="0">
-                <a:solidFill>
-                  <a:srgbClr val="2B2B2B"/>
-                </a:solidFill>
-                <a:latin typeface="Calibri" pitchFamily="34" charset="0"/>
-                <a:ea typeface="Calibri" pitchFamily="34" charset="-122"/>
-                <a:cs typeface="Calibri" pitchFamily="34" charset="-120"/>
-              </a:rPr>
-              <a:t>Lead-3 an toàn về chữ (lấy từ bài) nhưng hay lệch sapo.</a:t>
-            </a:r>
-            <a:endParaRPr lang="en-US" sz="1500" dirty="0"/>
-          </a:p>
-        </p:txBody>
-      </p:sp>
-      <p:sp>
-        <p:nvSpPr>
-          <p:cNvPr id="11" name="Text 9"/>
-          <p:cNvSpPr/>
-          <p:nvPr/>
-        </p:nvSpPr>
-        <p:spPr>
-          <a:xfrm>
-            <a:off x="6492240" y="1188720"/>
-            <a:ext cx="4937760" cy="365760"/>
-          </a:xfrm>
-          <a:prstGeom prst="rect">
-            <a:avLst/>
-          </a:prstGeom>
-          <a:noFill/>
-          <a:ln/>
-        </p:spPr>
-        <p:txBody>
-          <a:bodyPr wrap="square" lIns="0" tIns="0" rIns="0" bIns="0" rtlCol="0" anchor="ctr"/>
-          <a:lstStyle/>
-          <a:p>
-            <a:pPr indent="0" marL="0">
-              <a:buNone/>
-            </a:pPr>
-            <a:r>
-              <a:rPr lang="en-US" sz="1400" dirty="0">
-                <a:solidFill>
-                  <a:srgbClr val="B8432A"/>
-                </a:solidFill>
-                <a:latin typeface="Calibri" pitchFamily="34" charset="0"/>
-                <a:ea typeface="Calibri" pitchFamily="34" charset="-122"/>
-                <a:cs typeface="Calibri" pitchFamily="34" charset="-120"/>
-              </a:rPr>
-              <a:t>Không nhận</a:t>
-            </a:r>
-            <a:endParaRPr lang="en-US" sz="1400" dirty="0"/>
-          </a:p>
-        </p:txBody>
-      </p:sp>
-      <p:sp>
-        <p:nvSpPr>
-          <p:cNvPr id="12" name="Text 10"/>
-          <p:cNvSpPr/>
-          <p:nvPr/>
-        </p:nvSpPr>
-        <p:spPr>
-          <a:xfrm>
-            <a:off x="6492240" y="1691640"/>
-            <a:ext cx="4937760" cy="868680"/>
-          </a:xfrm>
-          <a:prstGeom prst="rect">
-            <a:avLst/>
-          </a:prstGeom>
-          <a:noFill/>
-          <a:ln/>
-        </p:spPr>
-        <p:txBody>
-          <a:bodyPr wrap="square" lIns="0" tIns="0" rIns="0" bIns="0" rtlCol="0" anchor="ctr"/>
-          <a:lstStyle/>
-          <a:p>
-            <a:pPr indent="0" marL="0">
-              <a:buNone/>
-            </a:pPr>
-            <a:r>
-              <a:rPr lang="en-US" sz="1500" dirty="0">
-                <a:solidFill>
-                  <a:srgbClr val="2B2B2B"/>
-                </a:solidFill>
-                <a:latin typeface="Calibri" pitchFamily="34" charset="0"/>
-                <a:ea typeface="Calibri" pitchFamily="34" charset="-122"/>
-                <a:cs typeface="Calibri" pitchFamily="34" charset="-120"/>
-              </a:rPr>
-              <a:t>Chỉ 100 bài, không phải full test gốc paper.</a:t>
-            </a:r>
-            <a:endParaRPr lang="en-US" sz="1500" dirty="0"/>
-          </a:p>
-        </p:txBody>
-      </p:sp>
-      <p:sp>
-        <p:nvSpPr>
-          <p:cNvPr id="13" name="Text 11"/>
-          <p:cNvSpPr/>
-          <p:nvPr/>
-        </p:nvSpPr>
-        <p:spPr>
-          <a:xfrm>
-            <a:off x="6492240" y="2651760"/>
-            <a:ext cx="4937760" cy="868680"/>
-          </a:xfrm>
-          <a:prstGeom prst="rect">
-            <a:avLst/>
-          </a:prstGeom>
-          <a:noFill/>
-          <a:ln/>
-        </p:spPr>
-        <p:txBody>
-          <a:bodyPr wrap="square" lIns="0" tIns="0" rIns="0" bIns="0" rtlCol="0" anchor="ctr"/>
-          <a:lstStyle/>
-          <a:p>
-            <a:pPr indent="0" marL="0">
-              <a:buNone/>
-            </a:pPr>
-            <a:r>
-              <a:rPr lang="en-US" sz="1500" dirty="0">
-                <a:solidFill>
-                  <a:srgbClr val="2B2B2B"/>
-                </a:solidFill>
-                <a:latin typeface="Calibri" pitchFamily="34" charset="0"/>
-                <a:ea typeface="Calibri" pitchFamily="34" charset="-122"/>
-                <a:cs typeface="Calibri" pitchFamily="34" charset="-120"/>
-              </a:rPr>
-              <a:t>ViT5 đã học Vietnews; không tách được “khả năng mô hình” với “đã thấy miền này”.</a:t>
-            </a:r>
-            <a:endParaRPr lang="en-US" sz="1500" dirty="0"/>
-          </a:p>
-        </p:txBody>
-      </p:sp>
-      <p:sp>
-        <p:nvSpPr>
-          <p:cNvPr id="14" name="Text 12"/>
-          <p:cNvSpPr/>
-          <p:nvPr/>
-        </p:nvSpPr>
-        <p:spPr>
-          <a:xfrm>
-            <a:off x="6492240" y="3611880"/>
-            <a:ext cx="4937760" cy="868680"/>
-          </a:xfrm>
-          <a:prstGeom prst="rect">
-            <a:avLst/>
-          </a:prstGeom>
-          <a:noFill/>
-          <a:ln/>
-        </p:spPr>
-        <p:txBody>
-          <a:bodyPr wrap="square" lIns="0" tIns="0" rIns="0" bIns="0" rtlCol="0" anchor="ctr"/>
-          <a:lstStyle/>
-          <a:p>
-            <a:pPr indent="0" marL="0">
-              <a:buNone/>
-            </a:pPr>
-            <a:r>
-              <a:rPr lang="en-US" sz="1500" dirty="0">
-                <a:solidFill>
-                  <a:srgbClr val="2B2B2B"/>
-                </a:solidFill>
-                <a:latin typeface="Calibri" pitchFamily="34" charset="0"/>
-                <a:ea typeface="Calibri" pitchFamily="34" charset="-122"/>
-                <a:cs typeface="Calibri" pitchFamily="34" charset="-120"/>
-              </a:rPr>
-              <a:t>Gold dạng bản tin 24h (nhiều tin/bài) cả ba hệ đều yếu.</a:t>
-            </a:r>
-            <a:endParaRPr lang="en-US" sz="1500" dirty="0"/>
-          </a:p>
-        </p:txBody>
-      </p:sp>
-      <p:sp>
-        <p:nvSpPr>
-          <p:cNvPr id="15" name="Text 13"/>
-          <p:cNvSpPr/>
-          <p:nvPr/>
-        </p:nvSpPr>
-        <p:spPr>
-          <a:xfrm>
-            <a:off x="6492240" y="4572000"/>
-            <a:ext cx="4937760" cy="868680"/>
-          </a:xfrm>
-          <a:prstGeom prst="rect">
-            <a:avLst/>
-          </a:prstGeom>
-          <a:noFill/>
-          <a:ln/>
-        </p:spPr>
-        <p:txBody>
-          <a:bodyPr wrap="square" lIns="0" tIns="0" rIns="0" bIns="0" rtlCol="0" anchor="ctr"/>
-          <a:lstStyle/>
-          <a:p>
-            <a:pPr indent="0" marL="0">
-              <a:buNone/>
-            </a:pPr>
-            <a:r>
-              <a:rPr lang="en-US" sz="1500" dirty="0">
-                <a:solidFill>
-                  <a:srgbClr val="2B2B2B"/>
-                </a:solidFill>
-                <a:latin typeface="Calibri" pitchFamily="34" charset="0"/>
-                <a:ea typeface="Calibri" pitchFamily="34" charset="-122"/>
-                <a:cs typeface="Calibri" pitchFamily="34" charset="-120"/>
-              </a:rPr>
-              <a:t>Chưa đo latency; chưa 500 bài (L3 bỏ qua).</a:t>
-            </a:r>
-            <a:endParaRPr lang="en-US" sz="1500" dirty="0"/>
+              <a:t>Quay video 2 phút dự phòng nếu máy phòng máy không có Docker.</a:t>
+            </a:r>
+            <a:endParaRPr lang="en-US" sz="1600" dirty="0"/>
           </a:p>
         </p:txBody>
       </p:sp>
@@ -7559,7 +8951,7 @@
                 <a:ea typeface="Calibri" pitchFamily="34" charset="-122"/>
                 <a:cs typeface="Calibri" pitchFamily="34" charset="-120"/>
               </a:rPr>
-              <a:t>15  NẾU LÀM TIẾP</a:t>
+              <a:t>14  KẾT LUẬN</a:t>
             </a:r>
             <a:endParaRPr lang="en-US" sz="1100" dirty="0"/>
           </a:p>
@@ -7598,7 +8990,7 @@
                 <a:ea typeface="Calibri" pitchFamily="34" charset="-122"/>
                 <a:cs typeface="Calibri" pitchFamily="34" charset="-120"/>
               </a:rPr>
-              <a:t>Ngoài phạm vi đồ án</a:t>
+              <a:t>Hạn chế</a:t>
             </a:r>
             <a:endParaRPr lang="en-US" sz="1200" dirty="0"/>
           </a:p>
@@ -7635,67 +9027,8 @@
         </p:nvSpPr>
         <p:spPr>
           <a:xfrm>
-            <a:off x="502920" y="1097280"/>
-            <a:ext cx="1188720" cy="1280160"/>
-          </a:xfrm>
-          <a:prstGeom prst="rect">
-            <a:avLst/>
-          </a:prstGeom>
-          <a:solidFill>
-            <a:srgbClr val="0B0B0B"/>
-          </a:solidFill>
-          <a:ln/>
-        </p:spPr>
-      </p:sp>
-      <p:sp>
-        <p:nvSpPr>
-          <p:cNvPr id="6" name="Text 4"/>
-          <p:cNvSpPr/>
-          <p:nvPr/>
-        </p:nvSpPr>
-        <p:spPr>
-          <a:xfrm>
-            <a:off x="502920" y="1463040"/>
-            <a:ext cx="1188720" cy="502920"/>
-          </a:xfrm>
-          <a:prstGeom prst="rect">
-            <a:avLst/>
-          </a:prstGeom>
-          <a:noFill/>
-          <a:ln/>
-        </p:spPr>
-        <p:txBody>
-          <a:bodyPr wrap="square" lIns="0" tIns="0" rIns="0" bIns="0" rtlCol="0" anchor="ctr"/>
-          <a:lstStyle/>
-          <a:p>
-            <a:pPr algn="ctr" indent="0" marL="0">
-              <a:buNone/>
-            </a:pPr>
-            <a:r>
-              <a:rPr lang="en-US" sz="2200" dirty="0">
-                <a:solidFill>
-                  <a:srgbClr val="EFE8D6"/>
-                </a:solidFill>
-                <a:latin typeface="Georgia" pitchFamily="34" charset="0"/>
-                <a:ea typeface="Georgia" pitchFamily="34" charset="-122"/>
-                <a:cs typeface="Georgia" pitchFamily="34" charset="-120"/>
-              </a:rPr>
-              <a:t>01</a:t>
-            </a:r>
-            <a:endParaRPr lang="en-US" sz="2200" dirty="0"/>
-          </a:p>
-        </p:txBody>
-      </p:sp>
-      <p:sp>
-        <p:nvSpPr>
-          <p:cNvPr id="7" name="Shape 5"/>
-          <p:cNvSpPr/>
-          <p:nvPr/>
-        </p:nvSpPr>
-        <p:spPr>
-          <a:xfrm>
-            <a:off x="1691640" y="1097280"/>
-            <a:ext cx="9966960" cy="1280160"/>
+            <a:off x="502920" y="1005840"/>
+            <a:ext cx="5577840" cy="4937760"/>
           </a:xfrm>
           <a:prstGeom prst="rect">
             <a:avLst/>
@@ -7713,157 +9046,20 @@
       </p:sp>
       <p:sp>
         <p:nvSpPr>
-          <p:cNvPr id="8" name="Text 6"/>
-          <p:cNvSpPr/>
-          <p:nvPr/>
-        </p:nvSpPr>
-        <p:spPr>
-          <a:xfrm>
-            <a:off x="1965960" y="1280160"/>
-            <a:ext cx="9509760" cy="365760"/>
-          </a:xfrm>
-          <a:prstGeom prst="rect">
-            <a:avLst/>
-          </a:prstGeom>
-          <a:noFill/>
-          <a:ln/>
-        </p:spPr>
-        <p:txBody>
-          <a:bodyPr wrap="square" lIns="0" tIns="0" rIns="0" bIns="0" rtlCol="0" anchor="ctr"/>
-          <a:lstStyle/>
-          <a:p>
-            <a:pPr indent="0" marL="0">
-              <a:buNone/>
-            </a:pPr>
-            <a:r>
-              <a:rPr lang="en-US" sz="1800" b="1" dirty="0">
-                <a:solidFill>
-                  <a:srgbClr val="1A1A1A"/>
-                </a:solidFill>
-                <a:latin typeface="Calibri" pitchFamily="34" charset="0"/>
-                <a:ea typeface="Calibri" pitchFamily="34" charset="-122"/>
-                <a:cs typeface="Calibri" pitchFamily="34" charset="-120"/>
-              </a:rPr>
-              <a:t>Đọc tay thêm</a:t>
-            </a:r>
-            <a:endParaRPr lang="en-US" sz="1800" dirty="0"/>
-          </a:p>
-        </p:txBody>
-      </p:sp>
-      <p:sp>
-        <p:nvSpPr>
-          <p:cNvPr id="9" name="Text 7"/>
-          <p:cNvSpPr/>
-          <p:nvPr/>
-        </p:nvSpPr>
-        <p:spPr>
-          <a:xfrm>
-            <a:off x="1965960" y="1737360"/>
-            <a:ext cx="9509760" cy="411480"/>
-          </a:xfrm>
-          <a:prstGeom prst="rect">
-            <a:avLst/>
-          </a:prstGeom>
-          <a:noFill/>
-          <a:ln/>
-        </p:spPr>
-        <p:txBody>
-          <a:bodyPr wrap="square" lIns="0" tIns="0" rIns="0" bIns="0" rtlCol="0" anchor="ctr"/>
-          <a:lstStyle/>
-          <a:p>
-            <a:pPr indent="0" marL="0">
-              <a:buNone/>
-            </a:pPr>
-            <a:r>
-              <a:rPr lang="en-US" sz="1600" dirty="0">
-                <a:solidFill>
-                  <a:srgbClr val="2B2B2B"/>
-                </a:solidFill>
-                <a:latin typeface="Calibri" pitchFamily="34" charset="0"/>
-                <a:ea typeface="Calibri" pitchFamily="34" charset="-122"/>
-                <a:cs typeface="Calibri" pitchFamily="34" charset="-120"/>
-              </a:rPr>
-              <a:t>Mở rộng 20 bài; đếm sai tên/số có hệ thống.</a:t>
-            </a:r>
-            <a:endParaRPr lang="en-US" sz="1600" dirty="0"/>
-          </a:p>
-        </p:txBody>
-      </p:sp>
-      <p:sp>
-        <p:nvSpPr>
-          <p:cNvPr id="10" name="Shape 8"/>
-          <p:cNvSpPr/>
-          <p:nvPr/>
-        </p:nvSpPr>
-        <p:spPr>
-          <a:xfrm>
-            <a:off x="502920" y="2560320"/>
-            <a:ext cx="1188720" cy="1280160"/>
+          <p:cNvPr id="6" name="Shape 4"/>
+          <p:cNvSpPr/>
+          <p:nvPr/>
+        </p:nvSpPr>
+        <p:spPr>
+          <a:xfrm>
+            <a:off x="6263640" y="1005840"/>
+            <a:ext cx="5394960" cy="4937760"/>
           </a:xfrm>
           <a:prstGeom prst="rect">
             <a:avLst/>
           </a:prstGeom>
           <a:solidFill>
-            <a:srgbClr val="0B0B0B"/>
-          </a:solidFill>
-          <a:ln/>
-        </p:spPr>
-      </p:sp>
-      <p:sp>
-        <p:nvSpPr>
-          <p:cNvPr id="11" name="Text 9"/>
-          <p:cNvSpPr/>
-          <p:nvPr/>
-        </p:nvSpPr>
-        <p:spPr>
-          <a:xfrm>
-            <a:off x="502920" y="2926080"/>
-            <a:ext cx="1188720" cy="502920"/>
-          </a:xfrm>
-          <a:prstGeom prst="rect">
-            <a:avLst/>
-          </a:prstGeom>
-          <a:noFill/>
-          <a:ln/>
-        </p:spPr>
-        <p:txBody>
-          <a:bodyPr wrap="square" lIns="0" tIns="0" rIns="0" bIns="0" rtlCol="0" anchor="ctr"/>
-          <a:lstStyle/>
-          <a:p>
-            <a:pPr algn="ctr" indent="0" marL="0">
-              <a:buNone/>
-            </a:pPr>
-            <a:r>
-              <a:rPr lang="en-US" sz="2200" dirty="0">
-                <a:solidFill>
-                  <a:srgbClr val="EFE8D6"/>
-                </a:solidFill>
-                <a:latin typeface="Georgia" pitchFamily="34" charset="0"/>
-                <a:ea typeface="Georgia" pitchFamily="34" charset="-122"/>
-                <a:cs typeface="Georgia" pitchFamily="34" charset="-120"/>
-              </a:rPr>
-              <a:t>02</a:t>
-            </a:r>
-            <a:endParaRPr lang="en-US" sz="2200" dirty="0"/>
-          </a:p>
-        </p:txBody>
-      </p:sp>
-      <p:sp>
-        <p:nvSpPr>
-          <p:cNvPr id="12" name="Shape 10"/>
-          <p:cNvSpPr/>
-          <p:nvPr/>
-        </p:nvSpPr>
-        <p:spPr>
-          <a:xfrm>
-            <a:off x="1691640" y="2560320"/>
-            <a:ext cx="9966960" cy="1280160"/>
-          </a:xfrm>
-          <a:prstGeom prst="rect">
-            <a:avLst/>
-          </a:prstGeom>
-          <a:solidFill>
-            <a:srgbClr val="F7F3E8"/>
+            <a:srgbClr val="F2E5D0"/>
           </a:solidFill>
           <a:ln w="9525">
             <a:solidFill>
@@ -7875,14 +9071,14 @@
       </p:sp>
       <p:sp>
         <p:nvSpPr>
-          <p:cNvPr id="13" name="Text 11"/>
-          <p:cNvSpPr/>
-          <p:nvPr/>
-        </p:nvSpPr>
-        <p:spPr>
-          <a:xfrm>
-            <a:off x="1965960" y="2743200"/>
-            <a:ext cx="9509760" cy="365760"/>
+          <p:cNvPr id="7" name="Text 5"/>
+          <p:cNvSpPr/>
+          <p:nvPr/>
+        </p:nvSpPr>
+        <p:spPr>
+          <a:xfrm>
+            <a:off x="731520" y="1188720"/>
+            <a:ext cx="5120640" cy="365760"/>
           </a:xfrm>
           <a:prstGeom prst="rect">
             <a:avLst/>
@@ -7898,30 +9094,30 @@
               <a:buNone/>
             </a:pPr>
             <a:r>
-              <a:rPr lang="en-US" sz="1800" b="1" dirty="0">
-                <a:solidFill>
-                  <a:srgbClr val="1A1A1A"/>
+              <a:rPr lang="en-US" sz="1400" dirty="0">
+                <a:solidFill>
+                  <a:srgbClr val="B8432A"/>
                 </a:solidFill>
                 <a:latin typeface="Calibri" pitchFamily="34" charset="0"/>
                 <a:ea typeface="Calibri" pitchFamily="34" charset="-122"/>
                 <a:cs typeface="Calibri" pitchFamily="34" charset="-120"/>
               </a:rPr>
-              <a:t>Gold đa tin</a:t>
-            </a:r>
-            <a:endParaRPr lang="en-US" sz="1800" dirty="0"/>
-          </a:p>
-        </p:txBody>
-      </p:sp>
-      <p:sp>
-        <p:nvSpPr>
-          <p:cNvPr id="14" name="Text 12"/>
-          <p:cNvSpPr/>
-          <p:nvPr/>
-        </p:nvSpPr>
-        <p:spPr>
-          <a:xfrm>
-            <a:off x="1965960" y="3200400"/>
-            <a:ext cx="9509760" cy="411480"/>
+              <a:t>Nhận được</a:t>
+            </a:r>
+            <a:endParaRPr lang="en-US" sz="1400" dirty="0"/>
+          </a:p>
+        </p:txBody>
+      </p:sp>
+      <p:sp>
+        <p:nvSpPr>
+          <p:cNvPr id="8" name="Text 6"/>
+          <p:cNvSpPr/>
+          <p:nvPr/>
+        </p:nvSpPr>
+        <p:spPr>
+          <a:xfrm>
+            <a:off x="731520" y="1691640"/>
+            <a:ext cx="5074920" cy="1143000"/>
           </a:xfrm>
           <a:prstGeom prst="rect">
             <a:avLst/>
@@ -7937,7 +9133,7 @@
               <a:buNone/>
             </a:pPr>
             <a:r>
-              <a:rPr lang="en-US" sz="1600" dirty="0">
+              <a:rPr lang="en-US" sz="1500" dirty="0">
                 <a:solidFill>
                   <a:srgbClr val="2B2B2B"/>
                 </a:solidFill>
@@ -7945,106 +9141,22 @@
                 <a:ea typeface="Calibri" pitchFamily="34" charset="-122"/>
                 <a:cs typeface="Calibri" pitchFamily="34" charset="-120"/>
               </a:rPr>
-              <a:t>Tách bài “an ninh 24h” thành từng tin trước khi tóm.</a:t>
-            </a:r>
-            <a:endParaRPr lang="en-US" sz="1600" dirty="0"/>
-          </a:p>
-        </p:txBody>
-      </p:sp>
-      <p:sp>
-        <p:nvSpPr>
-          <p:cNvPr id="15" name="Shape 13"/>
-          <p:cNvSpPr/>
-          <p:nvPr/>
-        </p:nvSpPr>
-        <p:spPr>
-          <a:xfrm>
-            <a:off x="502920" y="4023360"/>
-            <a:ext cx="1188720" cy="1280160"/>
-          </a:xfrm>
-          <a:prstGeom prst="rect">
-            <a:avLst/>
-          </a:prstGeom>
-          <a:solidFill>
-            <a:srgbClr val="0B0B0B"/>
-          </a:solidFill>
-          <a:ln/>
-        </p:spPr>
-      </p:sp>
-      <p:sp>
-        <p:nvSpPr>
-          <p:cNvPr id="16" name="Text 14"/>
-          <p:cNvSpPr/>
-          <p:nvPr/>
-        </p:nvSpPr>
-        <p:spPr>
-          <a:xfrm>
-            <a:off x="502920" y="4389120"/>
-            <a:ext cx="1188720" cy="502920"/>
-          </a:xfrm>
-          <a:prstGeom prst="rect">
-            <a:avLst/>
-          </a:prstGeom>
-          <a:noFill/>
-          <a:ln/>
-        </p:spPr>
-        <p:txBody>
-          <a:bodyPr wrap="square" lIns="0" tIns="0" rIns="0" bIns="0" rtlCol="0" anchor="ctr"/>
-          <a:lstStyle/>
-          <a:p>
-            <a:pPr algn="ctr" indent="0" marL="0">
-              <a:buNone/>
-            </a:pPr>
-            <a:r>
-              <a:rPr lang="en-US" sz="2200" dirty="0">
-                <a:solidFill>
-                  <a:srgbClr val="EFE8D6"/>
-                </a:solidFill>
-                <a:latin typeface="Georgia" pitchFamily="34" charset="0"/>
-                <a:ea typeface="Georgia" pitchFamily="34" charset="-122"/>
-                <a:cs typeface="Georgia" pitchFamily="34" charset="-120"/>
-              </a:rPr>
-              <a:t>03</a:t>
-            </a:r>
-            <a:endParaRPr lang="en-US" sz="2200" dirty="0"/>
-          </a:p>
-        </p:txBody>
-      </p:sp>
-      <p:sp>
-        <p:nvSpPr>
-          <p:cNvPr id="17" name="Shape 15"/>
-          <p:cNvSpPr/>
-          <p:nvPr/>
-        </p:nvSpPr>
-        <p:spPr>
-          <a:xfrm>
-            <a:off x="1691640" y="4023360"/>
-            <a:ext cx="9966960" cy="1280160"/>
-          </a:xfrm>
-          <a:prstGeom prst="rect">
-            <a:avLst/>
-          </a:prstGeom>
-          <a:solidFill>
-            <a:srgbClr val="F7F3E8"/>
-          </a:solidFill>
-          <a:ln w="9525">
-            <a:solidFill>
-              <a:srgbClr val="C8C0AE"/>
-            </a:solidFill>
-            <a:prstDash val="solid"/>
-          </a:ln>
-        </p:spPr>
-      </p:sp>
-      <p:sp>
-        <p:nvSpPr>
-          <p:cNvPr id="18" name="Text 16"/>
-          <p:cNvSpPr/>
-          <p:nvPr/>
-        </p:nvSpPr>
-        <p:spPr>
-          <a:xfrm>
-            <a:off x="1965960" y="4206240"/>
-            <a:ext cx="9509760" cy="365760"/>
+              <a:t>Trên 100 bài test đầu Vietnews, ViT5 ROUGE-1/2/L cao hơn Lead-3 và TextRank một chút.</a:t>
+            </a:r>
+            <a:endParaRPr lang="en-US" sz="1500" dirty="0"/>
+          </a:p>
+        </p:txBody>
+      </p:sp>
+      <p:sp>
+        <p:nvSpPr>
+          <p:cNvPr id="9" name="Text 7"/>
+          <p:cNvSpPr/>
+          <p:nvPr/>
+        </p:nvSpPr>
+        <p:spPr>
+          <a:xfrm>
+            <a:off x="731520" y="2926080"/>
+            <a:ext cx="5074920" cy="1143000"/>
           </a:xfrm>
           <a:prstGeom prst="rect">
             <a:avLst/>
@@ -8060,30 +9172,30 @@
               <a:buNone/>
             </a:pPr>
             <a:r>
-              <a:rPr lang="en-US" sz="1800" b="1" dirty="0">
-                <a:solidFill>
-                  <a:srgbClr val="1A1A1A"/>
+              <a:rPr lang="en-US" sz="1500" dirty="0">
+                <a:solidFill>
+                  <a:srgbClr val="2B2B2B"/>
                 </a:solidFill>
                 <a:latin typeface="Calibri" pitchFamily="34" charset="0"/>
                 <a:ea typeface="Calibri" pitchFamily="34" charset="-122"/>
                 <a:cs typeface="Calibri" pitchFamily="34" charset="-120"/>
               </a:rPr>
-              <a:t>Không train trùng</a:t>
-            </a:r>
-            <a:endParaRPr lang="en-US" sz="1800" dirty="0"/>
-          </a:p>
-        </p:txBody>
-      </p:sp>
-      <p:sp>
-        <p:nvSpPr>
-          <p:cNvPr id="19" name="Text 17"/>
-          <p:cNvSpPr/>
-          <p:nvPr/>
-        </p:nvSpPr>
-        <p:spPr>
-          <a:xfrm>
-            <a:off x="1965960" y="4663440"/>
-            <a:ext cx="9509760" cy="411480"/>
+              <a:t>Đọc tay 20 bài: ViT5 vẫn sai tên, đảo ý, bịa chi tiết — ROUGE không thay cho đối chiếu gold.</a:t>
+            </a:r>
+            <a:endParaRPr lang="en-US" sz="1500" dirty="0"/>
+          </a:p>
+        </p:txBody>
+      </p:sp>
+      <p:sp>
+        <p:nvSpPr>
+          <p:cNvPr id="10" name="Text 8"/>
+          <p:cNvSpPr/>
+          <p:nvPr/>
+        </p:nvSpPr>
+        <p:spPr>
+          <a:xfrm>
+            <a:off x="731520" y="4160520"/>
+            <a:ext cx="5074920" cy="1143000"/>
           </a:xfrm>
           <a:prstGeom prst="rect">
             <a:avLst/>
@@ -8099,7 +9211,7 @@
               <a:buNone/>
             </a:pPr>
             <a:r>
-              <a:rPr lang="en-US" sz="1600" dirty="0">
+              <a:rPr lang="en-US" sz="1500" dirty="0">
                 <a:solidFill>
                   <a:srgbClr val="2B2B2B"/>
                 </a:solidFill>
@@ -8107,22 +9219,22 @@
                 <a:ea typeface="Calibri" pitchFamily="34" charset="-122"/>
                 <a:cs typeface="Calibri" pitchFamily="34" charset="-120"/>
               </a:rPr>
-              <a:t>Nếu fine-tune, phải miền khác Vietnews.</a:t>
-            </a:r>
-            <a:endParaRPr lang="en-US" sz="1600" dirty="0"/>
-          </a:p>
-        </p:txBody>
-      </p:sp>
-      <p:sp>
-        <p:nvSpPr>
-          <p:cNvPr id="20" name="Text 18"/>
-          <p:cNvSpPr/>
-          <p:nvPr/>
-        </p:nvSpPr>
-        <p:spPr>
-          <a:xfrm>
-            <a:off x="502920" y="6510528"/>
-            <a:ext cx="8229600" cy="201168"/>
+              <a:t>Lead-3 an toàn về chữ (lấy từ bài) nhưng hay lệch sapo.</a:t>
+            </a:r>
+            <a:endParaRPr lang="en-US" sz="1500" dirty="0"/>
+          </a:p>
+        </p:txBody>
+      </p:sp>
+      <p:sp>
+        <p:nvSpPr>
+          <p:cNvPr id="11" name="Text 9"/>
+          <p:cNvSpPr/>
+          <p:nvPr/>
+        </p:nvSpPr>
+        <p:spPr>
+          <a:xfrm>
+            <a:off x="6492240" y="1188720"/>
+            <a:ext cx="4937760" cy="365760"/>
           </a:xfrm>
           <a:prstGeom prst="rect">
             <a:avLst/>
@@ -8138,14 +9250,209 @@
               <a:buNone/>
             </a:pPr>
             <a:r>
-              <a:rPr lang="en-US" sz="1000" dirty="0">
-                <a:solidFill>
-                  <a:srgbClr val="B5AFA0"/>
+              <a:rPr lang="en-US" sz="1400" dirty="0">
+                <a:solidFill>
+                  <a:srgbClr val="B8432A"/>
                 </a:solidFill>
                 <a:latin typeface="Calibri" pitchFamily="34" charset="0"/>
                 <a:ea typeface="Calibri" pitchFamily="34" charset="-122"/>
                 <a:cs typeface="Calibri" pitchFamily="34" charset="-120"/>
               </a:rPr>
+              <a:t>Không nhận</a:t>
+            </a:r>
+            <a:endParaRPr lang="en-US" sz="1400" dirty="0"/>
+          </a:p>
+        </p:txBody>
+      </p:sp>
+      <p:sp>
+        <p:nvSpPr>
+          <p:cNvPr id="12" name="Text 10"/>
+          <p:cNvSpPr/>
+          <p:nvPr/>
+        </p:nvSpPr>
+        <p:spPr>
+          <a:xfrm>
+            <a:off x="6492240" y="1691640"/>
+            <a:ext cx="4937760" cy="868680"/>
+          </a:xfrm>
+          <a:prstGeom prst="rect">
+            <a:avLst/>
+          </a:prstGeom>
+          <a:noFill/>
+          <a:ln/>
+        </p:spPr>
+        <p:txBody>
+          <a:bodyPr wrap="square" lIns="0" tIns="0" rIns="0" bIns="0" rtlCol="0" anchor="ctr"/>
+          <a:lstStyle/>
+          <a:p>
+            <a:pPr indent="0" marL="0">
+              <a:buNone/>
+            </a:pPr>
+            <a:r>
+              <a:rPr lang="en-US" sz="1500" dirty="0">
+                <a:solidFill>
+                  <a:srgbClr val="2B2B2B"/>
+                </a:solidFill>
+                <a:latin typeface="Calibri" pitchFamily="34" charset="0"/>
+                <a:ea typeface="Calibri" pitchFamily="34" charset="-122"/>
+                <a:cs typeface="Calibri" pitchFamily="34" charset="-120"/>
+              </a:rPr>
+              <a:t>Chỉ 100 bài, không phải full test gốc paper.</a:t>
+            </a:r>
+            <a:endParaRPr lang="en-US" sz="1500" dirty="0"/>
+          </a:p>
+        </p:txBody>
+      </p:sp>
+      <p:sp>
+        <p:nvSpPr>
+          <p:cNvPr id="13" name="Text 11"/>
+          <p:cNvSpPr/>
+          <p:nvPr/>
+        </p:nvSpPr>
+        <p:spPr>
+          <a:xfrm>
+            <a:off x="6492240" y="2651760"/>
+            <a:ext cx="4937760" cy="868680"/>
+          </a:xfrm>
+          <a:prstGeom prst="rect">
+            <a:avLst/>
+          </a:prstGeom>
+          <a:noFill/>
+          <a:ln/>
+        </p:spPr>
+        <p:txBody>
+          <a:bodyPr wrap="square" lIns="0" tIns="0" rIns="0" bIns="0" rtlCol="0" anchor="ctr"/>
+          <a:lstStyle/>
+          <a:p>
+            <a:pPr indent="0" marL="0">
+              <a:buNone/>
+            </a:pPr>
+            <a:r>
+              <a:rPr lang="en-US" sz="1500" dirty="0">
+                <a:solidFill>
+                  <a:srgbClr val="2B2B2B"/>
+                </a:solidFill>
+                <a:latin typeface="Calibri" pitchFamily="34" charset="0"/>
+                <a:ea typeface="Calibri" pitchFamily="34" charset="-122"/>
+                <a:cs typeface="Calibri" pitchFamily="34" charset="-120"/>
+              </a:rPr>
+              <a:t>ViT5 đã học Vietnews; không tách được “khả năng mô hình” với “đã thấy miền này”.</a:t>
+            </a:r>
+            <a:endParaRPr lang="en-US" sz="1500" dirty="0"/>
+          </a:p>
+        </p:txBody>
+      </p:sp>
+      <p:sp>
+        <p:nvSpPr>
+          <p:cNvPr id="14" name="Text 12"/>
+          <p:cNvSpPr/>
+          <p:nvPr/>
+        </p:nvSpPr>
+        <p:spPr>
+          <a:xfrm>
+            <a:off x="6492240" y="3611880"/>
+            <a:ext cx="4937760" cy="868680"/>
+          </a:xfrm>
+          <a:prstGeom prst="rect">
+            <a:avLst/>
+          </a:prstGeom>
+          <a:noFill/>
+          <a:ln/>
+        </p:spPr>
+        <p:txBody>
+          <a:bodyPr wrap="square" lIns="0" tIns="0" rIns="0" bIns="0" rtlCol="0" anchor="ctr"/>
+          <a:lstStyle/>
+          <a:p>
+            <a:pPr indent="0" marL="0">
+              <a:buNone/>
+            </a:pPr>
+            <a:r>
+              <a:rPr lang="en-US" sz="1500" dirty="0">
+                <a:solidFill>
+                  <a:srgbClr val="2B2B2B"/>
+                </a:solidFill>
+                <a:latin typeface="Calibri" pitchFamily="34" charset="0"/>
+                <a:ea typeface="Calibri" pitchFamily="34" charset="-122"/>
+                <a:cs typeface="Calibri" pitchFamily="34" charset="-120"/>
+              </a:rPr>
+              <a:t>Gold dạng bản tin 24h (nhiều tin/bài) cả ba hệ đều yếu.</a:t>
+            </a:r>
+            <a:endParaRPr lang="en-US" sz="1500" dirty="0"/>
+          </a:p>
+        </p:txBody>
+      </p:sp>
+      <p:sp>
+        <p:nvSpPr>
+          <p:cNvPr id="15" name="Text 13"/>
+          <p:cNvSpPr/>
+          <p:nvPr/>
+        </p:nvSpPr>
+        <p:spPr>
+          <a:xfrm>
+            <a:off x="6492240" y="4572000"/>
+            <a:ext cx="4937760" cy="868680"/>
+          </a:xfrm>
+          <a:prstGeom prst="rect">
+            <a:avLst/>
+          </a:prstGeom>
+          <a:noFill/>
+          <a:ln/>
+        </p:spPr>
+        <p:txBody>
+          <a:bodyPr wrap="square" lIns="0" tIns="0" rIns="0" bIns="0" rtlCol="0" anchor="ctr"/>
+          <a:lstStyle/>
+          <a:p>
+            <a:pPr indent="0" marL="0">
+              <a:buNone/>
+            </a:pPr>
+            <a:r>
+              <a:rPr lang="en-US" sz="1500" dirty="0">
+                <a:solidFill>
+                  <a:srgbClr val="2B2B2B"/>
+                </a:solidFill>
+                <a:latin typeface="Calibri" pitchFamily="34" charset="0"/>
+                <a:ea typeface="Calibri" pitchFamily="34" charset="-122"/>
+                <a:cs typeface="Calibri" pitchFamily="34" charset="-120"/>
+              </a:rPr>
+              <a:t>Chưa đo latency; chưa full test paper.</a:t>
+            </a:r>
+            <a:endParaRPr lang="en-US" sz="1500" dirty="0"/>
+          </a:p>
+        </p:txBody>
+      </p:sp>
+      <p:sp>
+        <p:nvSpPr>
+          <p:cNvPr id="16" name="Text 14"/>
+          <p:cNvSpPr/>
+          <p:nvPr/>
+        </p:nvSpPr>
+        <p:spPr>
+          <a:xfrm>
+            <a:off x="502920" y="6510528"/>
+            <a:ext cx="8229600" cy="201168"/>
+          </a:xfrm>
+          <a:prstGeom prst="rect">
+            <a:avLst/>
+          </a:prstGeom>
+          <a:noFill/>
+          <a:ln/>
+        </p:spPr>
+        <p:txBody>
+          <a:bodyPr wrap="square" lIns="0" tIns="0" rIns="0" bIns="0" rtlCol="0" anchor="ctr"/>
+          <a:lstStyle/>
+          <a:p>
+            <a:pPr indent="0" marL="0">
+              <a:buNone/>
+            </a:pPr>
+            <a:r>
+              <a:rPr lang="en-US" sz="1000" dirty="0">
+                <a:solidFill>
+                  <a:srgbClr val="B5AFA0"/>
+                </a:solidFill>
+                <a:latin typeface="Calibri" pitchFamily="34" charset="0"/>
+                <a:ea typeface="Calibri" pitchFamily="34" charset="-122"/>
+                <a:cs typeface="Calibri" pitchFamily="34" charset="-120"/>
+              </a:rPr>
               <a:t>CS221 · UIT  ·  Vietnews extractive vs abstractive</a:t>
             </a:r>
             <a:endParaRPr lang="en-US" sz="1000" dirty="0"/>
@@ -8154,7 +9461,7 @@
       </p:sp>
       <p:sp>
         <p:nvSpPr>
-          <p:cNvPr id="21" name="Text 19"/>
+          <p:cNvPr id="17" name="Text 15"/>
           <p:cNvSpPr/>
           <p:nvPr/>
         </p:nvSpPr>
@@ -8256,7 +9563,7 @@
                 <a:ea typeface="Calibri" pitchFamily="34" charset="-122"/>
                 <a:cs typeface="Calibri" pitchFamily="34" charset="-120"/>
               </a:rPr>
-              <a:t>16  TÀI LIỆU</a:t>
+              <a:t>15  NẾU LÀM TIẾP</a:t>
             </a:r>
             <a:endParaRPr lang="en-US" sz="1100" dirty="0"/>
           </a:p>
@@ -8295,7 +9602,7 @@
                 <a:ea typeface="Calibri" pitchFamily="34" charset="-122"/>
                 <a:cs typeface="Calibri" pitchFamily="34" charset="-120"/>
               </a:rPr>
-              <a:t>Đã dùng</a:t>
+              <a:t>Ngoài phạm vi đồ án</a:t>
             </a:r>
             <a:endParaRPr lang="en-US" sz="1200" dirty="0"/>
           </a:p>
@@ -8326,14 +9633,98 @@
       </p:sp>
       <p:sp>
         <p:nvSpPr>
-          <p:cNvPr id="5" name="Text 3"/>
-          <p:cNvSpPr/>
-          <p:nvPr/>
-        </p:nvSpPr>
-        <p:spPr>
-          <a:xfrm>
-            <a:off x="640080" y="1097280"/>
-            <a:ext cx="10972800" cy="685800"/>
+          <p:cNvPr id="5" name="Shape 3"/>
+          <p:cNvSpPr/>
+          <p:nvPr/>
+        </p:nvSpPr>
+        <p:spPr>
+          <a:xfrm>
+            <a:off x="502920" y="1097280"/>
+            <a:ext cx="1188720" cy="1280160"/>
+          </a:xfrm>
+          <a:prstGeom prst="rect">
+            <a:avLst/>
+          </a:prstGeom>
+          <a:solidFill>
+            <a:srgbClr val="0B0B0B"/>
+          </a:solidFill>
+          <a:ln/>
+        </p:spPr>
+      </p:sp>
+      <p:sp>
+        <p:nvSpPr>
+          <p:cNvPr id="6" name="Text 4"/>
+          <p:cNvSpPr/>
+          <p:nvPr/>
+        </p:nvSpPr>
+        <p:spPr>
+          <a:xfrm>
+            <a:off x="502920" y="1463040"/>
+            <a:ext cx="1188720" cy="502920"/>
+          </a:xfrm>
+          <a:prstGeom prst="rect">
+            <a:avLst/>
+          </a:prstGeom>
+          <a:noFill/>
+          <a:ln/>
+        </p:spPr>
+        <p:txBody>
+          <a:bodyPr wrap="square" lIns="0" tIns="0" rIns="0" bIns="0" rtlCol="0" anchor="ctr"/>
+          <a:lstStyle/>
+          <a:p>
+            <a:pPr algn="ctr" indent="0" marL="0">
+              <a:buNone/>
+            </a:pPr>
+            <a:r>
+              <a:rPr lang="en-US" sz="2200" dirty="0">
+                <a:solidFill>
+                  <a:srgbClr val="EFE8D6"/>
+                </a:solidFill>
+                <a:latin typeface="Georgia" pitchFamily="34" charset="0"/>
+                <a:ea typeface="Georgia" pitchFamily="34" charset="-122"/>
+                <a:cs typeface="Georgia" pitchFamily="34" charset="-120"/>
+              </a:rPr>
+              <a:t>01</a:t>
+            </a:r>
+            <a:endParaRPr lang="en-US" sz="2200" dirty="0"/>
+          </a:p>
+        </p:txBody>
+      </p:sp>
+      <p:sp>
+        <p:nvSpPr>
+          <p:cNvPr id="7" name="Shape 5"/>
+          <p:cNvSpPr/>
+          <p:nvPr/>
+        </p:nvSpPr>
+        <p:spPr>
+          <a:xfrm>
+            <a:off x="1691640" y="1097280"/>
+            <a:ext cx="9966960" cy="1280160"/>
+          </a:xfrm>
+          <a:prstGeom prst="rect">
+            <a:avLst/>
+          </a:prstGeom>
+          <a:solidFill>
+            <a:srgbClr val="F7F3E8"/>
+          </a:solidFill>
+          <a:ln w="9525">
+            <a:solidFill>
+              <a:srgbClr val="C8C0AE"/>
+            </a:solidFill>
+            <a:prstDash val="solid"/>
+          </a:ln>
+        </p:spPr>
+      </p:sp>
+      <p:sp>
+        <p:nvSpPr>
+          <p:cNvPr id="8" name="Text 6"/>
+          <p:cNvSpPr/>
+          <p:nvPr/>
+        </p:nvSpPr>
+        <p:spPr>
+          <a:xfrm>
+            <a:off x="1965960" y="1280160"/>
+            <a:ext cx="9509760" cy="365760"/>
           </a:xfrm>
           <a:prstGeom prst="rect">
             <a:avLst/>
@@ -8349,30 +9740,30 @@
               <a:buNone/>
             </a:pPr>
             <a:r>
-              <a:rPr lang="en-US" sz="1600" dirty="0">
-                <a:solidFill>
-                  <a:srgbClr val="2B2B2B"/>
+              <a:rPr lang="en-US" sz="1800" b="1" dirty="0">
+                <a:solidFill>
+                  <a:srgbClr val="1A1A1A"/>
                 </a:solidFill>
                 <a:latin typeface="Calibri" pitchFamily="34" charset="0"/>
                 <a:ea typeface="Calibri" pitchFamily="34" charset="-122"/>
                 <a:cs typeface="Calibri" pitchFamily="34" charset="-120"/>
               </a:rPr>
-              <a:t>1.  Nguyen et al. — VNDS / Vietnews. https://github.com/ThanhChinhBK/vietnews</a:t>
-            </a:r>
-            <a:endParaRPr lang="en-US" sz="1600" dirty="0"/>
-          </a:p>
-        </p:txBody>
-      </p:sp>
-      <p:sp>
-        <p:nvSpPr>
-          <p:cNvPr id="6" name="Text 4"/>
-          <p:cNvSpPr/>
-          <p:nvPr/>
-        </p:nvSpPr>
-        <p:spPr>
-          <a:xfrm>
-            <a:off x="640080" y="1874520"/>
-            <a:ext cx="10972800" cy="685800"/>
+              <a:t>Đọc tay thêm</a:t>
+            </a:r>
+            <a:endParaRPr lang="en-US" sz="1800" dirty="0"/>
+          </a:p>
+        </p:txBody>
+      </p:sp>
+      <p:sp>
+        <p:nvSpPr>
+          <p:cNvPr id="9" name="Text 7"/>
+          <p:cNvSpPr/>
+          <p:nvPr/>
+        </p:nvSpPr>
+        <p:spPr>
+          <a:xfrm>
+            <a:off x="1965960" y="1737360"/>
+            <a:ext cx="9509760" cy="411480"/>
           </a:xfrm>
           <a:prstGeom prst="rect">
             <a:avLst/>
@@ -8396,7 +9787,7 @@
                 <a:ea typeface="Calibri" pitchFamily="34" charset="-122"/>
                 <a:cs typeface="Calibri" pitchFamily="34" charset="-120"/>
               </a:rPr>
-              <a:t>2.  Phan et al. 2022. ViT5. NAACL SRW. Checkpoint: VietAI/vit5-base-vietnews-summarization</a:t>
+              <a:t>Mở rộng 20 bài; đếm sai tên/số có hệ thống.</a:t>
             </a:r>
             <a:endParaRPr lang="en-US" sz="1600" dirty="0"/>
           </a:p>
@@ -8404,14 +9795,98 @@
       </p:sp>
       <p:sp>
         <p:nvSpPr>
-          <p:cNvPr id="7" name="Text 5"/>
-          <p:cNvSpPr/>
-          <p:nvPr/>
-        </p:nvSpPr>
-        <p:spPr>
-          <a:xfrm>
-            <a:off x="640080" y="2651760"/>
-            <a:ext cx="10972800" cy="685800"/>
+          <p:cNvPr id="10" name="Shape 8"/>
+          <p:cNvSpPr/>
+          <p:nvPr/>
+        </p:nvSpPr>
+        <p:spPr>
+          <a:xfrm>
+            <a:off x="502920" y="2560320"/>
+            <a:ext cx="1188720" cy="1280160"/>
+          </a:xfrm>
+          <a:prstGeom prst="rect">
+            <a:avLst/>
+          </a:prstGeom>
+          <a:solidFill>
+            <a:srgbClr val="0B0B0B"/>
+          </a:solidFill>
+          <a:ln/>
+        </p:spPr>
+      </p:sp>
+      <p:sp>
+        <p:nvSpPr>
+          <p:cNvPr id="11" name="Text 9"/>
+          <p:cNvSpPr/>
+          <p:nvPr/>
+        </p:nvSpPr>
+        <p:spPr>
+          <a:xfrm>
+            <a:off x="502920" y="2926080"/>
+            <a:ext cx="1188720" cy="502920"/>
+          </a:xfrm>
+          <a:prstGeom prst="rect">
+            <a:avLst/>
+          </a:prstGeom>
+          <a:noFill/>
+          <a:ln/>
+        </p:spPr>
+        <p:txBody>
+          <a:bodyPr wrap="square" lIns="0" tIns="0" rIns="0" bIns="0" rtlCol="0" anchor="ctr"/>
+          <a:lstStyle/>
+          <a:p>
+            <a:pPr algn="ctr" indent="0" marL="0">
+              <a:buNone/>
+            </a:pPr>
+            <a:r>
+              <a:rPr lang="en-US" sz="2200" dirty="0">
+                <a:solidFill>
+                  <a:srgbClr val="EFE8D6"/>
+                </a:solidFill>
+                <a:latin typeface="Georgia" pitchFamily="34" charset="0"/>
+                <a:ea typeface="Georgia" pitchFamily="34" charset="-122"/>
+                <a:cs typeface="Georgia" pitchFamily="34" charset="-120"/>
+              </a:rPr>
+              <a:t>02</a:t>
+            </a:r>
+            <a:endParaRPr lang="en-US" sz="2200" dirty="0"/>
+          </a:p>
+        </p:txBody>
+      </p:sp>
+      <p:sp>
+        <p:nvSpPr>
+          <p:cNvPr id="12" name="Shape 10"/>
+          <p:cNvSpPr/>
+          <p:nvPr/>
+        </p:nvSpPr>
+        <p:spPr>
+          <a:xfrm>
+            <a:off x="1691640" y="2560320"/>
+            <a:ext cx="9966960" cy="1280160"/>
+          </a:xfrm>
+          <a:prstGeom prst="rect">
+            <a:avLst/>
+          </a:prstGeom>
+          <a:solidFill>
+            <a:srgbClr val="F7F3E8"/>
+          </a:solidFill>
+          <a:ln w="9525">
+            <a:solidFill>
+              <a:srgbClr val="C8C0AE"/>
+            </a:solidFill>
+            <a:prstDash val="solid"/>
+          </a:ln>
+        </p:spPr>
+      </p:sp>
+      <p:sp>
+        <p:nvSpPr>
+          <p:cNvPr id="13" name="Text 11"/>
+          <p:cNvSpPr/>
+          <p:nvPr/>
+        </p:nvSpPr>
+        <p:spPr>
+          <a:xfrm>
+            <a:off x="1965960" y="2743200"/>
+            <a:ext cx="9509760" cy="365760"/>
           </a:xfrm>
           <a:prstGeom prst="rect">
             <a:avLst/>
@@ -8427,30 +9902,30 @@
               <a:buNone/>
             </a:pPr>
             <a:r>
-              <a:rPr lang="en-US" sz="1600" dirty="0">
-                <a:solidFill>
-                  <a:srgbClr val="2B2B2B"/>
+              <a:rPr lang="en-US" sz="1800" b="1" dirty="0">
+                <a:solidFill>
+                  <a:srgbClr val="1A1A1A"/>
                 </a:solidFill>
                 <a:latin typeface="Calibri" pitchFamily="34" charset="0"/>
                 <a:ea typeface="Calibri" pitchFamily="34" charset="-122"/>
                 <a:cs typeface="Calibri" pitchFamily="34" charset="-120"/>
               </a:rPr>
-              <a:t>3.  Lin 2004. ROUGE. Model card ViT5: không prefix, &lt;/s&gt;, max_length=256</a:t>
-            </a:r>
-            <a:endParaRPr lang="en-US" sz="1600" dirty="0"/>
-          </a:p>
-        </p:txBody>
-      </p:sp>
-      <p:sp>
-        <p:nvSpPr>
-          <p:cNvPr id="8" name="Text 6"/>
-          <p:cNvSpPr/>
-          <p:nvPr/>
-        </p:nvSpPr>
-        <p:spPr>
-          <a:xfrm>
-            <a:off x="640080" y="3429000"/>
-            <a:ext cx="10972800" cy="685800"/>
+              <a:t>Gold đa tin</a:t>
+            </a:r>
+            <a:endParaRPr lang="en-US" sz="1800" dirty="0"/>
+          </a:p>
+        </p:txBody>
+      </p:sp>
+      <p:sp>
+        <p:nvSpPr>
+          <p:cNvPr id="14" name="Text 12"/>
+          <p:cNvSpPr/>
+          <p:nvPr/>
+        </p:nvSpPr>
+        <p:spPr>
+          <a:xfrm>
+            <a:off x="1965960" y="3200400"/>
+            <a:ext cx="9509760" cy="411480"/>
           </a:xfrm>
           <a:prstGeom prst="rect">
             <a:avLst/>
@@ -8474,7 +9949,7 @@
                 <a:ea typeface="Calibri" pitchFamily="34" charset="-122"/>
                 <a:cs typeface="Calibri" pitchFamily="34" charset="-120"/>
               </a:rPr>
-              <a:t>4.  Mihalcea &amp; Tarau — TextRank. Lead-3: baseline tóm tắt tin.</a:t>
+              <a:t>Tách bài “an ninh 24h” thành từng tin trước khi tóm.</a:t>
             </a:r>
             <a:endParaRPr lang="en-US" sz="1600" dirty="0"/>
           </a:p>
@@ -8482,14 +9957,98 @@
       </p:sp>
       <p:sp>
         <p:nvSpPr>
-          <p:cNvPr id="9" name="Text 7"/>
-          <p:cNvSpPr/>
-          <p:nvPr/>
-        </p:nvSpPr>
-        <p:spPr>
-          <a:xfrm>
-            <a:off x="640080" y="4206240"/>
-            <a:ext cx="10972800" cy="685800"/>
+          <p:cNvPr id="15" name="Shape 13"/>
+          <p:cNvSpPr/>
+          <p:nvPr/>
+        </p:nvSpPr>
+        <p:spPr>
+          <a:xfrm>
+            <a:off x="502920" y="4023360"/>
+            <a:ext cx="1188720" cy="1280160"/>
+          </a:xfrm>
+          <a:prstGeom prst="rect">
+            <a:avLst/>
+          </a:prstGeom>
+          <a:solidFill>
+            <a:srgbClr val="0B0B0B"/>
+          </a:solidFill>
+          <a:ln/>
+        </p:spPr>
+      </p:sp>
+      <p:sp>
+        <p:nvSpPr>
+          <p:cNvPr id="16" name="Text 14"/>
+          <p:cNvSpPr/>
+          <p:nvPr/>
+        </p:nvSpPr>
+        <p:spPr>
+          <a:xfrm>
+            <a:off x="502920" y="4389120"/>
+            <a:ext cx="1188720" cy="502920"/>
+          </a:xfrm>
+          <a:prstGeom prst="rect">
+            <a:avLst/>
+          </a:prstGeom>
+          <a:noFill/>
+          <a:ln/>
+        </p:spPr>
+        <p:txBody>
+          <a:bodyPr wrap="square" lIns="0" tIns="0" rIns="0" bIns="0" rtlCol="0" anchor="ctr"/>
+          <a:lstStyle/>
+          <a:p>
+            <a:pPr algn="ctr" indent="0" marL="0">
+              <a:buNone/>
+            </a:pPr>
+            <a:r>
+              <a:rPr lang="en-US" sz="2200" dirty="0">
+                <a:solidFill>
+                  <a:srgbClr val="EFE8D6"/>
+                </a:solidFill>
+                <a:latin typeface="Georgia" pitchFamily="34" charset="0"/>
+                <a:ea typeface="Georgia" pitchFamily="34" charset="-122"/>
+                <a:cs typeface="Georgia" pitchFamily="34" charset="-120"/>
+              </a:rPr>
+              <a:t>03</a:t>
+            </a:r>
+            <a:endParaRPr lang="en-US" sz="2200" dirty="0"/>
+          </a:p>
+        </p:txBody>
+      </p:sp>
+      <p:sp>
+        <p:nvSpPr>
+          <p:cNvPr id="17" name="Shape 15"/>
+          <p:cNvSpPr/>
+          <p:nvPr/>
+        </p:nvSpPr>
+        <p:spPr>
+          <a:xfrm>
+            <a:off x="1691640" y="4023360"/>
+            <a:ext cx="9966960" cy="1280160"/>
+          </a:xfrm>
+          <a:prstGeom prst="rect">
+            <a:avLst/>
+          </a:prstGeom>
+          <a:solidFill>
+            <a:srgbClr val="F7F3E8"/>
+          </a:solidFill>
+          <a:ln w="9525">
+            <a:solidFill>
+              <a:srgbClr val="C8C0AE"/>
+            </a:solidFill>
+            <a:prstDash val="solid"/>
+          </a:ln>
+        </p:spPr>
+      </p:sp>
+      <p:sp>
+        <p:nvSpPr>
+          <p:cNvPr id="18" name="Text 16"/>
+          <p:cNvSpPr/>
+          <p:nvPr/>
+        </p:nvSpPr>
+        <p:spPr>
+          <a:xfrm>
+            <a:off x="1965960" y="4206240"/>
+            <a:ext cx="9509760" cy="365760"/>
           </a:xfrm>
           <a:prstGeom prst="rect">
             <a:avLst/>
@@ -8505,30 +10064,30 @@
               <a:buNone/>
             </a:pPr>
             <a:r>
-              <a:rPr lang="en-US" sz="1600" dirty="0">
-                <a:solidFill>
-                  <a:srgbClr val="2B2B2B"/>
+              <a:rPr lang="en-US" sz="1800" b="1" dirty="0">
+                <a:solidFill>
+                  <a:srgbClr val="1A1A1A"/>
                 </a:solidFill>
                 <a:latin typeface="Calibri" pitchFamily="34" charset="0"/>
                 <a:ea typeface="Calibri" pitchFamily="34" charset="-122"/>
                 <a:cs typeface="Calibri" pitchFamily="34" charset="-120"/>
               </a:rPr>
-              <a:t>5.  Repo nhóm: github.com/hoangdq08/vietnews-summarization-extractive-abstractive</a:t>
-            </a:r>
-            <a:endParaRPr lang="en-US" sz="1600" dirty="0"/>
-          </a:p>
-        </p:txBody>
-      </p:sp>
-      <p:sp>
-        <p:nvSpPr>
-          <p:cNvPr id="10" name="Text 8"/>
-          <p:cNvSpPr/>
-          <p:nvPr/>
-        </p:nvSpPr>
-        <p:spPr>
-          <a:xfrm>
-            <a:off x="502920" y="6510528"/>
-            <a:ext cx="8229600" cy="201168"/>
+              <a:t>Không train trùng</a:t>
+            </a:r>
+            <a:endParaRPr lang="en-US" sz="1800" dirty="0"/>
+          </a:p>
+        </p:txBody>
+      </p:sp>
+      <p:sp>
+        <p:nvSpPr>
+          <p:cNvPr id="19" name="Text 17"/>
+          <p:cNvSpPr/>
+          <p:nvPr/>
+        </p:nvSpPr>
+        <p:spPr>
+          <a:xfrm>
+            <a:off x="1965960" y="4663440"/>
+            <a:ext cx="9509760" cy="411480"/>
           </a:xfrm>
           <a:prstGeom prst="rect">
             <a:avLst/>
@@ -8544,14 +10103,53 @@
               <a:buNone/>
             </a:pPr>
             <a:r>
-              <a:rPr lang="en-US" sz="1000" dirty="0">
-                <a:solidFill>
-                  <a:srgbClr val="B5AFA0"/>
+              <a:rPr lang="en-US" sz="1600" dirty="0">
+                <a:solidFill>
+                  <a:srgbClr val="2B2B2B"/>
                 </a:solidFill>
                 <a:latin typeface="Calibri" pitchFamily="34" charset="0"/>
                 <a:ea typeface="Calibri" pitchFamily="34" charset="-122"/>
                 <a:cs typeface="Calibri" pitchFamily="34" charset="-120"/>
               </a:rPr>
+              <a:t>Nếu fine-tune, phải miền khác Vietnews.</a:t>
+            </a:r>
+            <a:endParaRPr lang="en-US" sz="1600" dirty="0"/>
+          </a:p>
+        </p:txBody>
+      </p:sp>
+      <p:sp>
+        <p:nvSpPr>
+          <p:cNvPr id="20" name="Text 18"/>
+          <p:cNvSpPr/>
+          <p:nvPr/>
+        </p:nvSpPr>
+        <p:spPr>
+          <a:xfrm>
+            <a:off x="502920" y="6510528"/>
+            <a:ext cx="8229600" cy="201168"/>
+          </a:xfrm>
+          <a:prstGeom prst="rect">
+            <a:avLst/>
+          </a:prstGeom>
+          <a:noFill/>
+          <a:ln/>
+        </p:spPr>
+        <p:txBody>
+          <a:bodyPr wrap="square" lIns="0" tIns="0" rIns="0" bIns="0" rtlCol="0" anchor="ctr"/>
+          <a:lstStyle/>
+          <a:p>
+            <a:pPr indent="0" marL="0">
+              <a:buNone/>
+            </a:pPr>
+            <a:r>
+              <a:rPr lang="en-US" sz="1000" dirty="0">
+                <a:solidFill>
+                  <a:srgbClr val="B5AFA0"/>
+                </a:solidFill>
+                <a:latin typeface="Calibri" pitchFamily="34" charset="0"/>
+                <a:ea typeface="Calibri" pitchFamily="34" charset="-122"/>
+                <a:cs typeface="Calibri" pitchFamily="34" charset="-120"/>
+              </a:rPr>
               <a:t>CS221 · UIT  ·  Vietnews extractive vs abstractive</a:t>
             </a:r>
             <a:endParaRPr lang="en-US" sz="1000" dirty="0"/>
@@ -8560,7 +10158,7 @@
       </p:sp>
       <p:sp>
         <p:nvSpPr>
-          <p:cNvPr id="11" name="Text 9"/>
+          <p:cNvPr id="21" name="Text 19"/>
           <p:cNvSpPr/>
           <p:nvPr/>
         </p:nvSpPr>
@@ -8608,6 +10206,412 @@
 <file path=ppt/slides/slide18.xml><?xml version="1.0" encoding="utf-8"?>
 <p:sld xmlns:a="http://schemas.openxmlformats.org/drawingml/2006/main" xmlns:r="http://schemas.openxmlformats.org/officeDocument/2006/relationships" xmlns:p="http://schemas.openxmlformats.org/presentationml/2006/main">
   <p:cSld name="Slide 18">
+    <p:bg>
+      <p:bgPr>
+        <a:solidFill>
+          <a:srgbClr val="F0ECE0"/>
+        </a:solidFill>
+      </p:bgPr>
+    </p:bg>
+    <p:spTree>
+      <p:nvGrpSpPr>
+        <p:cNvPr id="1" name=""/>
+        <p:cNvGrpSpPr/>
+        <p:nvPr/>
+      </p:nvGrpSpPr>
+      <p:grpSpPr>
+        <a:xfrm>
+          <a:off x="0" y="0"/>
+          <a:ext cx="0" cy="0"/>
+          <a:chOff x="0" y="0"/>
+          <a:chExt cx="0" cy="0"/>
+        </a:xfrm>
+      </p:grpSpPr>
+      <p:sp>
+        <p:nvSpPr>
+          <p:cNvPr id="2" name="Text 0"/>
+          <p:cNvSpPr/>
+          <p:nvPr/>
+        </p:nvSpPr>
+        <p:spPr>
+          <a:xfrm>
+            <a:off x="502920" y="347472"/>
+            <a:ext cx="6583680" cy="292608"/>
+          </a:xfrm>
+          <a:prstGeom prst="rect">
+            <a:avLst/>
+          </a:prstGeom>
+          <a:noFill/>
+          <a:ln/>
+        </p:spPr>
+        <p:txBody>
+          <a:bodyPr wrap="square" lIns="0" tIns="0" rIns="0" bIns="0" rtlCol="0" anchor="ctr"/>
+          <a:lstStyle/>
+          <a:p>
+            <a:pPr indent="0" marL="0">
+              <a:buNone/>
+            </a:pPr>
+            <a:r>
+              <a:rPr lang="en-US" sz="1100" spc="250" kern="0" dirty="0">
+                <a:solidFill>
+                  <a:srgbClr val="8A8578"/>
+                </a:solidFill>
+                <a:latin typeface="Calibri" pitchFamily="34" charset="0"/>
+                <a:ea typeface="Calibri" pitchFamily="34" charset="-122"/>
+                <a:cs typeface="Calibri" pitchFamily="34" charset="-120"/>
+              </a:rPr>
+              <a:t>16  TÀI LIỆU</a:t>
+            </a:r>
+            <a:endParaRPr lang="en-US" sz="1100" dirty="0"/>
+          </a:p>
+        </p:txBody>
+      </p:sp>
+      <p:sp>
+        <p:nvSpPr>
+          <p:cNvPr id="3" name="Text 1"/>
+          <p:cNvSpPr/>
+          <p:nvPr/>
+        </p:nvSpPr>
+        <p:spPr>
+          <a:xfrm>
+            <a:off x="6202375" y="347472"/>
+            <a:ext cx="5486400" cy="292608"/>
+          </a:xfrm>
+          <a:prstGeom prst="rect">
+            <a:avLst/>
+          </a:prstGeom>
+          <a:noFill/>
+          <a:ln/>
+        </p:spPr>
+        <p:txBody>
+          <a:bodyPr wrap="square" lIns="0" tIns="0" rIns="0" bIns="0" rtlCol="0" anchor="ctr"/>
+          <a:lstStyle/>
+          <a:p>
+            <a:pPr algn="r" indent="0" marL="0">
+              <a:buNone/>
+            </a:pPr>
+            <a:r>
+              <a:rPr lang="en-US" sz="1200" dirty="0">
+                <a:solidFill>
+                  <a:srgbClr val="8A8578"/>
+                </a:solidFill>
+                <a:latin typeface="Calibri" pitchFamily="34" charset="0"/>
+                <a:ea typeface="Calibri" pitchFamily="34" charset="-122"/>
+                <a:cs typeface="Calibri" pitchFamily="34" charset="-120"/>
+              </a:rPr>
+              <a:t>Đã dùng</a:t>
+            </a:r>
+            <a:endParaRPr lang="en-US" sz="1200" dirty="0"/>
+          </a:p>
+        </p:txBody>
+      </p:sp>
+      <p:sp>
+        <p:nvSpPr>
+          <p:cNvPr id="4" name="Shape 2"/>
+          <p:cNvSpPr/>
+          <p:nvPr/>
+        </p:nvSpPr>
+        <p:spPr>
+          <a:xfrm>
+            <a:off x="502920" y="713232"/>
+            <a:ext cx="11185855" cy="0"/>
+          </a:xfrm>
+          <a:prstGeom prst="line">
+            <a:avLst/>
+          </a:prstGeom>
+          <a:noFill/>
+          <a:ln w="9525">
+            <a:solidFill>
+              <a:srgbClr val="C8C0AE"/>
+            </a:solidFill>
+            <a:prstDash val="solid"/>
+          </a:ln>
+        </p:spPr>
+      </p:sp>
+      <p:sp>
+        <p:nvSpPr>
+          <p:cNvPr id="5" name="Text 3"/>
+          <p:cNvSpPr/>
+          <p:nvPr/>
+        </p:nvSpPr>
+        <p:spPr>
+          <a:xfrm>
+            <a:off x="640080" y="1097280"/>
+            <a:ext cx="10972800" cy="685800"/>
+          </a:xfrm>
+          <a:prstGeom prst="rect">
+            <a:avLst/>
+          </a:prstGeom>
+          <a:noFill/>
+          <a:ln/>
+        </p:spPr>
+        <p:txBody>
+          <a:bodyPr wrap="square" lIns="0" tIns="0" rIns="0" bIns="0" rtlCol="0" anchor="ctr"/>
+          <a:lstStyle/>
+          <a:p>
+            <a:pPr indent="0" marL="0">
+              <a:buNone/>
+            </a:pPr>
+            <a:r>
+              <a:rPr lang="en-US" sz="1600" dirty="0">
+                <a:solidFill>
+                  <a:srgbClr val="2B2B2B"/>
+                </a:solidFill>
+                <a:latin typeface="Calibri" pitchFamily="34" charset="0"/>
+                <a:ea typeface="Calibri" pitchFamily="34" charset="-122"/>
+                <a:cs typeface="Calibri" pitchFamily="34" charset="-120"/>
+              </a:rPr>
+              <a:t>1.  Nguyen et al. — VNDS / Vietnews. https://github.com/ThanhChinhBK/vietnews</a:t>
+            </a:r>
+            <a:endParaRPr lang="en-US" sz="1600" dirty="0"/>
+          </a:p>
+        </p:txBody>
+      </p:sp>
+      <p:sp>
+        <p:nvSpPr>
+          <p:cNvPr id="6" name="Text 4"/>
+          <p:cNvSpPr/>
+          <p:nvPr/>
+        </p:nvSpPr>
+        <p:spPr>
+          <a:xfrm>
+            <a:off x="640080" y="1874520"/>
+            <a:ext cx="10972800" cy="685800"/>
+          </a:xfrm>
+          <a:prstGeom prst="rect">
+            <a:avLst/>
+          </a:prstGeom>
+          <a:noFill/>
+          <a:ln/>
+        </p:spPr>
+        <p:txBody>
+          <a:bodyPr wrap="square" lIns="0" tIns="0" rIns="0" bIns="0" rtlCol="0" anchor="ctr"/>
+          <a:lstStyle/>
+          <a:p>
+            <a:pPr indent="0" marL="0">
+              <a:buNone/>
+            </a:pPr>
+            <a:r>
+              <a:rPr lang="en-US" sz="1600" dirty="0">
+                <a:solidFill>
+                  <a:srgbClr val="2B2B2B"/>
+                </a:solidFill>
+                <a:latin typeface="Calibri" pitchFamily="34" charset="0"/>
+                <a:ea typeface="Calibri" pitchFamily="34" charset="-122"/>
+                <a:cs typeface="Calibri" pitchFamily="34" charset="-120"/>
+              </a:rPr>
+              <a:t>2.  Phan et al. 2022. ViT5. NAACL SRW. Checkpoint: VietAI/vit5-base-vietnews-summarization</a:t>
+            </a:r>
+            <a:endParaRPr lang="en-US" sz="1600" dirty="0"/>
+          </a:p>
+        </p:txBody>
+      </p:sp>
+      <p:sp>
+        <p:nvSpPr>
+          <p:cNvPr id="7" name="Text 5"/>
+          <p:cNvSpPr/>
+          <p:nvPr/>
+        </p:nvSpPr>
+        <p:spPr>
+          <a:xfrm>
+            <a:off x="640080" y="2651760"/>
+            <a:ext cx="10972800" cy="685800"/>
+          </a:xfrm>
+          <a:prstGeom prst="rect">
+            <a:avLst/>
+          </a:prstGeom>
+          <a:noFill/>
+          <a:ln/>
+        </p:spPr>
+        <p:txBody>
+          <a:bodyPr wrap="square" lIns="0" tIns="0" rIns="0" bIns="0" rtlCol="0" anchor="ctr"/>
+          <a:lstStyle/>
+          <a:p>
+            <a:pPr indent="0" marL="0">
+              <a:buNone/>
+            </a:pPr>
+            <a:r>
+              <a:rPr lang="en-US" sz="1600" dirty="0">
+                <a:solidFill>
+                  <a:srgbClr val="2B2B2B"/>
+                </a:solidFill>
+                <a:latin typeface="Calibri" pitchFamily="34" charset="0"/>
+                <a:ea typeface="Calibri" pitchFamily="34" charset="-122"/>
+                <a:cs typeface="Calibri" pitchFamily="34" charset="-120"/>
+              </a:rPr>
+              <a:t>3.  Lin 2004. ROUGE. Model card ViT5: không prefix, &lt;/s&gt;, max_length=256</a:t>
+            </a:r>
+            <a:endParaRPr lang="en-US" sz="1600" dirty="0"/>
+          </a:p>
+        </p:txBody>
+      </p:sp>
+      <p:sp>
+        <p:nvSpPr>
+          <p:cNvPr id="8" name="Text 6"/>
+          <p:cNvSpPr/>
+          <p:nvPr/>
+        </p:nvSpPr>
+        <p:spPr>
+          <a:xfrm>
+            <a:off x="640080" y="3429000"/>
+            <a:ext cx="10972800" cy="685800"/>
+          </a:xfrm>
+          <a:prstGeom prst="rect">
+            <a:avLst/>
+          </a:prstGeom>
+          <a:noFill/>
+          <a:ln/>
+        </p:spPr>
+        <p:txBody>
+          <a:bodyPr wrap="square" lIns="0" tIns="0" rIns="0" bIns="0" rtlCol="0" anchor="ctr"/>
+          <a:lstStyle/>
+          <a:p>
+            <a:pPr indent="0" marL="0">
+              <a:buNone/>
+            </a:pPr>
+            <a:r>
+              <a:rPr lang="en-US" sz="1600" dirty="0">
+                <a:solidFill>
+                  <a:srgbClr val="2B2B2B"/>
+                </a:solidFill>
+                <a:latin typeface="Calibri" pitchFamily="34" charset="0"/>
+                <a:ea typeface="Calibri" pitchFamily="34" charset="-122"/>
+                <a:cs typeface="Calibri" pitchFamily="34" charset="-120"/>
+              </a:rPr>
+              <a:t>4.  Mihalcea &amp; Tarau — TextRank. Lead-3: baseline tóm tắt tin.</a:t>
+            </a:r>
+            <a:endParaRPr lang="en-US" sz="1600" dirty="0"/>
+          </a:p>
+        </p:txBody>
+      </p:sp>
+      <p:sp>
+        <p:nvSpPr>
+          <p:cNvPr id="9" name="Text 7"/>
+          <p:cNvSpPr/>
+          <p:nvPr/>
+        </p:nvSpPr>
+        <p:spPr>
+          <a:xfrm>
+            <a:off x="640080" y="4206240"/>
+            <a:ext cx="10972800" cy="685800"/>
+          </a:xfrm>
+          <a:prstGeom prst="rect">
+            <a:avLst/>
+          </a:prstGeom>
+          <a:noFill/>
+          <a:ln/>
+        </p:spPr>
+        <p:txBody>
+          <a:bodyPr wrap="square" lIns="0" tIns="0" rIns="0" bIns="0" rtlCol="0" anchor="ctr"/>
+          <a:lstStyle/>
+          <a:p>
+            <a:pPr indent="0" marL="0">
+              <a:buNone/>
+            </a:pPr>
+            <a:r>
+              <a:rPr lang="en-US" sz="1600" dirty="0">
+                <a:solidFill>
+                  <a:srgbClr val="2B2B2B"/>
+                </a:solidFill>
+                <a:latin typeface="Calibri" pitchFamily="34" charset="0"/>
+                <a:ea typeface="Calibri" pitchFamily="34" charset="-122"/>
+                <a:cs typeface="Calibri" pitchFamily="34" charset="-120"/>
+              </a:rPr>
+              <a:t>5.  Repo nhóm: github.com/hoangdq08/vietnews-summarization-extractive-abstractive</a:t>
+            </a:r>
+            <a:endParaRPr lang="en-US" sz="1600" dirty="0"/>
+          </a:p>
+        </p:txBody>
+      </p:sp>
+      <p:sp>
+        <p:nvSpPr>
+          <p:cNvPr id="10" name="Text 8"/>
+          <p:cNvSpPr/>
+          <p:nvPr/>
+        </p:nvSpPr>
+        <p:spPr>
+          <a:xfrm>
+            <a:off x="502920" y="6510528"/>
+            <a:ext cx="8229600" cy="201168"/>
+          </a:xfrm>
+          <a:prstGeom prst="rect">
+            <a:avLst/>
+          </a:prstGeom>
+          <a:noFill/>
+          <a:ln/>
+        </p:spPr>
+        <p:txBody>
+          <a:bodyPr wrap="square" lIns="0" tIns="0" rIns="0" bIns="0" rtlCol="0" anchor="ctr"/>
+          <a:lstStyle/>
+          <a:p>
+            <a:pPr indent="0" marL="0">
+              <a:buNone/>
+            </a:pPr>
+            <a:r>
+              <a:rPr lang="en-US" sz="1000" dirty="0">
+                <a:solidFill>
+                  <a:srgbClr val="B5AFA0"/>
+                </a:solidFill>
+                <a:latin typeface="Calibri" pitchFamily="34" charset="0"/>
+                <a:ea typeface="Calibri" pitchFamily="34" charset="-122"/>
+                <a:cs typeface="Calibri" pitchFamily="34" charset="-120"/>
+              </a:rPr>
+              <a:t>CS221 · UIT  ·  Vietnews extractive vs abstractive</a:t>
+            </a:r>
+            <a:endParaRPr lang="en-US" sz="1000" dirty="0"/>
+          </a:p>
+        </p:txBody>
+      </p:sp>
+      <p:sp>
+        <p:nvSpPr>
+          <p:cNvPr id="11" name="Text 9"/>
+          <p:cNvSpPr/>
+          <p:nvPr/>
+        </p:nvSpPr>
+        <p:spPr>
+          <a:xfrm>
+            <a:off x="11094415" y="6510528"/>
+            <a:ext cx="594360" cy="201168"/>
+          </a:xfrm>
+          <a:prstGeom prst="rect">
+            <a:avLst/>
+          </a:prstGeom>
+          <a:noFill/>
+          <a:ln/>
+        </p:spPr>
+        <p:txBody>
+          <a:bodyPr wrap="square" lIns="0" tIns="0" rIns="0" bIns="0" rtlCol="0" anchor="ctr"/>
+          <a:lstStyle/>
+          <a:p>
+            <a:pPr algn="r" indent="0" marL="0">
+              <a:buNone/>
+            </a:pPr>
+            <a:r>
+              <a:rPr lang="en-US" sz="1000" dirty="0">
+                <a:solidFill>
+                  <a:srgbClr val="8A8578"/>
+                </a:solidFill>
+                <a:latin typeface="Calibri" pitchFamily="34" charset="0"/>
+                <a:ea typeface="Calibri" pitchFamily="34" charset="-122"/>
+                <a:cs typeface="Calibri" pitchFamily="34" charset="-120"/>
+              </a:rPr>
+              <a:t>18</a:t>
+            </a:r>
+            <a:endParaRPr lang="en-US" sz="1000" dirty="0"/>
+          </a:p>
+        </p:txBody>
+      </p:sp>
+    </p:spTree>
+  </p:cSld>
+  <p:clrMapOvr>
+    <a:masterClrMapping/>
+  </p:clrMapOvr>
+</p:sld>
+</file>
+
+<file path=ppt/slides/slide19.xml><?xml version="1.0" encoding="utf-8"?>
+<p:sld xmlns:a="http://schemas.openxmlformats.org/drawingml/2006/main" xmlns:r="http://schemas.openxmlformats.org/officeDocument/2006/relationships" xmlns:p="http://schemas.openxmlformats.org/presentationml/2006/main">
+  <p:cSld name="Slide 19">
     <p:bg>
       <p:bgPr>
         <a:solidFill>

--- a/slides/CS221-Vietnews-tom-tat.pptx
+++ b/slides/CS221-Vietnews-tom-tat.pptx
@@ -24,9 +24,10 @@
     <p:sldId id="272" r:id="rId18"/>
     <p:sldId id="273" r:id="rId19"/>
     <p:sldId id="274" r:id="rId20"/>
+    <p:sldId id="275" r:id="rId21"/>
   </p:sldIdLst>
   <p:notesMasterIdLst>
-    <p:notesMasterId r:id="rId21"/>
+    <p:notesMasterId r:id="rId22"/>
   </p:notesMasterIdLst>
   <p:sldSz cx="12192000" cy="6858000"/>
   <p:notesSz cx="6858000" cy="12192000"/>
@@ -1971,6 +1972,94 @@
 </p:notes>
 </file>
 
+<file path=ppt/notesSlides/notesSlide20.xml><?xml version="1.0" encoding="utf-8"?>
+<p:notes xmlns:a="http://schemas.openxmlformats.org/drawingml/2006/main" xmlns:r="http://schemas.openxmlformats.org/officeDocument/2006/relationships" xmlns:p="http://schemas.openxmlformats.org/presentationml/2006/main">
+  <p:cSld>
+    <p:spTree>
+      <p:nvGrpSpPr>
+        <p:cNvPr id="1" name=""/>
+        <p:cNvGrpSpPr/>
+        <p:nvPr/>
+      </p:nvGrpSpPr>
+      <p:grpSpPr>
+        <a:xfrm>
+          <a:off x="0" y="0"/>
+          <a:ext cx="0" cy="0"/>
+          <a:chOff x="0" y="0"/>
+          <a:chExt cx="0" cy="0"/>
+        </a:xfrm>
+      </p:grpSpPr>
+      <p:sp>
+        <p:nvSpPr>
+          <p:cNvPr id="2" name="Slide Image Placeholder 1"/>
+          <p:cNvSpPr>
+            <a:spLocks noGrp="1" noRot="1" noChangeAspect="1"/>
+          </p:cNvSpPr>
+          <p:nvPr>
+            <p:ph type="sldImg"/>
+          </p:nvPr>
+        </p:nvSpPr>
+        <p:spPr/>
+      </p:sp>
+      <p:sp>
+        <p:nvSpPr>
+          <p:cNvPr id="3" name="Notes Placeholder 2"/>
+          <p:cNvSpPr>
+            <a:spLocks noGrp="1"/>
+          </p:cNvSpPr>
+          <p:nvPr>
+            <p:ph type="body" idx="1"/>
+          </p:nvPr>
+        </p:nvSpPr>
+        <p:spPr/>
+        <p:txBody>
+          <a:bodyPr/>
+          <a:lstStyle/>
+          <a:p>
+            <a:r>
+              <a:rPr lang="en-US" dirty="0"/>
+              <a:t/>
+            </a:r>
+            <a:endParaRPr lang="en-US" dirty="0"/>
+          </a:p>
+        </p:txBody>
+      </p:sp>
+      <p:sp>
+        <p:nvSpPr>
+          <p:cNvPr id="4" name="Slide Number Placeholder 3"/>
+          <p:cNvSpPr>
+            <a:spLocks noGrp="1"/>
+          </p:cNvSpPr>
+          <p:nvPr>
+            <p:ph type="sldNum" sz="quarter" idx="10"/>
+          </p:nvPr>
+        </p:nvSpPr>
+        <p:spPr/>
+        <p:txBody>
+          <a:bodyPr/>
+          <a:lstStyle/>
+          <a:p>
+            <a:fld id="{F7021451-1387-4CA6-816F-3879F97B5CBC}" type="slidenum">
+              <a:rPr lang="en-US"/>
+              <a:t>20</a:t>
+            </a:fld>
+            <a:endParaRPr lang="en-US"/>
+          </a:p>
+        </p:txBody>
+      </p:sp>
+    </p:spTree>
+    <p:extLst>
+      <p:ext uri="{BB962C8B-B14F-4D97-AF65-F5344CB8AC3E}">
+        <p14:creationId xmlns:p14="http://schemas.microsoft.com/office/powerpoint/2010/main" val="1024086991"/>
+      </p:ext>
+    </p:extLst>
+  </p:cSld>
+  <p:clrMapOvr>
+    <a:masterClrMapping/>
+  </p:clrMapOvr>
+</p:notes>
+</file>
+
 <file path=ppt/notesSlides/notesSlide3.xml><?xml version="1.0" encoding="utf-8"?>
 <p:notes xmlns:a="http://schemas.openxmlformats.org/drawingml/2006/main" xmlns:r="http://schemas.openxmlformats.org/officeDocument/2006/relationships" xmlns:p="http://schemas.openxmlformats.org/presentationml/2006/main">
   <p:cSld>
@@ -6929,7 +7018,7 @@
                 <a:ea typeface="Calibri" pitchFamily="34" charset="-122"/>
                 <a:cs typeface="Calibri" pitchFamily="34" charset="-120"/>
               </a:rPr>
-              <a:t>11  ĐỌC TAY 20 BÀI</a:t>
+              <a:t>10c  N = 500  ·  EXTRACTIVE</a:t>
             </a:r>
             <a:endParaRPr lang="en-US" sz="1100" dirty="0"/>
           </a:p>
@@ -6968,7 +7057,7 @@
                 <a:ea typeface="Calibri" pitchFamily="34" charset="-122"/>
                 <a:cs typeface="Calibri" pitchFamily="34" charset="-120"/>
               </a:rPr>
-              <a:t>ROUGE không đủ</a:t>
+              <a:t>000001–000500</a:t>
             </a:r>
             <a:endParaRPr lang="en-US" sz="1200" dirty="0"/>
           </a:p>
@@ -7005,8 +7094,8 @@
         </p:nvSpPr>
         <p:spPr>
           <a:xfrm>
-            <a:off x="502920" y="914400"/>
-            <a:ext cx="10972800" cy="457200"/>
+            <a:off x="502920" y="868680"/>
+            <a:ext cx="11155680" cy="365760"/>
           </a:xfrm>
           <a:prstGeom prst="rect">
             <a:avLst/>
@@ -7022,7 +7111,7 @@
               <a:buNone/>
             </a:pPr>
             <a:r>
-              <a:rPr lang="en-US" sz="2600" dirty="0">
+              <a:rPr lang="en-US" sz="2000" dirty="0">
                 <a:solidFill>
                   <a:srgbClr val="1A1A1A"/>
                 </a:solidFill>
@@ -7030,87 +7119,1656 @@
                 <a:ea typeface="Georgia" pitchFamily="34" charset="-122"/>
                 <a:cs typeface="Georgia" pitchFamily="34" charset="-120"/>
               </a:rPr>
-              <a:t>ViT5 điểm cao hơn vẫn sai tên và số.</a:t>
-            </a:r>
-            <a:endParaRPr lang="en-US" sz="2600" dirty="0"/>
-          </a:p>
-        </p:txBody>
-      </p:sp>
-      <p:sp>
-        <p:nvSpPr>
-          <p:cNvPr id="6" name="Shape 4"/>
-          <p:cNvSpPr/>
-          <p:nvPr/>
-        </p:nvSpPr>
-        <p:spPr>
-          <a:xfrm>
-            <a:off x="502920" y="1554480"/>
-            <a:ext cx="2194560" cy="1188720"/>
+              <a:t>Lead-1 &gt; Lead-3. Oracle-3 ≈ 0,46 — còn câu tốt hơn 3 câu đầu.</a:t>
+            </a:r>
+            <a:endParaRPr lang="en-US" sz="2000" dirty="0"/>
+          </a:p>
+        </p:txBody>
+      </p:sp>
+      <p:graphicFrame>
+        <p:nvGraphicFramePr>
+          <p:cNvPr id="14" name="Table 0"/>
+          <p:cNvGraphicFramePr>
+            <a:graphicFrameLocks noGrp="1"/>
+          </p:cNvGraphicFramePr>
+          <p:nvPr>
+            <p:extLst>
+              <p:ext uri="{D42A27DB-BD31-4B8C-83A1-F6EECF244321}">
+                <p14:modId xmlns:p14="http://schemas.microsoft.com/office/powerpoint/2010/main" val="1579011935"/>
+              </p:ext>
+            </p:extLst>
+          </p:nvPr>
+        </p:nvGraphicFramePr>
+        <p:xfrm>
+          <a:off x="502920" y="1371600"/>
+          <a:ext cx="6858000" cy="4206240"/>
+        </p:xfrm>
+        <a:graphic>
+          <a:graphicData uri="http://schemas.openxmlformats.org/drawingml/2006/table">
+            <a:tbl>
+              <a:tblPr/>
+              <a:tblGrid>
+                <a:gridCol w="2011680"/>
+                <a:gridCol w="1618488"/>
+                <a:gridCol w="1618488"/>
+                <a:gridCol w="1609344"/>
+              </a:tblGrid>
+              <a:tr h="701040">
+                <a:tc>
+                  <a:txBody>
+                    <a:bodyPr/>
+                    <a:lstStyle/>
+                    <a:p>
+                      <a:pPr algn="ctr" indent="0" marL="0">
+                        <a:buNone/>
+                      </a:pPr>
+                      <a:r>
+                        <a:rPr lang="en-US" sz="1500" b="1" dirty="0">
+                          <a:solidFill>
+                            <a:srgbClr val="EFE8D6"/>
+                          </a:solidFill>
+                          <a:latin typeface="Calibri" pitchFamily="34" charset="0"/>
+                          <a:ea typeface="Calibri" pitchFamily="34" charset="-122"/>
+                          <a:cs typeface="Calibri" pitchFamily="34" charset="-120"/>
+                        </a:rPr>
+                        <a:t>Hệ</a:t>
+                      </a:r>
+                      <a:endParaRPr lang="en-US" sz="1500" dirty="0">
+                        <a:latin typeface="Calibri" charset="0"/>
+                        <a:ea typeface="Calibri" charset="0"/>
+                        <a:cs typeface="Calibri" charset="0"/>
+                      </a:endParaRPr>
+                    </a:p>
+                  </a:txBody>
+                  <a:tcPr marL="91440" marR="91440" marT="45720" marB="45720" anchor="ctr">
+                    <a:lnL w="6350" cap="flat" cmpd="sng" algn="ctr">
+                      <a:solidFill>
+                        <a:srgbClr val="C8C0AE"/>
+                      </a:solidFill>
+                      <a:prstDash val="solid"/>
+                      <a:round/>
+                      <a:headEnd type="none" w="med" len="med"/>
+                      <a:tailEnd type="none" w="med" len="med"/>
+                    </a:lnL>
+                    <a:lnR w="6350" cap="flat" cmpd="sng" algn="ctr">
+                      <a:solidFill>
+                        <a:srgbClr val="C8C0AE"/>
+                      </a:solidFill>
+                      <a:prstDash val="solid"/>
+                      <a:round/>
+                      <a:headEnd type="none" w="med" len="med"/>
+                      <a:tailEnd type="none" w="med" len="med"/>
+                    </a:lnR>
+                    <a:lnT w="6350" cap="flat" cmpd="sng" algn="ctr">
+                      <a:solidFill>
+                        <a:srgbClr val="C8C0AE"/>
+                      </a:solidFill>
+                      <a:prstDash val="solid"/>
+                      <a:round/>
+                      <a:headEnd type="none" w="med" len="med"/>
+                      <a:tailEnd type="none" w="med" len="med"/>
+                    </a:lnT>
+                    <a:lnB w="6350" cap="flat" cmpd="sng" algn="ctr">
+                      <a:solidFill>
+                        <a:srgbClr val="C8C0AE"/>
+                      </a:solidFill>
+                      <a:prstDash val="solid"/>
+                      <a:round/>
+                      <a:headEnd type="none" w="med" len="med"/>
+                      <a:tailEnd type="none" w="med" len="med"/>
+                    </a:lnB>
+                    <a:solidFill>
+                      <a:srgbClr val="0B0B0B"/>
+                    </a:solidFill>
+                  </a:tcPr>
+                </a:tc>
+                <a:tc>
+                  <a:txBody>
+                    <a:bodyPr/>
+                    <a:lstStyle/>
+                    <a:p>
+                      <a:pPr algn="ctr" indent="0" marL="0">
+                        <a:buNone/>
+                      </a:pPr>
+                      <a:r>
+                        <a:rPr lang="en-US" sz="1500" b="1" dirty="0">
+                          <a:solidFill>
+                            <a:srgbClr val="EFE8D6"/>
+                          </a:solidFill>
+                          <a:latin typeface="Calibri" pitchFamily="34" charset="0"/>
+                          <a:ea typeface="Calibri" pitchFamily="34" charset="-122"/>
+                          <a:cs typeface="Calibri" pitchFamily="34" charset="-120"/>
+                        </a:rPr>
+                        <a:t>ROUGE-1</a:t>
+                      </a:r>
+                      <a:endParaRPr lang="en-US" sz="1500" dirty="0">
+                        <a:latin typeface="Calibri" charset="0"/>
+                        <a:ea typeface="Calibri" charset="0"/>
+                        <a:cs typeface="Calibri" charset="0"/>
+                      </a:endParaRPr>
+                    </a:p>
+                  </a:txBody>
+                  <a:tcPr marL="91440" marR="91440" marT="45720" marB="45720" anchor="ctr">
+                    <a:lnL w="6350" cap="flat" cmpd="sng" algn="ctr">
+                      <a:solidFill>
+                        <a:srgbClr val="C8C0AE"/>
+                      </a:solidFill>
+                      <a:prstDash val="solid"/>
+                      <a:round/>
+                      <a:headEnd type="none" w="med" len="med"/>
+                      <a:tailEnd type="none" w="med" len="med"/>
+                    </a:lnL>
+                    <a:lnR w="6350" cap="flat" cmpd="sng" algn="ctr">
+                      <a:solidFill>
+                        <a:srgbClr val="C8C0AE"/>
+                      </a:solidFill>
+                      <a:prstDash val="solid"/>
+                      <a:round/>
+                      <a:headEnd type="none" w="med" len="med"/>
+                      <a:tailEnd type="none" w="med" len="med"/>
+                    </a:lnR>
+                    <a:lnT w="6350" cap="flat" cmpd="sng" algn="ctr">
+                      <a:solidFill>
+                        <a:srgbClr val="C8C0AE"/>
+                      </a:solidFill>
+                      <a:prstDash val="solid"/>
+                      <a:round/>
+                      <a:headEnd type="none" w="med" len="med"/>
+                      <a:tailEnd type="none" w="med" len="med"/>
+                    </a:lnT>
+                    <a:lnB w="6350" cap="flat" cmpd="sng" algn="ctr">
+                      <a:solidFill>
+                        <a:srgbClr val="C8C0AE"/>
+                      </a:solidFill>
+                      <a:prstDash val="solid"/>
+                      <a:round/>
+                      <a:headEnd type="none" w="med" len="med"/>
+                      <a:tailEnd type="none" w="med" len="med"/>
+                    </a:lnB>
+                    <a:solidFill>
+                      <a:srgbClr val="0B0B0B"/>
+                    </a:solidFill>
+                  </a:tcPr>
+                </a:tc>
+                <a:tc>
+                  <a:txBody>
+                    <a:bodyPr/>
+                    <a:lstStyle/>
+                    <a:p>
+                      <a:pPr algn="ctr" indent="0" marL="0">
+                        <a:buNone/>
+                      </a:pPr>
+                      <a:r>
+                        <a:rPr lang="en-US" sz="1500" b="1" dirty="0">
+                          <a:solidFill>
+                            <a:srgbClr val="EFE8D6"/>
+                          </a:solidFill>
+                          <a:latin typeface="Calibri" pitchFamily="34" charset="0"/>
+                          <a:ea typeface="Calibri" pitchFamily="34" charset="-122"/>
+                          <a:cs typeface="Calibri" pitchFamily="34" charset="-120"/>
+                        </a:rPr>
+                        <a:t>ROUGE-2</a:t>
+                      </a:r>
+                      <a:endParaRPr lang="en-US" sz="1500" dirty="0">
+                        <a:latin typeface="Calibri" charset="0"/>
+                        <a:ea typeface="Calibri" charset="0"/>
+                        <a:cs typeface="Calibri" charset="0"/>
+                      </a:endParaRPr>
+                    </a:p>
+                  </a:txBody>
+                  <a:tcPr marL="91440" marR="91440" marT="45720" marB="45720" anchor="ctr">
+                    <a:lnL w="6350" cap="flat" cmpd="sng" algn="ctr">
+                      <a:solidFill>
+                        <a:srgbClr val="C8C0AE"/>
+                      </a:solidFill>
+                      <a:prstDash val="solid"/>
+                      <a:round/>
+                      <a:headEnd type="none" w="med" len="med"/>
+                      <a:tailEnd type="none" w="med" len="med"/>
+                    </a:lnL>
+                    <a:lnR w="6350" cap="flat" cmpd="sng" algn="ctr">
+                      <a:solidFill>
+                        <a:srgbClr val="C8C0AE"/>
+                      </a:solidFill>
+                      <a:prstDash val="solid"/>
+                      <a:round/>
+                      <a:headEnd type="none" w="med" len="med"/>
+                      <a:tailEnd type="none" w="med" len="med"/>
+                    </a:lnR>
+                    <a:lnT w="6350" cap="flat" cmpd="sng" algn="ctr">
+                      <a:solidFill>
+                        <a:srgbClr val="C8C0AE"/>
+                      </a:solidFill>
+                      <a:prstDash val="solid"/>
+                      <a:round/>
+                      <a:headEnd type="none" w="med" len="med"/>
+                      <a:tailEnd type="none" w="med" len="med"/>
+                    </a:lnT>
+                    <a:lnB w="6350" cap="flat" cmpd="sng" algn="ctr">
+                      <a:solidFill>
+                        <a:srgbClr val="C8C0AE"/>
+                      </a:solidFill>
+                      <a:prstDash val="solid"/>
+                      <a:round/>
+                      <a:headEnd type="none" w="med" len="med"/>
+                      <a:tailEnd type="none" w="med" len="med"/>
+                    </a:lnB>
+                    <a:solidFill>
+                      <a:srgbClr val="0B0B0B"/>
+                    </a:solidFill>
+                  </a:tcPr>
+                </a:tc>
+                <a:tc>
+                  <a:txBody>
+                    <a:bodyPr/>
+                    <a:lstStyle/>
+                    <a:p>
+                      <a:pPr algn="ctr" indent="0" marL="0">
+                        <a:buNone/>
+                      </a:pPr>
+                      <a:r>
+                        <a:rPr lang="en-US" sz="1500" b="1" dirty="0">
+                          <a:solidFill>
+                            <a:srgbClr val="EFE8D6"/>
+                          </a:solidFill>
+                          <a:latin typeface="Calibri" pitchFamily="34" charset="0"/>
+                          <a:ea typeface="Calibri" pitchFamily="34" charset="-122"/>
+                          <a:cs typeface="Calibri" pitchFamily="34" charset="-120"/>
+                        </a:rPr>
+                        <a:t>ROUGE-L</a:t>
+                      </a:r>
+                      <a:endParaRPr lang="en-US" sz="1500" dirty="0">
+                        <a:latin typeface="Calibri" charset="0"/>
+                        <a:ea typeface="Calibri" charset="0"/>
+                        <a:cs typeface="Calibri" charset="0"/>
+                      </a:endParaRPr>
+                    </a:p>
+                  </a:txBody>
+                  <a:tcPr marL="91440" marR="91440" marT="45720" marB="45720" anchor="ctr">
+                    <a:lnL w="6350" cap="flat" cmpd="sng" algn="ctr">
+                      <a:solidFill>
+                        <a:srgbClr val="C8C0AE"/>
+                      </a:solidFill>
+                      <a:prstDash val="solid"/>
+                      <a:round/>
+                      <a:headEnd type="none" w="med" len="med"/>
+                      <a:tailEnd type="none" w="med" len="med"/>
+                    </a:lnL>
+                    <a:lnR w="6350" cap="flat" cmpd="sng" algn="ctr">
+                      <a:solidFill>
+                        <a:srgbClr val="C8C0AE"/>
+                      </a:solidFill>
+                      <a:prstDash val="solid"/>
+                      <a:round/>
+                      <a:headEnd type="none" w="med" len="med"/>
+                      <a:tailEnd type="none" w="med" len="med"/>
+                    </a:lnR>
+                    <a:lnT w="6350" cap="flat" cmpd="sng" algn="ctr">
+                      <a:solidFill>
+                        <a:srgbClr val="C8C0AE"/>
+                      </a:solidFill>
+                      <a:prstDash val="solid"/>
+                      <a:round/>
+                      <a:headEnd type="none" w="med" len="med"/>
+                      <a:tailEnd type="none" w="med" len="med"/>
+                    </a:lnT>
+                    <a:lnB w="6350" cap="flat" cmpd="sng" algn="ctr">
+                      <a:solidFill>
+                        <a:srgbClr val="C8C0AE"/>
+                      </a:solidFill>
+                      <a:prstDash val="solid"/>
+                      <a:round/>
+                      <a:headEnd type="none" w="med" len="med"/>
+                      <a:tailEnd type="none" w="med" len="med"/>
+                    </a:lnB>
+                    <a:solidFill>
+                      <a:srgbClr val="0B0B0B"/>
+                    </a:solidFill>
+                  </a:tcPr>
+                </a:tc>
+              </a:tr>
+              <a:tr h="701040">
+                <a:tc>
+                  <a:txBody>
+                    <a:bodyPr/>
+                    <a:lstStyle/>
+                    <a:p>
+                      <a:pPr algn="ctr" indent="0" marL="0">
+                        <a:buNone/>
+                      </a:pPr>
+                      <a:r>
+                        <a:rPr lang="en-US" sz="1500" dirty="0">
+                          <a:solidFill>
+                            <a:srgbClr val="2B2B2B"/>
+                          </a:solidFill>
+                          <a:latin typeface="Calibri" pitchFamily="34" charset="0"/>
+                          <a:ea typeface="Calibri" pitchFamily="34" charset="-122"/>
+                          <a:cs typeface="Calibri" pitchFamily="34" charset="-120"/>
+                        </a:rPr>
+                        <a:t>Lead-1</a:t>
+                      </a:r>
+                      <a:endParaRPr lang="en-US" sz="1500" dirty="0">
+                        <a:latin typeface="Calibri" charset="0"/>
+                        <a:ea typeface="Calibri" charset="0"/>
+                        <a:cs typeface="Calibri" charset="0"/>
+                      </a:endParaRPr>
+                    </a:p>
+                  </a:txBody>
+                  <a:tcPr marL="91440" marR="91440" marT="45720" marB="45720" anchor="ctr">
+                    <a:lnL w="6350" cap="flat" cmpd="sng" algn="ctr">
+                      <a:solidFill>
+                        <a:srgbClr val="C8C0AE"/>
+                      </a:solidFill>
+                      <a:prstDash val="solid"/>
+                      <a:round/>
+                      <a:headEnd type="none" w="med" len="med"/>
+                      <a:tailEnd type="none" w="med" len="med"/>
+                    </a:lnL>
+                    <a:lnR w="6350" cap="flat" cmpd="sng" algn="ctr">
+                      <a:solidFill>
+                        <a:srgbClr val="C8C0AE"/>
+                      </a:solidFill>
+                      <a:prstDash val="solid"/>
+                      <a:round/>
+                      <a:headEnd type="none" w="med" len="med"/>
+                      <a:tailEnd type="none" w="med" len="med"/>
+                    </a:lnR>
+                    <a:lnT w="6350" cap="flat" cmpd="sng" algn="ctr">
+                      <a:solidFill>
+                        <a:srgbClr val="C8C0AE"/>
+                      </a:solidFill>
+                      <a:prstDash val="solid"/>
+                      <a:round/>
+                      <a:headEnd type="none" w="med" len="med"/>
+                      <a:tailEnd type="none" w="med" len="med"/>
+                    </a:lnT>
+                    <a:lnB w="6350" cap="flat" cmpd="sng" algn="ctr">
+                      <a:solidFill>
+                        <a:srgbClr val="C8C0AE"/>
+                      </a:solidFill>
+                      <a:prstDash val="solid"/>
+                      <a:round/>
+                      <a:headEnd type="none" w="med" len="med"/>
+                      <a:tailEnd type="none" w="med" len="med"/>
+                    </a:lnB>
+                  </a:tcPr>
+                </a:tc>
+                <a:tc>
+                  <a:txBody>
+                    <a:bodyPr/>
+                    <a:lstStyle/>
+                    <a:p>
+                      <a:pPr algn="ctr" indent="0" marL="0">
+                        <a:buNone/>
+                      </a:pPr>
+                      <a:r>
+                        <a:rPr lang="en-US" sz="1500" dirty="0">
+                          <a:solidFill>
+                            <a:srgbClr val="2B2B2B"/>
+                          </a:solidFill>
+                          <a:latin typeface="Calibri" pitchFamily="34" charset="0"/>
+                          <a:ea typeface="Calibri" pitchFamily="34" charset="-122"/>
+                          <a:cs typeface="Calibri" pitchFamily="34" charset="-120"/>
+                        </a:rPr>
+                        <a:t>0.2719</a:t>
+                      </a:r>
+                      <a:endParaRPr lang="en-US" sz="1500" dirty="0">
+                        <a:latin typeface="Calibri" charset="0"/>
+                        <a:ea typeface="Calibri" charset="0"/>
+                        <a:cs typeface="Calibri" charset="0"/>
+                      </a:endParaRPr>
+                    </a:p>
+                  </a:txBody>
+                  <a:tcPr marL="91440" marR="91440" marT="45720" marB="45720" anchor="ctr">
+                    <a:lnL w="6350" cap="flat" cmpd="sng" algn="ctr">
+                      <a:solidFill>
+                        <a:srgbClr val="C8C0AE"/>
+                      </a:solidFill>
+                      <a:prstDash val="solid"/>
+                      <a:round/>
+                      <a:headEnd type="none" w="med" len="med"/>
+                      <a:tailEnd type="none" w="med" len="med"/>
+                    </a:lnL>
+                    <a:lnR w="6350" cap="flat" cmpd="sng" algn="ctr">
+                      <a:solidFill>
+                        <a:srgbClr val="C8C0AE"/>
+                      </a:solidFill>
+                      <a:prstDash val="solid"/>
+                      <a:round/>
+                      <a:headEnd type="none" w="med" len="med"/>
+                      <a:tailEnd type="none" w="med" len="med"/>
+                    </a:lnR>
+                    <a:lnT w="6350" cap="flat" cmpd="sng" algn="ctr">
+                      <a:solidFill>
+                        <a:srgbClr val="C8C0AE"/>
+                      </a:solidFill>
+                      <a:prstDash val="solid"/>
+                      <a:round/>
+                      <a:headEnd type="none" w="med" len="med"/>
+                      <a:tailEnd type="none" w="med" len="med"/>
+                    </a:lnT>
+                    <a:lnB w="6350" cap="flat" cmpd="sng" algn="ctr">
+                      <a:solidFill>
+                        <a:srgbClr val="C8C0AE"/>
+                      </a:solidFill>
+                      <a:prstDash val="solid"/>
+                      <a:round/>
+                      <a:headEnd type="none" w="med" len="med"/>
+                      <a:tailEnd type="none" w="med" len="med"/>
+                    </a:lnB>
+                  </a:tcPr>
+                </a:tc>
+                <a:tc>
+                  <a:txBody>
+                    <a:bodyPr/>
+                    <a:lstStyle/>
+                    <a:p>
+                      <a:pPr algn="ctr" indent="0" marL="0">
+                        <a:buNone/>
+                      </a:pPr>
+                      <a:r>
+                        <a:rPr lang="en-US" sz="1500" dirty="0">
+                          <a:solidFill>
+                            <a:srgbClr val="2B2B2B"/>
+                          </a:solidFill>
+                          <a:latin typeface="Calibri" pitchFamily="34" charset="0"/>
+                          <a:ea typeface="Calibri" pitchFamily="34" charset="-122"/>
+                          <a:cs typeface="Calibri" pitchFamily="34" charset="-120"/>
+                        </a:rPr>
+                        <a:t>0.1305</a:t>
+                      </a:r>
+                      <a:endParaRPr lang="en-US" sz="1500" dirty="0">
+                        <a:latin typeface="Calibri" charset="0"/>
+                        <a:ea typeface="Calibri" charset="0"/>
+                        <a:cs typeface="Calibri" charset="0"/>
+                      </a:endParaRPr>
+                    </a:p>
+                  </a:txBody>
+                  <a:tcPr marL="91440" marR="91440" marT="45720" marB="45720" anchor="ctr">
+                    <a:lnL w="6350" cap="flat" cmpd="sng" algn="ctr">
+                      <a:solidFill>
+                        <a:srgbClr val="C8C0AE"/>
+                      </a:solidFill>
+                      <a:prstDash val="solid"/>
+                      <a:round/>
+                      <a:headEnd type="none" w="med" len="med"/>
+                      <a:tailEnd type="none" w="med" len="med"/>
+                    </a:lnL>
+                    <a:lnR w="6350" cap="flat" cmpd="sng" algn="ctr">
+                      <a:solidFill>
+                        <a:srgbClr val="C8C0AE"/>
+                      </a:solidFill>
+                      <a:prstDash val="solid"/>
+                      <a:round/>
+                      <a:headEnd type="none" w="med" len="med"/>
+                      <a:tailEnd type="none" w="med" len="med"/>
+                    </a:lnR>
+                    <a:lnT w="6350" cap="flat" cmpd="sng" algn="ctr">
+                      <a:solidFill>
+                        <a:srgbClr val="C8C0AE"/>
+                      </a:solidFill>
+                      <a:prstDash val="solid"/>
+                      <a:round/>
+                      <a:headEnd type="none" w="med" len="med"/>
+                      <a:tailEnd type="none" w="med" len="med"/>
+                    </a:lnT>
+                    <a:lnB w="6350" cap="flat" cmpd="sng" algn="ctr">
+                      <a:solidFill>
+                        <a:srgbClr val="C8C0AE"/>
+                      </a:solidFill>
+                      <a:prstDash val="solid"/>
+                      <a:round/>
+                      <a:headEnd type="none" w="med" len="med"/>
+                      <a:tailEnd type="none" w="med" len="med"/>
+                    </a:lnB>
+                  </a:tcPr>
+                </a:tc>
+                <a:tc>
+                  <a:txBody>
+                    <a:bodyPr/>
+                    <a:lstStyle/>
+                    <a:p>
+                      <a:pPr algn="ctr" indent="0" marL="0">
+                        <a:buNone/>
+                      </a:pPr>
+                      <a:r>
+                        <a:rPr lang="en-US" sz="1500" dirty="0">
+                          <a:solidFill>
+                            <a:srgbClr val="2B2B2B"/>
+                          </a:solidFill>
+                          <a:latin typeface="Calibri" pitchFamily="34" charset="0"/>
+                          <a:ea typeface="Calibri" pitchFamily="34" charset="-122"/>
+                          <a:cs typeface="Calibri" pitchFamily="34" charset="-120"/>
+                        </a:rPr>
+                        <a:t>0.2092</a:t>
+                      </a:r>
+                      <a:endParaRPr lang="en-US" sz="1500" dirty="0">
+                        <a:latin typeface="Calibri" charset="0"/>
+                        <a:ea typeface="Calibri" charset="0"/>
+                        <a:cs typeface="Calibri" charset="0"/>
+                      </a:endParaRPr>
+                    </a:p>
+                  </a:txBody>
+                  <a:tcPr marL="91440" marR="91440" marT="45720" marB="45720" anchor="ctr">
+                    <a:lnL w="6350" cap="flat" cmpd="sng" algn="ctr">
+                      <a:solidFill>
+                        <a:srgbClr val="C8C0AE"/>
+                      </a:solidFill>
+                      <a:prstDash val="solid"/>
+                      <a:round/>
+                      <a:headEnd type="none" w="med" len="med"/>
+                      <a:tailEnd type="none" w="med" len="med"/>
+                    </a:lnL>
+                    <a:lnR w="6350" cap="flat" cmpd="sng" algn="ctr">
+                      <a:solidFill>
+                        <a:srgbClr val="C8C0AE"/>
+                      </a:solidFill>
+                      <a:prstDash val="solid"/>
+                      <a:round/>
+                      <a:headEnd type="none" w="med" len="med"/>
+                      <a:tailEnd type="none" w="med" len="med"/>
+                    </a:lnR>
+                    <a:lnT w="6350" cap="flat" cmpd="sng" algn="ctr">
+                      <a:solidFill>
+                        <a:srgbClr val="C8C0AE"/>
+                      </a:solidFill>
+                      <a:prstDash val="solid"/>
+                      <a:round/>
+                      <a:headEnd type="none" w="med" len="med"/>
+                      <a:tailEnd type="none" w="med" len="med"/>
+                    </a:lnT>
+                    <a:lnB w="6350" cap="flat" cmpd="sng" algn="ctr">
+                      <a:solidFill>
+                        <a:srgbClr val="C8C0AE"/>
+                      </a:solidFill>
+                      <a:prstDash val="solid"/>
+                      <a:round/>
+                      <a:headEnd type="none" w="med" len="med"/>
+                      <a:tailEnd type="none" w="med" len="med"/>
+                    </a:lnB>
+                  </a:tcPr>
+                </a:tc>
+              </a:tr>
+              <a:tr h="701040">
+                <a:tc>
+                  <a:txBody>
+                    <a:bodyPr/>
+                    <a:lstStyle/>
+                    <a:p>
+                      <a:pPr algn="ctr" indent="0" marL="0">
+                        <a:buNone/>
+                      </a:pPr>
+                      <a:r>
+                        <a:rPr lang="en-US" sz="1500" dirty="0">
+                          <a:solidFill>
+                            <a:srgbClr val="2B2B2B"/>
+                          </a:solidFill>
+                          <a:latin typeface="Calibri" pitchFamily="34" charset="0"/>
+                          <a:ea typeface="Calibri" pitchFamily="34" charset="-122"/>
+                          <a:cs typeface="Calibri" pitchFamily="34" charset="-120"/>
+                        </a:rPr>
+                        <a:t>Lead-3</a:t>
+                      </a:r>
+                      <a:endParaRPr lang="en-US" sz="1500" dirty="0">
+                        <a:latin typeface="Calibri" charset="0"/>
+                        <a:ea typeface="Calibri" charset="0"/>
+                        <a:cs typeface="Calibri" charset="0"/>
+                      </a:endParaRPr>
+                    </a:p>
+                  </a:txBody>
+                  <a:tcPr marL="91440" marR="91440" marT="45720" marB="45720" anchor="ctr">
+                    <a:lnL w="6350" cap="flat" cmpd="sng" algn="ctr">
+                      <a:solidFill>
+                        <a:srgbClr val="C8C0AE"/>
+                      </a:solidFill>
+                      <a:prstDash val="solid"/>
+                      <a:round/>
+                      <a:headEnd type="none" w="med" len="med"/>
+                      <a:tailEnd type="none" w="med" len="med"/>
+                    </a:lnL>
+                    <a:lnR w="6350" cap="flat" cmpd="sng" algn="ctr">
+                      <a:solidFill>
+                        <a:srgbClr val="C8C0AE"/>
+                      </a:solidFill>
+                      <a:prstDash val="solid"/>
+                      <a:round/>
+                      <a:headEnd type="none" w="med" len="med"/>
+                      <a:tailEnd type="none" w="med" len="med"/>
+                    </a:lnR>
+                    <a:lnT w="6350" cap="flat" cmpd="sng" algn="ctr">
+                      <a:solidFill>
+                        <a:srgbClr val="C8C0AE"/>
+                      </a:solidFill>
+                      <a:prstDash val="solid"/>
+                      <a:round/>
+                      <a:headEnd type="none" w="med" len="med"/>
+                      <a:tailEnd type="none" w="med" len="med"/>
+                    </a:lnT>
+                    <a:lnB w="6350" cap="flat" cmpd="sng" algn="ctr">
+                      <a:solidFill>
+                        <a:srgbClr val="C8C0AE"/>
+                      </a:solidFill>
+                      <a:prstDash val="solid"/>
+                      <a:round/>
+                      <a:headEnd type="none" w="med" len="med"/>
+                      <a:tailEnd type="none" w="med" len="med"/>
+                    </a:lnB>
+                  </a:tcPr>
+                </a:tc>
+                <a:tc>
+                  <a:txBody>
+                    <a:bodyPr/>
+                    <a:lstStyle/>
+                    <a:p>
+                      <a:pPr algn="ctr" indent="0" marL="0">
+                        <a:buNone/>
+                      </a:pPr>
+                      <a:r>
+                        <a:rPr lang="en-US" sz="1500" dirty="0">
+                          <a:solidFill>
+                            <a:srgbClr val="2B2B2B"/>
+                          </a:solidFill>
+                          <a:latin typeface="Calibri" pitchFamily="34" charset="0"/>
+                          <a:ea typeface="Calibri" pitchFamily="34" charset="-122"/>
+                          <a:cs typeface="Calibri" pitchFamily="34" charset="-120"/>
+                        </a:rPr>
+                        <a:t>0.2569</a:t>
+                      </a:r>
+                      <a:endParaRPr lang="en-US" sz="1500" dirty="0">
+                        <a:latin typeface="Calibri" charset="0"/>
+                        <a:ea typeface="Calibri" charset="0"/>
+                        <a:cs typeface="Calibri" charset="0"/>
+                      </a:endParaRPr>
+                    </a:p>
+                  </a:txBody>
+                  <a:tcPr marL="91440" marR="91440" marT="45720" marB="45720" anchor="ctr">
+                    <a:lnL w="6350" cap="flat" cmpd="sng" algn="ctr">
+                      <a:solidFill>
+                        <a:srgbClr val="C8C0AE"/>
+                      </a:solidFill>
+                      <a:prstDash val="solid"/>
+                      <a:round/>
+                      <a:headEnd type="none" w="med" len="med"/>
+                      <a:tailEnd type="none" w="med" len="med"/>
+                    </a:lnL>
+                    <a:lnR w="6350" cap="flat" cmpd="sng" algn="ctr">
+                      <a:solidFill>
+                        <a:srgbClr val="C8C0AE"/>
+                      </a:solidFill>
+                      <a:prstDash val="solid"/>
+                      <a:round/>
+                      <a:headEnd type="none" w="med" len="med"/>
+                      <a:tailEnd type="none" w="med" len="med"/>
+                    </a:lnR>
+                    <a:lnT w="6350" cap="flat" cmpd="sng" algn="ctr">
+                      <a:solidFill>
+                        <a:srgbClr val="C8C0AE"/>
+                      </a:solidFill>
+                      <a:prstDash val="solid"/>
+                      <a:round/>
+                      <a:headEnd type="none" w="med" len="med"/>
+                      <a:tailEnd type="none" w="med" len="med"/>
+                    </a:lnT>
+                    <a:lnB w="6350" cap="flat" cmpd="sng" algn="ctr">
+                      <a:solidFill>
+                        <a:srgbClr val="C8C0AE"/>
+                      </a:solidFill>
+                      <a:prstDash val="solid"/>
+                      <a:round/>
+                      <a:headEnd type="none" w="med" len="med"/>
+                      <a:tailEnd type="none" w="med" len="med"/>
+                    </a:lnB>
+                  </a:tcPr>
+                </a:tc>
+                <a:tc>
+                  <a:txBody>
+                    <a:bodyPr/>
+                    <a:lstStyle/>
+                    <a:p>
+                      <a:pPr algn="ctr" indent="0" marL="0">
+                        <a:buNone/>
+                      </a:pPr>
+                      <a:r>
+                        <a:rPr lang="en-US" sz="1500" dirty="0">
+                          <a:solidFill>
+                            <a:srgbClr val="2B2B2B"/>
+                          </a:solidFill>
+                          <a:latin typeface="Calibri" pitchFamily="34" charset="0"/>
+                          <a:ea typeface="Calibri" pitchFamily="34" charset="-122"/>
+                          <a:cs typeface="Calibri" pitchFamily="34" charset="-120"/>
+                        </a:rPr>
+                        <a:t>0.1294</a:t>
+                      </a:r>
+                      <a:endParaRPr lang="en-US" sz="1500" dirty="0">
+                        <a:latin typeface="Calibri" charset="0"/>
+                        <a:ea typeface="Calibri" charset="0"/>
+                        <a:cs typeface="Calibri" charset="0"/>
+                      </a:endParaRPr>
+                    </a:p>
+                  </a:txBody>
+                  <a:tcPr marL="91440" marR="91440" marT="45720" marB="45720" anchor="ctr">
+                    <a:lnL w="6350" cap="flat" cmpd="sng" algn="ctr">
+                      <a:solidFill>
+                        <a:srgbClr val="C8C0AE"/>
+                      </a:solidFill>
+                      <a:prstDash val="solid"/>
+                      <a:round/>
+                      <a:headEnd type="none" w="med" len="med"/>
+                      <a:tailEnd type="none" w="med" len="med"/>
+                    </a:lnL>
+                    <a:lnR w="6350" cap="flat" cmpd="sng" algn="ctr">
+                      <a:solidFill>
+                        <a:srgbClr val="C8C0AE"/>
+                      </a:solidFill>
+                      <a:prstDash val="solid"/>
+                      <a:round/>
+                      <a:headEnd type="none" w="med" len="med"/>
+                      <a:tailEnd type="none" w="med" len="med"/>
+                    </a:lnR>
+                    <a:lnT w="6350" cap="flat" cmpd="sng" algn="ctr">
+                      <a:solidFill>
+                        <a:srgbClr val="C8C0AE"/>
+                      </a:solidFill>
+                      <a:prstDash val="solid"/>
+                      <a:round/>
+                      <a:headEnd type="none" w="med" len="med"/>
+                      <a:tailEnd type="none" w="med" len="med"/>
+                    </a:lnT>
+                    <a:lnB w="6350" cap="flat" cmpd="sng" algn="ctr">
+                      <a:solidFill>
+                        <a:srgbClr val="C8C0AE"/>
+                      </a:solidFill>
+                      <a:prstDash val="solid"/>
+                      <a:round/>
+                      <a:headEnd type="none" w="med" len="med"/>
+                      <a:tailEnd type="none" w="med" len="med"/>
+                    </a:lnB>
+                  </a:tcPr>
+                </a:tc>
+                <a:tc>
+                  <a:txBody>
+                    <a:bodyPr/>
+                    <a:lstStyle/>
+                    <a:p>
+                      <a:pPr algn="ctr" indent="0" marL="0">
+                        <a:buNone/>
+                      </a:pPr>
+                      <a:r>
+                        <a:rPr lang="en-US" sz="1500" dirty="0">
+                          <a:solidFill>
+                            <a:srgbClr val="2B2B2B"/>
+                          </a:solidFill>
+                          <a:latin typeface="Calibri" pitchFamily="34" charset="0"/>
+                          <a:ea typeface="Calibri" pitchFamily="34" charset="-122"/>
+                          <a:cs typeface="Calibri" pitchFamily="34" charset="-120"/>
+                        </a:rPr>
+                        <a:t>0.1856</a:t>
+                      </a:r>
+                      <a:endParaRPr lang="en-US" sz="1500" dirty="0">
+                        <a:latin typeface="Calibri" charset="0"/>
+                        <a:ea typeface="Calibri" charset="0"/>
+                        <a:cs typeface="Calibri" charset="0"/>
+                      </a:endParaRPr>
+                    </a:p>
+                  </a:txBody>
+                  <a:tcPr marL="91440" marR="91440" marT="45720" marB="45720" anchor="ctr">
+                    <a:lnL w="6350" cap="flat" cmpd="sng" algn="ctr">
+                      <a:solidFill>
+                        <a:srgbClr val="C8C0AE"/>
+                      </a:solidFill>
+                      <a:prstDash val="solid"/>
+                      <a:round/>
+                      <a:headEnd type="none" w="med" len="med"/>
+                      <a:tailEnd type="none" w="med" len="med"/>
+                    </a:lnL>
+                    <a:lnR w="6350" cap="flat" cmpd="sng" algn="ctr">
+                      <a:solidFill>
+                        <a:srgbClr val="C8C0AE"/>
+                      </a:solidFill>
+                      <a:prstDash val="solid"/>
+                      <a:round/>
+                      <a:headEnd type="none" w="med" len="med"/>
+                      <a:tailEnd type="none" w="med" len="med"/>
+                    </a:lnR>
+                    <a:lnT w="6350" cap="flat" cmpd="sng" algn="ctr">
+                      <a:solidFill>
+                        <a:srgbClr val="C8C0AE"/>
+                      </a:solidFill>
+                      <a:prstDash val="solid"/>
+                      <a:round/>
+                      <a:headEnd type="none" w="med" len="med"/>
+                      <a:tailEnd type="none" w="med" len="med"/>
+                    </a:lnT>
+                    <a:lnB w="6350" cap="flat" cmpd="sng" algn="ctr">
+                      <a:solidFill>
+                        <a:srgbClr val="C8C0AE"/>
+                      </a:solidFill>
+                      <a:prstDash val="solid"/>
+                      <a:round/>
+                      <a:headEnd type="none" w="med" len="med"/>
+                      <a:tailEnd type="none" w="med" len="med"/>
+                    </a:lnB>
+                  </a:tcPr>
+                </a:tc>
+              </a:tr>
+              <a:tr h="701040">
+                <a:tc>
+                  <a:txBody>
+                    <a:bodyPr/>
+                    <a:lstStyle/>
+                    <a:p>
+                      <a:pPr algn="ctr" indent="0" marL="0">
+                        <a:buNone/>
+                      </a:pPr>
+                      <a:r>
+                        <a:rPr lang="en-US" sz="1500" dirty="0">
+                          <a:solidFill>
+                            <a:srgbClr val="2B2B2B"/>
+                          </a:solidFill>
+                          <a:latin typeface="Calibri" pitchFamily="34" charset="0"/>
+                          <a:ea typeface="Calibri" pitchFamily="34" charset="-122"/>
+                          <a:cs typeface="Calibri" pitchFamily="34" charset="-120"/>
+                        </a:rPr>
+                        <a:t>Lead-5</a:t>
+                      </a:r>
+                      <a:endParaRPr lang="en-US" sz="1500" dirty="0">
+                        <a:latin typeface="Calibri" charset="0"/>
+                        <a:ea typeface="Calibri" charset="0"/>
+                        <a:cs typeface="Calibri" charset="0"/>
+                      </a:endParaRPr>
+                    </a:p>
+                  </a:txBody>
+                  <a:tcPr marL="91440" marR="91440" marT="45720" marB="45720" anchor="ctr">
+                    <a:lnL w="6350" cap="flat" cmpd="sng" algn="ctr">
+                      <a:solidFill>
+                        <a:srgbClr val="C8C0AE"/>
+                      </a:solidFill>
+                      <a:prstDash val="solid"/>
+                      <a:round/>
+                      <a:headEnd type="none" w="med" len="med"/>
+                      <a:tailEnd type="none" w="med" len="med"/>
+                    </a:lnL>
+                    <a:lnR w="6350" cap="flat" cmpd="sng" algn="ctr">
+                      <a:solidFill>
+                        <a:srgbClr val="C8C0AE"/>
+                      </a:solidFill>
+                      <a:prstDash val="solid"/>
+                      <a:round/>
+                      <a:headEnd type="none" w="med" len="med"/>
+                      <a:tailEnd type="none" w="med" len="med"/>
+                    </a:lnR>
+                    <a:lnT w="6350" cap="flat" cmpd="sng" algn="ctr">
+                      <a:solidFill>
+                        <a:srgbClr val="C8C0AE"/>
+                      </a:solidFill>
+                      <a:prstDash val="solid"/>
+                      <a:round/>
+                      <a:headEnd type="none" w="med" len="med"/>
+                      <a:tailEnd type="none" w="med" len="med"/>
+                    </a:lnT>
+                    <a:lnB w="6350" cap="flat" cmpd="sng" algn="ctr">
+                      <a:solidFill>
+                        <a:srgbClr val="C8C0AE"/>
+                      </a:solidFill>
+                      <a:prstDash val="solid"/>
+                      <a:round/>
+                      <a:headEnd type="none" w="med" len="med"/>
+                      <a:tailEnd type="none" w="med" len="med"/>
+                    </a:lnB>
+                  </a:tcPr>
+                </a:tc>
+                <a:tc>
+                  <a:txBody>
+                    <a:bodyPr/>
+                    <a:lstStyle/>
+                    <a:p>
+                      <a:pPr algn="ctr" indent="0" marL="0">
+                        <a:buNone/>
+                      </a:pPr>
+                      <a:r>
+                        <a:rPr lang="en-US" sz="1500" dirty="0">
+                          <a:solidFill>
+                            <a:srgbClr val="2B2B2B"/>
+                          </a:solidFill>
+                          <a:latin typeface="Calibri" pitchFamily="34" charset="0"/>
+                          <a:ea typeface="Calibri" pitchFamily="34" charset="-122"/>
+                          <a:cs typeface="Calibri" pitchFamily="34" charset="-120"/>
+                        </a:rPr>
+                        <a:t>0.2256</a:t>
+                      </a:r>
+                      <a:endParaRPr lang="en-US" sz="1500" dirty="0">
+                        <a:latin typeface="Calibri" charset="0"/>
+                        <a:ea typeface="Calibri" charset="0"/>
+                        <a:cs typeface="Calibri" charset="0"/>
+                      </a:endParaRPr>
+                    </a:p>
+                  </a:txBody>
+                  <a:tcPr marL="91440" marR="91440" marT="45720" marB="45720" anchor="ctr">
+                    <a:lnL w="6350" cap="flat" cmpd="sng" algn="ctr">
+                      <a:solidFill>
+                        <a:srgbClr val="C8C0AE"/>
+                      </a:solidFill>
+                      <a:prstDash val="solid"/>
+                      <a:round/>
+                      <a:headEnd type="none" w="med" len="med"/>
+                      <a:tailEnd type="none" w="med" len="med"/>
+                    </a:lnL>
+                    <a:lnR w="6350" cap="flat" cmpd="sng" algn="ctr">
+                      <a:solidFill>
+                        <a:srgbClr val="C8C0AE"/>
+                      </a:solidFill>
+                      <a:prstDash val="solid"/>
+                      <a:round/>
+                      <a:headEnd type="none" w="med" len="med"/>
+                      <a:tailEnd type="none" w="med" len="med"/>
+                    </a:lnR>
+                    <a:lnT w="6350" cap="flat" cmpd="sng" algn="ctr">
+                      <a:solidFill>
+                        <a:srgbClr val="C8C0AE"/>
+                      </a:solidFill>
+                      <a:prstDash val="solid"/>
+                      <a:round/>
+                      <a:headEnd type="none" w="med" len="med"/>
+                      <a:tailEnd type="none" w="med" len="med"/>
+                    </a:lnT>
+                    <a:lnB w="6350" cap="flat" cmpd="sng" algn="ctr">
+                      <a:solidFill>
+                        <a:srgbClr val="C8C0AE"/>
+                      </a:solidFill>
+                      <a:prstDash val="solid"/>
+                      <a:round/>
+                      <a:headEnd type="none" w="med" len="med"/>
+                      <a:tailEnd type="none" w="med" len="med"/>
+                    </a:lnB>
+                  </a:tcPr>
+                </a:tc>
+                <a:tc>
+                  <a:txBody>
+                    <a:bodyPr/>
+                    <a:lstStyle/>
+                    <a:p>
+                      <a:pPr algn="ctr" indent="0" marL="0">
+                        <a:buNone/>
+                      </a:pPr>
+                      <a:r>
+                        <a:rPr lang="en-US" sz="1500" dirty="0">
+                          <a:solidFill>
+                            <a:srgbClr val="2B2B2B"/>
+                          </a:solidFill>
+                          <a:latin typeface="Calibri" pitchFamily="34" charset="0"/>
+                          <a:ea typeface="Calibri" pitchFamily="34" charset="-122"/>
+                          <a:cs typeface="Calibri" pitchFamily="34" charset="-120"/>
+                        </a:rPr>
+                        <a:t>0.1199</a:t>
+                      </a:r>
+                      <a:endParaRPr lang="en-US" sz="1500" dirty="0">
+                        <a:latin typeface="Calibri" charset="0"/>
+                        <a:ea typeface="Calibri" charset="0"/>
+                        <a:cs typeface="Calibri" charset="0"/>
+                      </a:endParaRPr>
+                    </a:p>
+                  </a:txBody>
+                  <a:tcPr marL="91440" marR="91440" marT="45720" marB="45720" anchor="ctr">
+                    <a:lnL w="6350" cap="flat" cmpd="sng" algn="ctr">
+                      <a:solidFill>
+                        <a:srgbClr val="C8C0AE"/>
+                      </a:solidFill>
+                      <a:prstDash val="solid"/>
+                      <a:round/>
+                      <a:headEnd type="none" w="med" len="med"/>
+                      <a:tailEnd type="none" w="med" len="med"/>
+                    </a:lnL>
+                    <a:lnR w="6350" cap="flat" cmpd="sng" algn="ctr">
+                      <a:solidFill>
+                        <a:srgbClr val="C8C0AE"/>
+                      </a:solidFill>
+                      <a:prstDash val="solid"/>
+                      <a:round/>
+                      <a:headEnd type="none" w="med" len="med"/>
+                      <a:tailEnd type="none" w="med" len="med"/>
+                    </a:lnR>
+                    <a:lnT w="6350" cap="flat" cmpd="sng" algn="ctr">
+                      <a:solidFill>
+                        <a:srgbClr val="C8C0AE"/>
+                      </a:solidFill>
+                      <a:prstDash val="solid"/>
+                      <a:round/>
+                      <a:headEnd type="none" w="med" len="med"/>
+                      <a:tailEnd type="none" w="med" len="med"/>
+                    </a:lnT>
+                    <a:lnB w="6350" cap="flat" cmpd="sng" algn="ctr">
+                      <a:solidFill>
+                        <a:srgbClr val="C8C0AE"/>
+                      </a:solidFill>
+                      <a:prstDash val="solid"/>
+                      <a:round/>
+                      <a:headEnd type="none" w="med" len="med"/>
+                      <a:tailEnd type="none" w="med" len="med"/>
+                    </a:lnB>
+                  </a:tcPr>
+                </a:tc>
+                <a:tc>
+                  <a:txBody>
+                    <a:bodyPr/>
+                    <a:lstStyle/>
+                    <a:p>
+                      <a:pPr algn="ctr" indent="0" marL="0">
+                        <a:buNone/>
+                      </a:pPr>
+                      <a:r>
+                        <a:rPr lang="en-US" sz="1500" dirty="0">
+                          <a:solidFill>
+                            <a:srgbClr val="2B2B2B"/>
+                          </a:solidFill>
+                          <a:latin typeface="Calibri" pitchFamily="34" charset="0"/>
+                          <a:ea typeface="Calibri" pitchFamily="34" charset="-122"/>
+                          <a:cs typeface="Calibri" pitchFamily="34" charset="-120"/>
+                        </a:rPr>
+                        <a:t>0.1624</a:t>
+                      </a:r>
+                      <a:endParaRPr lang="en-US" sz="1500" dirty="0">
+                        <a:latin typeface="Calibri" charset="0"/>
+                        <a:ea typeface="Calibri" charset="0"/>
+                        <a:cs typeface="Calibri" charset="0"/>
+                      </a:endParaRPr>
+                    </a:p>
+                  </a:txBody>
+                  <a:tcPr marL="91440" marR="91440" marT="45720" marB="45720" anchor="ctr">
+                    <a:lnL w="6350" cap="flat" cmpd="sng" algn="ctr">
+                      <a:solidFill>
+                        <a:srgbClr val="C8C0AE"/>
+                      </a:solidFill>
+                      <a:prstDash val="solid"/>
+                      <a:round/>
+                      <a:headEnd type="none" w="med" len="med"/>
+                      <a:tailEnd type="none" w="med" len="med"/>
+                    </a:lnL>
+                    <a:lnR w="6350" cap="flat" cmpd="sng" algn="ctr">
+                      <a:solidFill>
+                        <a:srgbClr val="C8C0AE"/>
+                      </a:solidFill>
+                      <a:prstDash val="solid"/>
+                      <a:round/>
+                      <a:headEnd type="none" w="med" len="med"/>
+                      <a:tailEnd type="none" w="med" len="med"/>
+                    </a:lnR>
+                    <a:lnT w="6350" cap="flat" cmpd="sng" algn="ctr">
+                      <a:solidFill>
+                        <a:srgbClr val="C8C0AE"/>
+                      </a:solidFill>
+                      <a:prstDash val="solid"/>
+                      <a:round/>
+                      <a:headEnd type="none" w="med" len="med"/>
+                      <a:tailEnd type="none" w="med" len="med"/>
+                    </a:lnT>
+                    <a:lnB w="6350" cap="flat" cmpd="sng" algn="ctr">
+                      <a:solidFill>
+                        <a:srgbClr val="C8C0AE"/>
+                      </a:solidFill>
+                      <a:prstDash val="solid"/>
+                      <a:round/>
+                      <a:headEnd type="none" w="med" len="med"/>
+                      <a:tailEnd type="none" w="med" len="med"/>
+                    </a:lnB>
+                  </a:tcPr>
+                </a:tc>
+              </a:tr>
+              <a:tr h="701040">
+                <a:tc>
+                  <a:txBody>
+                    <a:bodyPr/>
+                    <a:lstStyle/>
+                    <a:p>
+                      <a:pPr algn="ctr" indent="0" marL="0">
+                        <a:buNone/>
+                      </a:pPr>
+                      <a:r>
+                        <a:rPr lang="en-US" sz="1500" dirty="0">
+                          <a:solidFill>
+                            <a:srgbClr val="2B2B2B"/>
+                          </a:solidFill>
+                          <a:latin typeface="Calibri" pitchFamily="34" charset="0"/>
+                          <a:ea typeface="Calibri" pitchFamily="34" charset="-122"/>
+                          <a:cs typeface="Calibri" pitchFamily="34" charset="-120"/>
+                        </a:rPr>
+                        <a:t>TextRank-3</a:t>
+                      </a:r>
+                      <a:endParaRPr lang="en-US" sz="1500" dirty="0">
+                        <a:latin typeface="Calibri" charset="0"/>
+                        <a:ea typeface="Calibri" charset="0"/>
+                        <a:cs typeface="Calibri" charset="0"/>
+                      </a:endParaRPr>
+                    </a:p>
+                  </a:txBody>
+                  <a:tcPr marL="91440" marR="91440" marT="45720" marB="45720" anchor="ctr">
+                    <a:lnL w="6350" cap="flat" cmpd="sng" algn="ctr">
+                      <a:solidFill>
+                        <a:srgbClr val="C8C0AE"/>
+                      </a:solidFill>
+                      <a:prstDash val="solid"/>
+                      <a:round/>
+                      <a:headEnd type="none" w="med" len="med"/>
+                      <a:tailEnd type="none" w="med" len="med"/>
+                    </a:lnL>
+                    <a:lnR w="6350" cap="flat" cmpd="sng" algn="ctr">
+                      <a:solidFill>
+                        <a:srgbClr val="C8C0AE"/>
+                      </a:solidFill>
+                      <a:prstDash val="solid"/>
+                      <a:round/>
+                      <a:headEnd type="none" w="med" len="med"/>
+                      <a:tailEnd type="none" w="med" len="med"/>
+                    </a:lnR>
+                    <a:lnT w="6350" cap="flat" cmpd="sng" algn="ctr">
+                      <a:solidFill>
+                        <a:srgbClr val="C8C0AE"/>
+                      </a:solidFill>
+                      <a:prstDash val="solid"/>
+                      <a:round/>
+                      <a:headEnd type="none" w="med" len="med"/>
+                      <a:tailEnd type="none" w="med" len="med"/>
+                    </a:lnT>
+                    <a:lnB w="6350" cap="flat" cmpd="sng" algn="ctr">
+                      <a:solidFill>
+                        <a:srgbClr val="C8C0AE"/>
+                      </a:solidFill>
+                      <a:prstDash val="solid"/>
+                      <a:round/>
+                      <a:headEnd type="none" w="med" len="med"/>
+                      <a:tailEnd type="none" w="med" len="med"/>
+                    </a:lnB>
+                  </a:tcPr>
+                </a:tc>
+                <a:tc>
+                  <a:txBody>
+                    <a:bodyPr/>
+                    <a:lstStyle/>
+                    <a:p>
+                      <a:pPr algn="ctr" indent="0" marL="0">
+                        <a:buNone/>
+                      </a:pPr>
+                      <a:r>
+                        <a:rPr lang="en-US" sz="1500" dirty="0">
+                          <a:solidFill>
+                            <a:srgbClr val="2B2B2B"/>
+                          </a:solidFill>
+                          <a:latin typeface="Calibri" pitchFamily="34" charset="0"/>
+                          <a:ea typeface="Calibri" pitchFamily="34" charset="-122"/>
+                          <a:cs typeface="Calibri" pitchFamily="34" charset="-120"/>
+                        </a:rPr>
+                        <a:t>0.2499</a:t>
+                      </a:r>
+                      <a:endParaRPr lang="en-US" sz="1500" dirty="0">
+                        <a:latin typeface="Calibri" charset="0"/>
+                        <a:ea typeface="Calibri" charset="0"/>
+                        <a:cs typeface="Calibri" charset="0"/>
+                      </a:endParaRPr>
+                    </a:p>
+                  </a:txBody>
+                  <a:tcPr marL="91440" marR="91440" marT="45720" marB="45720" anchor="ctr">
+                    <a:lnL w="6350" cap="flat" cmpd="sng" algn="ctr">
+                      <a:solidFill>
+                        <a:srgbClr val="C8C0AE"/>
+                      </a:solidFill>
+                      <a:prstDash val="solid"/>
+                      <a:round/>
+                      <a:headEnd type="none" w="med" len="med"/>
+                      <a:tailEnd type="none" w="med" len="med"/>
+                    </a:lnL>
+                    <a:lnR w="6350" cap="flat" cmpd="sng" algn="ctr">
+                      <a:solidFill>
+                        <a:srgbClr val="C8C0AE"/>
+                      </a:solidFill>
+                      <a:prstDash val="solid"/>
+                      <a:round/>
+                      <a:headEnd type="none" w="med" len="med"/>
+                      <a:tailEnd type="none" w="med" len="med"/>
+                    </a:lnR>
+                    <a:lnT w="6350" cap="flat" cmpd="sng" algn="ctr">
+                      <a:solidFill>
+                        <a:srgbClr val="C8C0AE"/>
+                      </a:solidFill>
+                      <a:prstDash val="solid"/>
+                      <a:round/>
+                      <a:headEnd type="none" w="med" len="med"/>
+                      <a:tailEnd type="none" w="med" len="med"/>
+                    </a:lnT>
+                    <a:lnB w="6350" cap="flat" cmpd="sng" algn="ctr">
+                      <a:solidFill>
+                        <a:srgbClr val="C8C0AE"/>
+                      </a:solidFill>
+                      <a:prstDash val="solid"/>
+                      <a:round/>
+                      <a:headEnd type="none" w="med" len="med"/>
+                      <a:tailEnd type="none" w="med" len="med"/>
+                    </a:lnB>
+                  </a:tcPr>
+                </a:tc>
+                <a:tc>
+                  <a:txBody>
+                    <a:bodyPr/>
+                    <a:lstStyle/>
+                    <a:p>
+                      <a:pPr algn="ctr" indent="0" marL="0">
+                        <a:buNone/>
+                      </a:pPr>
+                      <a:r>
+                        <a:rPr lang="en-US" sz="1500" dirty="0">
+                          <a:solidFill>
+                            <a:srgbClr val="2B2B2B"/>
+                          </a:solidFill>
+                          <a:latin typeface="Calibri" pitchFamily="34" charset="0"/>
+                          <a:ea typeface="Calibri" pitchFamily="34" charset="-122"/>
+                          <a:cs typeface="Calibri" pitchFamily="34" charset="-120"/>
+                        </a:rPr>
+                        <a:t>0.1198</a:t>
+                      </a:r>
+                      <a:endParaRPr lang="en-US" sz="1500" dirty="0">
+                        <a:latin typeface="Calibri" charset="0"/>
+                        <a:ea typeface="Calibri" charset="0"/>
+                        <a:cs typeface="Calibri" charset="0"/>
+                      </a:endParaRPr>
+                    </a:p>
+                  </a:txBody>
+                  <a:tcPr marL="91440" marR="91440" marT="45720" marB="45720" anchor="ctr">
+                    <a:lnL w="6350" cap="flat" cmpd="sng" algn="ctr">
+                      <a:solidFill>
+                        <a:srgbClr val="C8C0AE"/>
+                      </a:solidFill>
+                      <a:prstDash val="solid"/>
+                      <a:round/>
+                      <a:headEnd type="none" w="med" len="med"/>
+                      <a:tailEnd type="none" w="med" len="med"/>
+                    </a:lnL>
+                    <a:lnR w="6350" cap="flat" cmpd="sng" algn="ctr">
+                      <a:solidFill>
+                        <a:srgbClr val="C8C0AE"/>
+                      </a:solidFill>
+                      <a:prstDash val="solid"/>
+                      <a:round/>
+                      <a:headEnd type="none" w="med" len="med"/>
+                      <a:tailEnd type="none" w="med" len="med"/>
+                    </a:lnR>
+                    <a:lnT w="6350" cap="flat" cmpd="sng" algn="ctr">
+                      <a:solidFill>
+                        <a:srgbClr val="C8C0AE"/>
+                      </a:solidFill>
+                      <a:prstDash val="solid"/>
+                      <a:round/>
+                      <a:headEnd type="none" w="med" len="med"/>
+                      <a:tailEnd type="none" w="med" len="med"/>
+                    </a:lnT>
+                    <a:lnB w="6350" cap="flat" cmpd="sng" algn="ctr">
+                      <a:solidFill>
+                        <a:srgbClr val="C8C0AE"/>
+                      </a:solidFill>
+                      <a:prstDash val="solid"/>
+                      <a:round/>
+                      <a:headEnd type="none" w="med" len="med"/>
+                      <a:tailEnd type="none" w="med" len="med"/>
+                    </a:lnB>
+                  </a:tcPr>
+                </a:tc>
+                <a:tc>
+                  <a:txBody>
+                    <a:bodyPr/>
+                    <a:lstStyle/>
+                    <a:p>
+                      <a:pPr algn="ctr" indent="0" marL="0">
+                        <a:buNone/>
+                      </a:pPr>
+                      <a:r>
+                        <a:rPr lang="en-US" sz="1500" dirty="0">
+                          <a:solidFill>
+                            <a:srgbClr val="2B2B2B"/>
+                          </a:solidFill>
+                          <a:latin typeface="Calibri" pitchFamily="34" charset="0"/>
+                          <a:ea typeface="Calibri" pitchFamily="34" charset="-122"/>
+                          <a:cs typeface="Calibri" pitchFamily="34" charset="-120"/>
+                        </a:rPr>
+                        <a:t>0.1815</a:t>
+                      </a:r>
+                      <a:endParaRPr lang="en-US" sz="1500" dirty="0">
+                        <a:latin typeface="Calibri" charset="0"/>
+                        <a:ea typeface="Calibri" charset="0"/>
+                        <a:cs typeface="Calibri" charset="0"/>
+                      </a:endParaRPr>
+                    </a:p>
+                  </a:txBody>
+                  <a:tcPr marL="91440" marR="91440" marT="45720" marB="45720" anchor="ctr">
+                    <a:lnL w="6350" cap="flat" cmpd="sng" algn="ctr">
+                      <a:solidFill>
+                        <a:srgbClr val="C8C0AE"/>
+                      </a:solidFill>
+                      <a:prstDash val="solid"/>
+                      <a:round/>
+                      <a:headEnd type="none" w="med" len="med"/>
+                      <a:tailEnd type="none" w="med" len="med"/>
+                    </a:lnL>
+                    <a:lnR w="6350" cap="flat" cmpd="sng" algn="ctr">
+                      <a:solidFill>
+                        <a:srgbClr val="C8C0AE"/>
+                      </a:solidFill>
+                      <a:prstDash val="solid"/>
+                      <a:round/>
+                      <a:headEnd type="none" w="med" len="med"/>
+                      <a:tailEnd type="none" w="med" len="med"/>
+                    </a:lnR>
+                    <a:lnT w="6350" cap="flat" cmpd="sng" algn="ctr">
+                      <a:solidFill>
+                        <a:srgbClr val="C8C0AE"/>
+                      </a:solidFill>
+                      <a:prstDash val="solid"/>
+                      <a:round/>
+                      <a:headEnd type="none" w="med" len="med"/>
+                      <a:tailEnd type="none" w="med" len="med"/>
+                    </a:lnT>
+                    <a:lnB w="6350" cap="flat" cmpd="sng" algn="ctr">
+                      <a:solidFill>
+                        <a:srgbClr val="C8C0AE"/>
+                      </a:solidFill>
+                      <a:prstDash val="solid"/>
+                      <a:round/>
+                      <a:headEnd type="none" w="med" len="med"/>
+                      <a:tailEnd type="none" w="med" len="med"/>
+                    </a:lnB>
+                  </a:tcPr>
+                </a:tc>
+              </a:tr>
+              <a:tr h="701040">
+                <a:tc>
+                  <a:txBody>
+                    <a:bodyPr/>
+                    <a:lstStyle/>
+                    <a:p>
+                      <a:pPr algn="ctr" indent="0" marL="0">
+                        <a:buNone/>
+                      </a:pPr>
+                      <a:r>
+                        <a:rPr lang="en-US" sz="1500" b="1" dirty="0">
+                          <a:solidFill>
+                            <a:srgbClr val="2B2B2B"/>
+                          </a:solidFill>
+                          <a:latin typeface="Calibri" pitchFamily="34" charset="0"/>
+                          <a:ea typeface="Calibri" pitchFamily="34" charset="-122"/>
+                          <a:cs typeface="Calibri" pitchFamily="34" charset="-120"/>
+                        </a:rPr>
+                        <a:t>Oracle-3</a:t>
+                      </a:r>
+                      <a:endParaRPr lang="en-US" sz="1500" dirty="0">
+                        <a:latin typeface="Calibri" charset="0"/>
+                        <a:ea typeface="Calibri" charset="0"/>
+                        <a:cs typeface="Calibri" charset="0"/>
+                      </a:endParaRPr>
+                    </a:p>
+                  </a:txBody>
+                  <a:tcPr marL="91440" marR="91440" marT="45720" marB="45720" anchor="ctr">
+                    <a:lnL w="6350" cap="flat" cmpd="sng" algn="ctr">
+                      <a:solidFill>
+                        <a:srgbClr val="C8C0AE"/>
+                      </a:solidFill>
+                      <a:prstDash val="solid"/>
+                      <a:round/>
+                      <a:headEnd type="none" w="med" len="med"/>
+                      <a:tailEnd type="none" w="med" len="med"/>
+                    </a:lnL>
+                    <a:lnR w="6350" cap="flat" cmpd="sng" algn="ctr">
+                      <a:solidFill>
+                        <a:srgbClr val="C8C0AE"/>
+                      </a:solidFill>
+                      <a:prstDash val="solid"/>
+                      <a:round/>
+                      <a:headEnd type="none" w="med" len="med"/>
+                      <a:tailEnd type="none" w="med" len="med"/>
+                    </a:lnR>
+                    <a:lnT w="6350" cap="flat" cmpd="sng" algn="ctr">
+                      <a:solidFill>
+                        <a:srgbClr val="C8C0AE"/>
+                      </a:solidFill>
+                      <a:prstDash val="solid"/>
+                      <a:round/>
+                      <a:headEnd type="none" w="med" len="med"/>
+                      <a:tailEnd type="none" w="med" len="med"/>
+                    </a:lnT>
+                    <a:lnB w="6350" cap="flat" cmpd="sng" algn="ctr">
+                      <a:solidFill>
+                        <a:srgbClr val="C8C0AE"/>
+                      </a:solidFill>
+                      <a:prstDash val="solid"/>
+                      <a:round/>
+                      <a:headEnd type="none" w="med" len="med"/>
+                      <a:tailEnd type="none" w="med" len="med"/>
+                    </a:lnB>
+                    <a:solidFill>
+                      <a:srgbClr val="F2E5D0"/>
+                    </a:solidFill>
+                  </a:tcPr>
+                </a:tc>
+                <a:tc>
+                  <a:txBody>
+                    <a:bodyPr/>
+                    <a:lstStyle/>
+                    <a:p>
+                      <a:pPr algn="ctr" indent="0" marL="0">
+                        <a:buNone/>
+                      </a:pPr>
+                      <a:r>
+                        <a:rPr lang="en-US" sz="1500" b="1" dirty="0">
+                          <a:solidFill>
+                            <a:srgbClr val="2B2B2B"/>
+                          </a:solidFill>
+                          <a:latin typeface="Calibri" pitchFamily="34" charset="0"/>
+                          <a:ea typeface="Calibri" pitchFamily="34" charset="-122"/>
+                          <a:cs typeface="Calibri" pitchFamily="34" charset="-120"/>
+                        </a:rPr>
+                        <a:t>0.4646</a:t>
+                      </a:r>
+                      <a:endParaRPr lang="en-US" sz="1500" dirty="0">
+                        <a:latin typeface="Calibri" charset="0"/>
+                        <a:ea typeface="Calibri" charset="0"/>
+                        <a:cs typeface="Calibri" charset="0"/>
+                      </a:endParaRPr>
+                    </a:p>
+                  </a:txBody>
+                  <a:tcPr marL="91440" marR="91440" marT="45720" marB="45720" anchor="ctr">
+                    <a:lnL w="6350" cap="flat" cmpd="sng" algn="ctr">
+                      <a:solidFill>
+                        <a:srgbClr val="C8C0AE"/>
+                      </a:solidFill>
+                      <a:prstDash val="solid"/>
+                      <a:round/>
+                      <a:headEnd type="none" w="med" len="med"/>
+                      <a:tailEnd type="none" w="med" len="med"/>
+                    </a:lnL>
+                    <a:lnR w="6350" cap="flat" cmpd="sng" algn="ctr">
+                      <a:solidFill>
+                        <a:srgbClr val="C8C0AE"/>
+                      </a:solidFill>
+                      <a:prstDash val="solid"/>
+                      <a:round/>
+                      <a:headEnd type="none" w="med" len="med"/>
+                      <a:tailEnd type="none" w="med" len="med"/>
+                    </a:lnR>
+                    <a:lnT w="6350" cap="flat" cmpd="sng" algn="ctr">
+                      <a:solidFill>
+                        <a:srgbClr val="C8C0AE"/>
+                      </a:solidFill>
+                      <a:prstDash val="solid"/>
+                      <a:round/>
+                      <a:headEnd type="none" w="med" len="med"/>
+                      <a:tailEnd type="none" w="med" len="med"/>
+                    </a:lnT>
+                    <a:lnB w="6350" cap="flat" cmpd="sng" algn="ctr">
+                      <a:solidFill>
+                        <a:srgbClr val="C8C0AE"/>
+                      </a:solidFill>
+                      <a:prstDash val="solid"/>
+                      <a:round/>
+                      <a:headEnd type="none" w="med" len="med"/>
+                      <a:tailEnd type="none" w="med" len="med"/>
+                    </a:lnB>
+                    <a:solidFill>
+                      <a:srgbClr val="F2E5D0"/>
+                    </a:solidFill>
+                  </a:tcPr>
+                </a:tc>
+                <a:tc>
+                  <a:txBody>
+                    <a:bodyPr/>
+                    <a:lstStyle/>
+                    <a:p>
+                      <a:pPr algn="ctr" indent="0" marL="0">
+                        <a:buNone/>
+                      </a:pPr>
+                      <a:r>
+                        <a:rPr lang="en-US" sz="1500" b="1" dirty="0">
+                          <a:solidFill>
+                            <a:srgbClr val="2B2B2B"/>
+                          </a:solidFill>
+                          <a:latin typeface="Calibri" pitchFamily="34" charset="0"/>
+                          <a:ea typeface="Calibri" pitchFamily="34" charset="-122"/>
+                          <a:cs typeface="Calibri" pitchFamily="34" charset="-120"/>
+                        </a:rPr>
+                        <a:t>0.2793</a:t>
+                      </a:r>
+                      <a:endParaRPr lang="en-US" sz="1500" dirty="0">
+                        <a:latin typeface="Calibri" charset="0"/>
+                        <a:ea typeface="Calibri" charset="0"/>
+                        <a:cs typeface="Calibri" charset="0"/>
+                      </a:endParaRPr>
+                    </a:p>
+                  </a:txBody>
+                  <a:tcPr marL="91440" marR="91440" marT="45720" marB="45720" anchor="ctr">
+                    <a:lnL w="6350" cap="flat" cmpd="sng" algn="ctr">
+                      <a:solidFill>
+                        <a:srgbClr val="C8C0AE"/>
+                      </a:solidFill>
+                      <a:prstDash val="solid"/>
+                      <a:round/>
+                      <a:headEnd type="none" w="med" len="med"/>
+                      <a:tailEnd type="none" w="med" len="med"/>
+                    </a:lnL>
+                    <a:lnR w="6350" cap="flat" cmpd="sng" algn="ctr">
+                      <a:solidFill>
+                        <a:srgbClr val="C8C0AE"/>
+                      </a:solidFill>
+                      <a:prstDash val="solid"/>
+                      <a:round/>
+                      <a:headEnd type="none" w="med" len="med"/>
+                      <a:tailEnd type="none" w="med" len="med"/>
+                    </a:lnR>
+                    <a:lnT w="6350" cap="flat" cmpd="sng" algn="ctr">
+                      <a:solidFill>
+                        <a:srgbClr val="C8C0AE"/>
+                      </a:solidFill>
+                      <a:prstDash val="solid"/>
+                      <a:round/>
+                      <a:headEnd type="none" w="med" len="med"/>
+                      <a:tailEnd type="none" w="med" len="med"/>
+                    </a:lnT>
+                    <a:lnB w="6350" cap="flat" cmpd="sng" algn="ctr">
+                      <a:solidFill>
+                        <a:srgbClr val="C8C0AE"/>
+                      </a:solidFill>
+                      <a:prstDash val="solid"/>
+                      <a:round/>
+                      <a:headEnd type="none" w="med" len="med"/>
+                      <a:tailEnd type="none" w="med" len="med"/>
+                    </a:lnB>
+                    <a:solidFill>
+                      <a:srgbClr val="F2E5D0"/>
+                    </a:solidFill>
+                  </a:tcPr>
+                </a:tc>
+                <a:tc>
+                  <a:txBody>
+                    <a:bodyPr/>
+                    <a:lstStyle/>
+                    <a:p>
+                      <a:pPr algn="ctr" indent="0" marL="0">
+                        <a:buNone/>
+                      </a:pPr>
+                      <a:r>
+                        <a:rPr lang="en-US" sz="1500" b="1" dirty="0">
+                          <a:solidFill>
+                            <a:srgbClr val="2B2B2B"/>
+                          </a:solidFill>
+                          <a:latin typeface="Calibri" pitchFamily="34" charset="0"/>
+                          <a:ea typeface="Calibri" pitchFamily="34" charset="-122"/>
+                          <a:cs typeface="Calibri" pitchFamily="34" charset="-120"/>
+                        </a:rPr>
+                        <a:t>0.3410</a:t>
+                      </a:r>
+                      <a:endParaRPr lang="en-US" sz="1500" dirty="0">
+                        <a:latin typeface="Calibri" charset="0"/>
+                        <a:ea typeface="Calibri" charset="0"/>
+                        <a:cs typeface="Calibri" charset="0"/>
+                      </a:endParaRPr>
+                    </a:p>
+                  </a:txBody>
+                  <a:tcPr marL="91440" marR="91440" marT="45720" marB="45720" anchor="ctr">
+                    <a:lnL w="6350" cap="flat" cmpd="sng" algn="ctr">
+                      <a:solidFill>
+                        <a:srgbClr val="C8C0AE"/>
+                      </a:solidFill>
+                      <a:prstDash val="solid"/>
+                      <a:round/>
+                      <a:headEnd type="none" w="med" len="med"/>
+                      <a:tailEnd type="none" w="med" len="med"/>
+                    </a:lnL>
+                    <a:lnR w="6350" cap="flat" cmpd="sng" algn="ctr">
+                      <a:solidFill>
+                        <a:srgbClr val="C8C0AE"/>
+                      </a:solidFill>
+                      <a:prstDash val="solid"/>
+                      <a:round/>
+                      <a:headEnd type="none" w="med" len="med"/>
+                      <a:tailEnd type="none" w="med" len="med"/>
+                    </a:lnR>
+                    <a:lnT w="6350" cap="flat" cmpd="sng" algn="ctr">
+                      <a:solidFill>
+                        <a:srgbClr val="C8C0AE"/>
+                      </a:solidFill>
+                      <a:prstDash val="solid"/>
+                      <a:round/>
+                      <a:headEnd type="none" w="med" len="med"/>
+                      <a:tailEnd type="none" w="med" len="med"/>
+                    </a:lnT>
+                    <a:lnB w="6350" cap="flat" cmpd="sng" algn="ctr">
+                      <a:solidFill>
+                        <a:srgbClr val="C8C0AE"/>
+                      </a:solidFill>
+                      <a:prstDash val="solid"/>
+                      <a:round/>
+                      <a:headEnd type="none" w="med" len="med"/>
+                      <a:tailEnd type="none" w="med" len="med"/>
+                    </a:lnB>
+                    <a:solidFill>
+                      <a:srgbClr val="F2E5D0"/>
+                    </a:solidFill>
+                  </a:tcPr>
+                </a:tc>
+              </a:tr>
+            </a:tbl>
+          </a:graphicData>
+        </a:graphic>
+      </p:graphicFrame>
+      <p:sp>
+        <p:nvSpPr>
+          <p:cNvPr id="7" name="Shape 4"/>
+          <p:cNvSpPr/>
+          <p:nvPr/>
+        </p:nvSpPr>
+        <p:spPr>
+          <a:xfrm>
+            <a:off x="7589520" y="1371600"/>
+            <a:ext cx="4069080" cy="4206240"/>
           </a:xfrm>
           <a:prstGeom prst="rect">
             <a:avLst/>
           </a:prstGeom>
           <a:solidFill>
             <a:srgbClr val="0B0B0B"/>
-          </a:solidFill>
-          <a:ln/>
-        </p:spPr>
-      </p:sp>
-      <p:sp>
-        <p:nvSpPr>
-          <p:cNvPr id="7" name="Text 5"/>
-          <p:cNvSpPr/>
-          <p:nvPr/>
-        </p:nvSpPr>
-        <p:spPr>
-          <a:xfrm>
-            <a:off x="640080" y="1920240"/>
-            <a:ext cx="1920240" cy="457200"/>
-          </a:xfrm>
-          <a:prstGeom prst="rect">
-            <a:avLst/>
-          </a:prstGeom>
-          <a:noFill/>
-          <a:ln/>
-        </p:spPr>
-        <p:txBody>
-          <a:bodyPr wrap="square" lIns="0" tIns="0" rIns="0" bIns="0" rtlCol="0" anchor="ctr"/>
-          <a:lstStyle/>
-          <a:p>
-            <a:pPr indent="0" marL="0">
-              <a:buNone/>
-            </a:pPr>
-            <a:r>
-              <a:rPr lang="en-US" sz="2000" dirty="0">
-                <a:solidFill>
-                  <a:srgbClr val="EFE8D6"/>
-                </a:solidFill>
-                <a:latin typeface="Georgia" pitchFamily="34" charset="0"/>
-                <a:ea typeface="Georgia" pitchFamily="34" charset="-122"/>
-                <a:cs typeface="Georgia" pitchFamily="34" charset="-120"/>
-              </a:rPr>
-              <a:t>ViT5</a:t>
-            </a:r>
-            <a:endParaRPr lang="en-US" sz="2000" dirty="0"/>
-          </a:p>
-        </p:txBody>
-      </p:sp>
-      <p:sp>
-        <p:nvSpPr>
-          <p:cNvPr id="8" name="Shape 6"/>
-          <p:cNvSpPr/>
-          <p:nvPr/>
-        </p:nvSpPr>
-        <p:spPr>
-          <a:xfrm>
-            <a:off x="2697480" y="1554480"/>
-            <a:ext cx="8961120" cy="1188720"/>
-          </a:xfrm>
-          <a:prstGeom prst="rect">
-            <a:avLst/>
-          </a:prstGeom>
-          <a:solidFill>
-            <a:srgbClr val="F7F3E8"/>
           </a:solidFill>
           <a:ln w="9525">
             <a:solidFill>
@@ -7122,14 +8780,14 @@
       </p:sp>
       <p:sp>
         <p:nvSpPr>
-          <p:cNvPr id="9" name="Text 7"/>
-          <p:cNvSpPr/>
-          <p:nvPr/>
-        </p:nvSpPr>
-        <p:spPr>
-          <a:xfrm>
-            <a:off x="2926080" y="1828800"/>
-            <a:ext cx="8549640" cy="640080"/>
+          <p:cNvPr id="8" name="Text 5"/>
+          <p:cNvSpPr/>
+          <p:nvPr/>
+        </p:nvSpPr>
+        <p:spPr>
+          <a:xfrm>
+            <a:off x="7818120" y="1554480"/>
+            <a:ext cx="3657600" cy="320040"/>
           </a:xfrm>
           <a:prstGeom prst="rect">
             <a:avLst/>
@@ -7145,50 +8803,30 @@
               <a:buNone/>
             </a:pPr>
             <a:r>
-              <a:rPr lang="en-US" sz="1600" dirty="0">
-                <a:solidFill>
-                  <a:srgbClr val="2B2B2B"/>
+              <a:rPr lang="en-US" sz="1300" dirty="0">
+                <a:solidFill>
+                  <a:srgbClr val="9A9488"/>
                 </a:solidFill>
                 <a:latin typeface="Calibri" pitchFamily="34" charset="0"/>
                 <a:ea typeface="Calibri" pitchFamily="34" charset="-122"/>
                 <a:cs typeface="Calibri" pitchFamily="34" charset="-120"/>
               </a:rPr>
-              <a:t>Sai tên / gán nhầm người; đảo polarity; bịa súng-dao; xe bồn thay máy ủi.</a:t>
-            </a:r>
-            <a:endParaRPr lang="en-US" sz="1600" dirty="0"/>
-          </a:p>
-        </p:txBody>
-      </p:sp>
-      <p:sp>
-        <p:nvSpPr>
-          <p:cNvPr id="10" name="Shape 8"/>
-          <p:cNvSpPr/>
-          <p:nvPr/>
-        </p:nvSpPr>
-        <p:spPr>
-          <a:xfrm>
-            <a:off x="502920" y="2880360"/>
-            <a:ext cx="2194560" cy="1188720"/>
-          </a:xfrm>
-          <a:prstGeom prst="rect">
-            <a:avLst/>
-          </a:prstGeom>
-          <a:solidFill>
-            <a:srgbClr val="0B0B0B"/>
-          </a:solidFill>
-          <a:ln/>
-        </p:spPr>
-      </p:sp>
-      <p:sp>
-        <p:nvSpPr>
-          <p:cNvPr id="11" name="Text 9"/>
-          <p:cNvSpPr/>
-          <p:nvPr/>
-        </p:nvSpPr>
-        <p:spPr>
-          <a:xfrm>
-            <a:off x="640080" y="3246120"/>
-            <a:ext cx="1920240" cy="457200"/>
+              <a:t>Đọc bảng</a:t>
+            </a:r>
+            <a:endParaRPr lang="en-US" sz="1300" dirty="0"/>
+          </a:p>
+        </p:txBody>
+      </p:sp>
+      <p:sp>
+        <p:nvSpPr>
+          <p:cNvPr id="9" name="Text 6"/>
+          <p:cNvSpPr/>
+          <p:nvPr/>
+        </p:nvSpPr>
+        <p:spPr>
+          <a:xfrm>
+            <a:off x="7818120" y="2011680"/>
+            <a:ext cx="3657600" cy="3200400"/>
           </a:xfrm>
           <a:prstGeom prst="rect">
             <a:avLst/>
@@ -7204,114 +8842,30 @@
               <a:buNone/>
             </a:pPr>
             <a:r>
-              <a:rPr lang="en-US" sz="2000" dirty="0">
+              <a:rPr lang="en-US" sz="1500" dirty="0">
                 <a:solidFill>
                   <a:srgbClr val="EFE8D6"/>
-                </a:solidFill>
-                <a:latin typeface="Georgia" pitchFamily="34" charset="0"/>
-                <a:ea typeface="Georgia" pitchFamily="34" charset="-122"/>
-                <a:cs typeface="Georgia" pitchFamily="34" charset="-120"/>
-              </a:rPr>
-              <a:t>Lead-3</a:t>
-            </a:r>
-            <a:endParaRPr lang="en-US" sz="2000" dirty="0"/>
-          </a:p>
-        </p:txBody>
-      </p:sp>
-      <p:sp>
-        <p:nvSpPr>
-          <p:cNvPr id="12" name="Shape 10"/>
-          <p:cNvSpPr/>
-          <p:nvPr/>
-        </p:nvSpPr>
-        <p:spPr>
-          <a:xfrm>
-            <a:off x="2697480" y="2880360"/>
-            <a:ext cx="8961120" cy="1188720"/>
-          </a:xfrm>
-          <a:prstGeom prst="rect">
-            <a:avLst/>
-          </a:prstGeom>
-          <a:solidFill>
-            <a:srgbClr val="F7F3E8"/>
-          </a:solidFill>
-          <a:ln w="9525">
-            <a:solidFill>
-              <a:srgbClr val="C8C0AE"/>
-            </a:solidFill>
-            <a:prstDash val="solid"/>
-          </a:ln>
-        </p:spPr>
-      </p:sp>
-      <p:sp>
-        <p:nvSpPr>
-          <p:cNvPr id="13" name="Text 11"/>
-          <p:cNvSpPr/>
-          <p:nvPr/>
-        </p:nvSpPr>
-        <p:spPr>
-          <a:xfrm>
-            <a:off x="2926080" y="3154680"/>
-            <a:ext cx="8549640" cy="640080"/>
-          </a:xfrm>
-          <a:prstGeom prst="rect">
-            <a:avLst/>
-          </a:prstGeom>
-          <a:noFill/>
-          <a:ln/>
-        </p:spPr>
-        <p:txBody>
-          <a:bodyPr wrap="square" lIns="0" tIns="0" rIns="0" bIns="0" rtlCol="0" anchor="ctr"/>
-          <a:lstStyle/>
-          <a:p>
-            <a:pPr indent="0" marL="0">
-              <a:buNone/>
-            </a:pPr>
-            <a:r>
-              <a:rPr lang="en-US" sz="1600" dirty="0">
-                <a:solidFill>
-                  <a:srgbClr val="2B2B2B"/>
                 </a:solidFill>
                 <a:latin typeface="Calibri" pitchFamily="34" charset="0"/>
                 <a:ea typeface="Calibri" pitchFamily="34" charset="-122"/>
                 <a:cs typeface="Calibri" pitchFamily="34" charset="-120"/>
               </a:rPr>
-              <a:t>Ít bịa (câu lấy từ bài). Hay lệch gold vì gold là sapo/kết luận.</a:t>
-            </a:r>
-            <a:endParaRPr lang="en-US" sz="1600" dirty="0"/>
-          </a:p>
-        </p:txBody>
-      </p:sp>
-      <p:sp>
-        <p:nvSpPr>
-          <p:cNvPr id="14" name="Shape 12"/>
-          <p:cNvSpPr/>
-          <p:nvPr/>
-        </p:nvSpPr>
-        <p:spPr>
-          <a:xfrm>
-            <a:off x="502920" y="4206240"/>
-            <a:ext cx="2194560" cy="1188720"/>
-          </a:xfrm>
-          <a:prstGeom prst="rect">
-            <a:avLst/>
-          </a:prstGeom>
-          <a:solidFill>
-            <a:srgbClr val="0B0B0B"/>
-          </a:solidFill>
-          <a:ln/>
-        </p:spPr>
-      </p:sp>
-      <p:sp>
-        <p:nvSpPr>
-          <p:cNvPr id="15" name="Text 13"/>
-          <p:cNvSpPr/>
-          <p:nvPr/>
-        </p:nvSpPr>
-        <p:spPr>
-          <a:xfrm>
-            <a:off x="640080" y="4572000"/>
-            <a:ext cx="1920240" cy="457200"/>
+              <a:t>Gold gần sapo nên 1 câu đầu đã khớp. Oracle chứng tỏ extractive chưa hết sức — Lead-3 chưa chọn đúng 3 câu. ViT5-500: notebook Kaggle riêng, chưa chạy.</a:t>
+            </a:r>
+            <a:endParaRPr lang="en-US" sz="1500" dirty="0"/>
+          </a:p>
+        </p:txBody>
+      </p:sp>
+      <p:sp>
+        <p:nvSpPr>
+          <p:cNvPr id="10" name="Text 7"/>
+          <p:cNvSpPr/>
+          <p:nvPr/>
+        </p:nvSpPr>
+        <p:spPr>
+          <a:xfrm>
+            <a:off x="502920" y="6510528"/>
+            <a:ext cx="8229600" cy="201168"/>
           </a:xfrm>
           <a:prstGeom prst="rect">
             <a:avLst/>
@@ -7327,157 +8881,54 @@
               <a:buNone/>
             </a:pPr>
             <a:r>
-              <a:rPr lang="en-US" sz="2000" dirty="0">
-                <a:solidFill>
-                  <a:srgbClr val="EFE8D6"/>
-                </a:solidFill>
-                <a:latin typeface="Georgia" pitchFamily="34" charset="0"/>
-                <a:ea typeface="Georgia" pitchFamily="34" charset="-122"/>
-                <a:cs typeface="Georgia" pitchFamily="34" charset="-120"/>
-              </a:rPr>
-              <a:t>TextRank</a:t>
-            </a:r>
-            <a:endParaRPr lang="en-US" sz="2000" dirty="0"/>
-          </a:p>
-        </p:txBody>
-      </p:sp>
-      <p:sp>
-        <p:nvSpPr>
-          <p:cNvPr id="16" name="Shape 14"/>
-          <p:cNvSpPr/>
-          <p:nvPr/>
-        </p:nvSpPr>
-        <p:spPr>
-          <a:xfrm>
-            <a:off x="2697480" y="4206240"/>
-            <a:ext cx="8961120" cy="1188720"/>
-          </a:xfrm>
-          <a:prstGeom prst="rect">
-            <a:avLst/>
-          </a:prstGeom>
-          <a:solidFill>
-            <a:srgbClr val="F7F3E8"/>
-          </a:solidFill>
-          <a:ln w="9525">
-            <a:solidFill>
-              <a:srgbClr val="C8C0AE"/>
-            </a:solidFill>
-            <a:prstDash val="solid"/>
-          </a:ln>
-        </p:spPr>
-      </p:sp>
-      <p:sp>
-        <p:nvSpPr>
-          <p:cNvPr id="17" name="Text 15"/>
-          <p:cNvSpPr/>
-          <p:nvPr/>
-        </p:nvSpPr>
-        <p:spPr>
-          <a:xfrm>
-            <a:off x="2926080" y="4480560"/>
-            <a:ext cx="8549640" cy="640080"/>
-          </a:xfrm>
-          <a:prstGeom prst="rect">
-            <a:avLst/>
-          </a:prstGeom>
-          <a:noFill/>
-          <a:ln/>
-        </p:spPr>
-        <p:txBody>
-          <a:bodyPr wrap="square" lIns="0" tIns="0" rIns="0" bIns="0" rtlCol="0" anchor="ctr"/>
-          <a:lstStyle/>
-          <a:p>
-            <a:pPr indent="0" marL="0">
-              <a:buNone/>
-            </a:pPr>
-            <a:r>
-              <a:rPr lang="en-US" sz="1600" dirty="0">
-                <a:solidFill>
-                  <a:srgbClr val="2B2B2B"/>
+              <a:rPr lang="en-US" sz="1000" dirty="0">
+                <a:solidFill>
+                  <a:srgbClr val="B5AFA0"/>
                 </a:solidFill>
                 <a:latin typeface="Calibri" pitchFamily="34" charset="0"/>
                 <a:ea typeface="Calibri" pitchFamily="34" charset="-122"/>
                 <a:cs typeface="Calibri" pitchFamily="34" charset="-120"/>
               </a:rPr>
-              <a:t>Đôi khi nhảy đoạn hoặc trộn nhiều tin trong bài tổng hợp 24h.</a:t>
-            </a:r>
-            <a:endParaRPr lang="en-US" sz="1600" dirty="0"/>
-          </a:p>
-        </p:txBody>
-      </p:sp>
-      <p:sp>
-        <p:nvSpPr>
-          <p:cNvPr id="18" name="Text 16"/>
-          <p:cNvSpPr/>
-          <p:nvPr/>
-        </p:nvSpPr>
-        <p:spPr>
-          <a:xfrm>
-            <a:off x="502920" y="6510528"/>
-            <a:ext cx="8229600" cy="201168"/>
-          </a:xfrm>
-          <a:prstGeom prst="rect">
-            <a:avLst/>
-          </a:prstGeom>
-          <a:noFill/>
-          <a:ln/>
-        </p:spPr>
-        <p:txBody>
-          <a:bodyPr wrap="square" lIns="0" tIns="0" rIns="0" bIns="0" rtlCol="0" anchor="ctr"/>
-          <a:lstStyle/>
-          <a:p>
-            <a:pPr indent="0" marL="0">
+              <a:t>CS221 · UIT  ·  Vietnews extractive vs abstractive</a:t>
+            </a:r>
+            <a:endParaRPr lang="en-US" sz="1000" dirty="0"/>
+          </a:p>
+        </p:txBody>
+      </p:sp>
+      <p:sp>
+        <p:nvSpPr>
+          <p:cNvPr id="11" name="Text 8"/>
+          <p:cNvSpPr/>
+          <p:nvPr/>
+        </p:nvSpPr>
+        <p:spPr>
+          <a:xfrm>
+            <a:off x="11094415" y="6510528"/>
+            <a:ext cx="594360" cy="201168"/>
+          </a:xfrm>
+          <a:prstGeom prst="rect">
+            <a:avLst/>
+          </a:prstGeom>
+          <a:noFill/>
+          <a:ln/>
+        </p:spPr>
+        <p:txBody>
+          <a:bodyPr wrap="square" lIns="0" tIns="0" rIns="0" bIns="0" rtlCol="0" anchor="ctr"/>
+          <a:lstStyle/>
+          <a:p>
+            <a:pPr algn="r" indent="0" marL="0">
               <a:buNone/>
             </a:pPr>
             <a:r>
               <a:rPr lang="en-US" sz="1000" dirty="0">
                 <a:solidFill>
-                  <a:srgbClr val="B5AFA0"/>
+                  <a:srgbClr val="8A8578"/>
                 </a:solidFill>
                 <a:latin typeface="Calibri" pitchFamily="34" charset="0"/>
                 <a:ea typeface="Calibri" pitchFamily="34" charset="-122"/>
                 <a:cs typeface="Calibri" pitchFamily="34" charset="-120"/>
               </a:rPr>
-              <a:t>CS221 · UIT  ·  Vietnews extractive vs abstractive</a:t>
-            </a:r>
-            <a:endParaRPr lang="en-US" sz="1000" dirty="0"/>
-          </a:p>
-        </p:txBody>
-      </p:sp>
-      <p:sp>
-        <p:nvSpPr>
-          <p:cNvPr id="19" name="Text 17"/>
-          <p:cNvSpPr/>
-          <p:nvPr/>
-        </p:nvSpPr>
-        <p:spPr>
-          <a:xfrm>
-            <a:off x="11094415" y="6510528"/>
-            <a:ext cx="594360" cy="201168"/>
-          </a:xfrm>
-          <a:prstGeom prst="rect">
-            <a:avLst/>
-          </a:prstGeom>
-          <a:noFill/>
-          <a:ln/>
-        </p:spPr>
-        <p:txBody>
-          <a:bodyPr wrap="square" lIns="0" tIns="0" rIns="0" bIns="0" rtlCol="0" anchor="ctr"/>
-          <a:lstStyle/>
-          <a:p>
-            <a:pPr algn="r" indent="0" marL="0">
-              <a:buNone/>
-            </a:pPr>
-            <a:r>
-              <a:rPr lang="en-US" sz="1000" dirty="0">
-                <a:solidFill>
-                  <a:srgbClr val="8A8578"/>
-                </a:solidFill>
-                <a:latin typeface="Calibri" pitchFamily="34" charset="0"/>
-                <a:ea typeface="Calibri" pitchFamily="34" charset="-122"/>
-                <a:cs typeface="Calibri" pitchFamily="34" charset="-120"/>
-              </a:rPr>
-              <a:t>13</a:t>
+              <a:t>12b</a:t>
             </a:r>
             <a:endParaRPr lang="en-US" sz="1000" dirty="0"/>
           </a:p>
@@ -7548,7 +8999,7 @@
                 <a:ea typeface="Calibri" pitchFamily="34" charset="-122"/>
                 <a:cs typeface="Calibri" pitchFamily="34" charset="-120"/>
               </a:rPr>
-              <a:t>12  BA VÍ DỤ</a:t>
+              <a:t>11  ĐỌC TAY 20 BÀI</a:t>
             </a:r>
             <a:endParaRPr lang="en-US" sz="1100" dirty="0"/>
           </a:p>
@@ -7587,7 +9038,7 @@
                 <a:ea typeface="Calibri" pitchFamily="34" charset="-122"/>
                 <a:cs typeface="Calibri" pitchFamily="34" charset="-120"/>
               </a:rPr>
-              <a:t>Đối chiếu gold</a:t>
+              <a:t>ROUGE không đủ</a:t>
             </a:r>
             <a:endParaRPr lang="en-US" sz="1200" dirty="0"/>
           </a:p>
@@ -7618,14 +9069,112 @@
       </p:sp>
       <p:sp>
         <p:nvSpPr>
-          <p:cNvPr id="5" name="Shape 3"/>
-          <p:cNvSpPr/>
-          <p:nvPr/>
-        </p:nvSpPr>
-        <p:spPr>
-          <a:xfrm>
-            <a:off x="457200" y="1051560"/>
-            <a:ext cx="3657600" cy="4892040"/>
+          <p:cNvPr id="5" name="Text 3"/>
+          <p:cNvSpPr/>
+          <p:nvPr/>
+        </p:nvSpPr>
+        <p:spPr>
+          <a:xfrm>
+            <a:off x="502920" y="914400"/>
+            <a:ext cx="10972800" cy="457200"/>
+          </a:xfrm>
+          <a:prstGeom prst="rect">
+            <a:avLst/>
+          </a:prstGeom>
+          <a:noFill/>
+          <a:ln/>
+        </p:spPr>
+        <p:txBody>
+          <a:bodyPr wrap="square" lIns="0" tIns="0" rIns="0" bIns="0" rtlCol="0" anchor="ctr"/>
+          <a:lstStyle/>
+          <a:p>
+            <a:pPr indent="0" marL="0">
+              <a:buNone/>
+            </a:pPr>
+            <a:r>
+              <a:rPr lang="en-US" sz="2600" dirty="0">
+                <a:solidFill>
+                  <a:srgbClr val="1A1A1A"/>
+                </a:solidFill>
+                <a:latin typeface="Georgia" pitchFamily="34" charset="0"/>
+                <a:ea typeface="Georgia" pitchFamily="34" charset="-122"/>
+                <a:cs typeface="Georgia" pitchFamily="34" charset="-120"/>
+              </a:rPr>
+              <a:t>ViT5 điểm cao hơn vẫn sai tên và số.</a:t>
+            </a:r>
+            <a:endParaRPr lang="en-US" sz="2600" dirty="0"/>
+          </a:p>
+        </p:txBody>
+      </p:sp>
+      <p:sp>
+        <p:nvSpPr>
+          <p:cNvPr id="6" name="Shape 4"/>
+          <p:cNvSpPr/>
+          <p:nvPr/>
+        </p:nvSpPr>
+        <p:spPr>
+          <a:xfrm>
+            <a:off x="502920" y="1554480"/>
+            <a:ext cx="2194560" cy="1188720"/>
+          </a:xfrm>
+          <a:prstGeom prst="rect">
+            <a:avLst/>
+          </a:prstGeom>
+          <a:solidFill>
+            <a:srgbClr val="0B0B0B"/>
+          </a:solidFill>
+          <a:ln/>
+        </p:spPr>
+      </p:sp>
+      <p:sp>
+        <p:nvSpPr>
+          <p:cNvPr id="7" name="Text 5"/>
+          <p:cNvSpPr/>
+          <p:nvPr/>
+        </p:nvSpPr>
+        <p:spPr>
+          <a:xfrm>
+            <a:off x="640080" y="1920240"/>
+            <a:ext cx="1920240" cy="457200"/>
+          </a:xfrm>
+          <a:prstGeom prst="rect">
+            <a:avLst/>
+          </a:prstGeom>
+          <a:noFill/>
+          <a:ln/>
+        </p:spPr>
+        <p:txBody>
+          <a:bodyPr wrap="square" lIns="0" tIns="0" rIns="0" bIns="0" rtlCol="0" anchor="ctr"/>
+          <a:lstStyle/>
+          <a:p>
+            <a:pPr indent="0" marL="0">
+              <a:buNone/>
+            </a:pPr>
+            <a:r>
+              <a:rPr lang="en-US" sz="2000" dirty="0">
+                <a:solidFill>
+                  <a:srgbClr val="EFE8D6"/>
+                </a:solidFill>
+                <a:latin typeface="Georgia" pitchFamily="34" charset="0"/>
+                <a:ea typeface="Georgia" pitchFamily="34" charset="-122"/>
+                <a:cs typeface="Georgia" pitchFamily="34" charset="-120"/>
+              </a:rPr>
+              <a:t>ViT5</a:t>
+            </a:r>
+            <a:endParaRPr lang="en-US" sz="2000" dirty="0"/>
+          </a:p>
+        </p:txBody>
+      </p:sp>
+      <p:sp>
+        <p:nvSpPr>
+          <p:cNvPr id="8" name="Shape 6"/>
+          <p:cNvSpPr/>
+          <p:nvPr/>
+        </p:nvSpPr>
+        <p:spPr>
+          <a:xfrm>
+            <a:off x="2697480" y="1554480"/>
+            <a:ext cx="8961120" cy="1188720"/>
           </a:xfrm>
           <a:prstGeom prst="rect">
             <a:avLst/>
@@ -7643,14 +9192,14 @@
       </p:sp>
       <p:sp>
         <p:nvSpPr>
-          <p:cNvPr id="6" name="Text 4"/>
-          <p:cNvSpPr/>
-          <p:nvPr/>
-        </p:nvSpPr>
-        <p:spPr>
-          <a:xfrm>
-            <a:off x="685800" y="1234440"/>
-            <a:ext cx="3200400" cy="320040"/>
+          <p:cNvPr id="9" name="Text 7"/>
+          <p:cNvSpPr/>
+          <p:nvPr/>
+        </p:nvSpPr>
+        <p:spPr>
+          <a:xfrm>
+            <a:off x="2926080" y="1828800"/>
+            <a:ext cx="8549640" cy="640080"/>
           </a:xfrm>
           <a:prstGeom prst="rect">
             <a:avLst/>
@@ -7666,30 +9215,50 @@
               <a:buNone/>
             </a:pPr>
             <a:r>
-              <a:rPr lang="en-US" sz="1400" dirty="0">
-                <a:solidFill>
-                  <a:srgbClr val="B8432A"/>
-                </a:solidFill>
-                <a:latin typeface="Consolas" pitchFamily="34" charset="0"/>
-                <a:ea typeface="Consolas" pitchFamily="34" charset="-122"/>
-                <a:cs typeface="Consolas" pitchFamily="34" charset="-120"/>
-              </a:rPr>
-              <a:t>000001</a:t>
-            </a:r>
-            <a:endParaRPr lang="en-US" sz="1400" dirty="0"/>
-          </a:p>
-        </p:txBody>
-      </p:sp>
-      <p:sp>
-        <p:nvSpPr>
-          <p:cNvPr id="7" name="Text 5"/>
-          <p:cNvSpPr/>
-          <p:nvPr/>
-        </p:nvSpPr>
-        <p:spPr>
-          <a:xfrm>
-            <a:off x="685800" y="1600200"/>
-            <a:ext cx="3200400" cy="411480"/>
+              <a:rPr lang="en-US" sz="1600" dirty="0">
+                <a:solidFill>
+                  <a:srgbClr val="2B2B2B"/>
+                </a:solidFill>
+                <a:latin typeface="Calibri" pitchFamily="34" charset="0"/>
+                <a:ea typeface="Calibri" pitchFamily="34" charset="-122"/>
+                <a:cs typeface="Calibri" pitchFamily="34" charset="-120"/>
+              </a:rPr>
+              <a:t>Sai tên / gán nhầm người; đảo polarity; bịa súng-dao; xe bồn thay máy ủi.</a:t>
+            </a:r>
+            <a:endParaRPr lang="en-US" sz="1600" dirty="0"/>
+          </a:p>
+        </p:txBody>
+      </p:sp>
+      <p:sp>
+        <p:nvSpPr>
+          <p:cNvPr id="10" name="Shape 8"/>
+          <p:cNvSpPr/>
+          <p:nvPr/>
+        </p:nvSpPr>
+        <p:spPr>
+          <a:xfrm>
+            <a:off x="502920" y="2880360"/>
+            <a:ext cx="2194560" cy="1188720"/>
+          </a:xfrm>
+          <a:prstGeom prst="rect">
+            <a:avLst/>
+          </a:prstGeom>
+          <a:solidFill>
+            <a:srgbClr val="0B0B0B"/>
+          </a:solidFill>
+          <a:ln/>
+        </p:spPr>
+      </p:sp>
+      <p:sp>
+        <p:nvSpPr>
+          <p:cNvPr id="11" name="Text 9"/>
+          <p:cNvSpPr/>
+          <p:nvPr/>
+        </p:nvSpPr>
+        <p:spPr>
+          <a:xfrm>
+            <a:off x="640080" y="3246120"/>
+            <a:ext cx="1920240" cy="457200"/>
           </a:xfrm>
           <a:prstGeom prst="rect">
             <a:avLst/>
@@ -7707,13 +9276,13 @@
             <a:r>
               <a:rPr lang="en-US" sz="2000" dirty="0">
                 <a:solidFill>
-                  <a:srgbClr val="1A1A1A"/>
+                  <a:srgbClr val="EFE8D6"/>
                 </a:solidFill>
                 <a:latin typeface="Georgia" pitchFamily="34" charset="0"/>
                 <a:ea typeface="Georgia" pitchFamily="34" charset="-122"/>
                 <a:cs typeface="Georgia" pitchFamily="34" charset="-120"/>
               </a:rPr>
-              <a:t>Sai tên</a:t>
+              <a:t>Lead-3</a:t>
             </a:r>
             <a:endParaRPr lang="en-US" sz="2000" dirty="0"/>
           </a:p>
@@ -7721,92 +9290,14 @@
       </p:sp>
       <p:sp>
         <p:nvSpPr>
-          <p:cNvPr id="8" name="Text 6"/>
-          <p:cNvSpPr/>
-          <p:nvPr/>
-        </p:nvSpPr>
-        <p:spPr>
-          <a:xfrm>
-            <a:off x="685800" y="2240280"/>
-            <a:ext cx="3200400" cy="1554480"/>
-          </a:xfrm>
-          <a:prstGeom prst="rect">
-            <a:avLst/>
-          </a:prstGeom>
-          <a:noFill/>
-          <a:ln/>
-        </p:spPr>
-        <p:txBody>
-          <a:bodyPr wrap="square" lIns="0" tIns="0" rIns="0" bIns="0" rtlCol="0" anchor="ctr"/>
-          <a:lstStyle/>
-          <a:p>
-            <a:pPr indent="0" marL="0">
-              <a:buNone/>
-            </a:pPr>
-            <a:r>
-              <a:rPr lang="en-US" sz="1500" dirty="0">
-                <a:solidFill>
-                  <a:srgbClr val="2B2B2B"/>
-                </a:solidFill>
-                <a:latin typeface="Calibri" pitchFamily="34" charset="0"/>
-                <a:ea typeface="Calibri" pitchFamily="34" charset="-122"/>
-                <a:cs typeface="Calibri" pitchFamily="34" charset="-120"/>
-              </a:rPr>
-              <a:t>Gold: Hồ Xuân Huy, 12 năm tù.</a:t>
-            </a:r>
-            <a:endParaRPr lang="en-US" sz="1500" dirty="0"/>
-          </a:p>
-        </p:txBody>
-      </p:sp>
-      <p:sp>
-        <p:nvSpPr>
-          <p:cNvPr id="9" name="Text 7"/>
-          <p:cNvSpPr/>
-          <p:nvPr/>
-        </p:nvSpPr>
-        <p:spPr>
-          <a:xfrm>
-            <a:off x="685800" y="3931920"/>
-            <a:ext cx="3200400" cy="1645920"/>
-          </a:xfrm>
-          <a:prstGeom prst="rect">
-            <a:avLst/>
-          </a:prstGeom>
-          <a:noFill/>
-          <a:ln/>
-        </p:spPr>
-        <p:txBody>
-          <a:bodyPr wrap="square" lIns="0" tIns="0" rIns="0" bIns="0" rtlCol="0" anchor="ctr"/>
-          <a:lstStyle/>
-          <a:p>
-            <a:pPr indent="0" marL="0">
-              <a:buNone/>
-            </a:pPr>
-            <a:r>
-              <a:rPr lang="en-US" sz="1500" dirty="0">
-                <a:solidFill>
-                  <a:srgbClr val="B8432A"/>
-                </a:solidFill>
-                <a:latin typeface="Calibri" pitchFamily="34" charset="0"/>
-                <a:ea typeface="Calibri" pitchFamily="34" charset="-122"/>
-                <a:cs typeface="Calibri" pitchFamily="34" charset="-120"/>
-              </a:rPr>
-              <a:t>ViT5: Bùi Quang Huy / Vũ nhôm, 3,2 tỷ.</a:t>
-            </a:r>
-            <a:endParaRPr lang="en-US" sz="1500" dirty="0"/>
-          </a:p>
-        </p:txBody>
-      </p:sp>
-      <p:sp>
-        <p:nvSpPr>
-          <p:cNvPr id="10" name="Shape 8"/>
-          <p:cNvSpPr/>
-          <p:nvPr/>
-        </p:nvSpPr>
-        <p:spPr>
-          <a:xfrm>
-            <a:off x="4297680" y="1051560"/>
-            <a:ext cx="3657600" cy="4892040"/>
+          <p:cNvPr id="12" name="Shape 10"/>
+          <p:cNvSpPr/>
+          <p:nvPr/>
+        </p:nvSpPr>
+        <p:spPr>
+          <a:xfrm>
+            <a:off x="2697480" y="2880360"/>
+            <a:ext cx="8961120" cy="1188720"/>
           </a:xfrm>
           <a:prstGeom prst="rect">
             <a:avLst/>
@@ -7824,14 +9315,14 @@
       </p:sp>
       <p:sp>
         <p:nvSpPr>
-          <p:cNvPr id="11" name="Text 9"/>
-          <p:cNvSpPr/>
-          <p:nvPr/>
-        </p:nvSpPr>
-        <p:spPr>
-          <a:xfrm>
-            <a:off x="4526280" y="1234440"/>
-            <a:ext cx="3200400" cy="320040"/>
+          <p:cNvPr id="13" name="Text 11"/>
+          <p:cNvSpPr/>
+          <p:nvPr/>
+        </p:nvSpPr>
+        <p:spPr>
+          <a:xfrm>
+            <a:off x="2926080" y="3154680"/>
+            <a:ext cx="8549640" cy="640080"/>
           </a:xfrm>
           <a:prstGeom prst="rect">
             <a:avLst/>
@@ -7847,30 +9338,50 @@
               <a:buNone/>
             </a:pPr>
             <a:r>
-              <a:rPr lang="en-US" sz="1400" dirty="0">
-                <a:solidFill>
-                  <a:srgbClr val="B8432A"/>
-                </a:solidFill>
-                <a:latin typeface="Consolas" pitchFamily="34" charset="0"/>
-                <a:ea typeface="Consolas" pitchFamily="34" charset="-122"/>
-                <a:cs typeface="Consolas" pitchFamily="34" charset="-120"/>
-              </a:rPr>
-              <a:t>000011</a:t>
-            </a:r>
-            <a:endParaRPr lang="en-US" sz="1400" dirty="0"/>
-          </a:p>
-        </p:txBody>
-      </p:sp>
-      <p:sp>
-        <p:nvSpPr>
-          <p:cNvPr id="12" name="Text 10"/>
-          <p:cNvSpPr/>
-          <p:nvPr/>
-        </p:nvSpPr>
-        <p:spPr>
-          <a:xfrm>
-            <a:off x="4526280" y="1600200"/>
-            <a:ext cx="3200400" cy="411480"/>
+              <a:rPr lang="en-US" sz="1600" dirty="0">
+                <a:solidFill>
+                  <a:srgbClr val="2B2B2B"/>
+                </a:solidFill>
+                <a:latin typeface="Calibri" pitchFamily="34" charset="0"/>
+                <a:ea typeface="Calibri" pitchFamily="34" charset="-122"/>
+                <a:cs typeface="Calibri" pitchFamily="34" charset="-120"/>
+              </a:rPr>
+              <a:t>Ít bịa (câu lấy từ bài). Hay lệch gold vì gold là sapo/kết luận.</a:t>
+            </a:r>
+            <a:endParaRPr lang="en-US" sz="1600" dirty="0"/>
+          </a:p>
+        </p:txBody>
+      </p:sp>
+      <p:sp>
+        <p:nvSpPr>
+          <p:cNvPr id="14" name="Shape 12"/>
+          <p:cNvSpPr/>
+          <p:nvPr/>
+        </p:nvSpPr>
+        <p:spPr>
+          <a:xfrm>
+            <a:off x="502920" y="4206240"/>
+            <a:ext cx="2194560" cy="1188720"/>
+          </a:xfrm>
+          <a:prstGeom prst="rect">
+            <a:avLst/>
+          </a:prstGeom>
+          <a:solidFill>
+            <a:srgbClr val="0B0B0B"/>
+          </a:solidFill>
+          <a:ln/>
+        </p:spPr>
+      </p:sp>
+      <p:sp>
+        <p:nvSpPr>
+          <p:cNvPr id="15" name="Text 13"/>
+          <p:cNvSpPr/>
+          <p:nvPr/>
+        </p:nvSpPr>
+        <p:spPr>
+          <a:xfrm>
+            <a:off x="640080" y="4572000"/>
+            <a:ext cx="1920240" cy="457200"/>
           </a:xfrm>
           <a:prstGeom prst="rect">
             <a:avLst/>
@@ -7888,13 +9399,13 @@
             <a:r>
               <a:rPr lang="en-US" sz="2000" dirty="0">
                 <a:solidFill>
-                  <a:srgbClr val="1A1A1A"/>
+                  <a:srgbClr val="EFE8D6"/>
                 </a:solidFill>
                 <a:latin typeface="Georgia" pitchFamily="34" charset="0"/>
                 <a:ea typeface="Georgia" pitchFamily="34" charset="-122"/>
                 <a:cs typeface="Georgia" pitchFamily="34" charset="-120"/>
               </a:rPr>
-              <a:t>Bịa đối tượng</a:t>
+              <a:t>TextRank</a:t>
             </a:r>
             <a:endParaRPr lang="en-US" sz="2000" dirty="0"/>
           </a:p>
@@ -7902,92 +9413,14 @@
       </p:sp>
       <p:sp>
         <p:nvSpPr>
-          <p:cNvPr id="13" name="Text 11"/>
-          <p:cNvSpPr/>
-          <p:nvPr/>
-        </p:nvSpPr>
-        <p:spPr>
-          <a:xfrm>
-            <a:off x="4526280" y="2240280"/>
-            <a:ext cx="3200400" cy="1554480"/>
-          </a:xfrm>
-          <a:prstGeom prst="rect">
-            <a:avLst/>
-          </a:prstGeom>
-          <a:noFill/>
-          <a:ln/>
-        </p:spPr>
-        <p:txBody>
-          <a:bodyPr wrap="square" lIns="0" tIns="0" rIns="0" bIns="0" rtlCol="0" anchor="ctr"/>
-          <a:lstStyle/>
-          <a:p>
-            <a:pPr indent="0" marL="0">
-              <a:buNone/>
-            </a:pPr>
-            <a:r>
-              <a:rPr lang="en-US" sz="1500" dirty="0">
-                <a:solidFill>
-                  <a:srgbClr val="2B2B2B"/>
-                </a:solidFill>
-                <a:latin typeface="Calibri" pitchFamily="34" charset="0"/>
-                <a:ea typeface="Calibri" pitchFamily="34" charset="-122"/>
-                <a:cs typeface="Calibri" pitchFamily="34" charset="-120"/>
-              </a:rPr>
-              <a:t>Gold: trộm máy ủi, bán, mua dây chuyền.</a:t>
-            </a:r>
-            <a:endParaRPr lang="en-US" sz="1500" dirty="0"/>
-          </a:p>
-        </p:txBody>
-      </p:sp>
-      <p:sp>
-        <p:nvSpPr>
-          <p:cNvPr id="14" name="Text 12"/>
-          <p:cNvSpPr/>
-          <p:nvPr/>
-        </p:nvSpPr>
-        <p:spPr>
-          <a:xfrm>
-            <a:off x="4526280" y="3931920"/>
-            <a:ext cx="3200400" cy="1645920"/>
-          </a:xfrm>
-          <a:prstGeom prst="rect">
-            <a:avLst/>
-          </a:prstGeom>
-          <a:noFill/>
-          <a:ln/>
-        </p:spPr>
-        <p:txBody>
-          <a:bodyPr wrap="square" lIns="0" tIns="0" rIns="0" bIns="0" rtlCol="0" anchor="ctr"/>
-          <a:lstStyle/>
-          <a:p>
-            <a:pPr indent="0" marL="0">
-              <a:buNone/>
-            </a:pPr>
-            <a:r>
-              <a:rPr lang="en-US" sz="1500" dirty="0">
-                <a:solidFill>
-                  <a:srgbClr val="B8432A"/>
-                </a:solidFill>
-                <a:latin typeface="Calibri" pitchFamily="34" charset="0"/>
-                <a:ea typeface="Calibri" pitchFamily="34" charset="-122"/>
-                <a:cs typeface="Calibri" pitchFamily="34" charset="-120"/>
-              </a:rPr>
-              <a:t>ViT5: “xe bồn”, thuê sửa chữa.</a:t>
-            </a:r>
-            <a:endParaRPr lang="en-US" sz="1500" dirty="0"/>
-          </a:p>
-        </p:txBody>
-      </p:sp>
-      <p:sp>
-        <p:nvSpPr>
-          <p:cNvPr id="15" name="Shape 13"/>
-          <p:cNvSpPr/>
-          <p:nvPr/>
-        </p:nvSpPr>
-        <p:spPr>
-          <a:xfrm>
-            <a:off x="8138160" y="1051560"/>
-            <a:ext cx="3657600" cy="4892040"/>
+          <p:cNvPr id="16" name="Shape 14"/>
+          <p:cNvSpPr/>
+          <p:nvPr/>
+        </p:nvSpPr>
+        <p:spPr>
+          <a:xfrm>
+            <a:off x="2697480" y="4206240"/>
+            <a:ext cx="8961120" cy="1188720"/>
           </a:xfrm>
           <a:prstGeom prst="rect">
             <a:avLst/>
@@ -8005,14 +9438,14 @@
       </p:sp>
       <p:sp>
         <p:nvSpPr>
-          <p:cNvPr id="16" name="Text 14"/>
-          <p:cNvSpPr/>
-          <p:nvPr/>
-        </p:nvSpPr>
-        <p:spPr>
-          <a:xfrm>
-            <a:off x="8366760" y="1234440"/>
-            <a:ext cx="3200400" cy="320040"/>
+          <p:cNvPr id="17" name="Text 15"/>
+          <p:cNvSpPr/>
+          <p:nvPr/>
+        </p:nvSpPr>
+        <p:spPr>
+          <a:xfrm>
+            <a:off x="2926080" y="4480560"/>
+            <a:ext cx="8549640" cy="640080"/>
           </a:xfrm>
           <a:prstGeom prst="rect">
             <a:avLst/>
@@ -8028,85 +9461,7 @@
               <a:buNone/>
             </a:pPr>
             <a:r>
-              <a:rPr lang="en-US" sz="1400" dirty="0">
-                <a:solidFill>
-                  <a:srgbClr val="B8432A"/>
-                </a:solidFill>
-                <a:latin typeface="Consolas" pitchFamily="34" charset="0"/>
-                <a:ea typeface="Consolas" pitchFamily="34" charset="-122"/>
-                <a:cs typeface="Consolas" pitchFamily="34" charset="-120"/>
-              </a:rPr>
-              <a:t>000036</a:t>
-            </a:r>
-            <a:endParaRPr lang="en-US" sz="1400" dirty="0"/>
-          </a:p>
-        </p:txBody>
-      </p:sp>
-      <p:sp>
-        <p:nvSpPr>
-          <p:cNvPr id="17" name="Text 15"/>
-          <p:cNvSpPr/>
-          <p:nvPr/>
-        </p:nvSpPr>
-        <p:spPr>
-          <a:xfrm>
-            <a:off x="8366760" y="1600200"/>
-            <a:ext cx="3200400" cy="411480"/>
-          </a:xfrm>
-          <a:prstGeom prst="rect">
-            <a:avLst/>
-          </a:prstGeom>
-          <a:noFill/>
-          <a:ln/>
-        </p:spPr>
-        <p:txBody>
-          <a:bodyPr wrap="square" lIns="0" tIns="0" rIns="0" bIns="0" rtlCol="0" anchor="ctr"/>
-          <a:lstStyle/>
-          <a:p>
-            <a:pPr indent="0" marL="0">
-              <a:buNone/>
-            </a:pPr>
-            <a:r>
-              <a:rPr lang="en-US" sz="2000" dirty="0">
-                <a:solidFill>
-                  <a:srgbClr val="1A1A1A"/>
-                </a:solidFill>
-                <a:latin typeface="Georgia" pitchFamily="34" charset="0"/>
-                <a:ea typeface="Georgia" pitchFamily="34" charset="-122"/>
-                <a:cs typeface="Georgia" pitchFamily="34" charset="-120"/>
-              </a:rPr>
-              <a:t>Gán nhầm lời Dương</a:t>
-            </a:r>
-            <a:endParaRPr lang="en-US" sz="2000" dirty="0"/>
-          </a:p>
-        </p:txBody>
-      </p:sp>
-      <p:sp>
-        <p:nvSpPr>
-          <p:cNvPr id="18" name="Text 16"/>
-          <p:cNvSpPr/>
-          <p:nvPr/>
-        </p:nvSpPr>
-        <p:spPr>
-          <a:xfrm>
-            <a:off x="8366760" y="2240280"/>
-            <a:ext cx="3200400" cy="1554480"/>
-          </a:xfrm>
-          <a:prstGeom prst="rect">
-            <a:avLst/>
-          </a:prstGeom>
-          <a:noFill/>
-          <a:ln/>
-        </p:spPr>
-        <p:txBody>
-          <a:bodyPr wrap="square" lIns="0" tIns="0" rIns="0" bIns="0" rtlCol="0" anchor="ctr"/>
-          <a:lstStyle/>
-          <a:p>
-            <a:pPr indent="0" marL="0">
-              <a:buNone/>
-            </a:pPr>
-            <a:r>
-              <a:rPr lang="en-US" sz="1500" dirty="0">
+              <a:rPr lang="en-US" sz="1600" dirty="0">
                 <a:solidFill>
                   <a:srgbClr val="2B2B2B"/>
                 </a:solidFill>
@@ -8114,22 +9469,22 @@
                 <a:ea typeface="Calibri" pitchFamily="34" charset="-122"/>
                 <a:cs typeface="Calibri" pitchFamily="34" charset="-120"/>
               </a:rPr>
-              <a:t>Gold: Vĩnh chối Rolex 7.000 USD.</a:t>
-            </a:r>
-            <a:endParaRPr lang="en-US" sz="1500" dirty="0"/>
-          </a:p>
-        </p:txBody>
-      </p:sp>
-      <p:sp>
-        <p:nvSpPr>
-          <p:cNvPr id="19" name="Text 17"/>
-          <p:cNvSpPr/>
-          <p:nvPr/>
-        </p:nvSpPr>
-        <p:spPr>
-          <a:xfrm>
-            <a:off x="8366760" y="3931920"/>
-            <a:ext cx="3200400" cy="1645920"/>
+              <a:t>Đôi khi nhảy đoạn hoặc trộn nhiều tin trong bài tổng hợp 24h.</a:t>
+            </a:r>
+            <a:endParaRPr lang="en-US" sz="1600" dirty="0"/>
+          </a:p>
+        </p:txBody>
+      </p:sp>
+      <p:sp>
+        <p:nvSpPr>
+          <p:cNvPr id="18" name="Text 16"/>
+          <p:cNvSpPr/>
+          <p:nvPr/>
+        </p:nvSpPr>
+        <p:spPr>
+          <a:xfrm>
+            <a:off x="502920" y="6510528"/>
+            <a:ext cx="8229600" cy="201168"/>
           </a:xfrm>
           <a:prstGeom prst="rect">
             <a:avLst/>
@@ -8145,93 +9500,54 @@
               <a:buNone/>
             </a:pPr>
             <a:r>
-              <a:rPr lang="en-US" sz="1500" dirty="0">
-                <a:solidFill>
-                  <a:srgbClr val="B8432A"/>
+              <a:rPr lang="en-US" sz="1000" dirty="0">
+                <a:solidFill>
+                  <a:srgbClr val="B5AFA0"/>
                 </a:solidFill>
                 <a:latin typeface="Calibri" pitchFamily="34" charset="0"/>
                 <a:ea typeface="Calibri" pitchFamily="34" charset="-122"/>
                 <a:cs typeface="Calibri" pitchFamily="34" charset="-120"/>
               </a:rPr>
-              <a:t>ViT5: Vĩnh “khai cho ông Vĩnh” 27 tỷ.</a:t>
-            </a:r>
-            <a:endParaRPr lang="en-US" sz="1500" dirty="0"/>
-          </a:p>
-        </p:txBody>
-      </p:sp>
-      <p:sp>
-        <p:nvSpPr>
-          <p:cNvPr id="20" name="Text 18"/>
-          <p:cNvSpPr/>
-          <p:nvPr/>
-        </p:nvSpPr>
-        <p:spPr>
-          <a:xfrm>
-            <a:off x="502920" y="6510528"/>
-            <a:ext cx="8229600" cy="201168"/>
-          </a:xfrm>
-          <a:prstGeom prst="rect">
-            <a:avLst/>
-          </a:prstGeom>
-          <a:noFill/>
-          <a:ln/>
-        </p:spPr>
-        <p:txBody>
-          <a:bodyPr wrap="square" lIns="0" tIns="0" rIns="0" bIns="0" rtlCol="0" anchor="ctr"/>
-          <a:lstStyle/>
-          <a:p>
-            <a:pPr indent="0" marL="0">
+              <a:t>CS221 · UIT  ·  Vietnews extractive vs abstractive</a:t>
+            </a:r>
+            <a:endParaRPr lang="en-US" sz="1000" dirty="0"/>
+          </a:p>
+        </p:txBody>
+      </p:sp>
+      <p:sp>
+        <p:nvSpPr>
+          <p:cNvPr id="19" name="Text 17"/>
+          <p:cNvSpPr/>
+          <p:nvPr/>
+        </p:nvSpPr>
+        <p:spPr>
+          <a:xfrm>
+            <a:off x="11094415" y="6510528"/>
+            <a:ext cx="594360" cy="201168"/>
+          </a:xfrm>
+          <a:prstGeom prst="rect">
+            <a:avLst/>
+          </a:prstGeom>
+          <a:noFill/>
+          <a:ln/>
+        </p:spPr>
+        <p:txBody>
+          <a:bodyPr wrap="square" lIns="0" tIns="0" rIns="0" bIns="0" rtlCol="0" anchor="ctr"/>
+          <a:lstStyle/>
+          <a:p>
+            <a:pPr algn="r" indent="0" marL="0">
               <a:buNone/>
             </a:pPr>
             <a:r>
               <a:rPr lang="en-US" sz="1000" dirty="0">
                 <a:solidFill>
-                  <a:srgbClr val="B5AFA0"/>
+                  <a:srgbClr val="8A8578"/>
                 </a:solidFill>
                 <a:latin typeface="Calibri" pitchFamily="34" charset="0"/>
                 <a:ea typeface="Calibri" pitchFamily="34" charset="-122"/>
                 <a:cs typeface="Calibri" pitchFamily="34" charset="-120"/>
               </a:rPr>
-              <a:t>CS221 · UIT  ·  Vietnews extractive vs abstractive</a:t>
-            </a:r>
-            <a:endParaRPr lang="en-US" sz="1000" dirty="0"/>
-          </a:p>
-        </p:txBody>
-      </p:sp>
-      <p:sp>
-        <p:nvSpPr>
-          <p:cNvPr id="21" name="Text 19"/>
-          <p:cNvSpPr/>
-          <p:nvPr/>
-        </p:nvSpPr>
-        <p:spPr>
-          <a:xfrm>
-            <a:off x="11094415" y="6510528"/>
-            <a:ext cx="594360" cy="201168"/>
-          </a:xfrm>
-          <a:prstGeom prst="rect">
-            <a:avLst/>
-          </a:prstGeom>
-          <a:noFill/>
-          <a:ln/>
-        </p:spPr>
-        <p:txBody>
-          <a:bodyPr wrap="square" lIns="0" tIns="0" rIns="0" bIns="0" rtlCol="0" anchor="ctr"/>
-          <a:lstStyle/>
-          <a:p>
-            <a:pPr algn="r" indent="0" marL="0">
-              <a:buNone/>
-            </a:pPr>
-            <a:r>
-              <a:rPr lang="en-US" sz="1000" dirty="0">
-                <a:solidFill>
-                  <a:srgbClr val="8A8578"/>
-                </a:solidFill>
-                <a:latin typeface="Calibri" pitchFamily="34" charset="0"/>
-                <a:ea typeface="Calibri" pitchFamily="34" charset="-122"/>
-                <a:cs typeface="Calibri" pitchFamily="34" charset="-120"/>
-              </a:rPr>
-              <a:t>14</a:t>
+              <a:t>13</a:t>
             </a:r>
             <a:endParaRPr lang="en-US" sz="1000" dirty="0"/>
           </a:p>
@@ -8302,7 +9618,7 @@
                 <a:ea typeface="Calibri" pitchFamily="34" charset="-122"/>
                 <a:cs typeface="Calibri" pitchFamily="34" charset="-120"/>
               </a:rPr>
-              <a:t>13  DEMO</a:t>
+              <a:t>12  BA VÍ DỤ</a:t>
             </a:r>
             <a:endParaRPr lang="en-US" sz="1100" dirty="0"/>
           </a:p>
@@ -8341,7 +9657,7 @@
                 <a:ea typeface="Calibri" pitchFamily="34" charset="-122"/>
                 <a:cs typeface="Calibri" pitchFamily="34" charset="-120"/>
               </a:rPr>
-              <a:t>Không cần GPU lúc bảo vệ</a:t>
+              <a:t>Đối chiếu gold</a:t>
             </a:r>
             <a:endParaRPr lang="en-US" sz="1200" dirty="0"/>
           </a:p>
@@ -8372,53 +9688,14 @@
       </p:sp>
       <p:sp>
         <p:nvSpPr>
-          <p:cNvPr id="5" name="Text 3"/>
-          <p:cNvSpPr/>
-          <p:nvPr/>
-        </p:nvSpPr>
-        <p:spPr>
-          <a:xfrm>
-            <a:off x="502920" y="914400"/>
-            <a:ext cx="10972800" cy="411480"/>
-          </a:xfrm>
-          <a:prstGeom prst="rect">
-            <a:avLst/>
-          </a:prstGeom>
-          <a:noFill/>
-          <a:ln/>
-        </p:spPr>
-        <p:txBody>
-          <a:bodyPr wrap="square" lIns="0" tIns="0" rIns="0" bIns="0" rtlCol="0" anchor="ctr"/>
-          <a:lstStyle/>
-          <a:p>
-            <a:pPr indent="0" marL="0">
-              <a:buNone/>
-            </a:pPr>
-            <a:r>
-              <a:rPr lang="en-US" sz="2600" dirty="0">
-                <a:solidFill>
-                  <a:srgbClr val="1A1A1A"/>
-                </a:solidFill>
-                <a:latin typeface="Georgia" pitchFamily="34" charset="0"/>
-                <a:ea typeface="Georgia" pitchFamily="34" charset="-122"/>
-                <a:cs typeface="Georgia" pitchFamily="34" charset="-120"/>
-              </a:rPr>
-              <a:t>Ba cột trên cùng một bài test.</a:t>
-            </a:r>
-            <a:endParaRPr lang="en-US" sz="2600" dirty="0"/>
-          </a:p>
-        </p:txBody>
-      </p:sp>
-      <p:sp>
-        <p:nvSpPr>
-          <p:cNvPr id="6" name="Shape 4"/>
-          <p:cNvSpPr/>
-          <p:nvPr/>
-        </p:nvSpPr>
-        <p:spPr>
-          <a:xfrm>
-            <a:off x="502920" y="1554480"/>
-            <a:ext cx="3611880" cy="3200400"/>
+          <p:cNvPr id="5" name="Shape 3"/>
+          <p:cNvSpPr/>
+          <p:nvPr/>
+        </p:nvSpPr>
+        <p:spPr>
+          <a:xfrm>
+            <a:off x="457200" y="1051560"/>
+            <a:ext cx="3657600" cy="4892040"/>
           </a:xfrm>
           <a:prstGeom prst="rect">
             <a:avLst/>
@@ -8436,14 +9713,53 @@
       </p:sp>
       <p:sp>
         <p:nvSpPr>
+          <p:cNvPr id="6" name="Text 4"/>
+          <p:cNvSpPr/>
+          <p:nvPr/>
+        </p:nvSpPr>
+        <p:spPr>
+          <a:xfrm>
+            <a:off x="685800" y="1234440"/>
+            <a:ext cx="3200400" cy="320040"/>
+          </a:xfrm>
+          <a:prstGeom prst="rect">
+            <a:avLst/>
+          </a:prstGeom>
+          <a:noFill/>
+          <a:ln/>
+        </p:spPr>
+        <p:txBody>
+          <a:bodyPr wrap="square" lIns="0" tIns="0" rIns="0" bIns="0" rtlCol="0" anchor="ctr"/>
+          <a:lstStyle/>
+          <a:p>
+            <a:pPr indent="0" marL="0">
+              <a:buNone/>
+            </a:pPr>
+            <a:r>
+              <a:rPr lang="en-US" sz="1400" dirty="0">
+                <a:solidFill>
+                  <a:srgbClr val="B8432A"/>
+                </a:solidFill>
+                <a:latin typeface="Consolas" pitchFamily="34" charset="0"/>
+                <a:ea typeface="Consolas" pitchFamily="34" charset="-122"/>
+                <a:cs typeface="Consolas" pitchFamily="34" charset="-120"/>
+              </a:rPr>
+              <a:t>000001</a:t>
+            </a:r>
+            <a:endParaRPr lang="en-US" sz="1400" dirty="0"/>
+          </a:p>
+        </p:txBody>
+      </p:sp>
+      <p:sp>
+        <p:nvSpPr>
           <p:cNvPr id="7" name="Text 5"/>
           <p:cNvSpPr/>
           <p:nvPr/>
         </p:nvSpPr>
         <p:spPr>
           <a:xfrm>
-            <a:off x="731520" y="1783080"/>
-            <a:ext cx="3154680" cy="457200"/>
+            <a:off x="685800" y="1600200"/>
+            <a:ext cx="3200400" cy="411480"/>
           </a:xfrm>
           <a:prstGeom prst="rect">
             <a:avLst/>
@@ -8459,7 +9775,7 @@
               <a:buNone/>
             </a:pPr>
             <a:r>
-              <a:rPr lang="en-US" sz="2200" dirty="0">
+              <a:rPr lang="en-US" sz="2000" dirty="0">
                 <a:solidFill>
                   <a:srgbClr val="1A1A1A"/>
                 </a:solidFill>
@@ -8467,9 +9783,9 @@
                 <a:ea typeface="Georgia" pitchFamily="34" charset="-122"/>
                 <a:cs typeface="Georgia" pitchFamily="34" charset="-120"/>
               </a:rPr>
-              <a:t>Local</a:t>
-            </a:r>
-            <a:endParaRPr lang="en-US" sz="2200" dirty="0"/>
+              <a:t>Sai tên</a:t>
+            </a:r>
+            <a:endParaRPr lang="en-US" sz="2000" dirty="0"/>
           </a:p>
         </p:txBody>
       </p:sp>
@@ -8481,8 +9797,8 @@
         </p:nvSpPr>
         <p:spPr>
           <a:xfrm>
-            <a:off x="731520" y="2377440"/>
-            <a:ext cx="3154680" cy="2011680"/>
+            <a:off x="685800" y="2240280"/>
+            <a:ext cx="3200400" cy="1554480"/>
           </a:xfrm>
           <a:prstGeom prst="rect">
             <a:avLst/>
@@ -8502,14 +9818,36 @@
                 <a:solidFill>
                   <a:srgbClr val="2B2B2B"/>
                 </a:solidFill>
-                <a:latin typeface="Consolas" pitchFamily="34" charset="0"/>
-                <a:ea typeface="Consolas" pitchFamily="34" charset="-122"/>
-                <a:cs typeface="Consolas" pitchFamily="34" charset="-120"/>
-              </a:rPr>
-              <a:t>python app/demo.py</a:t>
+                <a:latin typeface="Calibri" pitchFamily="34" charset="0"/>
+                <a:ea typeface="Calibri" pitchFamily="34" charset="-122"/>
+                <a:cs typeface="Calibri" pitchFamily="34" charset="-120"/>
+              </a:rPr>
+              <a:t>Gold: Hồ Xuân Huy, 12 năm tù.</a:t>
             </a:r>
             <a:endParaRPr lang="en-US" sz="1500" dirty="0"/>
           </a:p>
+        </p:txBody>
+      </p:sp>
+      <p:sp>
+        <p:nvSpPr>
+          <p:cNvPr id="9" name="Text 7"/>
+          <p:cNvSpPr/>
+          <p:nvPr/>
+        </p:nvSpPr>
+        <p:spPr>
+          <a:xfrm>
+            <a:off x="685800" y="3931920"/>
+            <a:ext cx="3200400" cy="1645920"/>
+          </a:xfrm>
+          <a:prstGeom prst="rect">
+            <a:avLst/>
+          </a:prstGeom>
+          <a:noFill/>
+          <a:ln/>
+        </p:spPr>
+        <p:txBody>
+          <a:bodyPr wrap="square" lIns="0" tIns="0" rIns="0" bIns="0" rtlCol="0" anchor="ctr"/>
+          <a:lstStyle/>
           <a:p>
             <a:pPr indent="0" marL="0">
               <a:buNone/>
@@ -8517,13 +9855,13 @@
             <a:r>
               <a:rPr lang="en-US" sz="1500" dirty="0">
                 <a:solidFill>
-                  <a:srgbClr val="2B2B2B"/>
-                </a:solidFill>
-                <a:latin typeface="Consolas" pitchFamily="34" charset="0"/>
-                <a:ea typeface="Consolas" pitchFamily="34" charset="-122"/>
-                <a:cs typeface="Consolas" pitchFamily="34" charset="-120"/>
-              </a:rPr>
-              <a:t>http://127.0.0.1:7860</a:t>
+                  <a:srgbClr val="B8432A"/>
+                </a:solidFill>
+                <a:latin typeface="Calibri" pitchFamily="34" charset="0"/>
+                <a:ea typeface="Calibri" pitchFamily="34" charset="-122"/>
+                <a:cs typeface="Calibri" pitchFamily="34" charset="-120"/>
+              </a:rPr>
+              <a:t>ViT5: Bùi Quang Huy / Vũ nhôm, 3,2 tỷ.</a:t>
             </a:r>
             <a:endParaRPr lang="en-US" sz="1500" dirty="0"/>
           </a:p>
@@ -8531,14 +9869,14 @@
       </p:sp>
       <p:sp>
         <p:nvSpPr>
-          <p:cNvPr id="9" name="Shape 7"/>
-          <p:cNvSpPr/>
-          <p:nvPr/>
-        </p:nvSpPr>
-        <p:spPr>
-          <a:xfrm>
-            <a:off x="4297680" y="1554480"/>
-            <a:ext cx="3611880" cy="3200400"/>
+          <p:cNvPr id="10" name="Shape 8"/>
+          <p:cNvSpPr/>
+          <p:nvPr/>
+        </p:nvSpPr>
+        <p:spPr>
+          <a:xfrm>
+            <a:off x="4297680" y="1051560"/>
+            <a:ext cx="3657600" cy="4892040"/>
           </a:xfrm>
           <a:prstGeom prst="rect">
             <a:avLst/>
@@ -8556,14 +9894,14 @@
       </p:sp>
       <p:sp>
         <p:nvSpPr>
-          <p:cNvPr id="10" name="Text 8"/>
-          <p:cNvSpPr/>
-          <p:nvPr/>
-        </p:nvSpPr>
-        <p:spPr>
-          <a:xfrm>
-            <a:off x="4526280" y="1783080"/>
-            <a:ext cx="3154680" cy="457200"/>
+          <p:cNvPr id="11" name="Text 9"/>
+          <p:cNvSpPr/>
+          <p:nvPr/>
+        </p:nvSpPr>
+        <p:spPr>
+          <a:xfrm>
+            <a:off x="4526280" y="1234440"/>
+            <a:ext cx="3200400" cy="320040"/>
           </a:xfrm>
           <a:prstGeom prst="rect">
             <a:avLst/>
@@ -8579,7 +9917,46 @@
               <a:buNone/>
             </a:pPr>
             <a:r>
-              <a:rPr lang="en-US" sz="2200" dirty="0">
+              <a:rPr lang="en-US" sz="1400" dirty="0">
+                <a:solidFill>
+                  <a:srgbClr val="B8432A"/>
+                </a:solidFill>
+                <a:latin typeface="Consolas" pitchFamily="34" charset="0"/>
+                <a:ea typeface="Consolas" pitchFamily="34" charset="-122"/>
+                <a:cs typeface="Consolas" pitchFamily="34" charset="-120"/>
+              </a:rPr>
+              <a:t>000011</a:t>
+            </a:r>
+            <a:endParaRPr lang="en-US" sz="1400" dirty="0"/>
+          </a:p>
+        </p:txBody>
+      </p:sp>
+      <p:sp>
+        <p:nvSpPr>
+          <p:cNvPr id="12" name="Text 10"/>
+          <p:cNvSpPr/>
+          <p:nvPr/>
+        </p:nvSpPr>
+        <p:spPr>
+          <a:xfrm>
+            <a:off x="4526280" y="1600200"/>
+            <a:ext cx="3200400" cy="411480"/>
+          </a:xfrm>
+          <a:prstGeom prst="rect">
+            <a:avLst/>
+          </a:prstGeom>
+          <a:noFill/>
+          <a:ln/>
+        </p:spPr>
+        <p:txBody>
+          <a:bodyPr wrap="square" lIns="0" tIns="0" rIns="0" bIns="0" rtlCol="0" anchor="ctr"/>
+          <a:lstStyle/>
+          <a:p>
+            <a:pPr indent="0" marL="0">
+              <a:buNone/>
+            </a:pPr>
+            <a:r>
+              <a:rPr lang="en-US" sz="2000" dirty="0">
                 <a:solidFill>
                   <a:srgbClr val="1A1A1A"/>
                 </a:solidFill>
@@ -8587,22 +9964,22 @@
                 <a:ea typeface="Georgia" pitchFamily="34" charset="-122"/>
                 <a:cs typeface="Georgia" pitchFamily="34" charset="-120"/>
               </a:rPr>
-              <a:t>Docker</a:t>
-            </a:r>
-            <a:endParaRPr lang="en-US" sz="2200" dirty="0"/>
-          </a:p>
-        </p:txBody>
-      </p:sp>
-      <p:sp>
-        <p:nvSpPr>
-          <p:cNvPr id="11" name="Text 9"/>
-          <p:cNvSpPr/>
-          <p:nvPr/>
-        </p:nvSpPr>
-        <p:spPr>
-          <a:xfrm>
-            <a:off x="4526280" y="2377440"/>
-            <a:ext cx="3154680" cy="2011680"/>
+              <a:t>Bịa đối tượng</a:t>
+            </a:r>
+            <a:endParaRPr lang="en-US" sz="2000" dirty="0"/>
+          </a:p>
+        </p:txBody>
+      </p:sp>
+      <p:sp>
+        <p:nvSpPr>
+          <p:cNvPr id="13" name="Text 11"/>
+          <p:cNvSpPr/>
+          <p:nvPr/>
+        </p:nvSpPr>
+        <p:spPr>
+          <a:xfrm>
+            <a:off x="4526280" y="2240280"/>
+            <a:ext cx="3200400" cy="1554480"/>
           </a:xfrm>
           <a:prstGeom prst="rect">
             <a:avLst/>
@@ -8622,14 +9999,36 @@
                 <a:solidFill>
                   <a:srgbClr val="2B2B2B"/>
                 </a:solidFill>
-                <a:latin typeface="Consolas" pitchFamily="34" charset="0"/>
-                <a:ea typeface="Consolas" pitchFamily="34" charset="-122"/>
-                <a:cs typeface="Consolas" pitchFamily="34" charset="-120"/>
-              </a:rPr>
-              <a:t>docker start vietnews-demo</a:t>
+                <a:latin typeface="Calibri" pitchFamily="34" charset="0"/>
+                <a:ea typeface="Calibri" pitchFamily="34" charset="-122"/>
+                <a:cs typeface="Calibri" pitchFamily="34" charset="-120"/>
+              </a:rPr>
+              <a:t>Gold: trộm máy ủi, bán, mua dây chuyền.</a:t>
             </a:r>
             <a:endParaRPr lang="en-US" sz="1500" dirty="0"/>
           </a:p>
+        </p:txBody>
+      </p:sp>
+      <p:sp>
+        <p:nvSpPr>
+          <p:cNvPr id="14" name="Text 12"/>
+          <p:cNvSpPr/>
+          <p:nvPr/>
+        </p:nvSpPr>
+        <p:spPr>
+          <a:xfrm>
+            <a:off x="4526280" y="3931920"/>
+            <a:ext cx="3200400" cy="1645920"/>
+          </a:xfrm>
+          <a:prstGeom prst="rect">
+            <a:avLst/>
+          </a:prstGeom>
+          <a:noFill/>
+          <a:ln/>
+        </p:spPr>
+        <p:txBody>
+          <a:bodyPr wrap="square" lIns="0" tIns="0" rIns="0" bIns="0" rtlCol="0" anchor="ctr"/>
+          <a:lstStyle/>
           <a:p>
             <a:pPr indent="0" marL="0">
               <a:buNone/>
@@ -8637,13 +10036,13 @@
             <a:r>
               <a:rPr lang="en-US" sz="1500" dirty="0">
                 <a:solidFill>
-                  <a:srgbClr val="2B2B2B"/>
-                </a:solidFill>
-                <a:latin typeface="Consolas" pitchFamily="34" charset="0"/>
-                <a:ea typeface="Consolas" pitchFamily="34" charset="-122"/>
-                <a:cs typeface="Consolas" pitchFamily="34" charset="-120"/>
-              </a:rPr>
-              <a:t>Cùng cổng 7860</a:t>
+                  <a:srgbClr val="B8432A"/>
+                </a:solidFill>
+                <a:latin typeface="Calibri" pitchFamily="34" charset="0"/>
+                <a:ea typeface="Calibri" pitchFamily="34" charset="-122"/>
+                <a:cs typeface="Calibri" pitchFamily="34" charset="-120"/>
+              </a:rPr>
+              <a:t>ViT5: “xe bồn”, thuê sửa chữa.</a:t>
             </a:r>
             <a:endParaRPr lang="en-US" sz="1500" dirty="0"/>
           </a:p>
@@ -8651,14 +10050,14 @@
       </p:sp>
       <p:sp>
         <p:nvSpPr>
-          <p:cNvPr id="12" name="Shape 10"/>
-          <p:cNvSpPr/>
-          <p:nvPr/>
-        </p:nvSpPr>
-        <p:spPr>
-          <a:xfrm>
-            <a:off x="8092440" y="1554480"/>
-            <a:ext cx="3611880" cy="3200400"/>
+          <p:cNvPr id="15" name="Shape 13"/>
+          <p:cNvSpPr/>
+          <p:nvPr/>
+        </p:nvSpPr>
+        <p:spPr>
+          <a:xfrm>
+            <a:off x="8138160" y="1051560"/>
+            <a:ext cx="3657600" cy="4892040"/>
           </a:xfrm>
           <a:prstGeom prst="rect">
             <a:avLst/>
@@ -8676,14 +10075,14 @@
       </p:sp>
       <p:sp>
         <p:nvSpPr>
-          <p:cNvPr id="13" name="Text 11"/>
-          <p:cNvSpPr/>
-          <p:nvPr/>
-        </p:nvSpPr>
-        <p:spPr>
-          <a:xfrm>
-            <a:off x="8321040" y="1783080"/>
-            <a:ext cx="3154680" cy="457200"/>
+          <p:cNvPr id="16" name="Text 14"/>
+          <p:cNvSpPr/>
+          <p:nvPr/>
+        </p:nvSpPr>
+        <p:spPr>
+          <a:xfrm>
+            <a:off x="8366760" y="1234440"/>
+            <a:ext cx="3200400" cy="320040"/>
           </a:xfrm>
           <a:prstGeom prst="rect">
             <a:avLst/>
@@ -8699,7 +10098,46 @@
               <a:buNone/>
             </a:pPr>
             <a:r>
-              <a:rPr lang="en-US" sz="2200" dirty="0">
+              <a:rPr lang="en-US" sz="1400" dirty="0">
+                <a:solidFill>
+                  <a:srgbClr val="B8432A"/>
+                </a:solidFill>
+                <a:latin typeface="Consolas" pitchFamily="34" charset="0"/>
+                <a:ea typeface="Consolas" pitchFamily="34" charset="-122"/>
+                <a:cs typeface="Consolas" pitchFamily="34" charset="-120"/>
+              </a:rPr>
+              <a:t>000036</a:t>
+            </a:r>
+            <a:endParaRPr lang="en-US" sz="1400" dirty="0"/>
+          </a:p>
+        </p:txBody>
+      </p:sp>
+      <p:sp>
+        <p:nvSpPr>
+          <p:cNvPr id="17" name="Text 15"/>
+          <p:cNvSpPr/>
+          <p:nvPr/>
+        </p:nvSpPr>
+        <p:spPr>
+          <a:xfrm>
+            <a:off x="8366760" y="1600200"/>
+            <a:ext cx="3200400" cy="411480"/>
+          </a:xfrm>
+          <a:prstGeom prst="rect">
+            <a:avLst/>
+          </a:prstGeom>
+          <a:noFill/>
+          <a:ln/>
+        </p:spPr>
+        <p:txBody>
+          <a:bodyPr wrap="square" lIns="0" tIns="0" rIns="0" bIns="0" rtlCol="0" anchor="ctr"/>
+          <a:lstStyle/>
+          <a:p>
+            <a:pPr indent="0" marL="0">
+              <a:buNone/>
+            </a:pPr>
+            <a:r>
+              <a:rPr lang="en-US" sz="2000" dirty="0">
                 <a:solidFill>
                   <a:srgbClr val="1A1A1A"/>
                 </a:solidFill>
@@ -8707,22 +10145,22 @@
                 <a:ea typeface="Georgia" pitchFamily="34" charset="-122"/>
                 <a:cs typeface="Georgia" pitchFamily="34" charset="-120"/>
               </a:rPr>
-              <a:t>Dữ liệu</a:t>
-            </a:r>
-            <a:endParaRPr lang="en-US" sz="2200" dirty="0"/>
-          </a:p>
-        </p:txBody>
-      </p:sp>
-      <p:sp>
-        <p:nvSpPr>
-          <p:cNvPr id="14" name="Text 12"/>
-          <p:cNvSpPr/>
-          <p:nvPr/>
-        </p:nvSpPr>
-        <p:spPr>
-          <a:xfrm>
-            <a:off x="8321040" y="2377440"/>
-            <a:ext cx="3154680" cy="2011680"/>
+              <a:t>Gán nhầm lời Dương</a:t>
+            </a:r>
+            <a:endParaRPr lang="en-US" sz="2000" dirty="0"/>
+          </a:p>
+        </p:txBody>
+      </p:sp>
+      <p:sp>
+        <p:nvSpPr>
+          <p:cNvPr id="18" name="Text 16"/>
+          <p:cNvSpPr/>
+          <p:nvPr/>
+        </p:nvSpPr>
+        <p:spPr>
+          <a:xfrm>
+            <a:off x="8366760" y="2240280"/>
+            <a:ext cx="3200400" cy="1554480"/>
           </a:xfrm>
           <a:prstGeom prst="rect">
             <a:avLst/>
@@ -8739,62 +10177,6 @@
             </a:pPr>
             <a:r>
               <a:rPr lang="en-US" sz="1500" dirty="0">
-                <a:solidFill>
-                  <a:srgbClr val="2B2B2B"/>
-                </a:solidFill>
-                <a:latin typeface="Consolas" pitchFamily="34" charset="0"/>
-                <a:ea typeface="Consolas" pitchFamily="34" charset="-122"/>
-                <a:cs typeface="Consolas" pitchFamily="34" charset="-120"/>
-              </a:rPr>
-              <a:t>preds.json có sẵn</a:t>
-            </a:r>
-            <a:endParaRPr lang="en-US" sz="1500" dirty="0"/>
-          </a:p>
-          <a:p>
-            <a:pPr indent="0" marL="0">
-              <a:buNone/>
-            </a:pPr>
-            <a:r>
-              <a:rPr lang="en-US" sz="1500" dirty="0">
-                <a:solidFill>
-                  <a:srgbClr val="2B2B2B"/>
-                </a:solidFill>
-                <a:latin typeface="Consolas" pitchFamily="34" charset="0"/>
-                <a:ea typeface="Consolas" pitchFamily="34" charset="-122"/>
-                <a:cs typeface="Consolas" pitchFamily="34" charset="-120"/>
-              </a:rPr>
-              <a:t>Lead-3 / TextRank tính lúc chọn bài</a:t>
-            </a:r>
-            <a:endParaRPr lang="en-US" sz="1500" dirty="0"/>
-          </a:p>
-        </p:txBody>
-      </p:sp>
-      <p:sp>
-        <p:nvSpPr>
-          <p:cNvPr id="15" name="Text 13"/>
-          <p:cNvSpPr/>
-          <p:nvPr/>
-        </p:nvSpPr>
-        <p:spPr>
-          <a:xfrm>
-            <a:off x="502920" y="4983480"/>
-            <a:ext cx="11155680" cy="640080"/>
-          </a:xfrm>
-          <a:prstGeom prst="rect">
-            <a:avLst/>
-          </a:prstGeom>
-          <a:noFill/>
-          <a:ln/>
-        </p:spPr>
-        <p:txBody>
-          <a:bodyPr wrap="square" lIns="0" tIns="0" rIns="0" bIns="0" rtlCol="0" anchor="ctr"/>
-          <a:lstStyle/>
-          <a:p>
-            <a:pPr indent="0" marL="0">
-              <a:buNone/>
-            </a:pPr>
-            <a:r>
-              <a:rPr lang="en-US" sz="1600" dirty="0">
                 <a:solidFill>
                   <a:srgbClr val="2B2B2B"/>
                 </a:solidFill>
@@ -8802,22 +10184,22 @@
                 <a:ea typeface="Calibri" pitchFamily="34" charset="-122"/>
                 <a:cs typeface="Calibri" pitchFamily="34" charset="-120"/>
               </a:rPr>
-              <a:t>Quay video 2 phút dự phòng nếu máy phòng máy không có Docker.</a:t>
-            </a:r>
-            <a:endParaRPr lang="en-US" sz="1600" dirty="0"/>
-          </a:p>
-        </p:txBody>
-      </p:sp>
-      <p:sp>
-        <p:nvSpPr>
-          <p:cNvPr id="16" name="Text 14"/>
-          <p:cNvSpPr/>
-          <p:nvPr/>
-        </p:nvSpPr>
-        <p:spPr>
-          <a:xfrm>
-            <a:off x="502920" y="6510528"/>
-            <a:ext cx="8229600" cy="201168"/>
+              <a:t>Gold: Vĩnh chối Rolex 7.000 USD.</a:t>
+            </a:r>
+            <a:endParaRPr lang="en-US" sz="1500" dirty="0"/>
+          </a:p>
+        </p:txBody>
+      </p:sp>
+      <p:sp>
+        <p:nvSpPr>
+          <p:cNvPr id="19" name="Text 17"/>
+          <p:cNvSpPr/>
+          <p:nvPr/>
+        </p:nvSpPr>
+        <p:spPr>
+          <a:xfrm>
+            <a:off x="8366760" y="3931920"/>
+            <a:ext cx="3200400" cy="1645920"/>
           </a:xfrm>
           <a:prstGeom prst="rect">
             <a:avLst/>
@@ -8833,54 +10215,93 @@
               <a:buNone/>
             </a:pPr>
             <a:r>
-              <a:rPr lang="en-US" sz="1000" dirty="0">
-                <a:solidFill>
-                  <a:srgbClr val="B5AFA0"/>
+              <a:rPr lang="en-US" sz="1500" dirty="0">
+                <a:solidFill>
+                  <a:srgbClr val="B8432A"/>
                 </a:solidFill>
                 <a:latin typeface="Calibri" pitchFamily="34" charset="0"/>
                 <a:ea typeface="Calibri" pitchFamily="34" charset="-122"/>
                 <a:cs typeface="Calibri" pitchFamily="34" charset="-120"/>
               </a:rPr>
-              <a:t>CS221 · UIT  ·  Vietnews extractive vs abstractive</a:t>
-            </a:r>
-            <a:endParaRPr lang="en-US" sz="1000" dirty="0"/>
-          </a:p>
-        </p:txBody>
-      </p:sp>
-      <p:sp>
-        <p:nvSpPr>
-          <p:cNvPr id="17" name="Text 15"/>
-          <p:cNvSpPr/>
-          <p:nvPr/>
-        </p:nvSpPr>
-        <p:spPr>
-          <a:xfrm>
-            <a:off x="11094415" y="6510528"/>
-            <a:ext cx="594360" cy="201168"/>
-          </a:xfrm>
-          <a:prstGeom prst="rect">
-            <a:avLst/>
-          </a:prstGeom>
-          <a:noFill/>
-          <a:ln/>
-        </p:spPr>
-        <p:txBody>
-          <a:bodyPr wrap="square" lIns="0" tIns="0" rIns="0" bIns="0" rtlCol="0" anchor="ctr"/>
-          <a:lstStyle/>
-          <a:p>
-            <a:pPr algn="r" indent="0" marL="0">
+              <a:t>ViT5: Vĩnh “khai cho ông Vĩnh” 27 tỷ.</a:t>
+            </a:r>
+            <a:endParaRPr lang="en-US" sz="1500" dirty="0"/>
+          </a:p>
+        </p:txBody>
+      </p:sp>
+      <p:sp>
+        <p:nvSpPr>
+          <p:cNvPr id="20" name="Text 18"/>
+          <p:cNvSpPr/>
+          <p:nvPr/>
+        </p:nvSpPr>
+        <p:spPr>
+          <a:xfrm>
+            <a:off x="502920" y="6510528"/>
+            <a:ext cx="8229600" cy="201168"/>
+          </a:xfrm>
+          <a:prstGeom prst="rect">
+            <a:avLst/>
+          </a:prstGeom>
+          <a:noFill/>
+          <a:ln/>
+        </p:spPr>
+        <p:txBody>
+          <a:bodyPr wrap="square" lIns="0" tIns="0" rIns="0" bIns="0" rtlCol="0" anchor="ctr"/>
+          <a:lstStyle/>
+          <a:p>
+            <a:pPr indent="0" marL="0">
               <a:buNone/>
             </a:pPr>
             <a:r>
               <a:rPr lang="en-US" sz="1000" dirty="0">
                 <a:solidFill>
-                  <a:srgbClr val="8A8578"/>
+                  <a:srgbClr val="B5AFA0"/>
                 </a:solidFill>
                 <a:latin typeface="Calibri" pitchFamily="34" charset="0"/>
                 <a:ea typeface="Calibri" pitchFamily="34" charset="-122"/>
                 <a:cs typeface="Calibri" pitchFamily="34" charset="-120"/>
               </a:rPr>
-              <a:t>15</a:t>
+              <a:t>CS221 · UIT  ·  Vietnews extractive vs abstractive</a:t>
+            </a:r>
+            <a:endParaRPr lang="en-US" sz="1000" dirty="0"/>
+          </a:p>
+        </p:txBody>
+      </p:sp>
+      <p:sp>
+        <p:nvSpPr>
+          <p:cNvPr id="21" name="Text 19"/>
+          <p:cNvSpPr/>
+          <p:nvPr/>
+        </p:nvSpPr>
+        <p:spPr>
+          <a:xfrm>
+            <a:off x="11094415" y="6510528"/>
+            <a:ext cx="594360" cy="201168"/>
+          </a:xfrm>
+          <a:prstGeom prst="rect">
+            <a:avLst/>
+          </a:prstGeom>
+          <a:noFill/>
+          <a:ln/>
+        </p:spPr>
+        <p:txBody>
+          <a:bodyPr wrap="square" lIns="0" tIns="0" rIns="0" bIns="0" rtlCol="0" anchor="ctr"/>
+          <a:lstStyle/>
+          <a:p>
+            <a:pPr algn="r" indent="0" marL="0">
+              <a:buNone/>
+            </a:pPr>
+            <a:r>
+              <a:rPr lang="en-US" sz="1000" dirty="0">
+                <a:solidFill>
+                  <a:srgbClr val="8A8578"/>
+                </a:solidFill>
+                <a:latin typeface="Calibri" pitchFamily="34" charset="0"/>
+                <a:ea typeface="Calibri" pitchFamily="34" charset="-122"/>
+                <a:cs typeface="Calibri" pitchFamily="34" charset="-120"/>
+              </a:rPr>
+              <a:t>14</a:t>
             </a:r>
             <a:endParaRPr lang="en-US" sz="1000" dirty="0"/>
           </a:p>
@@ -8951,7 +10372,7 @@
                 <a:ea typeface="Calibri" pitchFamily="34" charset="-122"/>
                 <a:cs typeface="Calibri" pitchFamily="34" charset="-120"/>
               </a:rPr>
-              <a:t>14  KẾT LUẬN</a:t>
+              <a:t>13  DEMO</a:t>
             </a:r>
             <a:endParaRPr lang="en-US" sz="1100" dirty="0"/>
           </a:p>
@@ -8990,7 +10411,7 @@
                 <a:ea typeface="Calibri" pitchFamily="34" charset="-122"/>
                 <a:cs typeface="Calibri" pitchFamily="34" charset="-120"/>
               </a:rPr>
-              <a:t>Hạn chế</a:t>
+              <a:t>Không cần GPU lúc bảo vệ</a:t>
             </a:r>
             <a:endParaRPr lang="en-US" sz="1200" dirty="0"/>
           </a:p>
@@ -9021,14 +10442,53 @@
       </p:sp>
       <p:sp>
         <p:nvSpPr>
-          <p:cNvPr id="5" name="Shape 3"/>
-          <p:cNvSpPr/>
-          <p:nvPr/>
-        </p:nvSpPr>
-        <p:spPr>
-          <a:xfrm>
-            <a:off x="502920" y="1005840"/>
-            <a:ext cx="5577840" cy="4937760"/>
+          <p:cNvPr id="5" name="Text 3"/>
+          <p:cNvSpPr/>
+          <p:nvPr/>
+        </p:nvSpPr>
+        <p:spPr>
+          <a:xfrm>
+            <a:off x="502920" y="914400"/>
+            <a:ext cx="10972800" cy="411480"/>
+          </a:xfrm>
+          <a:prstGeom prst="rect">
+            <a:avLst/>
+          </a:prstGeom>
+          <a:noFill/>
+          <a:ln/>
+        </p:spPr>
+        <p:txBody>
+          <a:bodyPr wrap="square" lIns="0" tIns="0" rIns="0" bIns="0" rtlCol="0" anchor="ctr"/>
+          <a:lstStyle/>
+          <a:p>
+            <a:pPr indent="0" marL="0">
+              <a:buNone/>
+            </a:pPr>
+            <a:r>
+              <a:rPr lang="en-US" sz="2600" dirty="0">
+                <a:solidFill>
+                  <a:srgbClr val="1A1A1A"/>
+                </a:solidFill>
+                <a:latin typeface="Georgia" pitchFamily="34" charset="0"/>
+                <a:ea typeface="Georgia" pitchFamily="34" charset="-122"/>
+                <a:cs typeface="Georgia" pitchFamily="34" charset="-120"/>
+              </a:rPr>
+              <a:t>Ba cột trên cùng một bài test.</a:t>
+            </a:r>
+            <a:endParaRPr lang="en-US" sz="2600" dirty="0"/>
+          </a:p>
+        </p:txBody>
+      </p:sp>
+      <p:sp>
+        <p:nvSpPr>
+          <p:cNvPr id="6" name="Shape 4"/>
+          <p:cNvSpPr/>
+          <p:nvPr/>
+        </p:nvSpPr>
+        <p:spPr>
+          <a:xfrm>
+            <a:off x="502920" y="1554480"/>
+            <a:ext cx="3611880" cy="3200400"/>
           </a:xfrm>
           <a:prstGeom prst="rect">
             <a:avLst/>
@@ -9046,20 +10506,115 @@
       </p:sp>
       <p:sp>
         <p:nvSpPr>
-          <p:cNvPr id="6" name="Shape 4"/>
-          <p:cNvSpPr/>
-          <p:nvPr/>
-        </p:nvSpPr>
-        <p:spPr>
-          <a:xfrm>
-            <a:off x="6263640" y="1005840"/>
-            <a:ext cx="5394960" cy="4937760"/>
+          <p:cNvPr id="7" name="Text 5"/>
+          <p:cNvSpPr/>
+          <p:nvPr/>
+        </p:nvSpPr>
+        <p:spPr>
+          <a:xfrm>
+            <a:off x="731520" y="1783080"/>
+            <a:ext cx="3154680" cy="457200"/>
+          </a:xfrm>
+          <a:prstGeom prst="rect">
+            <a:avLst/>
+          </a:prstGeom>
+          <a:noFill/>
+          <a:ln/>
+        </p:spPr>
+        <p:txBody>
+          <a:bodyPr wrap="square" lIns="0" tIns="0" rIns="0" bIns="0" rtlCol="0" anchor="ctr"/>
+          <a:lstStyle/>
+          <a:p>
+            <a:pPr indent="0" marL="0">
+              <a:buNone/>
+            </a:pPr>
+            <a:r>
+              <a:rPr lang="en-US" sz="2200" dirty="0">
+                <a:solidFill>
+                  <a:srgbClr val="1A1A1A"/>
+                </a:solidFill>
+                <a:latin typeface="Georgia" pitchFamily="34" charset="0"/>
+                <a:ea typeface="Georgia" pitchFamily="34" charset="-122"/>
+                <a:cs typeface="Georgia" pitchFamily="34" charset="-120"/>
+              </a:rPr>
+              <a:t>Local</a:t>
+            </a:r>
+            <a:endParaRPr lang="en-US" sz="2200" dirty="0"/>
+          </a:p>
+        </p:txBody>
+      </p:sp>
+      <p:sp>
+        <p:nvSpPr>
+          <p:cNvPr id="8" name="Text 6"/>
+          <p:cNvSpPr/>
+          <p:nvPr/>
+        </p:nvSpPr>
+        <p:spPr>
+          <a:xfrm>
+            <a:off x="731520" y="2377440"/>
+            <a:ext cx="3154680" cy="2011680"/>
+          </a:xfrm>
+          <a:prstGeom prst="rect">
+            <a:avLst/>
+          </a:prstGeom>
+          <a:noFill/>
+          <a:ln/>
+        </p:spPr>
+        <p:txBody>
+          <a:bodyPr wrap="square" lIns="0" tIns="0" rIns="0" bIns="0" rtlCol="0" anchor="ctr"/>
+          <a:lstStyle/>
+          <a:p>
+            <a:pPr indent="0" marL="0">
+              <a:buNone/>
+            </a:pPr>
+            <a:r>
+              <a:rPr lang="en-US" sz="1500" dirty="0">
+                <a:solidFill>
+                  <a:srgbClr val="2B2B2B"/>
+                </a:solidFill>
+                <a:latin typeface="Consolas" pitchFamily="34" charset="0"/>
+                <a:ea typeface="Consolas" pitchFamily="34" charset="-122"/>
+                <a:cs typeface="Consolas" pitchFamily="34" charset="-120"/>
+              </a:rPr>
+              <a:t>python app/demo.py</a:t>
+            </a:r>
+            <a:endParaRPr lang="en-US" sz="1500" dirty="0"/>
+          </a:p>
+          <a:p>
+            <a:pPr indent="0" marL="0">
+              <a:buNone/>
+            </a:pPr>
+            <a:r>
+              <a:rPr lang="en-US" sz="1500" dirty="0">
+                <a:solidFill>
+                  <a:srgbClr val="2B2B2B"/>
+                </a:solidFill>
+                <a:latin typeface="Consolas" pitchFamily="34" charset="0"/>
+                <a:ea typeface="Consolas" pitchFamily="34" charset="-122"/>
+                <a:cs typeface="Consolas" pitchFamily="34" charset="-120"/>
+              </a:rPr>
+              <a:t>http://127.0.0.1:7860</a:t>
+            </a:r>
+            <a:endParaRPr lang="en-US" sz="1500" dirty="0"/>
+          </a:p>
+        </p:txBody>
+      </p:sp>
+      <p:sp>
+        <p:nvSpPr>
+          <p:cNvPr id="9" name="Shape 7"/>
+          <p:cNvSpPr/>
+          <p:nvPr/>
+        </p:nvSpPr>
+        <p:spPr>
+          <a:xfrm>
+            <a:off x="4297680" y="1554480"/>
+            <a:ext cx="3611880" cy="3200400"/>
           </a:xfrm>
           <a:prstGeom prst="rect">
             <a:avLst/>
           </a:prstGeom>
           <a:solidFill>
-            <a:srgbClr val="F2E5D0"/>
+            <a:srgbClr val="F7F3E8"/>
           </a:solidFill>
           <a:ln w="9525">
             <a:solidFill>
@@ -9071,14 +10626,14 @@
       </p:sp>
       <p:sp>
         <p:nvSpPr>
-          <p:cNvPr id="7" name="Text 5"/>
-          <p:cNvSpPr/>
-          <p:nvPr/>
-        </p:nvSpPr>
-        <p:spPr>
-          <a:xfrm>
-            <a:off x="731520" y="1188720"/>
-            <a:ext cx="5120640" cy="365760"/>
+          <p:cNvPr id="10" name="Text 8"/>
+          <p:cNvSpPr/>
+          <p:nvPr/>
+        </p:nvSpPr>
+        <p:spPr>
+          <a:xfrm>
+            <a:off x="4526280" y="1783080"/>
+            <a:ext cx="3154680" cy="457200"/>
           </a:xfrm>
           <a:prstGeom prst="rect">
             <a:avLst/>
@@ -9094,30 +10649,245 @@
               <a:buNone/>
             </a:pPr>
             <a:r>
-              <a:rPr lang="en-US" sz="1400" dirty="0">
-                <a:solidFill>
-                  <a:srgbClr val="B8432A"/>
+              <a:rPr lang="en-US" sz="2200" dirty="0">
+                <a:solidFill>
+                  <a:srgbClr val="1A1A1A"/>
+                </a:solidFill>
+                <a:latin typeface="Georgia" pitchFamily="34" charset="0"/>
+                <a:ea typeface="Georgia" pitchFamily="34" charset="-122"/>
+                <a:cs typeface="Georgia" pitchFamily="34" charset="-120"/>
+              </a:rPr>
+              <a:t>Docker</a:t>
+            </a:r>
+            <a:endParaRPr lang="en-US" sz="2200" dirty="0"/>
+          </a:p>
+        </p:txBody>
+      </p:sp>
+      <p:sp>
+        <p:nvSpPr>
+          <p:cNvPr id="11" name="Text 9"/>
+          <p:cNvSpPr/>
+          <p:nvPr/>
+        </p:nvSpPr>
+        <p:spPr>
+          <a:xfrm>
+            <a:off x="4526280" y="2377440"/>
+            <a:ext cx="3154680" cy="2011680"/>
+          </a:xfrm>
+          <a:prstGeom prst="rect">
+            <a:avLst/>
+          </a:prstGeom>
+          <a:noFill/>
+          <a:ln/>
+        </p:spPr>
+        <p:txBody>
+          <a:bodyPr wrap="square" lIns="0" tIns="0" rIns="0" bIns="0" rtlCol="0" anchor="ctr"/>
+          <a:lstStyle/>
+          <a:p>
+            <a:pPr indent="0" marL="0">
+              <a:buNone/>
+            </a:pPr>
+            <a:r>
+              <a:rPr lang="en-US" sz="1500" dirty="0">
+                <a:solidFill>
+                  <a:srgbClr val="2B2B2B"/>
+                </a:solidFill>
+                <a:latin typeface="Consolas" pitchFamily="34" charset="0"/>
+                <a:ea typeface="Consolas" pitchFamily="34" charset="-122"/>
+                <a:cs typeface="Consolas" pitchFamily="34" charset="-120"/>
+              </a:rPr>
+              <a:t>docker start vietnews-demo</a:t>
+            </a:r>
+            <a:endParaRPr lang="en-US" sz="1500" dirty="0"/>
+          </a:p>
+          <a:p>
+            <a:pPr indent="0" marL="0">
+              <a:buNone/>
+            </a:pPr>
+            <a:r>
+              <a:rPr lang="en-US" sz="1500" dirty="0">
+                <a:solidFill>
+                  <a:srgbClr val="2B2B2B"/>
+                </a:solidFill>
+                <a:latin typeface="Consolas" pitchFamily="34" charset="0"/>
+                <a:ea typeface="Consolas" pitchFamily="34" charset="-122"/>
+                <a:cs typeface="Consolas" pitchFamily="34" charset="-120"/>
+              </a:rPr>
+              <a:t>Cùng cổng 7860</a:t>
+            </a:r>
+            <a:endParaRPr lang="en-US" sz="1500" dirty="0"/>
+          </a:p>
+        </p:txBody>
+      </p:sp>
+      <p:sp>
+        <p:nvSpPr>
+          <p:cNvPr id="12" name="Shape 10"/>
+          <p:cNvSpPr/>
+          <p:nvPr/>
+        </p:nvSpPr>
+        <p:spPr>
+          <a:xfrm>
+            <a:off x="8092440" y="1554480"/>
+            <a:ext cx="3611880" cy="3200400"/>
+          </a:xfrm>
+          <a:prstGeom prst="rect">
+            <a:avLst/>
+          </a:prstGeom>
+          <a:solidFill>
+            <a:srgbClr val="F7F3E8"/>
+          </a:solidFill>
+          <a:ln w="9525">
+            <a:solidFill>
+              <a:srgbClr val="C8C0AE"/>
+            </a:solidFill>
+            <a:prstDash val="solid"/>
+          </a:ln>
+        </p:spPr>
+      </p:sp>
+      <p:sp>
+        <p:nvSpPr>
+          <p:cNvPr id="13" name="Text 11"/>
+          <p:cNvSpPr/>
+          <p:nvPr/>
+        </p:nvSpPr>
+        <p:spPr>
+          <a:xfrm>
+            <a:off x="8321040" y="1783080"/>
+            <a:ext cx="3154680" cy="457200"/>
+          </a:xfrm>
+          <a:prstGeom prst="rect">
+            <a:avLst/>
+          </a:prstGeom>
+          <a:noFill/>
+          <a:ln/>
+        </p:spPr>
+        <p:txBody>
+          <a:bodyPr wrap="square" lIns="0" tIns="0" rIns="0" bIns="0" rtlCol="0" anchor="ctr"/>
+          <a:lstStyle/>
+          <a:p>
+            <a:pPr indent="0" marL="0">
+              <a:buNone/>
+            </a:pPr>
+            <a:r>
+              <a:rPr lang="en-US" sz="2200" dirty="0">
+                <a:solidFill>
+                  <a:srgbClr val="1A1A1A"/>
+                </a:solidFill>
+                <a:latin typeface="Georgia" pitchFamily="34" charset="0"/>
+                <a:ea typeface="Georgia" pitchFamily="34" charset="-122"/>
+                <a:cs typeface="Georgia" pitchFamily="34" charset="-120"/>
+              </a:rPr>
+              <a:t>Dữ liệu</a:t>
+            </a:r>
+            <a:endParaRPr lang="en-US" sz="2200" dirty="0"/>
+          </a:p>
+        </p:txBody>
+      </p:sp>
+      <p:sp>
+        <p:nvSpPr>
+          <p:cNvPr id="14" name="Text 12"/>
+          <p:cNvSpPr/>
+          <p:nvPr/>
+        </p:nvSpPr>
+        <p:spPr>
+          <a:xfrm>
+            <a:off x="8321040" y="2377440"/>
+            <a:ext cx="3154680" cy="2011680"/>
+          </a:xfrm>
+          <a:prstGeom prst="rect">
+            <a:avLst/>
+          </a:prstGeom>
+          <a:noFill/>
+          <a:ln/>
+        </p:spPr>
+        <p:txBody>
+          <a:bodyPr wrap="square" lIns="0" tIns="0" rIns="0" bIns="0" rtlCol="0" anchor="ctr"/>
+          <a:lstStyle/>
+          <a:p>
+            <a:pPr indent="0" marL="0">
+              <a:buNone/>
+            </a:pPr>
+            <a:r>
+              <a:rPr lang="en-US" sz="1500" dirty="0">
+                <a:solidFill>
+                  <a:srgbClr val="2B2B2B"/>
+                </a:solidFill>
+                <a:latin typeface="Consolas" pitchFamily="34" charset="0"/>
+                <a:ea typeface="Consolas" pitchFamily="34" charset="-122"/>
+                <a:cs typeface="Consolas" pitchFamily="34" charset="-120"/>
+              </a:rPr>
+              <a:t>preds.json có sẵn</a:t>
+            </a:r>
+            <a:endParaRPr lang="en-US" sz="1500" dirty="0"/>
+          </a:p>
+          <a:p>
+            <a:pPr indent="0" marL="0">
+              <a:buNone/>
+            </a:pPr>
+            <a:r>
+              <a:rPr lang="en-US" sz="1500" dirty="0">
+                <a:solidFill>
+                  <a:srgbClr val="2B2B2B"/>
+                </a:solidFill>
+                <a:latin typeface="Consolas" pitchFamily="34" charset="0"/>
+                <a:ea typeface="Consolas" pitchFamily="34" charset="-122"/>
+                <a:cs typeface="Consolas" pitchFamily="34" charset="-120"/>
+              </a:rPr>
+              <a:t>Lead-3 / TextRank tính lúc chọn bài</a:t>
+            </a:r>
+            <a:endParaRPr lang="en-US" sz="1500" dirty="0"/>
+          </a:p>
+        </p:txBody>
+      </p:sp>
+      <p:sp>
+        <p:nvSpPr>
+          <p:cNvPr id="15" name="Text 13"/>
+          <p:cNvSpPr/>
+          <p:nvPr/>
+        </p:nvSpPr>
+        <p:spPr>
+          <a:xfrm>
+            <a:off x="502920" y="4983480"/>
+            <a:ext cx="11155680" cy="640080"/>
+          </a:xfrm>
+          <a:prstGeom prst="rect">
+            <a:avLst/>
+          </a:prstGeom>
+          <a:noFill/>
+          <a:ln/>
+        </p:spPr>
+        <p:txBody>
+          <a:bodyPr wrap="square" lIns="0" tIns="0" rIns="0" bIns="0" rtlCol="0" anchor="ctr"/>
+          <a:lstStyle/>
+          <a:p>
+            <a:pPr indent="0" marL="0">
+              <a:buNone/>
+            </a:pPr>
+            <a:r>
+              <a:rPr lang="en-US" sz="1600" dirty="0">
+                <a:solidFill>
+                  <a:srgbClr val="2B2B2B"/>
                 </a:solidFill>
                 <a:latin typeface="Calibri" pitchFamily="34" charset="0"/>
                 <a:ea typeface="Calibri" pitchFamily="34" charset="-122"/>
                 <a:cs typeface="Calibri" pitchFamily="34" charset="-120"/>
               </a:rPr>
-              <a:t>Nhận được</a:t>
-            </a:r>
-            <a:endParaRPr lang="en-US" sz="1400" dirty="0"/>
-          </a:p>
-        </p:txBody>
-      </p:sp>
-      <p:sp>
-        <p:nvSpPr>
-          <p:cNvPr id="8" name="Text 6"/>
-          <p:cNvSpPr/>
-          <p:nvPr/>
-        </p:nvSpPr>
-        <p:spPr>
-          <a:xfrm>
-            <a:off x="731520" y="1691640"/>
-            <a:ext cx="5074920" cy="1143000"/>
+              <a:t>Quay video 2 phút dự phòng nếu máy phòng máy không có Docker.</a:t>
+            </a:r>
+            <a:endParaRPr lang="en-US" sz="1600" dirty="0"/>
+          </a:p>
+        </p:txBody>
+      </p:sp>
+      <p:sp>
+        <p:nvSpPr>
+          <p:cNvPr id="16" name="Text 14"/>
+          <p:cNvSpPr/>
+          <p:nvPr/>
+        </p:nvSpPr>
+        <p:spPr>
+          <a:xfrm>
+            <a:off x="502920" y="6510528"/>
+            <a:ext cx="8229600" cy="201168"/>
           </a:xfrm>
           <a:prstGeom prst="rect">
             <a:avLst/>
@@ -9133,366 +10903,54 @@
               <a:buNone/>
             </a:pPr>
             <a:r>
-              <a:rPr lang="en-US" sz="1500" dirty="0">
-                <a:solidFill>
-                  <a:srgbClr val="2B2B2B"/>
+              <a:rPr lang="en-US" sz="1000" dirty="0">
+                <a:solidFill>
+                  <a:srgbClr val="B5AFA0"/>
                 </a:solidFill>
                 <a:latin typeface="Calibri" pitchFamily="34" charset="0"/>
                 <a:ea typeface="Calibri" pitchFamily="34" charset="-122"/>
                 <a:cs typeface="Calibri" pitchFamily="34" charset="-120"/>
               </a:rPr>
-              <a:t>Trên 100 bài test đầu Vietnews, ViT5 ROUGE-1/2/L cao hơn Lead-3 và TextRank một chút.</a:t>
-            </a:r>
-            <a:endParaRPr lang="en-US" sz="1500" dirty="0"/>
-          </a:p>
-        </p:txBody>
-      </p:sp>
-      <p:sp>
-        <p:nvSpPr>
-          <p:cNvPr id="9" name="Text 7"/>
-          <p:cNvSpPr/>
-          <p:nvPr/>
-        </p:nvSpPr>
-        <p:spPr>
-          <a:xfrm>
-            <a:off x="731520" y="2926080"/>
-            <a:ext cx="5074920" cy="1143000"/>
-          </a:xfrm>
-          <a:prstGeom prst="rect">
-            <a:avLst/>
-          </a:prstGeom>
-          <a:noFill/>
-          <a:ln/>
-        </p:spPr>
-        <p:txBody>
-          <a:bodyPr wrap="square" lIns="0" tIns="0" rIns="0" bIns="0" rtlCol="0" anchor="ctr"/>
-          <a:lstStyle/>
-          <a:p>
-            <a:pPr indent="0" marL="0">
-              <a:buNone/>
-            </a:pPr>
-            <a:r>
-              <a:rPr lang="en-US" sz="1500" dirty="0">
-                <a:solidFill>
-                  <a:srgbClr val="2B2B2B"/>
+              <a:t>CS221 · UIT  ·  Vietnews extractive vs abstractive</a:t>
+            </a:r>
+            <a:endParaRPr lang="en-US" sz="1000" dirty="0"/>
+          </a:p>
+        </p:txBody>
+      </p:sp>
+      <p:sp>
+        <p:nvSpPr>
+          <p:cNvPr id="17" name="Text 15"/>
+          <p:cNvSpPr/>
+          <p:nvPr/>
+        </p:nvSpPr>
+        <p:spPr>
+          <a:xfrm>
+            <a:off x="11094415" y="6510528"/>
+            <a:ext cx="594360" cy="201168"/>
+          </a:xfrm>
+          <a:prstGeom prst="rect">
+            <a:avLst/>
+          </a:prstGeom>
+          <a:noFill/>
+          <a:ln/>
+        </p:spPr>
+        <p:txBody>
+          <a:bodyPr wrap="square" lIns="0" tIns="0" rIns="0" bIns="0" rtlCol="0" anchor="ctr"/>
+          <a:lstStyle/>
+          <a:p>
+            <a:pPr algn="r" indent="0" marL="0">
+              <a:buNone/>
+            </a:pPr>
+            <a:r>
+              <a:rPr lang="en-US" sz="1000" dirty="0">
+                <a:solidFill>
+                  <a:srgbClr val="8A8578"/>
                 </a:solidFill>
                 <a:latin typeface="Calibri" pitchFamily="34" charset="0"/>
                 <a:ea typeface="Calibri" pitchFamily="34" charset="-122"/>
                 <a:cs typeface="Calibri" pitchFamily="34" charset="-120"/>
               </a:rPr>
-              <a:t>Đọc tay 20 bài: ViT5 vẫn sai tên, đảo ý, bịa chi tiết — ROUGE không thay cho đối chiếu gold.</a:t>
-            </a:r>
-            <a:endParaRPr lang="en-US" sz="1500" dirty="0"/>
-          </a:p>
-        </p:txBody>
-      </p:sp>
-      <p:sp>
-        <p:nvSpPr>
-          <p:cNvPr id="10" name="Text 8"/>
-          <p:cNvSpPr/>
-          <p:nvPr/>
-        </p:nvSpPr>
-        <p:spPr>
-          <a:xfrm>
-            <a:off x="731520" y="4160520"/>
-            <a:ext cx="5074920" cy="1143000"/>
-          </a:xfrm>
-          <a:prstGeom prst="rect">
-            <a:avLst/>
-          </a:prstGeom>
-          <a:noFill/>
-          <a:ln/>
-        </p:spPr>
-        <p:txBody>
-          <a:bodyPr wrap="square" lIns="0" tIns="0" rIns="0" bIns="0" rtlCol="0" anchor="ctr"/>
-          <a:lstStyle/>
-          <a:p>
-            <a:pPr indent="0" marL="0">
-              <a:buNone/>
-            </a:pPr>
-            <a:r>
-              <a:rPr lang="en-US" sz="1500" dirty="0">
-                <a:solidFill>
-                  <a:srgbClr val="2B2B2B"/>
-                </a:solidFill>
-                <a:latin typeface="Calibri" pitchFamily="34" charset="0"/>
-                <a:ea typeface="Calibri" pitchFamily="34" charset="-122"/>
-                <a:cs typeface="Calibri" pitchFamily="34" charset="-120"/>
-              </a:rPr>
-              <a:t>Lead-3 an toàn về chữ (lấy từ bài) nhưng hay lệch sapo.</a:t>
-            </a:r>
-            <a:endParaRPr lang="en-US" sz="1500" dirty="0"/>
-          </a:p>
-        </p:txBody>
-      </p:sp>
-      <p:sp>
-        <p:nvSpPr>
-          <p:cNvPr id="11" name="Text 9"/>
-          <p:cNvSpPr/>
-          <p:nvPr/>
-        </p:nvSpPr>
-        <p:spPr>
-          <a:xfrm>
-            <a:off x="6492240" y="1188720"/>
-            <a:ext cx="4937760" cy="365760"/>
-          </a:xfrm>
-          <a:prstGeom prst="rect">
-            <a:avLst/>
-          </a:prstGeom>
-          <a:noFill/>
-          <a:ln/>
-        </p:spPr>
-        <p:txBody>
-          <a:bodyPr wrap="square" lIns="0" tIns="0" rIns="0" bIns="0" rtlCol="0" anchor="ctr"/>
-          <a:lstStyle/>
-          <a:p>
-            <a:pPr indent="0" marL="0">
-              <a:buNone/>
-            </a:pPr>
-            <a:r>
-              <a:rPr lang="en-US" sz="1400" dirty="0">
-                <a:solidFill>
-                  <a:srgbClr val="B8432A"/>
-                </a:solidFill>
-                <a:latin typeface="Calibri" pitchFamily="34" charset="0"/>
-                <a:ea typeface="Calibri" pitchFamily="34" charset="-122"/>
-                <a:cs typeface="Calibri" pitchFamily="34" charset="-120"/>
-              </a:rPr>
-              <a:t>Không nhận</a:t>
-            </a:r>
-            <a:endParaRPr lang="en-US" sz="1400" dirty="0"/>
-          </a:p>
-        </p:txBody>
-      </p:sp>
-      <p:sp>
-        <p:nvSpPr>
-          <p:cNvPr id="12" name="Text 10"/>
-          <p:cNvSpPr/>
-          <p:nvPr/>
-        </p:nvSpPr>
-        <p:spPr>
-          <a:xfrm>
-            <a:off x="6492240" y="1691640"/>
-            <a:ext cx="4937760" cy="868680"/>
-          </a:xfrm>
-          <a:prstGeom prst="rect">
-            <a:avLst/>
-          </a:prstGeom>
-          <a:noFill/>
-          <a:ln/>
-        </p:spPr>
-        <p:txBody>
-          <a:bodyPr wrap="square" lIns="0" tIns="0" rIns="0" bIns="0" rtlCol="0" anchor="ctr"/>
-          <a:lstStyle/>
-          <a:p>
-            <a:pPr indent="0" marL="0">
-              <a:buNone/>
-            </a:pPr>
-            <a:r>
-              <a:rPr lang="en-US" sz="1500" dirty="0">
-                <a:solidFill>
-                  <a:srgbClr val="2B2B2B"/>
-                </a:solidFill>
-                <a:latin typeface="Calibri" pitchFamily="34" charset="0"/>
-                <a:ea typeface="Calibri" pitchFamily="34" charset="-122"/>
-                <a:cs typeface="Calibri" pitchFamily="34" charset="-120"/>
-              </a:rPr>
-              <a:t>Chỉ 100 bài, không phải full test gốc paper.</a:t>
-            </a:r>
-            <a:endParaRPr lang="en-US" sz="1500" dirty="0"/>
-          </a:p>
-        </p:txBody>
-      </p:sp>
-      <p:sp>
-        <p:nvSpPr>
-          <p:cNvPr id="13" name="Text 11"/>
-          <p:cNvSpPr/>
-          <p:nvPr/>
-        </p:nvSpPr>
-        <p:spPr>
-          <a:xfrm>
-            <a:off x="6492240" y="2651760"/>
-            <a:ext cx="4937760" cy="868680"/>
-          </a:xfrm>
-          <a:prstGeom prst="rect">
-            <a:avLst/>
-          </a:prstGeom>
-          <a:noFill/>
-          <a:ln/>
-        </p:spPr>
-        <p:txBody>
-          <a:bodyPr wrap="square" lIns="0" tIns="0" rIns="0" bIns="0" rtlCol="0" anchor="ctr"/>
-          <a:lstStyle/>
-          <a:p>
-            <a:pPr indent="0" marL="0">
-              <a:buNone/>
-            </a:pPr>
-            <a:r>
-              <a:rPr lang="en-US" sz="1500" dirty="0">
-                <a:solidFill>
-                  <a:srgbClr val="2B2B2B"/>
-                </a:solidFill>
-                <a:latin typeface="Calibri" pitchFamily="34" charset="0"/>
-                <a:ea typeface="Calibri" pitchFamily="34" charset="-122"/>
-                <a:cs typeface="Calibri" pitchFamily="34" charset="-120"/>
-              </a:rPr>
-              <a:t>ViT5 đã học Vietnews; không tách được “khả năng mô hình” với “đã thấy miền này”.</a:t>
-            </a:r>
-            <a:endParaRPr lang="en-US" sz="1500" dirty="0"/>
-          </a:p>
-        </p:txBody>
-      </p:sp>
-      <p:sp>
-        <p:nvSpPr>
-          <p:cNvPr id="14" name="Text 12"/>
-          <p:cNvSpPr/>
-          <p:nvPr/>
-        </p:nvSpPr>
-        <p:spPr>
-          <a:xfrm>
-            <a:off x="6492240" y="3611880"/>
-            <a:ext cx="4937760" cy="868680"/>
-          </a:xfrm>
-          <a:prstGeom prst="rect">
-            <a:avLst/>
-          </a:prstGeom>
-          <a:noFill/>
-          <a:ln/>
-        </p:spPr>
-        <p:txBody>
-          <a:bodyPr wrap="square" lIns="0" tIns="0" rIns="0" bIns="0" rtlCol="0" anchor="ctr"/>
-          <a:lstStyle/>
-          <a:p>
-            <a:pPr indent="0" marL="0">
-              <a:buNone/>
-            </a:pPr>
-            <a:r>
-              <a:rPr lang="en-US" sz="1500" dirty="0">
-                <a:solidFill>
-                  <a:srgbClr val="2B2B2B"/>
-                </a:solidFill>
-                <a:latin typeface="Calibri" pitchFamily="34" charset="0"/>
-                <a:ea typeface="Calibri" pitchFamily="34" charset="-122"/>
-                <a:cs typeface="Calibri" pitchFamily="34" charset="-120"/>
-              </a:rPr>
-              <a:t>Gold dạng bản tin 24h (nhiều tin/bài) cả ba hệ đều yếu.</a:t>
-            </a:r>
-            <a:endParaRPr lang="en-US" sz="1500" dirty="0"/>
-          </a:p>
-        </p:txBody>
-      </p:sp>
-      <p:sp>
-        <p:nvSpPr>
-          <p:cNvPr id="15" name="Text 13"/>
-          <p:cNvSpPr/>
-          <p:nvPr/>
-        </p:nvSpPr>
-        <p:spPr>
-          <a:xfrm>
-            <a:off x="6492240" y="4572000"/>
-            <a:ext cx="4937760" cy="868680"/>
-          </a:xfrm>
-          <a:prstGeom prst="rect">
-            <a:avLst/>
-          </a:prstGeom>
-          <a:noFill/>
-          <a:ln/>
-        </p:spPr>
-        <p:txBody>
-          <a:bodyPr wrap="square" lIns="0" tIns="0" rIns="0" bIns="0" rtlCol="0" anchor="ctr"/>
-          <a:lstStyle/>
-          <a:p>
-            <a:pPr indent="0" marL="0">
-              <a:buNone/>
-            </a:pPr>
-            <a:r>
-              <a:rPr lang="en-US" sz="1500" dirty="0">
-                <a:solidFill>
-                  <a:srgbClr val="2B2B2B"/>
-                </a:solidFill>
-                <a:latin typeface="Calibri" pitchFamily="34" charset="0"/>
-                <a:ea typeface="Calibri" pitchFamily="34" charset="-122"/>
-                <a:cs typeface="Calibri" pitchFamily="34" charset="-120"/>
-              </a:rPr>
-              <a:t>Chưa đo latency; chưa full test paper.</a:t>
-            </a:r>
-            <a:endParaRPr lang="en-US" sz="1500" dirty="0"/>
-          </a:p>
-        </p:txBody>
-      </p:sp>
-      <p:sp>
-        <p:nvSpPr>
-          <p:cNvPr id="16" name="Text 14"/>
-          <p:cNvSpPr/>
-          <p:nvPr/>
-        </p:nvSpPr>
-        <p:spPr>
-          <a:xfrm>
-            <a:off x="502920" y="6510528"/>
-            <a:ext cx="8229600" cy="201168"/>
-          </a:xfrm>
-          <a:prstGeom prst="rect">
-            <a:avLst/>
-          </a:prstGeom>
-          <a:noFill/>
-          <a:ln/>
-        </p:spPr>
-        <p:txBody>
-          <a:bodyPr wrap="square" lIns="0" tIns="0" rIns="0" bIns="0" rtlCol="0" anchor="ctr"/>
-          <a:lstStyle/>
-          <a:p>
-            <a:pPr indent="0" marL="0">
-              <a:buNone/>
-            </a:pPr>
-            <a:r>
-              <a:rPr lang="en-US" sz="1000" dirty="0">
-                <a:solidFill>
-                  <a:srgbClr val="B5AFA0"/>
-                </a:solidFill>
-                <a:latin typeface="Calibri" pitchFamily="34" charset="0"/>
-                <a:ea typeface="Calibri" pitchFamily="34" charset="-122"/>
-                <a:cs typeface="Calibri" pitchFamily="34" charset="-120"/>
-              </a:rPr>
-              <a:t>CS221 · UIT  ·  Vietnews extractive vs abstractive</a:t>
-            </a:r>
-            <a:endParaRPr lang="en-US" sz="1000" dirty="0"/>
-          </a:p>
-        </p:txBody>
-      </p:sp>
-      <p:sp>
-        <p:nvSpPr>
-          <p:cNvPr id="17" name="Text 15"/>
-          <p:cNvSpPr/>
-          <p:nvPr/>
-        </p:nvSpPr>
-        <p:spPr>
-          <a:xfrm>
-            <a:off x="11094415" y="6510528"/>
-            <a:ext cx="594360" cy="201168"/>
-          </a:xfrm>
-          <a:prstGeom prst="rect">
-            <a:avLst/>
-          </a:prstGeom>
-          <a:noFill/>
-          <a:ln/>
-        </p:spPr>
-        <p:txBody>
-          <a:bodyPr wrap="square" lIns="0" tIns="0" rIns="0" bIns="0" rtlCol="0" anchor="ctr"/>
-          <a:lstStyle/>
-          <a:p>
-            <a:pPr algn="r" indent="0" marL="0">
-              <a:buNone/>
-            </a:pPr>
-            <a:r>
-              <a:rPr lang="en-US" sz="1000" dirty="0">
-                <a:solidFill>
-                  <a:srgbClr val="8A8578"/>
-                </a:solidFill>
-                <a:latin typeface="Calibri" pitchFamily="34" charset="0"/>
-                <a:ea typeface="Calibri" pitchFamily="34" charset="-122"/>
-                <a:cs typeface="Calibri" pitchFamily="34" charset="-120"/>
-              </a:rPr>
-              <a:t>16</a:t>
+              <a:t>15</a:t>
             </a:r>
             <a:endParaRPr lang="en-US" sz="1000" dirty="0"/>
           </a:p>
@@ -9563,7 +11021,7 @@
                 <a:ea typeface="Calibri" pitchFamily="34" charset="-122"/>
                 <a:cs typeface="Calibri" pitchFamily="34" charset="-120"/>
               </a:rPr>
-              <a:t>15  NẾU LÀM TIẾP</a:t>
+              <a:t>14  KẾT LUẬN</a:t>
             </a:r>
             <a:endParaRPr lang="en-US" sz="1100" dirty="0"/>
           </a:p>
@@ -9602,7 +11060,7 @@
                 <a:ea typeface="Calibri" pitchFamily="34" charset="-122"/>
                 <a:cs typeface="Calibri" pitchFamily="34" charset="-120"/>
               </a:rPr>
-              <a:t>Ngoài phạm vi đồ án</a:t>
+              <a:t>Hạn chế</a:t>
             </a:r>
             <a:endParaRPr lang="en-US" sz="1200" dirty="0"/>
           </a:p>
@@ -9639,67 +11097,8 @@
         </p:nvSpPr>
         <p:spPr>
           <a:xfrm>
-            <a:off x="502920" y="1097280"/>
-            <a:ext cx="1188720" cy="1280160"/>
-          </a:xfrm>
-          <a:prstGeom prst="rect">
-            <a:avLst/>
-          </a:prstGeom>
-          <a:solidFill>
-            <a:srgbClr val="0B0B0B"/>
-          </a:solidFill>
-          <a:ln/>
-        </p:spPr>
-      </p:sp>
-      <p:sp>
-        <p:nvSpPr>
-          <p:cNvPr id="6" name="Text 4"/>
-          <p:cNvSpPr/>
-          <p:nvPr/>
-        </p:nvSpPr>
-        <p:spPr>
-          <a:xfrm>
-            <a:off x="502920" y="1463040"/>
-            <a:ext cx="1188720" cy="502920"/>
-          </a:xfrm>
-          <a:prstGeom prst="rect">
-            <a:avLst/>
-          </a:prstGeom>
-          <a:noFill/>
-          <a:ln/>
-        </p:spPr>
-        <p:txBody>
-          <a:bodyPr wrap="square" lIns="0" tIns="0" rIns="0" bIns="0" rtlCol="0" anchor="ctr"/>
-          <a:lstStyle/>
-          <a:p>
-            <a:pPr algn="ctr" indent="0" marL="0">
-              <a:buNone/>
-            </a:pPr>
-            <a:r>
-              <a:rPr lang="en-US" sz="2200" dirty="0">
-                <a:solidFill>
-                  <a:srgbClr val="EFE8D6"/>
-                </a:solidFill>
-                <a:latin typeface="Georgia" pitchFamily="34" charset="0"/>
-                <a:ea typeface="Georgia" pitchFamily="34" charset="-122"/>
-                <a:cs typeface="Georgia" pitchFamily="34" charset="-120"/>
-              </a:rPr>
-              <a:t>01</a:t>
-            </a:r>
-            <a:endParaRPr lang="en-US" sz="2200" dirty="0"/>
-          </a:p>
-        </p:txBody>
-      </p:sp>
-      <p:sp>
-        <p:nvSpPr>
-          <p:cNvPr id="7" name="Shape 5"/>
-          <p:cNvSpPr/>
-          <p:nvPr/>
-        </p:nvSpPr>
-        <p:spPr>
-          <a:xfrm>
-            <a:off x="1691640" y="1097280"/>
-            <a:ext cx="9966960" cy="1280160"/>
+            <a:off x="502920" y="1005840"/>
+            <a:ext cx="5577840" cy="4937760"/>
           </a:xfrm>
           <a:prstGeom prst="rect">
             <a:avLst/>
@@ -9717,157 +11116,20 @@
       </p:sp>
       <p:sp>
         <p:nvSpPr>
-          <p:cNvPr id="8" name="Text 6"/>
-          <p:cNvSpPr/>
-          <p:nvPr/>
-        </p:nvSpPr>
-        <p:spPr>
-          <a:xfrm>
-            <a:off x="1965960" y="1280160"/>
-            <a:ext cx="9509760" cy="365760"/>
-          </a:xfrm>
-          <a:prstGeom prst="rect">
-            <a:avLst/>
-          </a:prstGeom>
-          <a:noFill/>
-          <a:ln/>
-        </p:spPr>
-        <p:txBody>
-          <a:bodyPr wrap="square" lIns="0" tIns="0" rIns="0" bIns="0" rtlCol="0" anchor="ctr"/>
-          <a:lstStyle/>
-          <a:p>
-            <a:pPr indent="0" marL="0">
-              <a:buNone/>
-            </a:pPr>
-            <a:r>
-              <a:rPr lang="en-US" sz="1800" b="1" dirty="0">
-                <a:solidFill>
-                  <a:srgbClr val="1A1A1A"/>
-                </a:solidFill>
-                <a:latin typeface="Calibri" pitchFamily="34" charset="0"/>
-                <a:ea typeface="Calibri" pitchFamily="34" charset="-122"/>
-                <a:cs typeface="Calibri" pitchFamily="34" charset="-120"/>
-              </a:rPr>
-              <a:t>Đọc tay thêm</a:t>
-            </a:r>
-            <a:endParaRPr lang="en-US" sz="1800" dirty="0"/>
-          </a:p>
-        </p:txBody>
-      </p:sp>
-      <p:sp>
-        <p:nvSpPr>
-          <p:cNvPr id="9" name="Text 7"/>
-          <p:cNvSpPr/>
-          <p:nvPr/>
-        </p:nvSpPr>
-        <p:spPr>
-          <a:xfrm>
-            <a:off x="1965960" y="1737360"/>
-            <a:ext cx="9509760" cy="411480"/>
-          </a:xfrm>
-          <a:prstGeom prst="rect">
-            <a:avLst/>
-          </a:prstGeom>
-          <a:noFill/>
-          <a:ln/>
-        </p:spPr>
-        <p:txBody>
-          <a:bodyPr wrap="square" lIns="0" tIns="0" rIns="0" bIns="0" rtlCol="0" anchor="ctr"/>
-          <a:lstStyle/>
-          <a:p>
-            <a:pPr indent="0" marL="0">
-              <a:buNone/>
-            </a:pPr>
-            <a:r>
-              <a:rPr lang="en-US" sz="1600" dirty="0">
-                <a:solidFill>
-                  <a:srgbClr val="2B2B2B"/>
-                </a:solidFill>
-                <a:latin typeface="Calibri" pitchFamily="34" charset="0"/>
-                <a:ea typeface="Calibri" pitchFamily="34" charset="-122"/>
-                <a:cs typeface="Calibri" pitchFamily="34" charset="-120"/>
-              </a:rPr>
-              <a:t>Mở rộng 20 bài; đếm sai tên/số có hệ thống.</a:t>
-            </a:r>
-            <a:endParaRPr lang="en-US" sz="1600" dirty="0"/>
-          </a:p>
-        </p:txBody>
-      </p:sp>
-      <p:sp>
-        <p:nvSpPr>
-          <p:cNvPr id="10" name="Shape 8"/>
-          <p:cNvSpPr/>
-          <p:nvPr/>
-        </p:nvSpPr>
-        <p:spPr>
-          <a:xfrm>
-            <a:off x="502920" y="2560320"/>
-            <a:ext cx="1188720" cy="1280160"/>
+          <p:cNvPr id="6" name="Shape 4"/>
+          <p:cNvSpPr/>
+          <p:nvPr/>
+        </p:nvSpPr>
+        <p:spPr>
+          <a:xfrm>
+            <a:off x="6263640" y="1005840"/>
+            <a:ext cx="5394960" cy="4937760"/>
           </a:xfrm>
           <a:prstGeom prst="rect">
             <a:avLst/>
           </a:prstGeom>
           <a:solidFill>
-            <a:srgbClr val="0B0B0B"/>
-          </a:solidFill>
-          <a:ln/>
-        </p:spPr>
-      </p:sp>
-      <p:sp>
-        <p:nvSpPr>
-          <p:cNvPr id="11" name="Text 9"/>
-          <p:cNvSpPr/>
-          <p:nvPr/>
-        </p:nvSpPr>
-        <p:spPr>
-          <a:xfrm>
-            <a:off x="502920" y="2926080"/>
-            <a:ext cx="1188720" cy="502920"/>
-          </a:xfrm>
-          <a:prstGeom prst="rect">
-            <a:avLst/>
-          </a:prstGeom>
-          <a:noFill/>
-          <a:ln/>
-        </p:spPr>
-        <p:txBody>
-          <a:bodyPr wrap="square" lIns="0" tIns="0" rIns="0" bIns="0" rtlCol="0" anchor="ctr"/>
-          <a:lstStyle/>
-          <a:p>
-            <a:pPr algn="ctr" indent="0" marL="0">
-              <a:buNone/>
-            </a:pPr>
-            <a:r>
-              <a:rPr lang="en-US" sz="2200" dirty="0">
-                <a:solidFill>
-                  <a:srgbClr val="EFE8D6"/>
-                </a:solidFill>
-                <a:latin typeface="Georgia" pitchFamily="34" charset="0"/>
-                <a:ea typeface="Georgia" pitchFamily="34" charset="-122"/>
-                <a:cs typeface="Georgia" pitchFamily="34" charset="-120"/>
-              </a:rPr>
-              <a:t>02</a:t>
-            </a:r>
-            <a:endParaRPr lang="en-US" sz="2200" dirty="0"/>
-          </a:p>
-        </p:txBody>
-      </p:sp>
-      <p:sp>
-        <p:nvSpPr>
-          <p:cNvPr id="12" name="Shape 10"/>
-          <p:cNvSpPr/>
-          <p:nvPr/>
-        </p:nvSpPr>
-        <p:spPr>
-          <a:xfrm>
-            <a:off x="1691640" y="2560320"/>
-            <a:ext cx="9966960" cy="1280160"/>
-          </a:xfrm>
-          <a:prstGeom prst="rect">
-            <a:avLst/>
-          </a:prstGeom>
-          <a:solidFill>
-            <a:srgbClr val="F7F3E8"/>
+            <a:srgbClr val="F2E5D0"/>
           </a:solidFill>
           <a:ln w="9525">
             <a:solidFill>
@@ -9879,14 +11141,14 @@
       </p:sp>
       <p:sp>
         <p:nvSpPr>
-          <p:cNvPr id="13" name="Text 11"/>
-          <p:cNvSpPr/>
-          <p:nvPr/>
-        </p:nvSpPr>
-        <p:spPr>
-          <a:xfrm>
-            <a:off x="1965960" y="2743200"/>
-            <a:ext cx="9509760" cy="365760"/>
+          <p:cNvPr id="7" name="Text 5"/>
+          <p:cNvSpPr/>
+          <p:nvPr/>
+        </p:nvSpPr>
+        <p:spPr>
+          <a:xfrm>
+            <a:off x="731520" y="1188720"/>
+            <a:ext cx="5120640" cy="365760"/>
           </a:xfrm>
           <a:prstGeom prst="rect">
             <a:avLst/>
@@ -9902,30 +11164,30 @@
               <a:buNone/>
             </a:pPr>
             <a:r>
-              <a:rPr lang="en-US" sz="1800" b="1" dirty="0">
-                <a:solidFill>
-                  <a:srgbClr val="1A1A1A"/>
+              <a:rPr lang="en-US" sz="1400" dirty="0">
+                <a:solidFill>
+                  <a:srgbClr val="B8432A"/>
                 </a:solidFill>
                 <a:latin typeface="Calibri" pitchFamily="34" charset="0"/>
                 <a:ea typeface="Calibri" pitchFamily="34" charset="-122"/>
                 <a:cs typeface="Calibri" pitchFamily="34" charset="-120"/>
               </a:rPr>
-              <a:t>Gold đa tin</a:t>
-            </a:r>
-            <a:endParaRPr lang="en-US" sz="1800" dirty="0"/>
-          </a:p>
-        </p:txBody>
-      </p:sp>
-      <p:sp>
-        <p:nvSpPr>
-          <p:cNvPr id="14" name="Text 12"/>
-          <p:cNvSpPr/>
-          <p:nvPr/>
-        </p:nvSpPr>
-        <p:spPr>
-          <a:xfrm>
-            <a:off x="1965960" y="3200400"/>
-            <a:ext cx="9509760" cy="411480"/>
+              <a:t>Nhận được</a:t>
+            </a:r>
+            <a:endParaRPr lang="en-US" sz="1400" dirty="0"/>
+          </a:p>
+        </p:txBody>
+      </p:sp>
+      <p:sp>
+        <p:nvSpPr>
+          <p:cNvPr id="8" name="Text 6"/>
+          <p:cNvSpPr/>
+          <p:nvPr/>
+        </p:nvSpPr>
+        <p:spPr>
+          <a:xfrm>
+            <a:off x="731520" y="1691640"/>
+            <a:ext cx="5074920" cy="1143000"/>
           </a:xfrm>
           <a:prstGeom prst="rect">
             <a:avLst/>
@@ -9941,7 +11203,7 @@
               <a:buNone/>
             </a:pPr>
             <a:r>
-              <a:rPr lang="en-US" sz="1600" dirty="0">
+              <a:rPr lang="en-US" sz="1500" dirty="0">
                 <a:solidFill>
                   <a:srgbClr val="2B2B2B"/>
                 </a:solidFill>
@@ -9949,106 +11211,22 @@
                 <a:ea typeface="Calibri" pitchFamily="34" charset="-122"/>
                 <a:cs typeface="Calibri" pitchFamily="34" charset="-120"/>
               </a:rPr>
-              <a:t>Tách bài “an ninh 24h” thành từng tin trước khi tóm.</a:t>
-            </a:r>
-            <a:endParaRPr lang="en-US" sz="1600" dirty="0"/>
-          </a:p>
-        </p:txBody>
-      </p:sp>
-      <p:sp>
-        <p:nvSpPr>
-          <p:cNvPr id="15" name="Shape 13"/>
-          <p:cNvSpPr/>
-          <p:nvPr/>
-        </p:nvSpPr>
-        <p:spPr>
-          <a:xfrm>
-            <a:off x="502920" y="4023360"/>
-            <a:ext cx="1188720" cy="1280160"/>
-          </a:xfrm>
-          <a:prstGeom prst="rect">
-            <a:avLst/>
-          </a:prstGeom>
-          <a:solidFill>
-            <a:srgbClr val="0B0B0B"/>
-          </a:solidFill>
-          <a:ln/>
-        </p:spPr>
-      </p:sp>
-      <p:sp>
-        <p:nvSpPr>
-          <p:cNvPr id="16" name="Text 14"/>
-          <p:cNvSpPr/>
-          <p:nvPr/>
-        </p:nvSpPr>
-        <p:spPr>
-          <a:xfrm>
-            <a:off x="502920" y="4389120"/>
-            <a:ext cx="1188720" cy="502920"/>
-          </a:xfrm>
-          <a:prstGeom prst="rect">
-            <a:avLst/>
-          </a:prstGeom>
-          <a:noFill/>
-          <a:ln/>
-        </p:spPr>
-        <p:txBody>
-          <a:bodyPr wrap="square" lIns="0" tIns="0" rIns="0" bIns="0" rtlCol="0" anchor="ctr"/>
-          <a:lstStyle/>
-          <a:p>
-            <a:pPr algn="ctr" indent="0" marL="0">
-              <a:buNone/>
-            </a:pPr>
-            <a:r>
-              <a:rPr lang="en-US" sz="2200" dirty="0">
-                <a:solidFill>
-                  <a:srgbClr val="EFE8D6"/>
-                </a:solidFill>
-                <a:latin typeface="Georgia" pitchFamily="34" charset="0"/>
-                <a:ea typeface="Georgia" pitchFamily="34" charset="-122"/>
-                <a:cs typeface="Georgia" pitchFamily="34" charset="-120"/>
-              </a:rPr>
-              <a:t>03</a:t>
-            </a:r>
-            <a:endParaRPr lang="en-US" sz="2200" dirty="0"/>
-          </a:p>
-        </p:txBody>
-      </p:sp>
-      <p:sp>
-        <p:nvSpPr>
-          <p:cNvPr id="17" name="Shape 15"/>
-          <p:cNvSpPr/>
-          <p:nvPr/>
-        </p:nvSpPr>
-        <p:spPr>
-          <a:xfrm>
-            <a:off x="1691640" y="4023360"/>
-            <a:ext cx="9966960" cy="1280160"/>
-          </a:xfrm>
-          <a:prstGeom prst="rect">
-            <a:avLst/>
-          </a:prstGeom>
-          <a:solidFill>
-            <a:srgbClr val="F7F3E8"/>
-          </a:solidFill>
-          <a:ln w="9525">
-            <a:solidFill>
-              <a:srgbClr val="C8C0AE"/>
-            </a:solidFill>
-            <a:prstDash val="solid"/>
-          </a:ln>
-        </p:spPr>
-      </p:sp>
-      <p:sp>
-        <p:nvSpPr>
-          <p:cNvPr id="18" name="Text 16"/>
-          <p:cNvSpPr/>
-          <p:nvPr/>
-        </p:nvSpPr>
-        <p:spPr>
-          <a:xfrm>
-            <a:off x="1965960" y="4206240"/>
-            <a:ext cx="9509760" cy="365760"/>
+              <a:t>Trên 100 bài test đầu Vietnews, ViT5 ROUGE-1/2/L cao hơn Lead-3 và TextRank một chút.</a:t>
+            </a:r>
+            <a:endParaRPr lang="en-US" sz="1500" dirty="0"/>
+          </a:p>
+        </p:txBody>
+      </p:sp>
+      <p:sp>
+        <p:nvSpPr>
+          <p:cNvPr id="9" name="Text 7"/>
+          <p:cNvSpPr/>
+          <p:nvPr/>
+        </p:nvSpPr>
+        <p:spPr>
+          <a:xfrm>
+            <a:off x="731520" y="2926080"/>
+            <a:ext cx="5074920" cy="1143000"/>
           </a:xfrm>
           <a:prstGeom prst="rect">
             <a:avLst/>
@@ -10064,30 +11242,30 @@
               <a:buNone/>
             </a:pPr>
             <a:r>
-              <a:rPr lang="en-US" sz="1800" b="1" dirty="0">
-                <a:solidFill>
-                  <a:srgbClr val="1A1A1A"/>
+              <a:rPr lang="en-US" sz="1500" dirty="0">
+                <a:solidFill>
+                  <a:srgbClr val="2B2B2B"/>
                 </a:solidFill>
                 <a:latin typeface="Calibri" pitchFamily="34" charset="0"/>
                 <a:ea typeface="Calibri" pitchFamily="34" charset="-122"/>
                 <a:cs typeface="Calibri" pitchFamily="34" charset="-120"/>
               </a:rPr>
-              <a:t>Không train trùng</a:t>
-            </a:r>
-            <a:endParaRPr lang="en-US" sz="1800" dirty="0"/>
-          </a:p>
-        </p:txBody>
-      </p:sp>
-      <p:sp>
-        <p:nvSpPr>
-          <p:cNvPr id="19" name="Text 17"/>
-          <p:cNvSpPr/>
-          <p:nvPr/>
-        </p:nvSpPr>
-        <p:spPr>
-          <a:xfrm>
-            <a:off x="1965960" y="4663440"/>
-            <a:ext cx="9509760" cy="411480"/>
+              <a:t>Đọc tay 20 bài: ViT5 vẫn sai tên, đảo ý, bịa chi tiết — ROUGE không thay cho đối chiếu gold.</a:t>
+            </a:r>
+            <a:endParaRPr lang="en-US" sz="1500" dirty="0"/>
+          </a:p>
+        </p:txBody>
+      </p:sp>
+      <p:sp>
+        <p:nvSpPr>
+          <p:cNvPr id="10" name="Text 8"/>
+          <p:cNvSpPr/>
+          <p:nvPr/>
+        </p:nvSpPr>
+        <p:spPr>
+          <a:xfrm>
+            <a:off x="731520" y="4160520"/>
+            <a:ext cx="5074920" cy="1143000"/>
           </a:xfrm>
           <a:prstGeom prst="rect">
             <a:avLst/>
@@ -10103,7 +11281,7 @@
               <a:buNone/>
             </a:pPr>
             <a:r>
-              <a:rPr lang="en-US" sz="1600" dirty="0">
+              <a:rPr lang="en-US" sz="1500" dirty="0">
                 <a:solidFill>
                   <a:srgbClr val="2B2B2B"/>
                 </a:solidFill>
@@ -10111,22 +11289,22 @@
                 <a:ea typeface="Calibri" pitchFamily="34" charset="-122"/>
                 <a:cs typeface="Calibri" pitchFamily="34" charset="-120"/>
               </a:rPr>
-              <a:t>Nếu fine-tune, phải miền khác Vietnews.</a:t>
-            </a:r>
-            <a:endParaRPr lang="en-US" sz="1600" dirty="0"/>
-          </a:p>
-        </p:txBody>
-      </p:sp>
-      <p:sp>
-        <p:nvSpPr>
-          <p:cNvPr id="20" name="Text 18"/>
-          <p:cNvSpPr/>
-          <p:nvPr/>
-        </p:nvSpPr>
-        <p:spPr>
-          <a:xfrm>
-            <a:off x="502920" y="6510528"/>
-            <a:ext cx="8229600" cy="201168"/>
+              <a:t>Lead-3 an toàn về chữ (lấy từ bài) nhưng hay lệch sapo.</a:t>
+            </a:r>
+            <a:endParaRPr lang="en-US" sz="1500" dirty="0"/>
+          </a:p>
+        </p:txBody>
+      </p:sp>
+      <p:sp>
+        <p:nvSpPr>
+          <p:cNvPr id="11" name="Text 9"/>
+          <p:cNvSpPr/>
+          <p:nvPr/>
+        </p:nvSpPr>
+        <p:spPr>
+          <a:xfrm>
+            <a:off x="6492240" y="1188720"/>
+            <a:ext cx="4937760" cy="365760"/>
           </a:xfrm>
           <a:prstGeom prst="rect">
             <a:avLst/>
@@ -10142,54 +11320,249 @@
               <a:buNone/>
             </a:pPr>
             <a:r>
-              <a:rPr lang="en-US" sz="1000" dirty="0">
-                <a:solidFill>
-                  <a:srgbClr val="B5AFA0"/>
+              <a:rPr lang="en-US" sz="1400" dirty="0">
+                <a:solidFill>
+                  <a:srgbClr val="B8432A"/>
                 </a:solidFill>
                 <a:latin typeface="Calibri" pitchFamily="34" charset="0"/>
                 <a:ea typeface="Calibri" pitchFamily="34" charset="-122"/>
                 <a:cs typeface="Calibri" pitchFamily="34" charset="-120"/>
               </a:rPr>
-              <a:t>CS221 · UIT  ·  Vietnews extractive vs abstractive</a:t>
-            </a:r>
-            <a:endParaRPr lang="en-US" sz="1000" dirty="0"/>
-          </a:p>
-        </p:txBody>
-      </p:sp>
-      <p:sp>
-        <p:nvSpPr>
-          <p:cNvPr id="21" name="Text 19"/>
-          <p:cNvSpPr/>
-          <p:nvPr/>
-        </p:nvSpPr>
-        <p:spPr>
-          <a:xfrm>
-            <a:off x="11094415" y="6510528"/>
-            <a:ext cx="594360" cy="201168"/>
-          </a:xfrm>
-          <a:prstGeom prst="rect">
-            <a:avLst/>
-          </a:prstGeom>
-          <a:noFill/>
-          <a:ln/>
-        </p:spPr>
-        <p:txBody>
-          <a:bodyPr wrap="square" lIns="0" tIns="0" rIns="0" bIns="0" rtlCol="0" anchor="ctr"/>
-          <a:lstStyle/>
-          <a:p>
-            <a:pPr algn="r" indent="0" marL="0">
-              <a:buNone/>
-            </a:pPr>
-            <a:r>
-              <a:rPr lang="en-US" sz="1000" dirty="0">
-                <a:solidFill>
-                  <a:srgbClr val="8A8578"/>
+              <a:t>Không nhận</a:t>
+            </a:r>
+            <a:endParaRPr lang="en-US" sz="1400" dirty="0"/>
+          </a:p>
+        </p:txBody>
+      </p:sp>
+      <p:sp>
+        <p:nvSpPr>
+          <p:cNvPr id="12" name="Text 10"/>
+          <p:cNvSpPr/>
+          <p:nvPr/>
+        </p:nvSpPr>
+        <p:spPr>
+          <a:xfrm>
+            <a:off x="6492240" y="1691640"/>
+            <a:ext cx="4937760" cy="868680"/>
+          </a:xfrm>
+          <a:prstGeom prst="rect">
+            <a:avLst/>
+          </a:prstGeom>
+          <a:noFill/>
+          <a:ln/>
+        </p:spPr>
+        <p:txBody>
+          <a:bodyPr wrap="square" lIns="0" tIns="0" rIns="0" bIns="0" rtlCol="0" anchor="ctr"/>
+          <a:lstStyle/>
+          <a:p>
+            <a:pPr indent="0" marL="0">
+              <a:buNone/>
+            </a:pPr>
+            <a:r>
+              <a:rPr lang="en-US" sz="1500" dirty="0">
+                <a:solidFill>
+                  <a:srgbClr val="2B2B2B"/>
                 </a:solidFill>
                 <a:latin typeface="Calibri" pitchFamily="34" charset="0"/>
                 <a:ea typeface="Calibri" pitchFamily="34" charset="-122"/>
                 <a:cs typeface="Calibri" pitchFamily="34" charset="-120"/>
               </a:rPr>
-              <a:t>17</a:t>
+              <a:t>Chỉ 100 bài, không phải full test gốc paper.</a:t>
+            </a:r>
+            <a:endParaRPr lang="en-US" sz="1500" dirty="0"/>
+          </a:p>
+        </p:txBody>
+      </p:sp>
+      <p:sp>
+        <p:nvSpPr>
+          <p:cNvPr id="13" name="Text 11"/>
+          <p:cNvSpPr/>
+          <p:nvPr/>
+        </p:nvSpPr>
+        <p:spPr>
+          <a:xfrm>
+            <a:off x="6492240" y="2651760"/>
+            <a:ext cx="4937760" cy="868680"/>
+          </a:xfrm>
+          <a:prstGeom prst="rect">
+            <a:avLst/>
+          </a:prstGeom>
+          <a:noFill/>
+          <a:ln/>
+        </p:spPr>
+        <p:txBody>
+          <a:bodyPr wrap="square" lIns="0" tIns="0" rIns="0" bIns="0" rtlCol="0" anchor="ctr"/>
+          <a:lstStyle/>
+          <a:p>
+            <a:pPr indent="0" marL="0">
+              <a:buNone/>
+            </a:pPr>
+            <a:r>
+              <a:rPr lang="en-US" sz="1500" dirty="0">
+                <a:solidFill>
+                  <a:srgbClr val="2B2B2B"/>
+                </a:solidFill>
+                <a:latin typeface="Calibri" pitchFamily="34" charset="0"/>
+                <a:ea typeface="Calibri" pitchFamily="34" charset="-122"/>
+                <a:cs typeface="Calibri" pitchFamily="34" charset="-120"/>
+              </a:rPr>
+              <a:t>ViT5 đã học Vietnews; không tách được “khả năng mô hình” với “đã thấy miền này”.</a:t>
+            </a:r>
+            <a:endParaRPr lang="en-US" sz="1500" dirty="0"/>
+          </a:p>
+        </p:txBody>
+      </p:sp>
+      <p:sp>
+        <p:nvSpPr>
+          <p:cNvPr id="14" name="Text 12"/>
+          <p:cNvSpPr/>
+          <p:nvPr/>
+        </p:nvSpPr>
+        <p:spPr>
+          <a:xfrm>
+            <a:off x="6492240" y="3611880"/>
+            <a:ext cx="4937760" cy="868680"/>
+          </a:xfrm>
+          <a:prstGeom prst="rect">
+            <a:avLst/>
+          </a:prstGeom>
+          <a:noFill/>
+          <a:ln/>
+        </p:spPr>
+        <p:txBody>
+          <a:bodyPr wrap="square" lIns="0" tIns="0" rIns="0" bIns="0" rtlCol="0" anchor="ctr"/>
+          <a:lstStyle/>
+          <a:p>
+            <a:pPr indent="0" marL="0">
+              <a:buNone/>
+            </a:pPr>
+            <a:r>
+              <a:rPr lang="en-US" sz="1500" dirty="0">
+                <a:solidFill>
+                  <a:srgbClr val="2B2B2B"/>
+                </a:solidFill>
+                <a:latin typeface="Calibri" pitchFamily="34" charset="0"/>
+                <a:ea typeface="Calibri" pitchFamily="34" charset="-122"/>
+                <a:cs typeface="Calibri" pitchFamily="34" charset="-120"/>
+              </a:rPr>
+              <a:t>Gold dạng bản tin 24h (nhiều tin/bài) cả ba hệ đều yếu.</a:t>
+            </a:r>
+            <a:endParaRPr lang="en-US" sz="1500" dirty="0"/>
+          </a:p>
+        </p:txBody>
+      </p:sp>
+      <p:sp>
+        <p:nvSpPr>
+          <p:cNvPr id="15" name="Text 13"/>
+          <p:cNvSpPr/>
+          <p:nvPr/>
+        </p:nvSpPr>
+        <p:spPr>
+          <a:xfrm>
+            <a:off x="6492240" y="4572000"/>
+            <a:ext cx="4937760" cy="868680"/>
+          </a:xfrm>
+          <a:prstGeom prst="rect">
+            <a:avLst/>
+          </a:prstGeom>
+          <a:noFill/>
+          <a:ln/>
+        </p:spPr>
+        <p:txBody>
+          <a:bodyPr wrap="square" lIns="0" tIns="0" rIns="0" bIns="0" rtlCol="0" anchor="ctr"/>
+          <a:lstStyle/>
+          <a:p>
+            <a:pPr indent="0" marL="0">
+              <a:buNone/>
+            </a:pPr>
+            <a:r>
+              <a:rPr lang="en-US" sz="1500" dirty="0">
+                <a:solidFill>
+                  <a:srgbClr val="2B2B2B"/>
+                </a:solidFill>
+                <a:latin typeface="Calibri" pitchFamily="34" charset="0"/>
+                <a:ea typeface="Calibri" pitchFamily="34" charset="-122"/>
+                <a:cs typeface="Calibri" pitchFamily="34" charset="-120"/>
+              </a:rPr>
+              <a:t>Chưa đo latency; chưa full test paper.</a:t>
+            </a:r>
+            <a:endParaRPr lang="en-US" sz="1500" dirty="0"/>
+          </a:p>
+        </p:txBody>
+      </p:sp>
+      <p:sp>
+        <p:nvSpPr>
+          <p:cNvPr id="16" name="Text 14"/>
+          <p:cNvSpPr/>
+          <p:nvPr/>
+        </p:nvSpPr>
+        <p:spPr>
+          <a:xfrm>
+            <a:off x="502920" y="6510528"/>
+            <a:ext cx="8229600" cy="201168"/>
+          </a:xfrm>
+          <a:prstGeom prst="rect">
+            <a:avLst/>
+          </a:prstGeom>
+          <a:noFill/>
+          <a:ln/>
+        </p:spPr>
+        <p:txBody>
+          <a:bodyPr wrap="square" lIns="0" tIns="0" rIns="0" bIns="0" rtlCol="0" anchor="ctr"/>
+          <a:lstStyle/>
+          <a:p>
+            <a:pPr indent="0" marL="0">
+              <a:buNone/>
+            </a:pPr>
+            <a:r>
+              <a:rPr lang="en-US" sz="1000" dirty="0">
+                <a:solidFill>
+                  <a:srgbClr val="B5AFA0"/>
+                </a:solidFill>
+                <a:latin typeface="Calibri" pitchFamily="34" charset="0"/>
+                <a:ea typeface="Calibri" pitchFamily="34" charset="-122"/>
+                <a:cs typeface="Calibri" pitchFamily="34" charset="-120"/>
+              </a:rPr>
+              <a:t>CS221 · UIT  ·  Vietnews extractive vs abstractive</a:t>
+            </a:r>
+            <a:endParaRPr lang="en-US" sz="1000" dirty="0"/>
+          </a:p>
+        </p:txBody>
+      </p:sp>
+      <p:sp>
+        <p:nvSpPr>
+          <p:cNvPr id="17" name="Text 15"/>
+          <p:cNvSpPr/>
+          <p:nvPr/>
+        </p:nvSpPr>
+        <p:spPr>
+          <a:xfrm>
+            <a:off x="11094415" y="6510528"/>
+            <a:ext cx="594360" cy="201168"/>
+          </a:xfrm>
+          <a:prstGeom prst="rect">
+            <a:avLst/>
+          </a:prstGeom>
+          <a:noFill/>
+          <a:ln/>
+        </p:spPr>
+        <p:txBody>
+          <a:bodyPr wrap="square" lIns="0" tIns="0" rIns="0" bIns="0" rtlCol="0" anchor="ctr"/>
+          <a:lstStyle/>
+          <a:p>
+            <a:pPr algn="r" indent="0" marL="0">
+              <a:buNone/>
+            </a:pPr>
+            <a:r>
+              <a:rPr lang="en-US" sz="1000" dirty="0">
+                <a:solidFill>
+                  <a:srgbClr val="8A8578"/>
+                </a:solidFill>
+                <a:latin typeface="Calibri" pitchFamily="34" charset="0"/>
+                <a:ea typeface="Calibri" pitchFamily="34" charset="-122"/>
+                <a:cs typeface="Calibri" pitchFamily="34" charset="-120"/>
+              </a:rPr>
+              <a:t>16</a:t>
             </a:r>
             <a:endParaRPr lang="en-US" sz="1000" dirty="0"/>
           </a:p>
@@ -10260,7 +11633,7 @@
                 <a:ea typeface="Calibri" pitchFamily="34" charset="-122"/>
                 <a:cs typeface="Calibri" pitchFamily="34" charset="-120"/>
               </a:rPr>
-              <a:t>16  TÀI LIỆU</a:t>
+              <a:t>15  NẾU LÀM TIẾP</a:t>
             </a:r>
             <a:endParaRPr lang="en-US" sz="1100" dirty="0"/>
           </a:p>
@@ -10299,7 +11672,7 @@
                 <a:ea typeface="Calibri" pitchFamily="34" charset="-122"/>
                 <a:cs typeface="Calibri" pitchFamily="34" charset="-120"/>
               </a:rPr>
-              <a:t>Đã dùng</a:t>
+              <a:t>Ngoài phạm vi đồ án</a:t>
             </a:r>
             <a:endParaRPr lang="en-US" sz="1200" dirty="0"/>
           </a:p>
@@ -10330,14 +11703,98 @@
       </p:sp>
       <p:sp>
         <p:nvSpPr>
-          <p:cNvPr id="5" name="Text 3"/>
-          <p:cNvSpPr/>
-          <p:nvPr/>
-        </p:nvSpPr>
-        <p:spPr>
-          <a:xfrm>
-            <a:off x="640080" y="1097280"/>
-            <a:ext cx="10972800" cy="685800"/>
+          <p:cNvPr id="5" name="Shape 3"/>
+          <p:cNvSpPr/>
+          <p:nvPr/>
+        </p:nvSpPr>
+        <p:spPr>
+          <a:xfrm>
+            <a:off x="502920" y="1097280"/>
+            <a:ext cx="1188720" cy="1280160"/>
+          </a:xfrm>
+          <a:prstGeom prst="rect">
+            <a:avLst/>
+          </a:prstGeom>
+          <a:solidFill>
+            <a:srgbClr val="0B0B0B"/>
+          </a:solidFill>
+          <a:ln/>
+        </p:spPr>
+      </p:sp>
+      <p:sp>
+        <p:nvSpPr>
+          <p:cNvPr id="6" name="Text 4"/>
+          <p:cNvSpPr/>
+          <p:nvPr/>
+        </p:nvSpPr>
+        <p:spPr>
+          <a:xfrm>
+            <a:off x="502920" y="1463040"/>
+            <a:ext cx="1188720" cy="502920"/>
+          </a:xfrm>
+          <a:prstGeom prst="rect">
+            <a:avLst/>
+          </a:prstGeom>
+          <a:noFill/>
+          <a:ln/>
+        </p:spPr>
+        <p:txBody>
+          <a:bodyPr wrap="square" lIns="0" tIns="0" rIns="0" bIns="0" rtlCol="0" anchor="ctr"/>
+          <a:lstStyle/>
+          <a:p>
+            <a:pPr algn="ctr" indent="0" marL="0">
+              <a:buNone/>
+            </a:pPr>
+            <a:r>
+              <a:rPr lang="en-US" sz="2200" dirty="0">
+                <a:solidFill>
+                  <a:srgbClr val="EFE8D6"/>
+                </a:solidFill>
+                <a:latin typeface="Georgia" pitchFamily="34" charset="0"/>
+                <a:ea typeface="Georgia" pitchFamily="34" charset="-122"/>
+                <a:cs typeface="Georgia" pitchFamily="34" charset="-120"/>
+              </a:rPr>
+              <a:t>01</a:t>
+            </a:r>
+            <a:endParaRPr lang="en-US" sz="2200" dirty="0"/>
+          </a:p>
+        </p:txBody>
+      </p:sp>
+      <p:sp>
+        <p:nvSpPr>
+          <p:cNvPr id="7" name="Shape 5"/>
+          <p:cNvSpPr/>
+          <p:nvPr/>
+        </p:nvSpPr>
+        <p:spPr>
+          <a:xfrm>
+            <a:off x="1691640" y="1097280"/>
+            <a:ext cx="9966960" cy="1280160"/>
+          </a:xfrm>
+          <a:prstGeom prst="rect">
+            <a:avLst/>
+          </a:prstGeom>
+          <a:solidFill>
+            <a:srgbClr val="F7F3E8"/>
+          </a:solidFill>
+          <a:ln w="9525">
+            <a:solidFill>
+              <a:srgbClr val="C8C0AE"/>
+            </a:solidFill>
+            <a:prstDash val="solid"/>
+          </a:ln>
+        </p:spPr>
+      </p:sp>
+      <p:sp>
+        <p:nvSpPr>
+          <p:cNvPr id="8" name="Text 6"/>
+          <p:cNvSpPr/>
+          <p:nvPr/>
+        </p:nvSpPr>
+        <p:spPr>
+          <a:xfrm>
+            <a:off x="1965960" y="1280160"/>
+            <a:ext cx="9509760" cy="365760"/>
           </a:xfrm>
           <a:prstGeom prst="rect">
             <a:avLst/>
@@ -10353,30 +11810,30 @@
               <a:buNone/>
             </a:pPr>
             <a:r>
-              <a:rPr lang="en-US" sz="1600" dirty="0">
-                <a:solidFill>
-                  <a:srgbClr val="2B2B2B"/>
+              <a:rPr lang="en-US" sz="1800" b="1" dirty="0">
+                <a:solidFill>
+                  <a:srgbClr val="1A1A1A"/>
                 </a:solidFill>
                 <a:latin typeface="Calibri" pitchFamily="34" charset="0"/>
                 <a:ea typeface="Calibri" pitchFamily="34" charset="-122"/>
                 <a:cs typeface="Calibri" pitchFamily="34" charset="-120"/>
               </a:rPr>
-              <a:t>1.  Nguyen et al. — VNDS / Vietnews. https://github.com/ThanhChinhBK/vietnews</a:t>
-            </a:r>
-            <a:endParaRPr lang="en-US" sz="1600" dirty="0"/>
-          </a:p>
-        </p:txBody>
-      </p:sp>
-      <p:sp>
-        <p:nvSpPr>
-          <p:cNvPr id="6" name="Text 4"/>
-          <p:cNvSpPr/>
-          <p:nvPr/>
-        </p:nvSpPr>
-        <p:spPr>
-          <a:xfrm>
-            <a:off x="640080" y="1874520"/>
-            <a:ext cx="10972800" cy="685800"/>
+              <a:t>Đọc tay thêm</a:t>
+            </a:r>
+            <a:endParaRPr lang="en-US" sz="1800" dirty="0"/>
+          </a:p>
+        </p:txBody>
+      </p:sp>
+      <p:sp>
+        <p:nvSpPr>
+          <p:cNvPr id="9" name="Text 7"/>
+          <p:cNvSpPr/>
+          <p:nvPr/>
+        </p:nvSpPr>
+        <p:spPr>
+          <a:xfrm>
+            <a:off x="1965960" y="1737360"/>
+            <a:ext cx="9509760" cy="411480"/>
           </a:xfrm>
           <a:prstGeom prst="rect">
             <a:avLst/>
@@ -10400,7 +11857,7 @@
                 <a:ea typeface="Calibri" pitchFamily="34" charset="-122"/>
                 <a:cs typeface="Calibri" pitchFamily="34" charset="-120"/>
               </a:rPr>
-              <a:t>2.  Phan et al. 2022. ViT5. NAACL SRW. Checkpoint: VietAI/vit5-base-vietnews-summarization</a:t>
+              <a:t>Mở rộng 20 bài; đếm sai tên/số có hệ thống.</a:t>
             </a:r>
             <a:endParaRPr lang="en-US" sz="1600" dirty="0"/>
           </a:p>
@@ -10408,14 +11865,98 @@
       </p:sp>
       <p:sp>
         <p:nvSpPr>
-          <p:cNvPr id="7" name="Text 5"/>
-          <p:cNvSpPr/>
-          <p:nvPr/>
-        </p:nvSpPr>
-        <p:spPr>
-          <a:xfrm>
-            <a:off x="640080" y="2651760"/>
-            <a:ext cx="10972800" cy="685800"/>
+          <p:cNvPr id="10" name="Shape 8"/>
+          <p:cNvSpPr/>
+          <p:nvPr/>
+        </p:nvSpPr>
+        <p:spPr>
+          <a:xfrm>
+            <a:off x="502920" y="2560320"/>
+            <a:ext cx="1188720" cy="1280160"/>
+          </a:xfrm>
+          <a:prstGeom prst="rect">
+            <a:avLst/>
+          </a:prstGeom>
+          <a:solidFill>
+            <a:srgbClr val="0B0B0B"/>
+          </a:solidFill>
+          <a:ln/>
+        </p:spPr>
+      </p:sp>
+      <p:sp>
+        <p:nvSpPr>
+          <p:cNvPr id="11" name="Text 9"/>
+          <p:cNvSpPr/>
+          <p:nvPr/>
+        </p:nvSpPr>
+        <p:spPr>
+          <a:xfrm>
+            <a:off x="502920" y="2926080"/>
+            <a:ext cx="1188720" cy="502920"/>
+          </a:xfrm>
+          <a:prstGeom prst="rect">
+            <a:avLst/>
+          </a:prstGeom>
+          <a:noFill/>
+          <a:ln/>
+        </p:spPr>
+        <p:txBody>
+          <a:bodyPr wrap="square" lIns="0" tIns="0" rIns="0" bIns="0" rtlCol="0" anchor="ctr"/>
+          <a:lstStyle/>
+          <a:p>
+            <a:pPr algn="ctr" indent="0" marL="0">
+              <a:buNone/>
+            </a:pPr>
+            <a:r>
+              <a:rPr lang="en-US" sz="2200" dirty="0">
+                <a:solidFill>
+                  <a:srgbClr val="EFE8D6"/>
+                </a:solidFill>
+                <a:latin typeface="Georgia" pitchFamily="34" charset="0"/>
+                <a:ea typeface="Georgia" pitchFamily="34" charset="-122"/>
+                <a:cs typeface="Georgia" pitchFamily="34" charset="-120"/>
+              </a:rPr>
+              <a:t>02</a:t>
+            </a:r>
+            <a:endParaRPr lang="en-US" sz="2200" dirty="0"/>
+          </a:p>
+        </p:txBody>
+      </p:sp>
+      <p:sp>
+        <p:nvSpPr>
+          <p:cNvPr id="12" name="Shape 10"/>
+          <p:cNvSpPr/>
+          <p:nvPr/>
+        </p:nvSpPr>
+        <p:spPr>
+          <a:xfrm>
+            <a:off x="1691640" y="2560320"/>
+            <a:ext cx="9966960" cy="1280160"/>
+          </a:xfrm>
+          <a:prstGeom prst="rect">
+            <a:avLst/>
+          </a:prstGeom>
+          <a:solidFill>
+            <a:srgbClr val="F7F3E8"/>
+          </a:solidFill>
+          <a:ln w="9525">
+            <a:solidFill>
+              <a:srgbClr val="C8C0AE"/>
+            </a:solidFill>
+            <a:prstDash val="solid"/>
+          </a:ln>
+        </p:spPr>
+      </p:sp>
+      <p:sp>
+        <p:nvSpPr>
+          <p:cNvPr id="13" name="Text 11"/>
+          <p:cNvSpPr/>
+          <p:nvPr/>
+        </p:nvSpPr>
+        <p:spPr>
+          <a:xfrm>
+            <a:off x="1965960" y="2743200"/>
+            <a:ext cx="9509760" cy="365760"/>
           </a:xfrm>
           <a:prstGeom prst="rect">
             <a:avLst/>
@@ -10431,30 +11972,30 @@
               <a:buNone/>
             </a:pPr>
             <a:r>
-              <a:rPr lang="en-US" sz="1600" dirty="0">
-                <a:solidFill>
-                  <a:srgbClr val="2B2B2B"/>
+              <a:rPr lang="en-US" sz="1800" b="1" dirty="0">
+                <a:solidFill>
+                  <a:srgbClr val="1A1A1A"/>
                 </a:solidFill>
                 <a:latin typeface="Calibri" pitchFamily="34" charset="0"/>
                 <a:ea typeface="Calibri" pitchFamily="34" charset="-122"/>
                 <a:cs typeface="Calibri" pitchFamily="34" charset="-120"/>
               </a:rPr>
-              <a:t>3.  Lin 2004. ROUGE. Model card ViT5: không prefix, &lt;/s&gt;, max_length=256</a:t>
-            </a:r>
-            <a:endParaRPr lang="en-US" sz="1600" dirty="0"/>
-          </a:p>
-        </p:txBody>
-      </p:sp>
-      <p:sp>
-        <p:nvSpPr>
-          <p:cNvPr id="8" name="Text 6"/>
-          <p:cNvSpPr/>
-          <p:nvPr/>
-        </p:nvSpPr>
-        <p:spPr>
-          <a:xfrm>
-            <a:off x="640080" y="3429000"/>
-            <a:ext cx="10972800" cy="685800"/>
+              <a:t>Gold đa tin</a:t>
+            </a:r>
+            <a:endParaRPr lang="en-US" sz="1800" dirty="0"/>
+          </a:p>
+        </p:txBody>
+      </p:sp>
+      <p:sp>
+        <p:nvSpPr>
+          <p:cNvPr id="14" name="Text 12"/>
+          <p:cNvSpPr/>
+          <p:nvPr/>
+        </p:nvSpPr>
+        <p:spPr>
+          <a:xfrm>
+            <a:off x="1965960" y="3200400"/>
+            <a:ext cx="9509760" cy="411480"/>
           </a:xfrm>
           <a:prstGeom prst="rect">
             <a:avLst/>
@@ -10478,7 +12019,7 @@
                 <a:ea typeface="Calibri" pitchFamily="34" charset="-122"/>
                 <a:cs typeface="Calibri" pitchFamily="34" charset="-120"/>
               </a:rPr>
-              <a:t>4.  Mihalcea &amp; Tarau — TextRank. Lead-3: baseline tóm tắt tin.</a:t>
+              <a:t>Tách bài “an ninh 24h” thành từng tin trước khi tóm.</a:t>
             </a:r>
             <a:endParaRPr lang="en-US" sz="1600" dirty="0"/>
           </a:p>
@@ -10486,14 +12027,98 @@
       </p:sp>
       <p:sp>
         <p:nvSpPr>
-          <p:cNvPr id="9" name="Text 7"/>
-          <p:cNvSpPr/>
-          <p:nvPr/>
-        </p:nvSpPr>
-        <p:spPr>
-          <a:xfrm>
-            <a:off x="640080" y="4206240"/>
-            <a:ext cx="10972800" cy="685800"/>
+          <p:cNvPr id="15" name="Shape 13"/>
+          <p:cNvSpPr/>
+          <p:nvPr/>
+        </p:nvSpPr>
+        <p:spPr>
+          <a:xfrm>
+            <a:off x="502920" y="4023360"/>
+            <a:ext cx="1188720" cy="1280160"/>
+          </a:xfrm>
+          <a:prstGeom prst="rect">
+            <a:avLst/>
+          </a:prstGeom>
+          <a:solidFill>
+            <a:srgbClr val="0B0B0B"/>
+          </a:solidFill>
+          <a:ln/>
+        </p:spPr>
+      </p:sp>
+      <p:sp>
+        <p:nvSpPr>
+          <p:cNvPr id="16" name="Text 14"/>
+          <p:cNvSpPr/>
+          <p:nvPr/>
+        </p:nvSpPr>
+        <p:spPr>
+          <a:xfrm>
+            <a:off x="502920" y="4389120"/>
+            <a:ext cx="1188720" cy="502920"/>
+          </a:xfrm>
+          <a:prstGeom prst="rect">
+            <a:avLst/>
+          </a:prstGeom>
+          <a:noFill/>
+          <a:ln/>
+        </p:spPr>
+        <p:txBody>
+          <a:bodyPr wrap="square" lIns="0" tIns="0" rIns="0" bIns="0" rtlCol="0" anchor="ctr"/>
+          <a:lstStyle/>
+          <a:p>
+            <a:pPr algn="ctr" indent="0" marL="0">
+              <a:buNone/>
+            </a:pPr>
+            <a:r>
+              <a:rPr lang="en-US" sz="2200" dirty="0">
+                <a:solidFill>
+                  <a:srgbClr val="EFE8D6"/>
+                </a:solidFill>
+                <a:latin typeface="Georgia" pitchFamily="34" charset="0"/>
+                <a:ea typeface="Georgia" pitchFamily="34" charset="-122"/>
+                <a:cs typeface="Georgia" pitchFamily="34" charset="-120"/>
+              </a:rPr>
+              <a:t>03</a:t>
+            </a:r>
+            <a:endParaRPr lang="en-US" sz="2200" dirty="0"/>
+          </a:p>
+        </p:txBody>
+      </p:sp>
+      <p:sp>
+        <p:nvSpPr>
+          <p:cNvPr id="17" name="Shape 15"/>
+          <p:cNvSpPr/>
+          <p:nvPr/>
+        </p:nvSpPr>
+        <p:spPr>
+          <a:xfrm>
+            <a:off x="1691640" y="4023360"/>
+            <a:ext cx="9966960" cy="1280160"/>
+          </a:xfrm>
+          <a:prstGeom prst="rect">
+            <a:avLst/>
+          </a:prstGeom>
+          <a:solidFill>
+            <a:srgbClr val="F7F3E8"/>
+          </a:solidFill>
+          <a:ln w="9525">
+            <a:solidFill>
+              <a:srgbClr val="C8C0AE"/>
+            </a:solidFill>
+            <a:prstDash val="solid"/>
+          </a:ln>
+        </p:spPr>
+      </p:sp>
+      <p:sp>
+        <p:nvSpPr>
+          <p:cNvPr id="18" name="Text 16"/>
+          <p:cNvSpPr/>
+          <p:nvPr/>
+        </p:nvSpPr>
+        <p:spPr>
+          <a:xfrm>
+            <a:off x="1965960" y="4206240"/>
+            <a:ext cx="9509760" cy="365760"/>
           </a:xfrm>
           <a:prstGeom prst="rect">
             <a:avLst/>
@@ -10509,30 +12134,30 @@
               <a:buNone/>
             </a:pPr>
             <a:r>
-              <a:rPr lang="en-US" sz="1600" dirty="0">
-                <a:solidFill>
-                  <a:srgbClr val="2B2B2B"/>
+              <a:rPr lang="en-US" sz="1800" b="1" dirty="0">
+                <a:solidFill>
+                  <a:srgbClr val="1A1A1A"/>
                 </a:solidFill>
                 <a:latin typeface="Calibri" pitchFamily="34" charset="0"/>
                 <a:ea typeface="Calibri" pitchFamily="34" charset="-122"/>
                 <a:cs typeface="Calibri" pitchFamily="34" charset="-120"/>
               </a:rPr>
-              <a:t>5.  Repo nhóm: github.com/hoangdq08/vietnews-summarization-extractive-abstractive</a:t>
-            </a:r>
-            <a:endParaRPr lang="en-US" sz="1600" dirty="0"/>
-          </a:p>
-        </p:txBody>
-      </p:sp>
-      <p:sp>
-        <p:nvSpPr>
-          <p:cNvPr id="10" name="Text 8"/>
-          <p:cNvSpPr/>
-          <p:nvPr/>
-        </p:nvSpPr>
-        <p:spPr>
-          <a:xfrm>
-            <a:off x="502920" y="6510528"/>
-            <a:ext cx="8229600" cy="201168"/>
+              <a:t>Không train trùng</a:t>
+            </a:r>
+            <a:endParaRPr lang="en-US" sz="1800" dirty="0"/>
+          </a:p>
+        </p:txBody>
+      </p:sp>
+      <p:sp>
+        <p:nvSpPr>
+          <p:cNvPr id="19" name="Text 17"/>
+          <p:cNvSpPr/>
+          <p:nvPr/>
+        </p:nvSpPr>
+        <p:spPr>
+          <a:xfrm>
+            <a:off x="1965960" y="4663440"/>
+            <a:ext cx="9509760" cy="411480"/>
           </a:xfrm>
           <a:prstGeom prst="rect">
             <a:avLst/>
@@ -10548,54 +12173,93 @@
               <a:buNone/>
             </a:pPr>
             <a:r>
-              <a:rPr lang="en-US" sz="1000" dirty="0">
-                <a:solidFill>
-                  <a:srgbClr val="B5AFA0"/>
+              <a:rPr lang="en-US" sz="1600" dirty="0">
+                <a:solidFill>
+                  <a:srgbClr val="2B2B2B"/>
                 </a:solidFill>
                 <a:latin typeface="Calibri" pitchFamily="34" charset="0"/>
                 <a:ea typeface="Calibri" pitchFamily="34" charset="-122"/>
                 <a:cs typeface="Calibri" pitchFamily="34" charset="-120"/>
               </a:rPr>
-              <a:t>CS221 · UIT  ·  Vietnews extractive vs abstractive</a:t>
-            </a:r>
-            <a:endParaRPr lang="en-US" sz="1000" dirty="0"/>
-          </a:p>
-        </p:txBody>
-      </p:sp>
-      <p:sp>
-        <p:nvSpPr>
-          <p:cNvPr id="11" name="Text 9"/>
-          <p:cNvSpPr/>
-          <p:nvPr/>
-        </p:nvSpPr>
-        <p:spPr>
-          <a:xfrm>
-            <a:off x="11094415" y="6510528"/>
-            <a:ext cx="594360" cy="201168"/>
-          </a:xfrm>
-          <a:prstGeom prst="rect">
-            <a:avLst/>
-          </a:prstGeom>
-          <a:noFill/>
-          <a:ln/>
-        </p:spPr>
-        <p:txBody>
-          <a:bodyPr wrap="square" lIns="0" tIns="0" rIns="0" bIns="0" rtlCol="0" anchor="ctr"/>
-          <a:lstStyle/>
-          <a:p>
-            <a:pPr algn="r" indent="0" marL="0">
+              <a:t>Nếu fine-tune, phải miền khác Vietnews.</a:t>
+            </a:r>
+            <a:endParaRPr lang="en-US" sz="1600" dirty="0"/>
+          </a:p>
+        </p:txBody>
+      </p:sp>
+      <p:sp>
+        <p:nvSpPr>
+          <p:cNvPr id="20" name="Text 18"/>
+          <p:cNvSpPr/>
+          <p:nvPr/>
+        </p:nvSpPr>
+        <p:spPr>
+          <a:xfrm>
+            <a:off x="502920" y="6510528"/>
+            <a:ext cx="8229600" cy="201168"/>
+          </a:xfrm>
+          <a:prstGeom prst="rect">
+            <a:avLst/>
+          </a:prstGeom>
+          <a:noFill/>
+          <a:ln/>
+        </p:spPr>
+        <p:txBody>
+          <a:bodyPr wrap="square" lIns="0" tIns="0" rIns="0" bIns="0" rtlCol="0" anchor="ctr"/>
+          <a:lstStyle/>
+          <a:p>
+            <a:pPr indent="0" marL="0">
               <a:buNone/>
             </a:pPr>
             <a:r>
               <a:rPr lang="en-US" sz="1000" dirty="0">
                 <a:solidFill>
-                  <a:srgbClr val="8A8578"/>
+                  <a:srgbClr val="B5AFA0"/>
                 </a:solidFill>
                 <a:latin typeface="Calibri" pitchFamily="34" charset="0"/>
                 <a:ea typeface="Calibri" pitchFamily="34" charset="-122"/>
                 <a:cs typeface="Calibri" pitchFamily="34" charset="-120"/>
               </a:rPr>
-              <a:t>18</a:t>
+              <a:t>CS221 · UIT  ·  Vietnews extractive vs abstractive</a:t>
+            </a:r>
+            <a:endParaRPr lang="en-US" sz="1000" dirty="0"/>
+          </a:p>
+        </p:txBody>
+      </p:sp>
+      <p:sp>
+        <p:nvSpPr>
+          <p:cNvPr id="21" name="Text 19"/>
+          <p:cNvSpPr/>
+          <p:nvPr/>
+        </p:nvSpPr>
+        <p:spPr>
+          <a:xfrm>
+            <a:off x="11094415" y="6510528"/>
+            <a:ext cx="594360" cy="201168"/>
+          </a:xfrm>
+          <a:prstGeom prst="rect">
+            <a:avLst/>
+          </a:prstGeom>
+          <a:noFill/>
+          <a:ln/>
+        </p:spPr>
+        <p:txBody>
+          <a:bodyPr wrap="square" lIns="0" tIns="0" rIns="0" bIns="0" rtlCol="0" anchor="ctr"/>
+          <a:lstStyle/>
+          <a:p>
+            <a:pPr algn="r" indent="0" marL="0">
+              <a:buNone/>
+            </a:pPr>
+            <a:r>
+              <a:rPr lang="en-US" sz="1000" dirty="0">
+                <a:solidFill>
+                  <a:srgbClr val="8A8578"/>
+                </a:solidFill>
+                <a:latin typeface="Calibri" pitchFamily="34" charset="0"/>
+                <a:ea typeface="Calibri" pitchFamily="34" charset="-122"/>
+                <a:cs typeface="Calibri" pitchFamily="34" charset="-120"/>
+              </a:rPr>
+              <a:t>17</a:t>
             </a:r>
             <a:endParaRPr lang="en-US" sz="1000" dirty="0"/>
           </a:p>
@@ -10615,7 +12279,7 @@
     <p:bg>
       <p:bgPr>
         <a:solidFill>
-          <a:srgbClr val="0B0B0B"/>
+          <a:srgbClr val="F0ECE0"/>
         </a:solidFill>
       </p:bgPr>
     </p:bg>
@@ -10641,8 +12305,8 @@
         </p:nvSpPr>
         <p:spPr>
           <a:xfrm>
-            <a:off x="640080" y="1965960"/>
-            <a:ext cx="10972800" cy="365760"/>
+            <a:off x="502920" y="347472"/>
+            <a:ext cx="6583680" cy="292608"/>
           </a:xfrm>
           <a:prstGeom prst="rect">
             <a:avLst/>
@@ -10658,17 +12322,17 @@
               <a:buNone/>
             </a:pPr>
             <a:r>
-              <a:rPr lang="en-US" sz="1400" spc="300" kern="0" dirty="0">
-                <a:solidFill>
-                  <a:srgbClr val="9A9488"/>
+              <a:rPr lang="en-US" sz="1100" spc="250" kern="0" dirty="0">
+                <a:solidFill>
+                  <a:srgbClr val="8A8578"/>
                 </a:solidFill>
                 <a:latin typeface="Calibri" pitchFamily="34" charset="0"/>
                 <a:ea typeface="Calibri" pitchFamily="34" charset="-122"/>
                 <a:cs typeface="Calibri" pitchFamily="34" charset="-120"/>
               </a:rPr>
-              <a:t>CS221  ·  HỎI ĐÁP</a:t>
-            </a:r>
-            <a:endParaRPr lang="en-US" sz="1400" dirty="0"/>
+              <a:t>16  TÀI LIỆU</a:t>
+            </a:r>
+            <a:endParaRPr lang="en-US" sz="1100" dirty="0"/>
           </a:p>
         </p:txBody>
       </p:sp>
@@ -10680,8 +12344,70 @@
         </p:nvSpPr>
         <p:spPr>
           <a:xfrm>
-            <a:off x="640080" y="2468880"/>
-            <a:ext cx="10972800" cy="1463040"/>
+            <a:off x="6202375" y="347472"/>
+            <a:ext cx="5486400" cy="292608"/>
+          </a:xfrm>
+          <a:prstGeom prst="rect">
+            <a:avLst/>
+          </a:prstGeom>
+          <a:noFill/>
+          <a:ln/>
+        </p:spPr>
+        <p:txBody>
+          <a:bodyPr wrap="square" lIns="0" tIns="0" rIns="0" bIns="0" rtlCol="0" anchor="ctr"/>
+          <a:lstStyle/>
+          <a:p>
+            <a:pPr algn="r" indent="0" marL="0">
+              <a:buNone/>
+            </a:pPr>
+            <a:r>
+              <a:rPr lang="en-US" sz="1200" dirty="0">
+                <a:solidFill>
+                  <a:srgbClr val="8A8578"/>
+                </a:solidFill>
+                <a:latin typeface="Calibri" pitchFamily="34" charset="0"/>
+                <a:ea typeface="Calibri" pitchFamily="34" charset="-122"/>
+                <a:cs typeface="Calibri" pitchFamily="34" charset="-120"/>
+              </a:rPr>
+              <a:t>Đã dùng</a:t>
+            </a:r>
+            <a:endParaRPr lang="en-US" sz="1200" dirty="0"/>
+          </a:p>
+        </p:txBody>
+      </p:sp>
+      <p:sp>
+        <p:nvSpPr>
+          <p:cNvPr id="4" name="Shape 2"/>
+          <p:cNvSpPr/>
+          <p:nvPr/>
+        </p:nvSpPr>
+        <p:spPr>
+          <a:xfrm>
+            <a:off x="502920" y="713232"/>
+            <a:ext cx="11185855" cy="0"/>
+          </a:xfrm>
+          <a:prstGeom prst="line">
+            <a:avLst/>
+          </a:prstGeom>
+          <a:noFill/>
+          <a:ln w="9525">
+            <a:solidFill>
+              <a:srgbClr val="C8C0AE"/>
+            </a:solidFill>
+            <a:prstDash val="solid"/>
+          </a:ln>
+        </p:spPr>
+      </p:sp>
+      <p:sp>
+        <p:nvSpPr>
+          <p:cNvPr id="5" name="Text 3"/>
+          <p:cNvSpPr/>
+          <p:nvPr/>
+        </p:nvSpPr>
+        <p:spPr>
+          <a:xfrm>
+            <a:off x="640080" y="1097280"/>
+            <a:ext cx="10972800" cy="685800"/>
           </a:xfrm>
           <a:prstGeom prst="rect">
             <a:avLst/>
@@ -10697,47 +12423,69 @@
               <a:buNone/>
             </a:pPr>
             <a:r>
-              <a:rPr lang="en-US" sz="3200" dirty="0">
-                <a:solidFill>
-                  <a:srgbClr val="EFE8D6"/>
-                </a:solidFill>
-                <a:latin typeface="Georgia" pitchFamily="34" charset="0"/>
-                <a:ea typeface="Georgia" pitchFamily="34" charset="-122"/>
-                <a:cs typeface="Georgia" pitchFamily="34" charset="-120"/>
-              </a:rPr>
-              <a:t>Câu nào cũng được.</a:t>
-            </a:r>
-            <a:endParaRPr lang="en-US" sz="3200" dirty="0"/>
-          </a:p>
+              <a:rPr lang="en-US" sz="1600" dirty="0">
+                <a:solidFill>
+                  <a:srgbClr val="2B2B2B"/>
+                </a:solidFill>
+                <a:latin typeface="Calibri" pitchFamily="34" charset="0"/>
+                <a:ea typeface="Calibri" pitchFamily="34" charset="-122"/>
+                <a:cs typeface="Calibri" pitchFamily="34" charset="-120"/>
+              </a:rPr>
+              <a:t>1.  Nguyen et al. — VNDS / Vietnews. https://github.com/ThanhChinhBK/vietnews</a:t>
+            </a:r>
+            <a:endParaRPr lang="en-US" sz="1600" dirty="0"/>
+          </a:p>
+        </p:txBody>
+      </p:sp>
+      <p:sp>
+        <p:nvSpPr>
+          <p:cNvPr id="6" name="Text 4"/>
+          <p:cNvSpPr/>
+          <p:nvPr/>
+        </p:nvSpPr>
+        <p:spPr>
+          <a:xfrm>
+            <a:off x="640080" y="1874520"/>
+            <a:ext cx="10972800" cy="685800"/>
+          </a:xfrm>
+          <a:prstGeom prst="rect">
+            <a:avLst/>
+          </a:prstGeom>
+          <a:noFill/>
+          <a:ln/>
+        </p:spPr>
+        <p:txBody>
+          <a:bodyPr wrap="square" lIns="0" tIns="0" rIns="0" bIns="0" rtlCol="0" anchor="ctr"/>
+          <a:lstStyle/>
           <a:p>
             <a:pPr indent="0" marL="0">
               <a:buNone/>
             </a:pPr>
             <a:r>
-              <a:rPr lang="en-US" sz="3200" dirty="0">
-                <a:solidFill>
-                  <a:srgbClr val="EFE8D6"/>
-                </a:solidFill>
-                <a:latin typeface="Georgia" pitchFamily="34" charset="0"/>
-                <a:ea typeface="Georgia" pitchFamily="34" charset="-122"/>
-                <a:cs typeface="Georgia" pitchFamily="34" charset="-120"/>
-              </a:rPr>
-              <a:t>Số liệu nằm trong results/.</a:t>
-            </a:r>
-            <a:endParaRPr lang="en-US" sz="3200" dirty="0"/>
-          </a:p>
-        </p:txBody>
-      </p:sp>
-      <p:sp>
-        <p:nvSpPr>
-          <p:cNvPr id="4" name="Text 2"/>
-          <p:cNvSpPr/>
-          <p:nvPr/>
-        </p:nvSpPr>
-        <p:spPr>
-          <a:xfrm>
-            <a:off x="640080" y="5212080"/>
-            <a:ext cx="10972800" cy="320040"/>
+              <a:rPr lang="en-US" sz="1600" dirty="0">
+                <a:solidFill>
+                  <a:srgbClr val="2B2B2B"/>
+                </a:solidFill>
+                <a:latin typeface="Calibri" pitchFamily="34" charset="0"/>
+                <a:ea typeface="Calibri" pitchFamily="34" charset="-122"/>
+                <a:cs typeface="Calibri" pitchFamily="34" charset="-120"/>
+              </a:rPr>
+              <a:t>2.  Phan et al. 2022. ViT5. NAACL SRW. Checkpoint: VietAI/vit5-base-vietnews-summarization</a:t>
+            </a:r>
+            <a:endParaRPr lang="en-US" sz="1600" dirty="0"/>
+          </a:p>
+        </p:txBody>
+      </p:sp>
+      <p:sp>
+        <p:nvSpPr>
+          <p:cNvPr id="7" name="Text 5"/>
+          <p:cNvSpPr/>
+          <p:nvPr/>
+        </p:nvSpPr>
+        <p:spPr>
+          <a:xfrm>
+            <a:off x="640080" y="2651760"/>
+            <a:ext cx="10972800" cy="685800"/>
           </a:xfrm>
           <a:prstGeom prst="rect">
             <a:avLst/>
@@ -10753,17 +12501,173 @@
               <a:buNone/>
             </a:pPr>
             <a:r>
-              <a:rPr lang="en-US" sz="1400" dirty="0">
-                <a:solidFill>
-                  <a:srgbClr val="9A9488"/>
-                </a:solidFill>
-                <a:latin typeface="Consolas" pitchFamily="34" charset="0"/>
-                <a:ea typeface="Consolas" pitchFamily="34" charset="-122"/>
-                <a:cs typeface="Consolas" pitchFamily="34" charset="-120"/>
-              </a:rPr>
-              <a:t>Demo: 127.0.0.1:7860   ·   Repo: hoangdq08/vietnews-summarization-extractive-abstractive</a:t>
-            </a:r>
-            <a:endParaRPr lang="en-US" sz="1400" dirty="0"/>
+              <a:rPr lang="en-US" sz="1600" dirty="0">
+                <a:solidFill>
+                  <a:srgbClr val="2B2B2B"/>
+                </a:solidFill>
+                <a:latin typeface="Calibri" pitchFamily="34" charset="0"/>
+                <a:ea typeface="Calibri" pitchFamily="34" charset="-122"/>
+                <a:cs typeface="Calibri" pitchFamily="34" charset="-120"/>
+              </a:rPr>
+              <a:t>3.  Lin 2004. ROUGE. Model card ViT5: không prefix, &lt;/s&gt;, max_length=256</a:t>
+            </a:r>
+            <a:endParaRPr lang="en-US" sz="1600" dirty="0"/>
+          </a:p>
+        </p:txBody>
+      </p:sp>
+      <p:sp>
+        <p:nvSpPr>
+          <p:cNvPr id="8" name="Text 6"/>
+          <p:cNvSpPr/>
+          <p:nvPr/>
+        </p:nvSpPr>
+        <p:spPr>
+          <a:xfrm>
+            <a:off x="640080" y="3429000"/>
+            <a:ext cx="10972800" cy="685800"/>
+          </a:xfrm>
+          <a:prstGeom prst="rect">
+            <a:avLst/>
+          </a:prstGeom>
+          <a:noFill/>
+          <a:ln/>
+        </p:spPr>
+        <p:txBody>
+          <a:bodyPr wrap="square" lIns="0" tIns="0" rIns="0" bIns="0" rtlCol="0" anchor="ctr"/>
+          <a:lstStyle/>
+          <a:p>
+            <a:pPr indent="0" marL="0">
+              <a:buNone/>
+            </a:pPr>
+            <a:r>
+              <a:rPr lang="en-US" sz="1600" dirty="0">
+                <a:solidFill>
+                  <a:srgbClr val="2B2B2B"/>
+                </a:solidFill>
+                <a:latin typeface="Calibri" pitchFamily="34" charset="0"/>
+                <a:ea typeface="Calibri" pitchFamily="34" charset="-122"/>
+                <a:cs typeface="Calibri" pitchFamily="34" charset="-120"/>
+              </a:rPr>
+              <a:t>4.  Mihalcea &amp; Tarau — TextRank. Lead-3: baseline tóm tắt tin.</a:t>
+            </a:r>
+            <a:endParaRPr lang="en-US" sz="1600" dirty="0"/>
+          </a:p>
+        </p:txBody>
+      </p:sp>
+      <p:sp>
+        <p:nvSpPr>
+          <p:cNvPr id="9" name="Text 7"/>
+          <p:cNvSpPr/>
+          <p:nvPr/>
+        </p:nvSpPr>
+        <p:spPr>
+          <a:xfrm>
+            <a:off x="640080" y="4206240"/>
+            <a:ext cx="10972800" cy="685800"/>
+          </a:xfrm>
+          <a:prstGeom prst="rect">
+            <a:avLst/>
+          </a:prstGeom>
+          <a:noFill/>
+          <a:ln/>
+        </p:spPr>
+        <p:txBody>
+          <a:bodyPr wrap="square" lIns="0" tIns="0" rIns="0" bIns="0" rtlCol="0" anchor="ctr"/>
+          <a:lstStyle/>
+          <a:p>
+            <a:pPr indent="0" marL="0">
+              <a:buNone/>
+            </a:pPr>
+            <a:r>
+              <a:rPr lang="en-US" sz="1600" dirty="0">
+                <a:solidFill>
+                  <a:srgbClr val="2B2B2B"/>
+                </a:solidFill>
+                <a:latin typeface="Calibri" pitchFamily="34" charset="0"/>
+                <a:ea typeface="Calibri" pitchFamily="34" charset="-122"/>
+                <a:cs typeface="Calibri" pitchFamily="34" charset="-120"/>
+              </a:rPr>
+              <a:t>5.  Repo nhóm: github.com/hoangdq08/vietnews-summarization-extractive-abstractive</a:t>
+            </a:r>
+            <a:endParaRPr lang="en-US" sz="1600" dirty="0"/>
+          </a:p>
+        </p:txBody>
+      </p:sp>
+      <p:sp>
+        <p:nvSpPr>
+          <p:cNvPr id="10" name="Text 8"/>
+          <p:cNvSpPr/>
+          <p:nvPr/>
+        </p:nvSpPr>
+        <p:spPr>
+          <a:xfrm>
+            <a:off x="502920" y="6510528"/>
+            <a:ext cx="8229600" cy="201168"/>
+          </a:xfrm>
+          <a:prstGeom prst="rect">
+            <a:avLst/>
+          </a:prstGeom>
+          <a:noFill/>
+          <a:ln/>
+        </p:spPr>
+        <p:txBody>
+          <a:bodyPr wrap="square" lIns="0" tIns="0" rIns="0" bIns="0" rtlCol="0" anchor="ctr"/>
+          <a:lstStyle/>
+          <a:p>
+            <a:pPr indent="0" marL="0">
+              <a:buNone/>
+            </a:pPr>
+            <a:r>
+              <a:rPr lang="en-US" sz="1000" dirty="0">
+                <a:solidFill>
+                  <a:srgbClr val="B5AFA0"/>
+                </a:solidFill>
+                <a:latin typeface="Calibri" pitchFamily="34" charset="0"/>
+                <a:ea typeface="Calibri" pitchFamily="34" charset="-122"/>
+                <a:cs typeface="Calibri" pitchFamily="34" charset="-120"/>
+              </a:rPr>
+              <a:t>CS221 · UIT  ·  Vietnews extractive vs abstractive</a:t>
+            </a:r>
+            <a:endParaRPr lang="en-US" sz="1000" dirty="0"/>
+          </a:p>
+        </p:txBody>
+      </p:sp>
+      <p:sp>
+        <p:nvSpPr>
+          <p:cNvPr id="11" name="Text 9"/>
+          <p:cNvSpPr/>
+          <p:nvPr/>
+        </p:nvSpPr>
+        <p:spPr>
+          <a:xfrm>
+            <a:off x="11094415" y="6510528"/>
+            <a:ext cx="594360" cy="201168"/>
+          </a:xfrm>
+          <a:prstGeom prst="rect">
+            <a:avLst/>
+          </a:prstGeom>
+          <a:noFill/>
+          <a:ln/>
+        </p:spPr>
+        <p:txBody>
+          <a:bodyPr wrap="square" lIns="0" tIns="0" rIns="0" bIns="0" rtlCol="0" anchor="ctr"/>
+          <a:lstStyle/>
+          <a:p>
+            <a:pPr algn="r" indent="0" marL="0">
+              <a:buNone/>
+            </a:pPr>
+            <a:r>
+              <a:rPr lang="en-US" sz="1000" dirty="0">
+                <a:solidFill>
+                  <a:srgbClr val="8A8578"/>
+                </a:solidFill>
+                <a:latin typeface="Calibri" pitchFamily="34" charset="0"/>
+                <a:ea typeface="Calibri" pitchFamily="34" charset="-122"/>
+                <a:cs typeface="Calibri" pitchFamily="34" charset="-120"/>
+              </a:rPr>
+              <a:t>18</a:t>
+            </a:r>
+            <a:endParaRPr lang="en-US" sz="1000" dirty="0"/>
           </a:p>
         </p:txBody>
       </p:sp>
@@ -11582,6 +13486,172 @@
               <a:t>2</a:t>
             </a:r>
             <a:endParaRPr lang="en-US" sz="1000" dirty="0"/>
+          </a:p>
+        </p:txBody>
+      </p:sp>
+    </p:spTree>
+  </p:cSld>
+  <p:clrMapOvr>
+    <a:masterClrMapping/>
+  </p:clrMapOvr>
+</p:sld>
+</file>
+
+<file path=ppt/slides/slide20.xml><?xml version="1.0" encoding="utf-8"?>
+<p:sld xmlns:a="http://schemas.openxmlformats.org/drawingml/2006/main" xmlns:r="http://schemas.openxmlformats.org/officeDocument/2006/relationships" xmlns:p="http://schemas.openxmlformats.org/presentationml/2006/main">
+  <p:cSld name="Slide 20">
+    <p:bg>
+      <p:bgPr>
+        <a:solidFill>
+          <a:srgbClr val="0B0B0B"/>
+        </a:solidFill>
+      </p:bgPr>
+    </p:bg>
+    <p:spTree>
+      <p:nvGrpSpPr>
+        <p:cNvPr id="1" name=""/>
+        <p:cNvGrpSpPr/>
+        <p:nvPr/>
+      </p:nvGrpSpPr>
+      <p:grpSpPr>
+        <a:xfrm>
+          <a:off x="0" y="0"/>
+          <a:ext cx="0" cy="0"/>
+          <a:chOff x="0" y="0"/>
+          <a:chExt cx="0" cy="0"/>
+        </a:xfrm>
+      </p:grpSpPr>
+      <p:sp>
+        <p:nvSpPr>
+          <p:cNvPr id="2" name="Text 0"/>
+          <p:cNvSpPr/>
+          <p:nvPr/>
+        </p:nvSpPr>
+        <p:spPr>
+          <a:xfrm>
+            <a:off x="640080" y="1965960"/>
+            <a:ext cx="10972800" cy="365760"/>
+          </a:xfrm>
+          <a:prstGeom prst="rect">
+            <a:avLst/>
+          </a:prstGeom>
+          <a:noFill/>
+          <a:ln/>
+        </p:spPr>
+        <p:txBody>
+          <a:bodyPr wrap="square" lIns="0" tIns="0" rIns="0" bIns="0" rtlCol="0" anchor="ctr"/>
+          <a:lstStyle/>
+          <a:p>
+            <a:pPr indent="0" marL="0">
+              <a:buNone/>
+            </a:pPr>
+            <a:r>
+              <a:rPr lang="en-US" sz="1400" spc="300" kern="0" dirty="0">
+                <a:solidFill>
+                  <a:srgbClr val="9A9488"/>
+                </a:solidFill>
+                <a:latin typeface="Calibri" pitchFamily="34" charset="0"/>
+                <a:ea typeface="Calibri" pitchFamily="34" charset="-122"/>
+                <a:cs typeface="Calibri" pitchFamily="34" charset="-120"/>
+              </a:rPr>
+              <a:t>CS221  ·  HỎI ĐÁP</a:t>
+            </a:r>
+            <a:endParaRPr lang="en-US" sz="1400" dirty="0"/>
+          </a:p>
+        </p:txBody>
+      </p:sp>
+      <p:sp>
+        <p:nvSpPr>
+          <p:cNvPr id="3" name="Text 1"/>
+          <p:cNvSpPr/>
+          <p:nvPr/>
+        </p:nvSpPr>
+        <p:spPr>
+          <a:xfrm>
+            <a:off x="640080" y="2468880"/>
+            <a:ext cx="10972800" cy="1463040"/>
+          </a:xfrm>
+          <a:prstGeom prst="rect">
+            <a:avLst/>
+          </a:prstGeom>
+          <a:noFill/>
+          <a:ln/>
+        </p:spPr>
+        <p:txBody>
+          <a:bodyPr wrap="square" lIns="0" tIns="0" rIns="0" bIns="0" rtlCol="0" anchor="ctr"/>
+          <a:lstStyle/>
+          <a:p>
+            <a:pPr indent="0" marL="0">
+              <a:buNone/>
+            </a:pPr>
+            <a:r>
+              <a:rPr lang="en-US" sz="3200" dirty="0">
+                <a:solidFill>
+                  <a:srgbClr val="EFE8D6"/>
+                </a:solidFill>
+                <a:latin typeface="Georgia" pitchFamily="34" charset="0"/>
+                <a:ea typeface="Georgia" pitchFamily="34" charset="-122"/>
+                <a:cs typeface="Georgia" pitchFamily="34" charset="-120"/>
+              </a:rPr>
+              <a:t>Câu nào cũng được.</a:t>
+            </a:r>
+            <a:endParaRPr lang="en-US" sz="3200" dirty="0"/>
+          </a:p>
+          <a:p>
+            <a:pPr indent="0" marL="0">
+              <a:buNone/>
+            </a:pPr>
+            <a:r>
+              <a:rPr lang="en-US" sz="3200" dirty="0">
+                <a:solidFill>
+                  <a:srgbClr val="EFE8D6"/>
+                </a:solidFill>
+                <a:latin typeface="Georgia" pitchFamily="34" charset="0"/>
+                <a:ea typeface="Georgia" pitchFamily="34" charset="-122"/>
+                <a:cs typeface="Georgia" pitchFamily="34" charset="-120"/>
+              </a:rPr>
+              <a:t>Số liệu nằm trong results/.</a:t>
+            </a:r>
+            <a:endParaRPr lang="en-US" sz="3200" dirty="0"/>
+          </a:p>
+        </p:txBody>
+      </p:sp>
+      <p:sp>
+        <p:nvSpPr>
+          <p:cNvPr id="4" name="Text 2"/>
+          <p:cNvSpPr/>
+          <p:nvPr/>
+        </p:nvSpPr>
+        <p:spPr>
+          <a:xfrm>
+            <a:off x="640080" y="5212080"/>
+            <a:ext cx="10972800" cy="320040"/>
+          </a:xfrm>
+          <a:prstGeom prst="rect">
+            <a:avLst/>
+          </a:prstGeom>
+          <a:noFill/>
+          <a:ln/>
+        </p:spPr>
+        <p:txBody>
+          <a:bodyPr wrap="square" lIns="0" tIns="0" rIns="0" bIns="0" rtlCol="0" anchor="ctr"/>
+          <a:lstStyle/>
+          <a:p>
+            <a:pPr indent="0" marL="0">
+              <a:buNone/>
+            </a:pPr>
+            <a:r>
+              <a:rPr lang="en-US" sz="1400" dirty="0">
+                <a:solidFill>
+                  <a:srgbClr val="9A9488"/>
+                </a:solidFill>
+                <a:latin typeface="Consolas" pitchFamily="34" charset="0"/>
+                <a:ea typeface="Consolas" pitchFamily="34" charset="-122"/>
+                <a:cs typeface="Consolas" pitchFamily="34" charset="-120"/>
+              </a:rPr>
+              <a:t>Demo: 127.0.0.1:7860   ·   Repo: hoangdq08/vietnews-summarization-extractive-abstractive</a:t>
+            </a:r>
+            <a:endParaRPr lang="en-US" sz="1400" dirty="0"/>
           </a:p>
         </p:txBody>
       </p:sp>

--- a/slides/CS221-Vietnews-tom-tat.pptx
+++ b/slides/CS221-Vietnews-tom-tat.pptx
@@ -7018,7 +7018,7 @@
                 <a:ea typeface="Calibri" pitchFamily="34" charset="-122"/>
                 <a:cs typeface="Calibri" pitchFamily="34" charset="-120"/>
               </a:rPr>
-              <a:t>10c  N = 500  ·  EXTRACTIVE</a:t>
+              <a:t>10c  N = 500</a:t>
             </a:r>
             <a:endParaRPr lang="en-US" sz="1100" dirty="0"/>
           </a:p>
@@ -7119,7 +7119,7 @@
                 <a:ea typeface="Georgia" pitchFamily="34" charset="-122"/>
                 <a:cs typeface="Georgia" pitchFamily="34" charset="-120"/>
               </a:rPr>
-              <a:t>Lead-1 &gt; Lead-3. Oracle-3 ≈ 0,46 — còn câu tốt hơn 3 câu đầu.</a:t>
+              <a:t>ViT5 0,2784 &gt; Lead-1 0,2719. Oracle-3 ≈ 0,46.</a:t>
             </a:r>
             <a:endParaRPr lang="en-US" sz="2000" dirty="0"/>
           </a:p>
@@ -7153,7 +7153,7 @@
                 <a:gridCol w="1618488"/>
                 <a:gridCol w="1609344"/>
               </a:tblGrid>
-              <a:tr h="701040">
+              <a:tr h="600891">
                 <a:tc>
                   <a:txBody>
                     <a:bodyPr/>
@@ -7163,7 +7163,7 @@
                         <a:buNone/>
                       </a:pPr>
                       <a:r>
-                        <a:rPr lang="en-US" sz="1500" b="1" dirty="0">
+                        <a:rPr lang="en-US" sz="1400" b="1" dirty="0">
                           <a:solidFill>
                             <a:srgbClr val="EFE8D6"/>
                           </a:solidFill>
@@ -7173,7 +7173,7 @@
                         </a:rPr>
                         <a:t>Hệ</a:t>
                       </a:r>
-                      <a:endParaRPr lang="en-US" sz="1500" dirty="0">
+                      <a:endParaRPr lang="en-US" sz="1400" dirty="0">
                         <a:latin typeface="Calibri" charset="0"/>
                         <a:ea typeface="Calibri" charset="0"/>
                         <a:cs typeface="Calibri" charset="0"/>
@@ -7231,7 +7231,7 @@
                         <a:buNone/>
                       </a:pPr>
                       <a:r>
-                        <a:rPr lang="en-US" sz="1500" b="1" dirty="0">
+                        <a:rPr lang="en-US" sz="1400" b="1" dirty="0">
                           <a:solidFill>
                             <a:srgbClr val="EFE8D6"/>
                           </a:solidFill>
@@ -7241,7 +7241,7 @@
                         </a:rPr>
                         <a:t>ROUGE-1</a:t>
                       </a:r>
-                      <a:endParaRPr lang="en-US" sz="1500" dirty="0">
+                      <a:endParaRPr lang="en-US" sz="1400" dirty="0">
                         <a:latin typeface="Calibri" charset="0"/>
                         <a:ea typeface="Calibri" charset="0"/>
                         <a:cs typeface="Calibri" charset="0"/>
@@ -7299,7 +7299,7 @@
                         <a:buNone/>
                       </a:pPr>
                       <a:r>
-                        <a:rPr lang="en-US" sz="1500" b="1" dirty="0">
+                        <a:rPr lang="en-US" sz="1400" b="1" dirty="0">
                           <a:solidFill>
                             <a:srgbClr val="EFE8D6"/>
                           </a:solidFill>
@@ -7309,7 +7309,7 @@
                         </a:rPr>
                         <a:t>ROUGE-2</a:t>
                       </a:r>
-                      <a:endParaRPr lang="en-US" sz="1500" dirty="0">
+                      <a:endParaRPr lang="en-US" sz="1400" dirty="0">
                         <a:latin typeface="Calibri" charset="0"/>
                         <a:ea typeface="Calibri" charset="0"/>
                         <a:cs typeface="Calibri" charset="0"/>
@@ -7367,7 +7367,7 @@
                         <a:buNone/>
                       </a:pPr>
                       <a:r>
-                        <a:rPr lang="en-US" sz="1500" b="1" dirty="0">
+                        <a:rPr lang="en-US" sz="1400" b="1" dirty="0">
                           <a:solidFill>
                             <a:srgbClr val="EFE8D6"/>
                           </a:solidFill>
@@ -7377,7 +7377,7 @@
                         </a:rPr>
                         <a:t>ROUGE-L</a:t>
                       </a:r>
-                      <a:endParaRPr lang="en-US" sz="1500" dirty="0">
+                      <a:endParaRPr lang="en-US" sz="1400" dirty="0">
                         <a:latin typeface="Calibri" charset="0"/>
                         <a:ea typeface="Calibri" charset="0"/>
                         <a:cs typeface="Calibri" charset="0"/>
@@ -7427,7 +7427,7 @@
                   </a:tcPr>
                 </a:tc>
               </a:tr>
-              <a:tr h="701040">
+              <a:tr h="600891">
                 <a:tc>
                   <a:txBody>
                     <a:bodyPr/>
@@ -7437,7 +7437,7 @@
                         <a:buNone/>
                       </a:pPr>
                       <a:r>
-                        <a:rPr lang="en-US" sz="1500" dirty="0">
+                        <a:rPr lang="en-US" sz="1400" dirty="0">
                           <a:solidFill>
                             <a:srgbClr val="2B2B2B"/>
                           </a:solidFill>
@@ -7447,7 +7447,7 @@
                         </a:rPr>
                         <a:t>Lead-1</a:t>
                       </a:r>
-                      <a:endParaRPr lang="en-US" sz="1500" dirty="0">
+                      <a:endParaRPr lang="en-US" sz="1400" dirty="0">
                         <a:latin typeface="Calibri" charset="0"/>
                         <a:ea typeface="Calibri" charset="0"/>
                         <a:cs typeface="Calibri" charset="0"/>
@@ -7502,7 +7502,7 @@
                         <a:buNone/>
                       </a:pPr>
                       <a:r>
-                        <a:rPr lang="en-US" sz="1500" dirty="0">
+                        <a:rPr lang="en-US" sz="1400" dirty="0">
                           <a:solidFill>
                             <a:srgbClr val="2B2B2B"/>
                           </a:solidFill>
@@ -7512,7 +7512,7 @@
                         </a:rPr>
                         <a:t>0.2719</a:t>
                       </a:r>
-                      <a:endParaRPr lang="en-US" sz="1500" dirty="0">
+                      <a:endParaRPr lang="en-US" sz="1400" dirty="0">
                         <a:latin typeface="Calibri" charset="0"/>
                         <a:ea typeface="Calibri" charset="0"/>
                         <a:cs typeface="Calibri" charset="0"/>
@@ -7567,7 +7567,7 @@
                         <a:buNone/>
                       </a:pPr>
                       <a:r>
-                        <a:rPr lang="en-US" sz="1500" dirty="0">
+                        <a:rPr lang="en-US" sz="1400" dirty="0">
                           <a:solidFill>
                             <a:srgbClr val="2B2B2B"/>
                           </a:solidFill>
@@ -7577,7 +7577,7 @@
                         </a:rPr>
                         <a:t>0.1305</a:t>
                       </a:r>
-                      <a:endParaRPr lang="en-US" sz="1500" dirty="0">
+                      <a:endParaRPr lang="en-US" sz="1400" dirty="0">
                         <a:latin typeface="Calibri" charset="0"/>
                         <a:ea typeface="Calibri" charset="0"/>
                         <a:cs typeface="Calibri" charset="0"/>
@@ -7632,7 +7632,7 @@
                         <a:buNone/>
                       </a:pPr>
                       <a:r>
-                        <a:rPr lang="en-US" sz="1500" dirty="0">
+                        <a:rPr lang="en-US" sz="1400" dirty="0">
                           <a:solidFill>
                             <a:srgbClr val="2B2B2B"/>
                           </a:solidFill>
@@ -7642,7 +7642,7 @@
                         </a:rPr>
                         <a:t>0.2092</a:t>
                       </a:r>
-                      <a:endParaRPr lang="en-US" sz="1500" dirty="0">
+                      <a:endParaRPr lang="en-US" sz="1400" dirty="0">
                         <a:latin typeface="Calibri" charset="0"/>
                         <a:ea typeface="Calibri" charset="0"/>
                         <a:cs typeface="Calibri" charset="0"/>
@@ -7689,7 +7689,7 @@
                   </a:tcPr>
                 </a:tc>
               </a:tr>
-              <a:tr h="701040">
+              <a:tr h="600891">
                 <a:tc>
                   <a:txBody>
                     <a:bodyPr/>
@@ -7699,7 +7699,7 @@
                         <a:buNone/>
                       </a:pPr>
                       <a:r>
-                        <a:rPr lang="en-US" sz="1500" dirty="0">
+                        <a:rPr lang="en-US" sz="1400" dirty="0">
                           <a:solidFill>
                             <a:srgbClr val="2B2B2B"/>
                           </a:solidFill>
@@ -7709,7 +7709,7 @@
                         </a:rPr>
                         <a:t>Lead-3</a:t>
                       </a:r>
-                      <a:endParaRPr lang="en-US" sz="1500" dirty="0">
+                      <a:endParaRPr lang="en-US" sz="1400" dirty="0">
                         <a:latin typeface="Calibri" charset="0"/>
                         <a:ea typeface="Calibri" charset="0"/>
                         <a:cs typeface="Calibri" charset="0"/>
@@ -7764,7 +7764,7 @@
                         <a:buNone/>
                       </a:pPr>
                       <a:r>
-                        <a:rPr lang="en-US" sz="1500" dirty="0">
+                        <a:rPr lang="en-US" sz="1400" dirty="0">
                           <a:solidFill>
                             <a:srgbClr val="2B2B2B"/>
                           </a:solidFill>
@@ -7774,7 +7774,7 @@
                         </a:rPr>
                         <a:t>0.2569</a:t>
                       </a:r>
-                      <a:endParaRPr lang="en-US" sz="1500" dirty="0">
+                      <a:endParaRPr lang="en-US" sz="1400" dirty="0">
                         <a:latin typeface="Calibri" charset="0"/>
                         <a:ea typeface="Calibri" charset="0"/>
                         <a:cs typeface="Calibri" charset="0"/>
@@ -7829,7 +7829,7 @@
                         <a:buNone/>
                       </a:pPr>
                       <a:r>
-                        <a:rPr lang="en-US" sz="1500" dirty="0">
+                        <a:rPr lang="en-US" sz="1400" dirty="0">
                           <a:solidFill>
                             <a:srgbClr val="2B2B2B"/>
                           </a:solidFill>
@@ -7839,7 +7839,7 @@
                         </a:rPr>
                         <a:t>0.1294</a:t>
                       </a:r>
-                      <a:endParaRPr lang="en-US" sz="1500" dirty="0">
+                      <a:endParaRPr lang="en-US" sz="1400" dirty="0">
                         <a:latin typeface="Calibri" charset="0"/>
                         <a:ea typeface="Calibri" charset="0"/>
                         <a:cs typeface="Calibri" charset="0"/>
@@ -7894,7 +7894,7 @@
                         <a:buNone/>
                       </a:pPr>
                       <a:r>
-                        <a:rPr lang="en-US" sz="1500" dirty="0">
+                        <a:rPr lang="en-US" sz="1400" dirty="0">
                           <a:solidFill>
                             <a:srgbClr val="2B2B2B"/>
                           </a:solidFill>
@@ -7904,7 +7904,7 @@
                         </a:rPr>
                         <a:t>0.1856</a:t>
                       </a:r>
-                      <a:endParaRPr lang="en-US" sz="1500" dirty="0">
+                      <a:endParaRPr lang="en-US" sz="1400" dirty="0">
                         <a:latin typeface="Calibri" charset="0"/>
                         <a:ea typeface="Calibri" charset="0"/>
                         <a:cs typeface="Calibri" charset="0"/>
@@ -7951,7 +7951,7 @@
                   </a:tcPr>
                 </a:tc>
               </a:tr>
-              <a:tr h="701040">
+              <a:tr h="600891">
                 <a:tc>
                   <a:txBody>
                     <a:bodyPr/>
@@ -7961,7 +7961,7 @@
                         <a:buNone/>
                       </a:pPr>
                       <a:r>
-                        <a:rPr lang="en-US" sz="1500" dirty="0">
+                        <a:rPr lang="en-US" sz="1400" dirty="0">
                           <a:solidFill>
                             <a:srgbClr val="2B2B2B"/>
                           </a:solidFill>
@@ -7971,7 +7971,7 @@
                         </a:rPr>
                         <a:t>Lead-5</a:t>
                       </a:r>
-                      <a:endParaRPr lang="en-US" sz="1500" dirty="0">
+                      <a:endParaRPr lang="en-US" sz="1400" dirty="0">
                         <a:latin typeface="Calibri" charset="0"/>
                         <a:ea typeface="Calibri" charset="0"/>
                         <a:cs typeface="Calibri" charset="0"/>
@@ -8026,7 +8026,7 @@
                         <a:buNone/>
                       </a:pPr>
                       <a:r>
-                        <a:rPr lang="en-US" sz="1500" dirty="0">
+                        <a:rPr lang="en-US" sz="1400" dirty="0">
                           <a:solidFill>
                             <a:srgbClr val="2B2B2B"/>
                           </a:solidFill>
@@ -8036,7 +8036,7 @@
                         </a:rPr>
                         <a:t>0.2256</a:t>
                       </a:r>
-                      <a:endParaRPr lang="en-US" sz="1500" dirty="0">
+                      <a:endParaRPr lang="en-US" sz="1400" dirty="0">
                         <a:latin typeface="Calibri" charset="0"/>
                         <a:ea typeface="Calibri" charset="0"/>
                         <a:cs typeface="Calibri" charset="0"/>
@@ -8091,7 +8091,7 @@
                         <a:buNone/>
                       </a:pPr>
                       <a:r>
-                        <a:rPr lang="en-US" sz="1500" dirty="0">
+                        <a:rPr lang="en-US" sz="1400" dirty="0">
                           <a:solidFill>
                             <a:srgbClr val="2B2B2B"/>
                           </a:solidFill>
@@ -8101,7 +8101,7 @@
                         </a:rPr>
                         <a:t>0.1199</a:t>
                       </a:r>
-                      <a:endParaRPr lang="en-US" sz="1500" dirty="0">
+                      <a:endParaRPr lang="en-US" sz="1400" dirty="0">
                         <a:latin typeface="Calibri" charset="0"/>
                         <a:ea typeface="Calibri" charset="0"/>
                         <a:cs typeface="Calibri" charset="0"/>
@@ -8156,7 +8156,7 @@
                         <a:buNone/>
                       </a:pPr>
                       <a:r>
-                        <a:rPr lang="en-US" sz="1500" dirty="0">
+                        <a:rPr lang="en-US" sz="1400" dirty="0">
                           <a:solidFill>
                             <a:srgbClr val="2B2B2B"/>
                           </a:solidFill>
@@ -8166,7 +8166,7 @@
                         </a:rPr>
                         <a:t>0.1624</a:t>
                       </a:r>
-                      <a:endParaRPr lang="en-US" sz="1500" dirty="0">
+                      <a:endParaRPr lang="en-US" sz="1400" dirty="0">
                         <a:latin typeface="Calibri" charset="0"/>
                         <a:ea typeface="Calibri" charset="0"/>
                         <a:cs typeface="Calibri" charset="0"/>
@@ -8213,7 +8213,7 @@
                   </a:tcPr>
                 </a:tc>
               </a:tr>
-              <a:tr h="701040">
+              <a:tr h="600891">
                 <a:tc>
                   <a:txBody>
                     <a:bodyPr/>
@@ -8223,7 +8223,7 @@
                         <a:buNone/>
                       </a:pPr>
                       <a:r>
-                        <a:rPr lang="en-US" sz="1500" dirty="0">
+                        <a:rPr lang="en-US" sz="1400" dirty="0">
                           <a:solidFill>
                             <a:srgbClr val="2B2B2B"/>
                           </a:solidFill>
@@ -8233,7 +8233,7 @@
                         </a:rPr>
                         <a:t>TextRank-3</a:t>
                       </a:r>
-                      <a:endParaRPr lang="en-US" sz="1500" dirty="0">
+                      <a:endParaRPr lang="en-US" sz="1400" dirty="0">
                         <a:latin typeface="Calibri" charset="0"/>
                         <a:ea typeface="Calibri" charset="0"/>
                         <a:cs typeface="Calibri" charset="0"/>
@@ -8288,7 +8288,7 @@
                         <a:buNone/>
                       </a:pPr>
                       <a:r>
-                        <a:rPr lang="en-US" sz="1500" dirty="0">
+                        <a:rPr lang="en-US" sz="1400" dirty="0">
                           <a:solidFill>
                             <a:srgbClr val="2B2B2B"/>
                           </a:solidFill>
@@ -8298,7 +8298,7 @@
                         </a:rPr>
                         <a:t>0.2499</a:t>
                       </a:r>
-                      <a:endParaRPr lang="en-US" sz="1500" dirty="0">
+                      <a:endParaRPr lang="en-US" sz="1400" dirty="0">
                         <a:latin typeface="Calibri" charset="0"/>
                         <a:ea typeface="Calibri" charset="0"/>
                         <a:cs typeface="Calibri" charset="0"/>
@@ -8353,7 +8353,7 @@
                         <a:buNone/>
                       </a:pPr>
                       <a:r>
-                        <a:rPr lang="en-US" sz="1500" dirty="0">
+                        <a:rPr lang="en-US" sz="1400" dirty="0">
                           <a:solidFill>
                             <a:srgbClr val="2B2B2B"/>
                           </a:solidFill>
@@ -8363,7 +8363,7 @@
                         </a:rPr>
                         <a:t>0.1198</a:t>
                       </a:r>
-                      <a:endParaRPr lang="en-US" sz="1500" dirty="0">
+                      <a:endParaRPr lang="en-US" sz="1400" dirty="0">
                         <a:latin typeface="Calibri" charset="0"/>
                         <a:ea typeface="Calibri" charset="0"/>
                         <a:cs typeface="Calibri" charset="0"/>
@@ -8418,7 +8418,7 @@
                         <a:buNone/>
                       </a:pPr>
                       <a:r>
-                        <a:rPr lang="en-US" sz="1500" dirty="0">
+                        <a:rPr lang="en-US" sz="1400" dirty="0">
                           <a:solidFill>
                             <a:srgbClr val="2B2B2B"/>
                           </a:solidFill>
@@ -8428,7 +8428,7 @@
                         </a:rPr>
                         <a:t>0.1815</a:t>
                       </a:r>
-                      <a:endParaRPr lang="en-US" sz="1500" dirty="0">
+                      <a:endParaRPr lang="en-US" sz="1400" dirty="0">
                         <a:latin typeface="Calibri" charset="0"/>
                         <a:ea typeface="Calibri" charset="0"/>
                         <a:cs typeface="Calibri" charset="0"/>
@@ -8475,7 +8475,7 @@
                   </a:tcPr>
                 </a:tc>
               </a:tr>
-              <a:tr h="701040">
+              <a:tr h="600891">
                 <a:tc>
                   <a:txBody>
                     <a:bodyPr/>
@@ -8485,7 +8485,281 @@
                         <a:buNone/>
                       </a:pPr>
                       <a:r>
-                        <a:rPr lang="en-US" sz="1500" b="1" dirty="0">
+                        <a:rPr lang="en-US" sz="1400" b="1" dirty="0">
+                          <a:solidFill>
+                            <a:srgbClr val="2B2B2B"/>
+                          </a:solidFill>
+                          <a:latin typeface="Calibri" pitchFamily="34" charset="0"/>
+                          <a:ea typeface="Calibri" pitchFamily="34" charset="-122"/>
+                          <a:cs typeface="Calibri" pitchFamily="34" charset="-120"/>
+                        </a:rPr>
+                        <a:t>ViT5</a:t>
+                      </a:r>
+                      <a:endParaRPr lang="en-US" sz="1400" dirty="0">
+                        <a:latin typeface="Calibri" charset="0"/>
+                        <a:ea typeface="Calibri" charset="0"/>
+                        <a:cs typeface="Calibri" charset="0"/>
+                      </a:endParaRPr>
+                    </a:p>
+                  </a:txBody>
+                  <a:tcPr marL="91440" marR="91440" marT="45720" marB="45720" anchor="ctr">
+                    <a:lnL w="6350" cap="flat" cmpd="sng" algn="ctr">
+                      <a:solidFill>
+                        <a:srgbClr val="C8C0AE"/>
+                      </a:solidFill>
+                      <a:prstDash val="solid"/>
+                      <a:round/>
+                      <a:headEnd type="none" w="med" len="med"/>
+                      <a:tailEnd type="none" w="med" len="med"/>
+                    </a:lnL>
+                    <a:lnR w="6350" cap="flat" cmpd="sng" algn="ctr">
+                      <a:solidFill>
+                        <a:srgbClr val="C8C0AE"/>
+                      </a:solidFill>
+                      <a:prstDash val="solid"/>
+                      <a:round/>
+                      <a:headEnd type="none" w="med" len="med"/>
+                      <a:tailEnd type="none" w="med" len="med"/>
+                    </a:lnR>
+                    <a:lnT w="6350" cap="flat" cmpd="sng" algn="ctr">
+                      <a:solidFill>
+                        <a:srgbClr val="C8C0AE"/>
+                      </a:solidFill>
+                      <a:prstDash val="solid"/>
+                      <a:round/>
+                      <a:headEnd type="none" w="med" len="med"/>
+                      <a:tailEnd type="none" w="med" len="med"/>
+                    </a:lnT>
+                    <a:lnB w="6350" cap="flat" cmpd="sng" algn="ctr">
+                      <a:solidFill>
+                        <a:srgbClr val="C8C0AE"/>
+                      </a:solidFill>
+                      <a:prstDash val="solid"/>
+                      <a:round/>
+                      <a:headEnd type="none" w="med" len="med"/>
+                      <a:tailEnd type="none" w="med" len="med"/>
+                    </a:lnB>
+                    <a:solidFill>
+                      <a:srgbClr val="F7F3E8"/>
+                    </a:solidFill>
+                  </a:tcPr>
+                </a:tc>
+                <a:tc>
+                  <a:txBody>
+                    <a:bodyPr/>
+                    <a:lstStyle/>
+                    <a:p>
+                      <a:pPr algn="ctr" indent="0" marL="0">
+                        <a:buNone/>
+                      </a:pPr>
+                      <a:r>
+                        <a:rPr lang="en-US" sz="1400" b="1" dirty="0">
+                          <a:solidFill>
+                            <a:srgbClr val="2B2B2B"/>
+                          </a:solidFill>
+                          <a:latin typeface="Calibri" pitchFamily="34" charset="0"/>
+                          <a:ea typeface="Calibri" pitchFamily="34" charset="-122"/>
+                          <a:cs typeface="Calibri" pitchFamily="34" charset="-120"/>
+                        </a:rPr>
+                        <a:t>0.2784</a:t>
+                      </a:r>
+                      <a:endParaRPr lang="en-US" sz="1400" dirty="0">
+                        <a:latin typeface="Calibri" charset="0"/>
+                        <a:ea typeface="Calibri" charset="0"/>
+                        <a:cs typeface="Calibri" charset="0"/>
+                      </a:endParaRPr>
+                    </a:p>
+                  </a:txBody>
+                  <a:tcPr marL="91440" marR="91440" marT="45720" marB="45720" anchor="ctr">
+                    <a:lnL w="6350" cap="flat" cmpd="sng" algn="ctr">
+                      <a:solidFill>
+                        <a:srgbClr val="C8C0AE"/>
+                      </a:solidFill>
+                      <a:prstDash val="solid"/>
+                      <a:round/>
+                      <a:headEnd type="none" w="med" len="med"/>
+                      <a:tailEnd type="none" w="med" len="med"/>
+                    </a:lnL>
+                    <a:lnR w="6350" cap="flat" cmpd="sng" algn="ctr">
+                      <a:solidFill>
+                        <a:srgbClr val="C8C0AE"/>
+                      </a:solidFill>
+                      <a:prstDash val="solid"/>
+                      <a:round/>
+                      <a:headEnd type="none" w="med" len="med"/>
+                      <a:tailEnd type="none" w="med" len="med"/>
+                    </a:lnR>
+                    <a:lnT w="6350" cap="flat" cmpd="sng" algn="ctr">
+                      <a:solidFill>
+                        <a:srgbClr val="C8C0AE"/>
+                      </a:solidFill>
+                      <a:prstDash val="solid"/>
+                      <a:round/>
+                      <a:headEnd type="none" w="med" len="med"/>
+                      <a:tailEnd type="none" w="med" len="med"/>
+                    </a:lnT>
+                    <a:lnB w="6350" cap="flat" cmpd="sng" algn="ctr">
+                      <a:solidFill>
+                        <a:srgbClr val="C8C0AE"/>
+                      </a:solidFill>
+                      <a:prstDash val="solid"/>
+                      <a:round/>
+                      <a:headEnd type="none" w="med" len="med"/>
+                      <a:tailEnd type="none" w="med" len="med"/>
+                    </a:lnB>
+                    <a:solidFill>
+                      <a:srgbClr val="F7F3E8"/>
+                    </a:solidFill>
+                  </a:tcPr>
+                </a:tc>
+                <a:tc>
+                  <a:txBody>
+                    <a:bodyPr/>
+                    <a:lstStyle/>
+                    <a:p>
+                      <a:pPr algn="ctr" indent="0" marL="0">
+                        <a:buNone/>
+                      </a:pPr>
+                      <a:r>
+                        <a:rPr lang="en-US" sz="1400" b="1" dirty="0">
+                          <a:solidFill>
+                            <a:srgbClr val="2B2B2B"/>
+                          </a:solidFill>
+                          <a:latin typeface="Calibri" pitchFamily="34" charset="0"/>
+                          <a:ea typeface="Calibri" pitchFamily="34" charset="-122"/>
+                          <a:cs typeface="Calibri" pitchFamily="34" charset="-120"/>
+                        </a:rPr>
+                        <a:t>0.1474</a:t>
+                      </a:r>
+                      <a:endParaRPr lang="en-US" sz="1400" dirty="0">
+                        <a:latin typeface="Calibri" charset="0"/>
+                        <a:ea typeface="Calibri" charset="0"/>
+                        <a:cs typeface="Calibri" charset="0"/>
+                      </a:endParaRPr>
+                    </a:p>
+                  </a:txBody>
+                  <a:tcPr marL="91440" marR="91440" marT="45720" marB="45720" anchor="ctr">
+                    <a:lnL w="6350" cap="flat" cmpd="sng" algn="ctr">
+                      <a:solidFill>
+                        <a:srgbClr val="C8C0AE"/>
+                      </a:solidFill>
+                      <a:prstDash val="solid"/>
+                      <a:round/>
+                      <a:headEnd type="none" w="med" len="med"/>
+                      <a:tailEnd type="none" w="med" len="med"/>
+                    </a:lnL>
+                    <a:lnR w="6350" cap="flat" cmpd="sng" algn="ctr">
+                      <a:solidFill>
+                        <a:srgbClr val="C8C0AE"/>
+                      </a:solidFill>
+                      <a:prstDash val="solid"/>
+                      <a:round/>
+                      <a:headEnd type="none" w="med" len="med"/>
+                      <a:tailEnd type="none" w="med" len="med"/>
+                    </a:lnR>
+                    <a:lnT w="6350" cap="flat" cmpd="sng" algn="ctr">
+                      <a:solidFill>
+                        <a:srgbClr val="C8C0AE"/>
+                      </a:solidFill>
+                      <a:prstDash val="solid"/>
+                      <a:round/>
+                      <a:headEnd type="none" w="med" len="med"/>
+                      <a:tailEnd type="none" w="med" len="med"/>
+                    </a:lnT>
+                    <a:lnB w="6350" cap="flat" cmpd="sng" algn="ctr">
+                      <a:solidFill>
+                        <a:srgbClr val="C8C0AE"/>
+                      </a:solidFill>
+                      <a:prstDash val="solid"/>
+                      <a:round/>
+                      <a:headEnd type="none" w="med" len="med"/>
+                      <a:tailEnd type="none" w="med" len="med"/>
+                    </a:lnB>
+                    <a:solidFill>
+                      <a:srgbClr val="F7F3E8"/>
+                    </a:solidFill>
+                  </a:tcPr>
+                </a:tc>
+                <a:tc>
+                  <a:txBody>
+                    <a:bodyPr/>
+                    <a:lstStyle/>
+                    <a:p>
+                      <a:pPr algn="ctr" indent="0" marL="0">
+                        <a:buNone/>
+                      </a:pPr>
+                      <a:r>
+                        <a:rPr lang="en-US" sz="1400" b="1" dirty="0">
+                          <a:solidFill>
+                            <a:srgbClr val="2B2B2B"/>
+                          </a:solidFill>
+                          <a:latin typeface="Calibri" pitchFamily="34" charset="0"/>
+                          <a:ea typeface="Calibri" pitchFamily="34" charset="-122"/>
+                          <a:cs typeface="Calibri" pitchFamily="34" charset="-120"/>
+                        </a:rPr>
+                        <a:t>0.2233</a:t>
+                      </a:r>
+                      <a:endParaRPr lang="en-US" sz="1400" dirty="0">
+                        <a:latin typeface="Calibri" charset="0"/>
+                        <a:ea typeface="Calibri" charset="0"/>
+                        <a:cs typeface="Calibri" charset="0"/>
+                      </a:endParaRPr>
+                    </a:p>
+                  </a:txBody>
+                  <a:tcPr marL="91440" marR="91440" marT="45720" marB="45720" anchor="ctr">
+                    <a:lnL w="6350" cap="flat" cmpd="sng" algn="ctr">
+                      <a:solidFill>
+                        <a:srgbClr val="C8C0AE"/>
+                      </a:solidFill>
+                      <a:prstDash val="solid"/>
+                      <a:round/>
+                      <a:headEnd type="none" w="med" len="med"/>
+                      <a:tailEnd type="none" w="med" len="med"/>
+                    </a:lnL>
+                    <a:lnR w="6350" cap="flat" cmpd="sng" algn="ctr">
+                      <a:solidFill>
+                        <a:srgbClr val="C8C0AE"/>
+                      </a:solidFill>
+                      <a:prstDash val="solid"/>
+                      <a:round/>
+                      <a:headEnd type="none" w="med" len="med"/>
+                      <a:tailEnd type="none" w="med" len="med"/>
+                    </a:lnR>
+                    <a:lnT w="6350" cap="flat" cmpd="sng" algn="ctr">
+                      <a:solidFill>
+                        <a:srgbClr val="C8C0AE"/>
+                      </a:solidFill>
+                      <a:prstDash val="solid"/>
+                      <a:round/>
+                      <a:headEnd type="none" w="med" len="med"/>
+                      <a:tailEnd type="none" w="med" len="med"/>
+                    </a:lnT>
+                    <a:lnB w="6350" cap="flat" cmpd="sng" algn="ctr">
+                      <a:solidFill>
+                        <a:srgbClr val="C8C0AE"/>
+                      </a:solidFill>
+                      <a:prstDash val="solid"/>
+                      <a:round/>
+                      <a:headEnd type="none" w="med" len="med"/>
+                      <a:tailEnd type="none" w="med" len="med"/>
+                    </a:lnB>
+                    <a:solidFill>
+                      <a:srgbClr val="F7F3E8"/>
+                    </a:solidFill>
+                  </a:tcPr>
+                </a:tc>
+              </a:tr>
+              <a:tr h="600891">
+                <a:tc>
+                  <a:txBody>
+                    <a:bodyPr/>
+                    <a:lstStyle/>
+                    <a:p>
+                      <a:pPr algn="ctr" indent="0" marL="0">
+                        <a:buNone/>
+                      </a:pPr>
+                      <a:r>
+                        <a:rPr lang="en-US" sz="1400" b="1" dirty="0">
                           <a:solidFill>
                             <a:srgbClr val="2B2B2B"/>
                           </a:solidFill>
@@ -8495,7 +8769,7 @@
                         </a:rPr>
                         <a:t>Oracle-3</a:t>
                       </a:r>
-                      <a:endParaRPr lang="en-US" sz="1500" dirty="0">
+                      <a:endParaRPr lang="en-US" sz="1400" dirty="0">
                         <a:latin typeface="Calibri" charset="0"/>
                         <a:ea typeface="Calibri" charset="0"/>
                         <a:cs typeface="Calibri" charset="0"/>
@@ -8553,7 +8827,7 @@
                         <a:buNone/>
                       </a:pPr>
                       <a:r>
-                        <a:rPr lang="en-US" sz="1500" b="1" dirty="0">
+                        <a:rPr lang="en-US" sz="1400" b="1" dirty="0">
                           <a:solidFill>
                             <a:srgbClr val="2B2B2B"/>
                           </a:solidFill>
@@ -8563,7 +8837,7 @@
                         </a:rPr>
                         <a:t>0.4646</a:t>
                       </a:r>
-                      <a:endParaRPr lang="en-US" sz="1500" dirty="0">
+                      <a:endParaRPr lang="en-US" sz="1400" dirty="0">
                         <a:latin typeface="Calibri" charset="0"/>
                         <a:ea typeface="Calibri" charset="0"/>
                         <a:cs typeface="Calibri" charset="0"/>
@@ -8621,7 +8895,7 @@
                         <a:buNone/>
                       </a:pPr>
                       <a:r>
-                        <a:rPr lang="en-US" sz="1500" b="1" dirty="0">
+                        <a:rPr lang="en-US" sz="1400" b="1" dirty="0">
                           <a:solidFill>
                             <a:srgbClr val="2B2B2B"/>
                           </a:solidFill>
@@ -8631,7 +8905,7 @@
                         </a:rPr>
                         <a:t>0.2793</a:t>
                       </a:r>
-                      <a:endParaRPr lang="en-US" sz="1500" dirty="0">
+                      <a:endParaRPr lang="en-US" sz="1400" dirty="0">
                         <a:latin typeface="Calibri" charset="0"/>
                         <a:ea typeface="Calibri" charset="0"/>
                         <a:cs typeface="Calibri" charset="0"/>
@@ -8689,7 +8963,7 @@
                         <a:buNone/>
                       </a:pPr>
                       <a:r>
-                        <a:rPr lang="en-US" sz="1500" b="1" dirty="0">
+                        <a:rPr lang="en-US" sz="1400" b="1" dirty="0">
                           <a:solidFill>
                             <a:srgbClr val="2B2B2B"/>
                           </a:solidFill>
@@ -8699,7 +8973,7 @@
                         </a:rPr>
                         <a:t>0.3410</a:t>
                       </a:r>
-                      <a:endParaRPr lang="en-US" sz="1500" dirty="0">
+                      <a:endParaRPr lang="en-US" sz="1400" dirty="0">
                         <a:latin typeface="Calibri" charset="0"/>
                         <a:ea typeface="Calibri" charset="0"/>
                         <a:cs typeface="Calibri" charset="0"/>
@@ -8850,7 +9124,7 @@
                 <a:ea typeface="Calibri" pitchFamily="34" charset="-122"/>
                 <a:cs typeface="Calibri" pitchFamily="34" charset="-120"/>
               </a:rPr>
-              <a:t>Gold gần sapo nên 1 câu đầu đã khớp. Oracle chứng tỏ extractive chưa hết sức — Lead-3 chưa chọn đúng 3 câu. ViT5-500: notebook Kaggle riêng, chưa chạy.</a:t>
+              <a:t>Cùng generate n=100; 100 bài đầu trùng preds.json. Gold gần sapo nên Lead-1 đã cao. ViT5 hơn Lead-1 một chút. Oracle ≈ 0,46: extractive còn cửa, Lead-3 chưa chọn đúng câu.</a:t>
             </a:r>
             <a:endParaRPr lang="en-US" sz="1500" dirty="0"/>
           </a:p>
@@ -11211,7 +11485,7 @@
                 <a:ea typeface="Calibri" pitchFamily="34" charset="-122"/>
                 <a:cs typeface="Calibri" pitchFamily="34" charset="-120"/>
               </a:rPr>
-              <a:t>Trên 100 bài test đầu Vietnews, ViT5 ROUGE-1/2/L cao hơn Lead-3 và TextRank một chút.</a:t>
+              <a:t>Trên 100 bài test đầu, ViT5 ROUGE cao hơn Lead-3 và TextRank một chút. n=500: ViT5 0,2784 &gt; Lead-1 0,2719.</a:t>
             </a:r>
             <a:endParaRPr lang="en-US" sz="1500" dirty="0"/>
           </a:p>
@@ -11367,7 +11641,7 @@
                 <a:ea typeface="Calibri" pitchFamily="34" charset="-122"/>
                 <a:cs typeface="Calibri" pitchFamily="34" charset="-120"/>
               </a:rPr>
-              <a:t>Chỉ 100 bài, không phải full test gốc paper.</a:t>
+              <a:t>Đọc tay / lệch số trên 100 bài; ROUGE 500 không thay error analysis.</a:t>
             </a:r>
             <a:endParaRPr lang="en-US" sz="1500" dirty="0"/>
           </a:p>

--- a/slides/CS221-Vietnews-tom-tat.pptx
+++ b/slides/CS221-Vietnews-tom-tat.pptx
@@ -18844,7 +18844,7 @@
                           <a:ea typeface="Calibri" pitchFamily="34" charset="-122"/>
                           <a:cs typeface="Calibri" pitchFamily="34" charset="-120"/>
                         </a:rPr>
-                        <a:t>100 id đầu test_tokenized; file data/test_ids.txt</a:t>
+                        <a:t>100 id đầu test_tokenized (000001–000100)</a:t>
                       </a:r>
                       <a:endParaRPr lang="en-US" sz="1400" dirty="0">
                         <a:latin typeface="Calibri" charset="0"/>
